--- a/docs/plots/carbo/jx_carbo_linsubhr_ratio_hosp8.pptx
+++ b/docs/plots/carbo/jx_carbo_linsubhr_ratio_hosp8.pptx
@@ -3002,588 +3002,567 @@
           </p:nvSpPr>
           <p:spPr>
             <a:xfrm>
-              <a:off x="817517" y="2069148"/>
-              <a:ext cx="7370972" cy="3309971"/>
+              <a:off x="817517" y="1896563"/>
+              <a:ext cx="7370972" cy="3541227"/>
             </a:xfrm>
             <a:custGeom>
               <a:avLst/>
               <a:pathLst>
-                <a:path w="7370972" h="3309971">
+                <a:path w="7370972" h="3541227">
                   <a:moveTo>
-                    <a:pt x="0" y="0"/>
+                    <a:pt x="603428" y="0"/>
                   </a:moveTo>
                   <a:lnTo>
-                    <a:pt x="73372" y="103096"/>
-                  </a:lnTo>
-                  <a:lnTo>
-                    <a:pt x="151006" y="208767"/>
-                  </a:lnTo>
-                  <a:lnTo>
-                    <a:pt x="228640" y="311131"/>
-                  </a:lnTo>
-                  <a:lnTo>
-                    <a:pt x="306274" y="410292"/>
-                  </a:lnTo>
-                  <a:lnTo>
-                    <a:pt x="383908" y="506350"/>
-                  </a:lnTo>
-                  <a:lnTo>
-                    <a:pt x="461542" y="599402"/>
-                  </a:lnTo>
-                  <a:lnTo>
-                    <a:pt x="539176" y="689543"/>
-                  </a:lnTo>
-                  <a:lnTo>
-                    <a:pt x="616810" y="776863"/>
-                  </a:lnTo>
-                  <a:lnTo>
-                    <a:pt x="694444" y="861450"/>
-                  </a:lnTo>
-                  <a:lnTo>
-                    <a:pt x="772078" y="943391"/>
-                  </a:lnTo>
-                  <a:lnTo>
-                    <a:pt x="849712" y="1022768"/>
-                  </a:lnTo>
-                  <a:lnTo>
-                    <a:pt x="927346" y="1099660"/>
-                  </a:lnTo>
-                  <a:lnTo>
-                    <a:pt x="1004981" y="1174147"/>
-                  </a:lnTo>
-                  <a:lnTo>
-                    <a:pt x="1082615" y="1246303"/>
-                  </a:lnTo>
-                  <a:lnTo>
-                    <a:pt x="1160249" y="1316201"/>
-                  </a:lnTo>
-                  <a:lnTo>
-                    <a:pt x="1237883" y="1383912"/>
-                  </a:lnTo>
-                  <a:lnTo>
-                    <a:pt x="1315517" y="1449504"/>
-                  </a:lnTo>
-                  <a:lnTo>
-                    <a:pt x="1393151" y="1513043"/>
-                  </a:lnTo>
-                  <a:lnTo>
-                    <a:pt x="1470785" y="1574594"/>
-                  </a:lnTo>
-                  <a:lnTo>
-                    <a:pt x="1548419" y="1634219"/>
-                  </a:lnTo>
-                  <a:lnTo>
-                    <a:pt x="1626053" y="1691979"/>
-                  </a:lnTo>
-                  <a:lnTo>
-                    <a:pt x="1703687" y="1747931"/>
-                  </a:lnTo>
-                  <a:lnTo>
-                    <a:pt x="1781321" y="1802132"/>
-                  </a:lnTo>
-                  <a:lnTo>
-                    <a:pt x="1858955" y="1854637"/>
-                  </a:lnTo>
-                  <a:lnTo>
-                    <a:pt x="1936589" y="1905499"/>
-                  </a:lnTo>
-                  <a:lnTo>
-                    <a:pt x="2014223" y="1954770"/>
-                  </a:lnTo>
-                  <a:lnTo>
-                    <a:pt x="2091857" y="2002499"/>
-                  </a:lnTo>
-                  <a:lnTo>
-                    <a:pt x="2169491" y="2048734"/>
-                  </a:lnTo>
-                  <a:lnTo>
-                    <a:pt x="2247125" y="2093523"/>
-                  </a:lnTo>
-                  <a:lnTo>
-                    <a:pt x="2324759" y="2136910"/>
-                  </a:lnTo>
-                  <a:lnTo>
-                    <a:pt x="2402393" y="2178939"/>
-                  </a:lnTo>
-                  <a:lnTo>
-                    <a:pt x="2480027" y="2219653"/>
-                  </a:lnTo>
-                  <a:lnTo>
-                    <a:pt x="2557661" y="2259093"/>
-                  </a:lnTo>
-                  <a:lnTo>
-                    <a:pt x="2635295" y="2297299"/>
-                  </a:lnTo>
-                  <a:lnTo>
-                    <a:pt x="2712930" y="2334310"/>
-                  </a:lnTo>
-                  <a:lnTo>
-                    <a:pt x="2790564" y="2370162"/>
-                  </a:lnTo>
-                  <a:lnTo>
-                    <a:pt x="2868198" y="2404893"/>
-                  </a:lnTo>
-                  <a:lnTo>
-                    <a:pt x="2945832" y="2438537"/>
-                  </a:lnTo>
-                  <a:lnTo>
-                    <a:pt x="3023466" y="2471128"/>
-                  </a:lnTo>
-                  <a:lnTo>
-                    <a:pt x="3101100" y="2502699"/>
-                  </a:lnTo>
-                  <a:lnTo>
-                    <a:pt x="3178734" y="2533282"/>
-                  </a:lnTo>
-                  <a:lnTo>
-                    <a:pt x="3256368" y="2562908"/>
-                  </a:lnTo>
-                  <a:lnTo>
-                    <a:pt x="3334002" y="2591607"/>
-                  </a:lnTo>
-                  <a:lnTo>
-                    <a:pt x="3411636" y="2607852"/>
-                  </a:lnTo>
-                  <a:lnTo>
-                    <a:pt x="3489270" y="2600104"/>
-                  </a:lnTo>
-                  <a:lnTo>
-                    <a:pt x="3566904" y="2592287"/>
-                  </a:lnTo>
-                  <a:lnTo>
-                    <a:pt x="3644538" y="2584400"/>
-                  </a:lnTo>
-                  <a:lnTo>
-                    <a:pt x="3722172" y="2576444"/>
-                  </a:lnTo>
-                  <a:lnTo>
-                    <a:pt x="3799806" y="2568417"/>
-                  </a:lnTo>
-                  <a:lnTo>
-                    <a:pt x="3877440" y="2560318"/>
-                  </a:lnTo>
-                  <a:lnTo>
-                    <a:pt x="3955074" y="2552147"/>
-                  </a:lnTo>
-                  <a:lnTo>
-                    <a:pt x="4032708" y="2543904"/>
-                  </a:lnTo>
-                  <a:lnTo>
-                    <a:pt x="4110342" y="2535588"/>
-                  </a:lnTo>
-                  <a:lnTo>
-                    <a:pt x="4187976" y="2527197"/>
-                  </a:lnTo>
-                  <a:lnTo>
-                    <a:pt x="4265610" y="2518733"/>
-                  </a:lnTo>
-                  <a:lnTo>
-                    <a:pt x="4343244" y="2510193"/>
-                  </a:lnTo>
-                  <a:lnTo>
-                    <a:pt x="4420879" y="2501577"/>
-                  </a:lnTo>
-                  <a:lnTo>
-                    <a:pt x="4498513" y="2492884"/>
-                  </a:lnTo>
-                  <a:lnTo>
-                    <a:pt x="4576147" y="2484115"/>
-                  </a:lnTo>
-                  <a:lnTo>
-                    <a:pt x="4653781" y="2475267"/>
-                  </a:lnTo>
-                  <a:lnTo>
-                    <a:pt x="4731415" y="2466341"/>
-                  </a:lnTo>
-                  <a:lnTo>
-                    <a:pt x="4809049" y="2457336"/>
-                  </a:lnTo>
-                  <a:lnTo>
-                    <a:pt x="4886683" y="2448250"/>
-                  </a:lnTo>
-                  <a:lnTo>
-                    <a:pt x="4964317" y="2439084"/>
-                  </a:lnTo>
-                  <a:lnTo>
-                    <a:pt x="5041951" y="2429836"/>
-                  </a:lnTo>
-                  <a:lnTo>
-                    <a:pt x="5119585" y="2420507"/>
-                  </a:lnTo>
-                  <a:lnTo>
-                    <a:pt x="5197219" y="2411094"/>
-                  </a:lnTo>
-                  <a:lnTo>
-                    <a:pt x="5274853" y="2401598"/>
-                  </a:lnTo>
-                  <a:lnTo>
-                    <a:pt x="5352487" y="2392017"/>
-                  </a:lnTo>
-                  <a:lnTo>
-                    <a:pt x="5430121" y="2382352"/>
-                  </a:lnTo>
-                  <a:lnTo>
-                    <a:pt x="5507755" y="2372600"/>
-                  </a:lnTo>
-                  <a:lnTo>
-                    <a:pt x="5585389" y="2362762"/>
-                  </a:lnTo>
-                  <a:lnTo>
-                    <a:pt x="5663023" y="2352836"/>
-                  </a:lnTo>
-                  <a:lnTo>
-                    <a:pt x="5740657" y="2342823"/>
-                  </a:lnTo>
-                  <a:lnTo>
-                    <a:pt x="5818291" y="2332720"/>
-                  </a:lnTo>
-                  <a:lnTo>
-                    <a:pt x="5895925" y="2322527"/>
-                  </a:lnTo>
-                  <a:lnTo>
-                    <a:pt x="5973559" y="2312244"/>
-                  </a:lnTo>
-                  <a:lnTo>
-                    <a:pt x="6051193" y="2301870"/>
-                  </a:lnTo>
-                  <a:lnTo>
-                    <a:pt x="6128827" y="2291403"/>
-                  </a:lnTo>
-                  <a:lnTo>
-                    <a:pt x="6206462" y="2280844"/>
-                  </a:lnTo>
-                  <a:lnTo>
-                    <a:pt x="6284096" y="2270191"/>
-                  </a:lnTo>
-                  <a:lnTo>
-                    <a:pt x="6361730" y="2259443"/>
-                  </a:lnTo>
-                  <a:lnTo>
-                    <a:pt x="6439364" y="2248599"/>
-                  </a:lnTo>
-                  <a:lnTo>
-                    <a:pt x="6516998" y="2237660"/>
-                  </a:lnTo>
-                  <a:lnTo>
-                    <a:pt x="6594632" y="2226623"/>
-                  </a:lnTo>
-                  <a:lnTo>
-                    <a:pt x="6672266" y="2215488"/>
-                  </a:lnTo>
-                  <a:lnTo>
-                    <a:pt x="6749900" y="2204254"/>
-                  </a:lnTo>
-                  <a:lnTo>
-                    <a:pt x="6827534" y="2192920"/>
-                  </a:lnTo>
-                  <a:lnTo>
-                    <a:pt x="6905168" y="2181486"/>
-                  </a:lnTo>
-                  <a:lnTo>
-                    <a:pt x="6982802" y="2169950"/>
-                  </a:lnTo>
-                  <a:lnTo>
-                    <a:pt x="7060436" y="2158311"/>
-                  </a:lnTo>
-                  <a:lnTo>
-                    <a:pt x="7138070" y="2146569"/>
-                  </a:lnTo>
-                  <a:lnTo>
-                    <a:pt x="7215704" y="2134723"/>
-                  </a:lnTo>
-                  <a:lnTo>
-                    <a:pt x="7293338" y="2122772"/>
-                  </a:lnTo>
-                  <a:lnTo>
-                    <a:pt x="7370972" y="2110714"/>
-                  </a:lnTo>
-                  <a:lnTo>
-                    <a:pt x="7370972" y="3309971"/>
-                  </a:lnTo>
-                  <a:lnTo>
-                    <a:pt x="7293338" y="3304477"/>
-                  </a:lnTo>
-                  <a:lnTo>
-                    <a:pt x="7215704" y="3298805"/>
-                  </a:lnTo>
-                  <a:lnTo>
-                    <a:pt x="7138070" y="3292950"/>
-                  </a:lnTo>
-                  <a:lnTo>
-                    <a:pt x="7060436" y="3286906"/>
-                  </a:lnTo>
-                  <a:lnTo>
-                    <a:pt x="6982802" y="3280667"/>
-                  </a:lnTo>
-                  <a:lnTo>
-                    <a:pt x="6905168" y="3274226"/>
-                  </a:lnTo>
-                  <a:lnTo>
-                    <a:pt x="6827534" y="3267577"/>
-                  </a:lnTo>
-                  <a:lnTo>
-                    <a:pt x="6749900" y="3260714"/>
-                  </a:lnTo>
-                  <a:lnTo>
-                    <a:pt x="6672266" y="3253628"/>
-                  </a:lnTo>
-                  <a:lnTo>
-                    <a:pt x="6594632" y="3246314"/>
-                  </a:lnTo>
-                  <a:lnTo>
-                    <a:pt x="6516998" y="3238763"/>
-                  </a:lnTo>
-                  <a:lnTo>
-                    <a:pt x="6439364" y="3230969"/>
-                  </a:lnTo>
-                  <a:lnTo>
-                    <a:pt x="6361730" y="3222923"/>
-                  </a:lnTo>
-                  <a:lnTo>
-                    <a:pt x="6284096" y="3214617"/>
-                  </a:lnTo>
-                  <a:lnTo>
-                    <a:pt x="6206462" y="3206042"/>
-                  </a:lnTo>
-                  <a:lnTo>
-                    <a:pt x="6128827" y="3197191"/>
-                  </a:lnTo>
-                  <a:lnTo>
-                    <a:pt x="6051193" y="3188054"/>
-                  </a:lnTo>
-                  <a:lnTo>
-                    <a:pt x="5973559" y="3178621"/>
-                  </a:lnTo>
-                  <a:lnTo>
-                    <a:pt x="5895925" y="3168884"/>
-                  </a:lnTo>
-                  <a:lnTo>
-                    <a:pt x="5818291" y="3158832"/>
-                  </a:lnTo>
-                  <a:lnTo>
-                    <a:pt x="5740657" y="3148456"/>
-                  </a:lnTo>
-                  <a:lnTo>
-                    <a:pt x="5663023" y="3137744"/>
-                  </a:lnTo>
-                  <a:lnTo>
-                    <a:pt x="5585389" y="3126687"/>
-                  </a:lnTo>
-                  <a:lnTo>
-                    <a:pt x="5507755" y="3115272"/>
-                  </a:lnTo>
-                  <a:lnTo>
-                    <a:pt x="5430121" y="3103488"/>
-                  </a:lnTo>
-                  <a:lnTo>
-                    <a:pt x="5352487" y="3091324"/>
-                  </a:lnTo>
-                  <a:lnTo>
-                    <a:pt x="5274853" y="3078767"/>
-                  </a:lnTo>
-                  <a:lnTo>
-                    <a:pt x="5197219" y="3065805"/>
-                  </a:lnTo>
-                  <a:lnTo>
-                    <a:pt x="5119585" y="3052423"/>
-                  </a:lnTo>
-                  <a:lnTo>
-                    <a:pt x="5041951" y="3038610"/>
-                  </a:lnTo>
-                  <a:lnTo>
-                    <a:pt x="4964317" y="3024350"/>
-                  </a:lnTo>
-                  <a:lnTo>
-                    <a:pt x="4886683" y="3009629"/>
-                  </a:lnTo>
-                  <a:lnTo>
-                    <a:pt x="4809049" y="2994433"/>
-                  </a:lnTo>
-                  <a:lnTo>
-                    <a:pt x="4731415" y="2978746"/>
-                  </a:lnTo>
-                  <a:lnTo>
-                    <a:pt x="4653781" y="2962553"/>
-                  </a:lnTo>
-                  <a:lnTo>
-                    <a:pt x="4576147" y="2945836"/>
-                  </a:lnTo>
-                  <a:lnTo>
-                    <a:pt x="4498513" y="2928579"/>
-                  </a:lnTo>
-                  <a:lnTo>
-                    <a:pt x="4420879" y="2910765"/>
-                  </a:lnTo>
-                  <a:lnTo>
-                    <a:pt x="4343244" y="2892376"/>
-                  </a:lnTo>
-                  <a:lnTo>
-                    <a:pt x="4265610" y="2873392"/>
-                  </a:lnTo>
-                  <a:lnTo>
-                    <a:pt x="4187976" y="2853795"/>
-                  </a:lnTo>
-                  <a:lnTo>
-                    <a:pt x="4110342" y="2833565"/>
-                  </a:lnTo>
-                  <a:lnTo>
-                    <a:pt x="4032708" y="2812682"/>
-                  </a:lnTo>
-                  <a:lnTo>
-                    <a:pt x="3955074" y="2791124"/>
-                  </a:lnTo>
-                  <a:lnTo>
-                    <a:pt x="3877440" y="2768870"/>
-                  </a:lnTo>
-                  <a:lnTo>
-                    <a:pt x="3799806" y="2745897"/>
-                  </a:lnTo>
-                  <a:lnTo>
-                    <a:pt x="3722172" y="2722181"/>
-                  </a:lnTo>
-                  <a:lnTo>
-                    <a:pt x="3644538" y="2697700"/>
-                  </a:lnTo>
-                  <a:lnTo>
-                    <a:pt x="3566904" y="2672428"/>
-                  </a:lnTo>
-                  <a:lnTo>
-                    <a:pt x="3489270" y="2646340"/>
-                  </a:lnTo>
-                  <a:lnTo>
-                    <a:pt x="3411636" y="2619408"/>
-                  </a:lnTo>
-                  <a:lnTo>
-                    <a:pt x="3334002" y="2615533"/>
-                  </a:lnTo>
-                  <a:lnTo>
-                    <a:pt x="3256368" y="2623145"/>
-                  </a:lnTo>
-                  <a:lnTo>
-                    <a:pt x="3178734" y="2630690"/>
-                  </a:lnTo>
-                  <a:lnTo>
-                    <a:pt x="3101100" y="2638169"/>
-                  </a:lnTo>
-                  <a:lnTo>
-                    <a:pt x="3023466" y="2645583"/>
-                  </a:lnTo>
-                  <a:lnTo>
-                    <a:pt x="2945832" y="2652930"/>
-                  </a:lnTo>
-                  <a:lnTo>
-                    <a:pt x="2868198" y="2660214"/>
-                  </a:lnTo>
-                  <a:lnTo>
-                    <a:pt x="2790564" y="2667433"/>
-                  </a:lnTo>
-                  <a:lnTo>
-                    <a:pt x="2712930" y="2674588"/>
-                  </a:lnTo>
-                  <a:lnTo>
-                    <a:pt x="2635295" y="2681680"/>
-                  </a:lnTo>
-                  <a:lnTo>
-                    <a:pt x="2557661" y="2688710"/>
-                  </a:lnTo>
-                  <a:lnTo>
-                    <a:pt x="2480027" y="2695679"/>
-                  </a:lnTo>
-                  <a:lnTo>
-                    <a:pt x="2402393" y="2702585"/>
-                  </a:lnTo>
-                  <a:lnTo>
-                    <a:pt x="2324759" y="2709431"/>
-                  </a:lnTo>
-                  <a:lnTo>
-                    <a:pt x="2247125" y="2716217"/>
-                  </a:lnTo>
-                  <a:lnTo>
-                    <a:pt x="2169491" y="2722943"/>
-                  </a:lnTo>
-                  <a:lnTo>
-                    <a:pt x="2091857" y="2729609"/>
-                  </a:lnTo>
-                  <a:lnTo>
-                    <a:pt x="2014223" y="2736217"/>
-                  </a:lnTo>
-                  <a:lnTo>
-                    <a:pt x="1936589" y="2742767"/>
-                  </a:lnTo>
-                  <a:lnTo>
-                    <a:pt x="1858955" y="2749259"/>
-                  </a:lnTo>
-                  <a:lnTo>
-                    <a:pt x="1781321" y="2755694"/>
-                  </a:lnTo>
-                  <a:lnTo>
-                    <a:pt x="1703687" y="2762072"/>
-                  </a:lnTo>
-                  <a:lnTo>
-                    <a:pt x="1626053" y="2768395"/>
-                  </a:lnTo>
-                  <a:lnTo>
-                    <a:pt x="1548419" y="2774661"/>
-                  </a:lnTo>
-                  <a:lnTo>
-                    <a:pt x="1470785" y="2780872"/>
-                  </a:lnTo>
-                  <a:lnTo>
-                    <a:pt x="1393151" y="2787029"/>
-                  </a:lnTo>
-                  <a:lnTo>
-                    <a:pt x="1315517" y="2793131"/>
-                  </a:lnTo>
-                  <a:lnTo>
-                    <a:pt x="1237883" y="2799180"/>
-                  </a:lnTo>
-                  <a:lnTo>
-                    <a:pt x="1160249" y="2805175"/>
-                  </a:lnTo>
-                  <a:lnTo>
-                    <a:pt x="1082615" y="2811118"/>
-                  </a:lnTo>
-                  <a:lnTo>
-                    <a:pt x="1004981" y="2817008"/>
-                  </a:lnTo>
-                  <a:lnTo>
-                    <a:pt x="927346" y="2822846"/>
-                  </a:lnTo>
-                  <a:lnTo>
-                    <a:pt x="849712" y="2828633"/>
-                  </a:lnTo>
-                  <a:lnTo>
-                    <a:pt x="772078" y="2834369"/>
-                  </a:lnTo>
-                  <a:lnTo>
-                    <a:pt x="694444" y="2840055"/>
-                  </a:lnTo>
-                  <a:lnTo>
-                    <a:pt x="616810" y="2845690"/>
-                  </a:lnTo>
-                  <a:lnTo>
-                    <a:pt x="539176" y="2851276"/>
-                  </a:lnTo>
-                  <a:lnTo>
-                    <a:pt x="461542" y="2856813"/>
-                  </a:lnTo>
-                  <a:lnTo>
-                    <a:pt x="383908" y="2862301"/>
-                  </a:lnTo>
-                  <a:lnTo>
-                    <a:pt x="306274" y="2867740"/>
-                  </a:lnTo>
-                  <a:lnTo>
-                    <a:pt x="228640" y="2873132"/>
-                  </a:lnTo>
-                  <a:lnTo>
-                    <a:pt x="151006" y="2878476"/>
-                  </a:lnTo>
-                  <a:lnTo>
-                    <a:pt x="73372" y="2883773"/>
-                  </a:lnTo>
-                  <a:lnTo>
-                    <a:pt x="0" y="2888736"/>
+                    <a:pt x="616810" y="25537"/>
+                  </a:lnTo>
+                  <a:lnTo>
+                    <a:pt x="694444" y="167875"/>
+                  </a:lnTo>
+                  <a:lnTo>
+                    <a:pt x="772078" y="304627"/>
+                  </a:lnTo>
+                  <a:lnTo>
+                    <a:pt x="849712" y="436013"/>
+                  </a:lnTo>
+                  <a:lnTo>
+                    <a:pt x="927346" y="562242"/>
+                  </a:lnTo>
+                  <a:lnTo>
+                    <a:pt x="1004981" y="683518"/>
+                  </a:lnTo>
+                  <a:lnTo>
+                    <a:pt x="1082615" y="800035"/>
+                  </a:lnTo>
+                  <a:lnTo>
+                    <a:pt x="1160249" y="911980"/>
+                  </a:lnTo>
+                  <a:lnTo>
+                    <a:pt x="1237883" y="1019531"/>
+                  </a:lnTo>
+                  <a:lnTo>
+                    <a:pt x="1315517" y="1122862"/>
+                  </a:lnTo>
+                  <a:lnTo>
+                    <a:pt x="1393151" y="1222137"/>
+                  </a:lnTo>
+                  <a:lnTo>
+                    <a:pt x="1470785" y="1317517"/>
+                  </a:lnTo>
+                  <a:lnTo>
+                    <a:pt x="1548419" y="1409154"/>
+                  </a:lnTo>
+                  <a:lnTo>
+                    <a:pt x="1626053" y="1497195"/>
+                  </a:lnTo>
+                  <a:lnTo>
+                    <a:pt x="1703687" y="1581781"/>
+                  </a:lnTo>
+                  <a:lnTo>
+                    <a:pt x="1781321" y="1663047"/>
+                  </a:lnTo>
+                  <a:lnTo>
+                    <a:pt x="1858955" y="1741125"/>
+                  </a:lnTo>
+                  <a:lnTo>
+                    <a:pt x="1936589" y="1816138"/>
+                  </a:lnTo>
+                  <a:lnTo>
+                    <a:pt x="2014223" y="1888208"/>
+                  </a:lnTo>
+                  <a:lnTo>
+                    <a:pt x="2091857" y="1957449"/>
+                  </a:lnTo>
+                  <a:lnTo>
+                    <a:pt x="2169491" y="2023973"/>
+                  </a:lnTo>
+                  <a:lnTo>
+                    <a:pt x="2247125" y="2087887"/>
+                  </a:lnTo>
+                  <a:lnTo>
+                    <a:pt x="2324759" y="2149292"/>
+                  </a:lnTo>
+                  <a:lnTo>
+                    <a:pt x="2402393" y="2208288"/>
+                  </a:lnTo>
+                  <a:lnTo>
+                    <a:pt x="2480027" y="2264968"/>
+                  </a:lnTo>
+                  <a:lnTo>
+                    <a:pt x="2557661" y="2319425"/>
+                  </a:lnTo>
+                  <a:lnTo>
+                    <a:pt x="2635295" y="2371744"/>
+                  </a:lnTo>
+                  <a:lnTo>
+                    <a:pt x="2712930" y="2422010"/>
+                  </a:lnTo>
+                  <a:lnTo>
+                    <a:pt x="2790564" y="2470304"/>
+                  </a:lnTo>
+                  <a:lnTo>
+                    <a:pt x="2868198" y="2516702"/>
+                  </a:lnTo>
+                  <a:lnTo>
+                    <a:pt x="2945832" y="2561279"/>
+                  </a:lnTo>
+                  <a:lnTo>
+                    <a:pt x="3023466" y="2604108"/>
+                  </a:lnTo>
+                  <a:lnTo>
+                    <a:pt x="3101100" y="2645255"/>
+                  </a:lnTo>
+                  <a:lnTo>
+                    <a:pt x="3178734" y="2684788"/>
+                  </a:lnTo>
+                  <a:lnTo>
+                    <a:pt x="3256368" y="2722769"/>
+                  </a:lnTo>
+                  <a:lnTo>
+                    <a:pt x="3334002" y="2759260"/>
+                  </a:lnTo>
+                  <a:lnTo>
+                    <a:pt x="3411636" y="2781274"/>
+                  </a:lnTo>
+                  <a:lnTo>
+                    <a:pt x="3489270" y="2776096"/>
+                  </a:lnTo>
+                  <a:lnTo>
+                    <a:pt x="3566904" y="2770888"/>
+                  </a:lnTo>
+                  <a:lnTo>
+                    <a:pt x="3644538" y="2765649"/>
+                  </a:lnTo>
+                  <a:lnTo>
+                    <a:pt x="3722172" y="2760379"/>
+                  </a:lnTo>
+                  <a:lnTo>
+                    <a:pt x="3799806" y="2755078"/>
+                  </a:lnTo>
+                  <a:lnTo>
+                    <a:pt x="3877440" y="2749745"/>
+                  </a:lnTo>
+                  <a:lnTo>
+                    <a:pt x="3955074" y="2744380"/>
+                  </a:lnTo>
+                  <a:lnTo>
+                    <a:pt x="4032708" y="2738984"/>
+                  </a:lnTo>
+                  <a:lnTo>
+                    <a:pt x="4110342" y="2733555"/>
+                  </a:lnTo>
+                  <a:lnTo>
+                    <a:pt x="4187976" y="2728095"/>
+                  </a:lnTo>
+                  <a:lnTo>
+                    <a:pt x="4265610" y="2722601"/>
+                  </a:lnTo>
+                  <a:lnTo>
+                    <a:pt x="4343244" y="2717075"/>
+                  </a:lnTo>
+                  <a:lnTo>
+                    <a:pt x="4420879" y="2711517"/>
+                  </a:lnTo>
+                  <a:lnTo>
+                    <a:pt x="4498513" y="2705925"/>
+                  </a:lnTo>
+                  <a:lnTo>
+                    <a:pt x="4576147" y="2700300"/>
+                  </a:lnTo>
+                  <a:lnTo>
+                    <a:pt x="4653781" y="2694642"/>
+                  </a:lnTo>
+                  <a:lnTo>
+                    <a:pt x="4731415" y="2688950"/>
+                  </a:lnTo>
+                  <a:lnTo>
+                    <a:pt x="4809049" y="2683224"/>
+                  </a:lnTo>
+                  <a:lnTo>
+                    <a:pt x="4886683" y="2677464"/>
+                  </a:lnTo>
+                  <a:lnTo>
+                    <a:pt x="4964317" y="2671670"/>
+                  </a:lnTo>
+                  <a:lnTo>
+                    <a:pt x="5041951" y="2665842"/>
+                  </a:lnTo>
+                  <a:lnTo>
+                    <a:pt x="5119585" y="2659978"/>
+                  </a:lnTo>
+                  <a:lnTo>
+                    <a:pt x="5197219" y="2654080"/>
+                  </a:lnTo>
+                  <a:lnTo>
+                    <a:pt x="5274853" y="2648147"/>
+                  </a:lnTo>
+                  <a:lnTo>
+                    <a:pt x="5352487" y="2642179"/>
+                  </a:lnTo>
+                  <a:lnTo>
+                    <a:pt x="5430121" y="2636176"/>
+                  </a:lnTo>
+                  <a:lnTo>
+                    <a:pt x="5507755" y="2630136"/>
+                  </a:lnTo>
+                  <a:lnTo>
+                    <a:pt x="5585389" y="2624061"/>
+                  </a:lnTo>
+                  <a:lnTo>
+                    <a:pt x="5663023" y="2617950"/>
+                  </a:lnTo>
+                  <a:lnTo>
+                    <a:pt x="5740657" y="2611802"/>
+                  </a:lnTo>
+                  <a:lnTo>
+                    <a:pt x="5818291" y="2605618"/>
+                  </a:lnTo>
+                  <a:lnTo>
+                    <a:pt x="5895925" y="2599397"/>
+                  </a:lnTo>
+                  <a:lnTo>
+                    <a:pt x="5973559" y="2593139"/>
+                  </a:lnTo>
+                  <a:lnTo>
+                    <a:pt x="6051193" y="2586844"/>
+                  </a:lnTo>
+                  <a:lnTo>
+                    <a:pt x="6128827" y="2580511"/>
+                  </a:lnTo>
+                  <a:lnTo>
+                    <a:pt x="6206462" y="2574141"/>
+                  </a:lnTo>
+                  <a:lnTo>
+                    <a:pt x="6284096" y="2567733"/>
+                  </a:lnTo>
+                  <a:lnTo>
+                    <a:pt x="6361730" y="2561287"/>
+                  </a:lnTo>
+                  <a:lnTo>
+                    <a:pt x="6439364" y="2554803"/>
+                  </a:lnTo>
+                  <a:lnTo>
+                    <a:pt x="6516998" y="2548280"/>
+                  </a:lnTo>
+                  <a:lnTo>
+                    <a:pt x="6594632" y="2541719"/>
+                  </a:lnTo>
+                  <a:lnTo>
+                    <a:pt x="6672266" y="2535118"/>
+                  </a:lnTo>
+                  <a:lnTo>
+                    <a:pt x="6749900" y="2528478"/>
+                  </a:lnTo>
+                  <a:lnTo>
+                    <a:pt x="6827534" y="2521799"/>
+                  </a:lnTo>
+                  <a:lnTo>
+                    <a:pt x="6905168" y="2515080"/>
+                  </a:lnTo>
+                  <a:lnTo>
+                    <a:pt x="6982802" y="2508321"/>
+                  </a:lnTo>
+                  <a:lnTo>
+                    <a:pt x="7060436" y="2501522"/>
+                  </a:lnTo>
+                  <a:lnTo>
+                    <a:pt x="7138070" y="2494683"/>
+                  </a:lnTo>
+                  <a:lnTo>
+                    <a:pt x="7215704" y="2487803"/>
+                  </a:lnTo>
+                  <a:lnTo>
+                    <a:pt x="7293338" y="2480882"/>
+                  </a:lnTo>
+                  <a:lnTo>
+                    <a:pt x="7370972" y="2473920"/>
+                  </a:lnTo>
+                  <a:lnTo>
+                    <a:pt x="7370972" y="3541227"/>
+                  </a:lnTo>
+                  <a:lnTo>
+                    <a:pt x="7293338" y="3536676"/>
+                  </a:lnTo>
+                  <a:lnTo>
+                    <a:pt x="7215704" y="3531940"/>
+                  </a:lnTo>
+                  <a:lnTo>
+                    <a:pt x="7138070" y="3527010"/>
+                  </a:lnTo>
+                  <a:lnTo>
+                    <a:pt x="7060436" y="3521878"/>
+                  </a:lnTo>
+                  <a:lnTo>
+                    <a:pt x="6982802" y="3516537"/>
+                  </a:lnTo>
+                  <a:lnTo>
+                    <a:pt x="6905168" y="3510977"/>
+                  </a:lnTo>
+                  <a:lnTo>
+                    <a:pt x="6827534" y="3505191"/>
+                  </a:lnTo>
+                  <a:lnTo>
+                    <a:pt x="6749900" y="3499168"/>
+                  </a:lnTo>
+                  <a:lnTo>
+                    <a:pt x="6672266" y="3492899"/>
+                  </a:lnTo>
+                  <a:lnTo>
+                    <a:pt x="6594632" y="3486374"/>
+                  </a:lnTo>
+                  <a:lnTo>
+                    <a:pt x="6516998" y="3479583"/>
+                  </a:lnTo>
+                  <a:lnTo>
+                    <a:pt x="6439364" y="3472514"/>
+                  </a:lnTo>
+                  <a:lnTo>
+                    <a:pt x="6361730" y="3465157"/>
+                  </a:lnTo>
+                  <a:lnTo>
+                    <a:pt x="6284096" y="3457499"/>
+                  </a:lnTo>
+                  <a:lnTo>
+                    <a:pt x="6206462" y="3449528"/>
+                  </a:lnTo>
+                  <a:lnTo>
+                    <a:pt x="6128827" y="3441232"/>
+                  </a:lnTo>
+                  <a:lnTo>
+                    <a:pt x="6051193" y="3432596"/>
+                  </a:lnTo>
+                  <a:lnTo>
+                    <a:pt x="5973559" y="3423608"/>
+                  </a:lnTo>
+                  <a:lnTo>
+                    <a:pt x="5895925" y="3414253"/>
+                  </a:lnTo>
+                  <a:lnTo>
+                    <a:pt x="5818291" y="3404516"/>
+                  </a:lnTo>
+                  <a:lnTo>
+                    <a:pt x="5740657" y="3394381"/>
+                  </a:lnTo>
+                  <a:lnTo>
+                    <a:pt x="5663023" y="3383832"/>
+                  </a:lnTo>
+                  <a:lnTo>
+                    <a:pt x="5585389" y="3372852"/>
+                  </a:lnTo>
+                  <a:lnTo>
+                    <a:pt x="5507755" y="3361424"/>
+                  </a:lnTo>
+                  <a:lnTo>
+                    <a:pt x="5430121" y="3349529"/>
+                  </a:lnTo>
+                  <a:lnTo>
+                    <a:pt x="5352487" y="3337148"/>
+                  </a:lnTo>
+                  <a:lnTo>
+                    <a:pt x="5274853" y="3324262"/>
+                  </a:lnTo>
+                  <a:lnTo>
+                    <a:pt x="5197219" y="3310849"/>
+                  </a:lnTo>
+                  <a:lnTo>
+                    <a:pt x="5119585" y="3296888"/>
+                  </a:lnTo>
+                  <a:lnTo>
+                    <a:pt x="5041951" y="3282357"/>
+                  </a:lnTo>
+                  <a:lnTo>
+                    <a:pt x="4964317" y="3267232"/>
+                  </a:lnTo>
+                  <a:lnTo>
+                    <a:pt x="4886683" y="3251490"/>
+                  </a:lnTo>
+                  <a:lnTo>
+                    <a:pt x="4809049" y="3235104"/>
+                  </a:lnTo>
+                  <a:lnTo>
+                    <a:pt x="4731415" y="3218050"/>
+                  </a:lnTo>
+                  <a:lnTo>
+                    <a:pt x="4653781" y="3200298"/>
+                  </a:lnTo>
+                  <a:lnTo>
+                    <a:pt x="4576147" y="3181822"/>
+                  </a:lnTo>
+                  <a:lnTo>
+                    <a:pt x="4498513" y="3162591"/>
+                  </a:lnTo>
+                  <a:lnTo>
+                    <a:pt x="4420879" y="3142574"/>
+                  </a:lnTo>
+                  <a:lnTo>
+                    <a:pt x="4343244" y="3121740"/>
+                  </a:lnTo>
+                  <a:lnTo>
+                    <a:pt x="4265610" y="3100055"/>
+                  </a:lnTo>
+                  <a:lnTo>
+                    <a:pt x="4187976" y="3077484"/>
+                  </a:lnTo>
+                  <a:lnTo>
+                    <a:pt x="4110342" y="3053992"/>
+                  </a:lnTo>
+                  <a:lnTo>
+                    <a:pt x="4032708" y="3029539"/>
+                  </a:lnTo>
+                  <a:lnTo>
+                    <a:pt x="3955074" y="3004088"/>
+                  </a:lnTo>
+                  <a:lnTo>
+                    <a:pt x="3877440" y="2977597"/>
+                  </a:lnTo>
+                  <a:lnTo>
+                    <a:pt x="3799806" y="2950025"/>
+                  </a:lnTo>
+                  <a:lnTo>
+                    <a:pt x="3722172" y="2921326"/>
+                  </a:lnTo>
+                  <a:lnTo>
+                    <a:pt x="3644538" y="2891454"/>
+                  </a:lnTo>
+                  <a:lnTo>
+                    <a:pt x="3566904" y="2860363"/>
+                  </a:lnTo>
+                  <a:lnTo>
+                    <a:pt x="3489270" y="2828002"/>
+                  </a:lnTo>
+                  <a:lnTo>
+                    <a:pt x="3411636" y="2794319"/>
+                  </a:lnTo>
+                  <a:lnTo>
+                    <a:pt x="3334002" y="2786420"/>
+                  </a:lnTo>
+                  <a:lnTo>
+                    <a:pt x="3256368" y="2791537"/>
+                  </a:lnTo>
+                  <a:lnTo>
+                    <a:pt x="3178734" y="2796623"/>
+                  </a:lnTo>
+                  <a:lnTo>
+                    <a:pt x="3101100" y="2801679"/>
+                  </a:lnTo>
+                  <a:lnTo>
+                    <a:pt x="3023466" y="2806705"/>
+                  </a:lnTo>
+                  <a:lnTo>
+                    <a:pt x="2945832" y="2811701"/>
+                  </a:lnTo>
+                  <a:lnTo>
+                    <a:pt x="2868198" y="2816668"/>
+                  </a:lnTo>
+                  <a:lnTo>
+                    <a:pt x="2790564" y="2821606"/>
+                  </a:lnTo>
+                  <a:lnTo>
+                    <a:pt x="2712930" y="2826514"/>
+                  </a:lnTo>
+                  <a:lnTo>
+                    <a:pt x="2635295" y="2831394"/>
+                  </a:lnTo>
+                  <a:lnTo>
+                    <a:pt x="2557661" y="2836244"/>
+                  </a:lnTo>
+                  <a:lnTo>
+                    <a:pt x="2480027" y="2841067"/>
+                  </a:lnTo>
+                  <a:lnTo>
+                    <a:pt x="2402393" y="2845860"/>
+                  </a:lnTo>
+                  <a:lnTo>
+                    <a:pt x="2324759" y="2850625"/>
+                  </a:lnTo>
+                  <a:lnTo>
+                    <a:pt x="2247125" y="2855362"/>
+                  </a:lnTo>
+                  <a:lnTo>
+                    <a:pt x="2169491" y="2860071"/>
+                  </a:lnTo>
+                  <a:lnTo>
+                    <a:pt x="2091857" y="2864753"/>
+                  </a:lnTo>
+                  <a:lnTo>
+                    <a:pt x="2014223" y="2869406"/>
+                  </a:lnTo>
+                  <a:lnTo>
+                    <a:pt x="1936589" y="2874032"/>
+                  </a:lnTo>
+                  <a:lnTo>
+                    <a:pt x="1858955" y="2878631"/>
+                  </a:lnTo>
+                  <a:lnTo>
+                    <a:pt x="1781321" y="2883203"/>
+                  </a:lnTo>
+                  <a:lnTo>
+                    <a:pt x="1703687" y="2887748"/>
+                  </a:lnTo>
+                  <a:lnTo>
+                    <a:pt x="1626053" y="2892265"/>
+                  </a:lnTo>
+                  <a:lnTo>
+                    <a:pt x="1548419" y="2896756"/>
+                  </a:lnTo>
+                  <a:lnTo>
+                    <a:pt x="1470785" y="2901221"/>
+                  </a:lnTo>
+                  <a:lnTo>
+                    <a:pt x="1393151" y="2905659"/>
+                  </a:lnTo>
+                  <a:lnTo>
+                    <a:pt x="1315517" y="2910071"/>
+                  </a:lnTo>
+                  <a:lnTo>
+                    <a:pt x="1237883" y="2914457"/>
+                  </a:lnTo>
+                  <a:lnTo>
+                    <a:pt x="1160249" y="2918817"/>
+                  </a:lnTo>
+                  <a:lnTo>
+                    <a:pt x="1082615" y="2923152"/>
+                  </a:lnTo>
+                  <a:lnTo>
+                    <a:pt x="1004981" y="2927460"/>
+                  </a:lnTo>
+                  <a:lnTo>
+                    <a:pt x="927346" y="2931744"/>
+                  </a:lnTo>
+                  <a:lnTo>
+                    <a:pt x="849712" y="2936001"/>
+                  </a:lnTo>
+                  <a:lnTo>
+                    <a:pt x="772078" y="2940234"/>
+                  </a:lnTo>
+                  <a:lnTo>
+                    <a:pt x="694444" y="2944442"/>
+                  </a:lnTo>
+                  <a:lnTo>
+                    <a:pt x="616810" y="2948625"/>
+                  </a:lnTo>
+                  <a:lnTo>
+                    <a:pt x="539176" y="2952783"/>
+                  </a:lnTo>
+                  <a:lnTo>
+                    <a:pt x="461542" y="2956917"/>
+                  </a:lnTo>
+                  <a:lnTo>
+                    <a:pt x="383908" y="2961026"/>
+                  </a:lnTo>
+                  <a:lnTo>
+                    <a:pt x="306274" y="2965111"/>
+                  </a:lnTo>
+                  <a:lnTo>
+                    <a:pt x="228640" y="2969172"/>
+                  </a:lnTo>
+                  <a:lnTo>
+                    <a:pt x="151006" y="2973209"/>
+                  </a:lnTo>
+                  <a:lnTo>
+                    <a:pt x="73372" y="2977222"/>
+                  </a:lnTo>
+                  <a:lnTo>
+                    <a:pt x="0" y="2980992"/>
                   </a:lnTo>
                   <a:close/>
                 </a:path>
@@ -3609,300 +3588,279 @@
           </p:nvSpPr>
           <p:spPr>
             <a:xfrm>
-              <a:off x="817517" y="2069148"/>
-              <a:ext cx="7370972" cy="2607852"/>
+              <a:off x="1420946" y="1896563"/>
+              <a:ext cx="6767544" cy="2781274"/>
             </a:xfrm>
             <a:custGeom>
               <a:avLst/>
               <a:pathLst>
-                <a:path w="7370972" h="2607852">
+                <a:path w="6767544" h="2781274">
                   <a:moveTo>
                     <a:pt x="0" y="0"/>
                   </a:moveTo>
                   <a:lnTo>
-                    <a:pt x="73372" y="103096"/>
-                  </a:lnTo>
-                  <a:lnTo>
-                    <a:pt x="151006" y="208767"/>
-                  </a:lnTo>
-                  <a:lnTo>
-                    <a:pt x="228640" y="311131"/>
-                  </a:lnTo>
-                  <a:lnTo>
-                    <a:pt x="306274" y="410292"/>
-                  </a:lnTo>
-                  <a:lnTo>
-                    <a:pt x="383908" y="506350"/>
-                  </a:lnTo>
-                  <a:lnTo>
-                    <a:pt x="461542" y="599402"/>
-                  </a:lnTo>
-                  <a:lnTo>
-                    <a:pt x="539176" y="689543"/>
-                  </a:lnTo>
-                  <a:lnTo>
-                    <a:pt x="616810" y="776863"/>
-                  </a:lnTo>
-                  <a:lnTo>
-                    <a:pt x="694444" y="861450"/>
-                  </a:lnTo>
-                  <a:lnTo>
-                    <a:pt x="772078" y="943391"/>
-                  </a:lnTo>
-                  <a:lnTo>
-                    <a:pt x="849712" y="1022768"/>
-                  </a:lnTo>
-                  <a:lnTo>
-                    <a:pt x="927346" y="1099660"/>
-                  </a:lnTo>
-                  <a:lnTo>
-                    <a:pt x="1004981" y="1174147"/>
-                  </a:lnTo>
-                  <a:lnTo>
-                    <a:pt x="1082615" y="1246303"/>
-                  </a:lnTo>
-                  <a:lnTo>
-                    <a:pt x="1160249" y="1316201"/>
-                  </a:lnTo>
-                  <a:lnTo>
-                    <a:pt x="1237883" y="1383912"/>
-                  </a:lnTo>
-                  <a:lnTo>
-                    <a:pt x="1315517" y="1449504"/>
-                  </a:lnTo>
-                  <a:lnTo>
-                    <a:pt x="1393151" y="1513043"/>
-                  </a:lnTo>
-                  <a:lnTo>
-                    <a:pt x="1470785" y="1574594"/>
-                  </a:lnTo>
-                  <a:lnTo>
-                    <a:pt x="1548419" y="1634219"/>
-                  </a:lnTo>
-                  <a:lnTo>
-                    <a:pt x="1626053" y="1691979"/>
-                  </a:lnTo>
-                  <a:lnTo>
-                    <a:pt x="1703687" y="1747931"/>
-                  </a:lnTo>
-                  <a:lnTo>
-                    <a:pt x="1781321" y="1802132"/>
-                  </a:lnTo>
-                  <a:lnTo>
-                    <a:pt x="1858955" y="1854637"/>
-                  </a:lnTo>
-                  <a:lnTo>
-                    <a:pt x="1936589" y="1905499"/>
-                  </a:lnTo>
-                  <a:lnTo>
-                    <a:pt x="2014223" y="1954770"/>
-                  </a:lnTo>
-                  <a:lnTo>
-                    <a:pt x="2091857" y="2002499"/>
-                  </a:lnTo>
-                  <a:lnTo>
-                    <a:pt x="2169491" y="2048734"/>
-                  </a:lnTo>
-                  <a:lnTo>
-                    <a:pt x="2247125" y="2093523"/>
-                  </a:lnTo>
-                  <a:lnTo>
-                    <a:pt x="2324759" y="2136910"/>
-                  </a:lnTo>
-                  <a:lnTo>
-                    <a:pt x="2402393" y="2178939"/>
-                  </a:lnTo>
-                  <a:lnTo>
-                    <a:pt x="2480027" y="2219653"/>
-                  </a:lnTo>
-                  <a:lnTo>
-                    <a:pt x="2557661" y="2259093"/>
-                  </a:lnTo>
-                  <a:lnTo>
-                    <a:pt x="2635295" y="2297299"/>
-                  </a:lnTo>
-                  <a:lnTo>
-                    <a:pt x="2712930" y="2334310"/>
-                  </a:lnTo>
-                  <a:lnTo>
-                    <a:pt x="2790564" y="2370162"/>
-                  </a:lnTo>
-                  <a:lnTo>
-                    <a:pt x="2868198" y="2404893"/>
-                  </a:lnTo>
-                  <a:lnTo>
-                    <a:pt x="2945832" y="2438537"/>
-                  </a:lnTo>
-                  <a:lnTo>
-                    <a:pt x="3023466" y="2471128"/>
-                  </a:lnTo>
-                  <a:lnTo>
-                    <a:pt x="3101100" y="2502699"/>
-                  </a:lnTo>
-                  <a:lnTo>
-                    <a:pt x="3178734" y="2533282"/>
-                  </a:lnTo>
-                  <a:lnTo>
-                    <a:pt x="3256368" y="2562908"/>
-                  </a:lnTo>
-                  <a:lnTo>
-                    <a:pt x="3334002" y="2591607"/>
-                  </a:lnTo>
-                  <a:lnTo>
-                    <a:pt x="3411636" y="2607852"/>
-                  </a:lnTo>
-                  <a:lnTo>
-                    <a:pt x="3489270" y="2600104"/>
-                  </a:lnTo>
-                  <a:lnTo>
-                    <a:pt x="3566904" y="2592287"/>
-                  </a:lnTo>
-                  <a:lnTo>
-                    <a:pt x="3644538" y="2584400"/>
-                  </a:lnTo>
-                  <a:lnTo>
-                    <a:pt x="3722172" y="2576444"/>
-                  </a:lnTo>
-                  <a:lnTo>
-                    <a:pt x="3799806" y="2568417"/>
-                  </a:lnTo>
-                  <a:lnTo>
-                    <a:pt x="3877440" y="2560318"/>
-                  </a:lnTo>
-                  <a:lnTo>
-                    <a:pt x="3955074" y="2552147"/>
-                  </a:lnTo>
-                  <a:lnTo>
-                    <a:pt x="4032708" y="2543904"/>
-                  </a:lnTo>
-                  <a:lnTo>
-                    <a:pt x="4110342" y="2535588"/>
-                  </a:lnTo>
-                  <a:lnTo>
-                    <a:pt x="4187976" y="2527197"/>
-                  </a:lnTo>
-                  <a:lnTo>
-                    <a:pt x="4265610" y="2518733"/>
-                  </a:lnTo>
-                  <a:lnTo>
-                    <a:pt x="4343244" y="2510193"/>
-                  </a:lnTo>
-                  <a:lnTo>
-                    <a:pt x="4420879" y="2501577"/>
-                  </a:lnTo>
-                  <a:lnTo>
-                    <a:pt x="4498513" y="2492884"/>
-                  </a:lnTo>
-                  <a:lnTo>
-                    <a:pt x="4576147" y="2484115"/>
-                  </a:lnTo>
-                  <a:lnTo>
-                    <a:pt x="4653781" y="2475267"/>
-                  </a:lnTo>
-                  <a:lnTo>
-                    <a:pt x="4731415" y="2466341"/>
-                  </a:lnTo>
-                  <a:lnTo>
-                    <a:pt x="4809049" y="2457336"/>
-                  </a:lnTo>
-                  <a:lnTo>
-                    <a:pt x="4886683" y="2448250"/>
-                  </a:lnTo>
-                  <a:lnTo>
-                    <a:pt x="4964317" y="2439084"/>
-                  </a:lnTo>
-                  <a:lnTo>
-                    <a:pt x="5041951" y="2429836"/>
-                  </a:lnTo>
-                  <a:lnTo>
-                    <a:pt x="5119585" y="2420507"/>
-                  </a:lnTo>
-                  <a:lnTo>
-                    <a:pt x="5197219" y="2411094"/>
-                  </a:lnTo>
-                  <a:lnTo>
-                    <a:pt x="5274853" y="2401598"/>
-                  </a:lnTo>
-                  <a:lnTo>
-                    <a:pt x="5352487" y="2392017"/>
-                  </a:lnTo>
-                  <a:lnTo>
-                    <a:pt x="5430121" y="2382352"/>
-                  </a:lnTo>
-                  <a:lnTo>
-                    <a:pt x="5507755" y="2372600"/>
-                  </a:lnTo>
-                  <a:lnTo>
-                    <a:pt x="5585389" y="2362762"/>
-                  </a:lnTo>
-                  <a:lnTo>
-                    <a:pt x="5663023" y="2352836"/>
-                  </a:lnTo>
-                  <a:lnTo>
-                    <a:pt x="5740657" y="2342823"/>
-                  </a:lnTo>
-                  <a:lnTo>
-                    <a:pt x="5818291" y="2332720"/>
-                  </a:lnTo>
-                  <a:lnTo>
-                    <a:pt x="5895925" y="2322527"/>
-                  </a:lnTo>
-                  <a:lnTo>
-                    <a:pt x="5973559" y="2312244"/>
-                  </a:lnTo>
-                  <a:lnTo>
-                    <a:pt x="6051193" y="2301870"/>
-                  </a:lnTo>
-                  <a:lnTo>
-                    <a:pt x="6128827" y="2291403"/>
-                  </a:lnTo>
-                  <a:lnTo>
-                    <a:pt x="6206462" y="2280844"/>
-                  </a:lnTo>
-                  <a:lnTo>
-                    <a:pt x="6284096" y="2270191"/>
-                  </a:lnTo>
-                  <a:lnTo>
-                    <a:pt x="6361730" y="2259443"/>
-                  </a:lnTo>
-                  <a:lnTo>
-                    <a:pt x="6439364" y="2248599"/>
-                  </a:lnTo>
-                  <a:lnTo>
-                    <a:pt x="6516998" y="2237660"/>
-                  </a:lnTo>
-                  <a:lnTo>
-                    <a:pt x="6594632" y="2226623"/>
-                  </a:lnTo>
-                  <a:lnTo>
-                    <a:pt x="6672266" y="2215488"/>
-                  </a:lnTo>
-                  <a:lnTo>
-                    <a:pt x="6749900" y="2204254"/>
-                  </a:lnTo>
-                  <a:lnTo>
-                    <a:pt x="6827534" y="2192920"/>
-                  </a:lnTo>
-                  <a:lnTo>
-                    <a:pt x="6905168" y="2181486"/>
-                  </a:lnTo>
-                  <a:lnTo>
-                    <a:pt x="6982802" y="2169950"/>
-                  </a:lnTo>
-                  <a:lnTo>
-                    <a:pt x="7060436" y="2158311"/>
-                  </a:lnTo>
-                  <a:lnTo>
-                    <a:pt x="7138070" y="2146569"/>
-                  </a:lnTo>
-                  <a:lnTo>
-                    <a:pt x="7215704" y="2134723"/>
-                  </a:lnTo>
-                  <a:lnTo>
-                    <a:pt x="7293338" y="2122772"/>
-                  </a:lnTo>
-                  <a:lnTo>
-                    <a:pt x="7370972" y="2110714"/>
+                    <a:pt x="13382" y="25537"/>
+                  </a:lnTo>
+                  <a:lnTo>
+                    <a:pt x="91016" y="167875"/>
+                  </a:lnTo>
+                  <a:lnTo>
+                    <a:pt x="168650" y="304627"/>
+                  </a:lnTo>
+                  <a:lnTo>
+                    <a:pt x="246284" y="436013"/>
+                  </a:lnTo>
+                  <a:lnTo>
+                    <a:pt x="323918" y="562242"/>
+                  </a:lnTo>
+                  <a:lnTo>
+                    <a:pt x="401552" y="683518"/>
+                  </a:lnTo>
+                  <a:lnTo>
+                    <a:pt x="479186" y="800035"/>
+                  </a:lnTo>
+                  <a:lnTo>
+                    <a:pt x="556820" y="911980"/>
+                  </a:lnTo>
+                  <a:lnTo>
+                    <a:pt x="634454" y="1019531"/>
+                  </a:lnTo>
+                  <a:lnTo>
+                    <a:pt x="712088" y="1122862"/>
+                  </a:lnTo>
+                  <a:lnTo>
+                    <a:pt x="789722" y="1222137"/>
+                  </a:lnTo>
+                  <a:lnTo>
+                    <a:pt x="867356" y="1317517"/>
+                  </a:lnTo>
+                  <a:lnTo>
+                    <a:pt x="944990" y="1409154"/>
+                  </a:lnTo>
+                  <a:lnTo>
+                    <a:pt x="1022624" y="1497195"/>
+                  </a:lnTo>
+                  <a:lnTo>
+                    <a:pt x="1100258" y="1581781"/>
+                  </a:lnTo>
+                  <a:lnTo>
+                    <a:pt x="1177892" y="1663047"/>
+                  </a:lnTo>
+                  <a:lnTo>
+                    <a:pt x="1255526" y="1741125"/>
+                  </a:lnTo>
+                  <a:lnTo>
+                    <a:pt x="1333161" y="1816138"/>
+                  </a:lnTo>
+                  <a:lnTo>
+                    <a:pt x="1410795" y="1888208"/>
+                  </a:lnTo>
+                  <a:lnTo>
+                    <a:pt x="1488429" y="1957449"/>
+                  </a:lnTo>
+                  <a:lnTo>
+                    <a:pt x="1566063" y="2023973"/>
+                  </a:lnTo>
+                  <a:lnTo>
+                    <a:pt x="1643697" y="2087887"/>
+                  </a:lnTo>
+                  <a:lnTo>
+                    <a:pt x="1721331" y="2149292"/>
+                  </a:lnTo>
+                  <a:lnTo>
+                    <a:pt x="1798965" y="2208288"/>
+                  </a:lnTo>
+                  <a:lnTo>
+                    <a:pt x="1876599" y="2264968"/>
+                  </a:lnTo>
+                  <a:lnTo>
+                    <a:pt x="1954233" y="2319425"/>
+                  </a:lnTo>
+                  <a:lnTo>
+                    <a:pt x="2031867" y="2371744"/>
+                  </a:lnTo>
+                  <a:lnTo>
+                    <a:pt x="2109501" y="2422010"/>
+                  </a:lnTo>
+                  <a:lnTo>
+                    <a:pt x="2187135" y="2470304"/>
+                  </a:lnTo>
+                  <a:lnTo>
+                    <a:pt x="2264769" y="2516702"/>
+                  </a:lnTo>
+                  <a:lnTo>
+                    <a:pt x="2342403" y="2561279"/>
+                  </a:lnTo>
+                  <a:lnTo>
+                    <a:pt x="2420037" y="2604108"/>
+                  </a:lnTo>
+                  <a:lnTo>
+                    <a:pt x="2497671" y="2645255"/>
+                  </a:lnTo>
+                  <a:lnTo>
+                    <a:pt x="2575305" y="2684788"/>
+                  </a:lnTo>
+                  <a:lnTo>
+                    <a:pt x="2652939" y="2722769"/>
+                  </a:lnTo>
+                  <a:lnTo>
+                    <a:pt x="2730573" y="2759260"/>
+                  </a:lnTo>
+                  <a:lnTo>
+                    <a:pt x="2808207" y="2781274"/>
+                  </a:lnTo>
+                  <a:lnTo>
+                    <a:pt x="2885841" y="2776096"/>
+                  </a:lnTo>
+                  <a:lnTo>
+                    <a:pt x="2963475" y="2770888"/>
+                  </a:lnTo>
+                  <a:lnTo>
+                    <a:pt x="3041110" y="2765649"/>
+                  </a:lnTo>
+                  <a:lnTo>
+                    <a:pt x="3118744" y="2760379"/>
+                  </a:lnTo>
+                  <a:lnTo>
+                    <a:pt x="3196378" y="2755078"/>
+                  </a:lnTo>
+                  <a:lnTo>
+                    <a:pt x="3274012" y="2749745"/>
+                  </a:lnTo>
+                  <a:lnTo>
+                    <a:pt x="3351646" y="2744380"/>
+                  </a:lnTo>
+                  <a:lnTo>
+                    <a:pt x="3429280" y="2738984"/>
+                  </a:lnTo>
+                  <a:lnTo>
+                    <a:pt x="3506914" y="2733555"/>
+                  </a:lnTo>
+                  <a:lnTo>
+                    <a:pt x="3584548" y="2728095"/>
+                  </a:lnTo>
+                  <a:lnTo>
+                    <a:pt x="3662182" y="2722601"/>
+                  </a:lnTo>
+                  <a:lnTo>
+                    <a:pt x="3739816" y="2717075"/>
+                  </a:lnTo>
+                  <a:lnTo>
+                    <a:pt x="3817450" y="2711517"/>
+                  </a:lnTo>
+                  <a:lnTo>
+                    <a:pt x="3895084" y="2705925"/>
+                  </a:lnTo>
+                  <a:lnTo>
+                    <a:pt x="3972718" y="2700300"/>
+                  </a:lnTo>
+                  <a:lnTo>
+                    <a:pt x="4050352" y="2694642"/>
+                  </a:lnTo>
+                  <a:lnTo>
+                    <a:pt x="4127986" y="2688950"/>
+                  </a:lnTo>
+                  <a:lnTo>
+                    <a:pt x="4205620" y="2683224"/>
+                  </a:lnTo>
+                  <a:lnTo>
+                    <a:pt x="4283254" y="2677464"/>
+                  </a:lnTo>
+                  <a:lnTo>
+                    <a:pt x="4360888" y="2671670"/>
+                  </a:lnTo>
+                  <a:lnTo>
+                    <a:pt x="4438522" y="2665842"/>
+                  </a:lnTo>
+                  <a:lnTo>
+                    <a:pt x="4516156" y="2659978"/>
+                  </a:lnTo>
+                  <a:lnTo>
+                    <a:pt x="4593790" y="2654080"/>
+                  </a:lnTo>
+                  <a:lnTo>
+                    <a:pt x="4671424" y="2648147"/>
+                  </a:lnTo>
+                  <a:lnTo>
+                    <a:pt x="4749059" y="2642179"/>
+                  </a:lnTo>
+                  <a:lnTo>
+                    <a:pt x="4826693" y="2636176"/>
+                  </a:lnTo>
+                  <a:lnTo>
+                    <a:pt x="4904327" y="2630136"/>
+                  </a:lnTo>
+                  <a:lnTo>
+                    <a:pt x="4981961" y="2624061"/>
+                  </a:lnTo>
+                  <a:lnTo>
+                    <a:pt x="5059595" y="2617950"/>
+                  </a:lnTo>
+                  <a:lnTo>
+                    <a:pt x="5137229" y="2611802"/>
+                  </a:lnTo>
+                  <a:lnTo>
+                    <a:pt x="5214863" y="2605618"/>
+                  </a:lnTo>
+                  <a:lnTo>
+                    <a:pt x="5292497" y="2599397"/>
+                  </a:lnTo>
+                  <a:lnTo>
+                    <a:pt x="5370131" y="2593139"/>
+                  </a:lnTo>
+                  <a:lnTo>
+                    <a:pt x="5447765" y="2586844"/>
+                  </a:lnTo>
+                  <a:lnTo>
+                    <a:pt x="5525399" y="2580511"/>
+                  </a:lnTo>
+                  <a:lnTo>
+                    <a:pt x="5603033" y="2574141"/>
+                  </a:lnTo>
+                  <a:lnTo>
+                    <a:pt x="5680667" y="2567733"/>
+                  </a:lnTo>
+                  <a:lnTo>
+                    <a:pt x="5758301" y="2561287"/>
+                  </a:lnTo>
+                  <a:lnTo>
+                    <a:pt x="5835935" y="2554803"/>
+                  </a:lnTo>
+                  <a:lnTo>
+                    <a:pt x="5913569" y="2548280"/>
+                  </a:lnTo>
+                  <a:lnTo>
+                    <a:pt x="5991203" y="2541719"/>
+                  </a:lnTo>
+                  <a:lnTo>
+                    <a:pt x="6068837" y="2535118"/>
+                  </a:lnTo>
+                  <a:lnTo>
+                    <a:pt x="6146471" y="2528478"/>
+                  </a:lnTo>
+                  <a:lnTo>
+                    <a:pt x="6224105" y="2521799"/>
+                  </a:lnTo>
+                  <a:lnTo>
+                    <a:pt x="6301739" y="2515080"/>
+                  </a:lnTo>
+                  <a:lnTo>
+                    <a:pt x="6379373" y="2508321"/>
+                  </a:lnTo>
+                  <a:lnTo>
+                    <a:pt x="6457008" y="2501522"/>
+                  </a:lnTo>
+                  <a:lnTo>
+                    <a:pt x="6534642" y="2494683"/>
+                  </a:lnTo>
+                  <a:lnTo>
+                    <a:pt x="6612276" y="2487803"/>
+                  </a:lnTo>
+                  <a:lnTo>
+                    <a:pt x="6689910" y="2480882"/>
+                  </a:lnTo>
+                  <a:lnTo>
+                    <a:pt x="6767544" y="2473920"/>
                   </a:lnTo>
                 </a:path>
               </a:pathLst>
@@ -3922,300 +3880,300 @@
           </p:nvSpPr>
           <p:spPr>
             <a:xfrm>
-              <a:off x="817517" y="4684681"/>
-              <a:ext cx="7370972" cy="694438"/>
+              <a:off x="817517" y="4682984"/>
+              <a:ext cx="7370972" cy="754807"/>
             </a:xfrm>
             <a:custGeom>
               <a:avLst/>
               <a:pathLst>
-                <a:path w="7370972" h="694438">
+                <a:path w="7370972" h="754807">
                   <a:moveTo>
-                    <a:pt x="7370972" y="694438"/>
+                    <a:pt x="7370972" y="754807"/>
                   </a:moveTo>
                   <a:lnTo>
-                    <a:pt x="7293338" y="688944"/>
-                  </a:lnTo>
-                  <a:lnTo>
-                    <a:pt x="7215704" y="683272"/>
-                  </a:lnTo>
-                  <a:lnTo>
-                    <a:pt x="7138070" y="677417"/>
-                  </a:lnTo>
-                  <a:lnTo>
-                    <a:pt x="7060436" y="671373"/>
-                  </a:lnTo>
-                  <a:lnTo>
-                    <a:pt x="6982802" y="665134"/>
-                  </a:lnTo>
-                  <a:lnTo>
-                    <a:pt x="6905168" y="658693"/>
-                  </a:lnTo>
-                  <a:lnTo>
-                    <a:pt x="6827534" y="652044"/>
-                  </a:lnTo>
-                  <a:lnTo>
-                    <a:pt x="6749900" y="645180"/>
-                  </a:lnTo>
-                  <a:lnTo>
-                    <a:pt x="6672266" y="638095"/>
-                  </a:lnTo>
-                  <a:lnTo>
-                    <a:pt x="6594632" y="630781"/>
-                  </a:lnTo>
-                  <a:lnTo>
-                    <a:pt x="6516998" y="623230"/>
-                  </a:lnTo>
-                  <a:lnTo>
-                    <a:pt x="6439364" y="615436"/>
-                  </a:lnTo>
-                  <a:lnTo>
-                    <a:pt x="6361730" y="607390"/>
-                  </a:lnTo>
-                  <a:lnTo>
-                    <a:pt x="6284096" y="599084"/>
-                  </a:lnTo>
-                  <a:lnTo>
-                    <a:pt x="6206462" y="590509"/>
-                  </a:lnTo>
-                  <a:lnTo>
-                    <a:pt x="6128827" y="581658"/>
-                  </a:lnTo>
-                  <a:lnTo>
-                    <a:pt x="6051193" y="572521"/>
-                  </a:lnTo>
-                  <a:lnTo>
-                    <a:pt x="5973559" y="563088"/>
-                  </a:lnTo>
-                  <a:lnTo>
-                    <a:pt x="5895925" y="553351"/>
-                  </a:lnTo>
-                  <a:lnTo>
-                    <a:pt x="5818291" y="543299"/>
-                  </a:lnTo>
-                  <a:lnTo>
-                    <a:pt x="5740657" y="532923"/>
-                  </a:lnTo>
-                  <a:lnTo>
-                    <a:pt x="5663023" y="522211"/>
-                  </a:lnTo>
-                  <a:lnTo>
-                    <a:pt x="5585389" y="511154"/>
-                  </a:lnTo>
-                  <a:lnTo>
-                    <a:pt x="5507755" y="499739"/>
-                  </a:lnTo>
-                  <a:lnTo>
-                    <a:pt x="5430121" y="487955"/>
-                  </a:lnTo>
-                  <a:lnTo>
-                    <a:pt x="5352487" y="475791"/>
-                  </a:lnTo>
-                  <a:lnTo>
-                    <a:pt x="5274853" y="463234"/>
-                  </a:lnTo>
-                  <a:lnTo>
-                    <a:pt x="5197219" y="450272"/>
-                  </a:lnTo>
-                  <a:lnTo>
-                    <a:pt x="5119585" y="436890"/>
-                  </a:lnTo>
-                  <a:lnTo>
-                    <a:pt x="5041951" y="423076"/>
-                  </a:lnTo>
-                  <a:lnTo>
-                    <a:pt x="4964317" y="408817"/>
-                  </a:lnTo>
-                  <a:lnTo>
-                    <a:pt x="4886683" y="394096"/>
-                  </a:lnTo>
-                  <a:lnTo>
-                    <a:pt x="4809049" y="378900"/>
-                  </a:lnTo>
-                  <a:lnTo>
-                    <a:pt x="4731415" y="363213"/>
-                  </a:lnTo>
-                  <a:lnTo>
-                    <a:pt x="4653781" y="347020"/>
-                  </a:lnTo>
-                  <a:lnTo>
-                    <a:pt x="4576147" y="330303"/>
-                  </a:lnTo>
-                  <a:lnTo>
-                    <a:pt x="4498513" y="313046"/>
-                  </a:lnTo>
-                  <a:lnTo>
-                    <a:pt x="4420879" y="295232"/>
-                  </a:lnTo>
-                  <a:lnTo>
-                    <a:pt x="4343244" y="276842"/>
-                  </a:lnTo>
-                  <a:lnTo>
-                    <a:pt x="4265610" y="257859"/>
-                  </a:lnTo>
-                  <a:lnTo>
-                    <a:pt x="4187976" y="238262"/>
-                  </a:lnTo>
-                  <a:lnTo>
-                    <a:pt x="4110342" y="218032"/>
-                  </a:lnTo>
-                  <a:lnTo>
-                    <a:pt x="4032708" y="197149"/>
-                  </a:lnTo>
-                  <a:lnTo>
-                    <a:pt x="3955074" y="175591"/>
-                  </a:lnTo>
-                  <a:lnTo>
-                    <a:pt x="3877440" y="153337"/>
-                  </a:lnTo>
-                  <a:lnTo>
-                    <a:pt x="3799806" y="130364"/>
-                  </a:lnTo>
-                  <a:lnTo>
-                    <a:pt x="3722172" y="106648"/>
-                  </a:lnTo>
-                  <a:lnTo>
-                    <a:pt x="3644538" y="82167"/>
-                  </a:lnTo>
-                  <a:lnTo>
-                    <a:pt x="3566904" y="56895"/>
-                  </a:lnTo>
-                  <a:lnTo>
-                    <a:pt x="3489270" y="30806"/>
-                  </a:lnTo>
-                  <a:lnTo>
-                    <a:pt x="3411636" y="3875"/>
+                    <a:pt x="7293338" y="750256"/>
+                  </a:lnTo>
+                  <a:lnTo>
+                    <a:pt x="7215704" y="745519"/>
+                  </a:lnTo>
+                  <a:lnTo>
+                    <a:pt x="7138070" y="740589"/>
+                  </a:lnTo>
+                  <a:lnTo>
+                    <a:pt x="7060436" y="735457"/>
+                  </a:lnTo>
+                  <a:lnTo>
+                    <a:pt x="6982802" y="730116"/>
+                  </a:lnTo>
+                  <a:lnTo>
+                    <a:pt x="6905168" y="724557"/>
+                  </a:lnTo>
+                  <a:lnTo>
+                    <a:pt x="6827534" y="718770"/>
+                  </a:lnTo>
+                  <a:lnTo>
+                    <a:pt x="6749900" y="712747"/>
+                  </a:lnTo>
+                  <a:lnTo>
+                    <a:pt x="6672266" y="706479"/>
+                  </a:lnTo>
+                  <a:lnTo>
+                    <a:pt x="6594632" y="699954"/>
+                  </a:lnTo>
+                  <a:lnTo>
+                    <a:pt x="6516998" y="693162"/>
+                  </a:lnTo>
+                  <a:lnTo>
+                    <a:pt x="6439364" y="686094"/>
+                  </a:lnTo>
+                  <a:lnTo>
+                    <a:pt x="6361730" y="678736"/>
+                  </a:lnTo>
+                  <a:lnTo>
+                    <a:pt x="6284096" y="671078"/>
+                  </a:lnTo>
+                  <a:lnTo>
+                    <a:pt x="6206462" y="663107"/>
+                  </a:lnTo>
+                  <a:lnTo>
+                    <a:pt x="6128827" y="654811"/>
+                  </a:lnTo>
+                  <a:lnTo>
+                    <a:pt x="6051193" y="646176"/>
+                  </a:lnTo>
+                  <a:lnTo>
+                    <a:pt x="5973559" y="637188"/>
+                  </a:lnTo>
+                  <a:lnTo>
+                    <a:pt x="5895925" y="627832"/>
+                  </a:lnTo>
+                  <a:lnTo>
+                    <a:pt x="5818291" y="618095"/>
+                  </a:lnTo>
+                  <a:lnTo>
+                    <a:pt x="5740657" y="607960"/>
+                  </a:lnTo>
+                  <a:lnTo>
+                    <a:pt x="5663023" y="597411"/>
+                  </a:lnTo>
+                  <a:lnTo>
+                    <a:pt x="5585389" y="586432"/>
+                  </a:lnTo>
+                  <a:lnTo>
+                    <a:pt x="5507755" y="575003"/>
+                  </a:lnTo>
+                  <a:lnTo>
+                    <a:pt x="5430121" y="563108"/>
+                  </a:lnTo>
+                  <a:lnTo>
+                    <a:pt x="5352487" y="550727"/>
+                  </a:lnTo>
+                  <a:lnTo>
+                    <a:pt x="5274853" y="537841"/>
+                  </a:lnTo>
+                  <a:lnTo>
+                    <a:pt x="5197219" y="524428"/>
+                  </a:lnTo>
+                  <a:lnTo>
+                    <a:pt x="5119585" y="510467"/>
+                  </a:lnTo>
+                  <a:lnTo>
+                    <a:pt x="5041951" y="495936"/>
+                  </a:lnTo>
+                  <a:lnTo>
+                    <a:pt x="4964317" y="480811"/>
+                  </a:lnTo>
+                  <a:lnTo>
+                    <a:pt x="4886683" y="465069"/>
+                  </a:lnTo>
+                  <a:lnTo>
+                    <a:pt x="4809049" y="448683"/>
+                  </a:lnTo>
+                  <a:lnTo>
+                    <a:pt x="4731415" y="431629"/>
+                  </a:lnTo>
+                  <a:lnTo>
+                    <a:pt x="4653781" y="413878"/>
+                  </a:lnTo>
+                  <a:lnTo>
+                    <a:pt x="4576147" y="395401"/>
+                  </a:lnTo>
+                  <a:lnTo>
+                    <a:pt x="4498513" y="376170"/>
+                  </a:lnTo>
+                  <a:lnTo>
+                    <a:pt x="4420879" y="356154"/>
+                  </a:lnTo>
+                  <a:lnTo>
+                    <a:pt x="4343244" y="335319"/>
+                  </a:lnTo>
+                  <a:lnTo>
+                    <a:pt x="4265610" y="313634"/>
+                  </a:lnTo>
+                  <a:lnTo>
+                    <a:pt x="4187976" y="291064"/>
+                  </a:lnTo>
+                  <a:lnTo>
+                    <a:pt x="4110342" y="267571"/>
+                  </a:lnTo>
+                  <a:lnTo>
+                    <a:pt x="4032708" y="243118"/>
+                  </a:lnTo>
+                  <a:lnTo>
+                    <a:pt x="3955074" y="217667"/>
+                  </a:lnTo>
+                  <a:lnTo>
+                    <a:pt x="3877440" y="191177"/>
+                  </a:lnTo>
+                  <a:lnTo>
+                    <a:pt x="3799806" y="163604"/>
+                  </a:lnTo>
+                  <a:lnTo>
+                    <a:pt x="3722172" y="134905"/>
+                  </a:lnTo>
+                  <a:lnTo>
+                    <a:pt x="3644538" y="105034"/>
+                  </a:lnTo>
+                  <a:lnTo>
+                    <a:pt x="3566904" y="73942"/>
+                  </a:lnTo>
+                  <a:lnTo>
+                    <a:pt x="3489270" y="41581"/>
+                  </a:lnTo>
+                  <a:lnTo>
+                    <a:pt x="3411636" y="7898"/>
                   </a:lnTo>
                   <a:lnTo>
                     <a:pt x="3334002" y="0"/>
                   </a:lnTo>
                   <a:lnTo>
-                    <a:pt x="3256368" y="7612"/>
-                  </a:lnTo>
-                  <a:lnTo>
-                    <a:pt x="3178734" y="15157"/>
-                  </a:lnTo>
-                  <a:lnTo>
-                    <a:pt x="3101100" y="22636"/>
-                  </a:lnTo>
-                  <a:lnTo>
-                    <a:pt x="3023466" y="30049"/>
-                  </a:lnTo>
-                  <a:lnTo>
-                    <a:pt x="2945832" y="37397"/>
-                  </a:lnTo>
-                  <a:lnTo>
-                    <a:pt x="2868198" y="44680"/>
-                  </a:lnTo>
-                  <a:lnTo>
-                    <a:pt x="2790564" y="51900"/>
-                  </a:lnTo>
-                  <a:lnTo>
-                    <a:pt x="2712930" y="59055"/>
-                  </a:lnTo>
-                  <a:lnTo>
-                    <a:pt x="2635295" y="66147"/>
-                  </a:lnTo>
-                  <a:lnTo>
-                    <a:pt x="2557661" y="73177"/>
-                  </a:lnTo>
-                  <a:lnTo>
-                    <a:pt x="2480027" y="80145"/>
-                  </a:lnTo>
-                  <a:lnTo>
-                    <a:pt x="2402393" y="87052"/>
-                  </a:lnTo>
-                  <a:lnTo>
-                    <a:pt x="2324759" y="93898"/>
-                  </a:lnTo>
-                  <a:lnTo>
-                    <a:pt x="2247125" y="100684"/>
-                  </a:lnTo>
-                  <a:lnTo>
-                    <a:pt x="2169491" y="107410"/>
-                  </a:lnTo>
-                  <a:lnTo>
-                    <a:pt x="2091857" y="114076"/>
-                  </a:lnTo>
-                  <a:lnTo>
-                    <a:pt x="2014223" y="120684"/>
-                  </a:lnTo>
-                  <a:lnTo>
-                    <a:pt x="1936589" y="127234"/>
-                  </a:lnTo>
-                  <a:lnTo>
-                    <a:pt x="1858955" y="133726"/>
-                  </a:lnTo>
-                  <a:lnTo>
-                    <a:pt x="1781321" y="140161"/>
-                  </a:lnTo>
-                  <a:lnTo>
-                    <a:pt x="1703687" y="146539"/>
-                  </a:lnTo>
-                  <a:lnTo>
-                    <a:pt x="1626053" y="152862"/>
-                  </a:lnTo>
-                  <a:lnTo>
-                    <a:pt x="1548419" y="159128"/>
-                  </a:lnTo>
-                  <a:lnTo>
-                    <a:pt x="1470785" y="165339"/>
-                  </a:lnTo>
-                  <a:lnTo>
-                    <a:pt x="1393151" y="171496"/>
-                  </a:lnTo>
-                  <a:lnTo>
-                    <a:pt x="1315517" y="177598"/>
-                  </a:lnTo>
-                  <a:lnTo>
-                    <a:pt x="1237883" y="183647"/>
-                  </a:lnTo>
-                  <a:lnTo>
-                    <a:pt x="1160249" y="189642"/>
-                  </a:lnTo>
-                  <a:lnTo>
-                    <a:pt x="1082615" y="195585"/>
-                  </a:lnTo>
-                  <a:lnTo>
-                    <a:pt x="1004981" y="201475"/>
-                  </a:lnTo>
-                  <a:lnTo>
-                    <a:pt x="927346" y="207313"/>
-                  </a:lnTo>
-                  <a:lnTo>
-                    <a:pt x="849712" y="213100"/>
-                  </a:lnTo>
-                  <a:lnTo>
-                    <a:pt x="772078" y="218836"/>
-                  </a:lnTo>
-                  <a:lnTo>
-                    <a:pt x="694444" y="224522"/>
-                  </a:lnTo>
-                  <a:lnTo>
-                    <a:pt x="616810" y="230157"/>
-                  </a:lnTo>
-                  <a:lnTo>
-                    <a:pt x="539176" y="235743"/>
-                  </a:lnTo>
-                  <a:lnTo>
-                    <a:pt x="461542" y="241280"/>
-                  </a:lnTo>
-                  <a:lnTo>
-                    <a:pt x="383908" y="246768"/>
-                  </a:lnTo>
-                  <a:lnTo>
-                    <a:pt x="306274" y="252207"/>
-                  </a:lnTo>
-                  <a:lnTo>
-                    <a:pt x="228640" y="257599"/>
-                  </a:lnTo>
-                  <a:lnTo>
-                    <a:pt x="151006" y="262943"/>
-                  </a:lnTo>
-                  <a:lnTo>
-                    <a:pt x="73372" y="268240"/>
-                  </a:lnTo>
-                  <a:lnTo>
-                    <a:pt x="0" y="273203"/>
+                    <a:pt x="3256368" y="5116"/>
+                  </a:lnTo>
+                  <a:lnTo>
+                    <a:pt x="3178734" y="10202"/>
+                  </a:lnTo>
+                  <a:lnTo>
+                    <a:pt x="3101100" y="15258"/>
+                  </a:lnTo>
+                  <a:lnTo>
+                    <a:pt x="3023466" y="20284"/>
+                  </a:lnTo>
+                  <a:lnTo>
+                    <a:pt x="2945832" y="25281"/>
+                  </a:lnTo>
+                  <a:lnTo>
+                    <a:pt x="2868198" y="30247"/>
+                  </a:lnTo>
+                  <a:lnTo>
+                    <a:pt x="2790564" y="35185"/>
+                  </a:lnTo>
+                  <a:lnTo>
+                    <a:pt x="2712930" y="40094"/>
+                  </a:lnTo>
+                  <a:lnTo>
+                    <a:pt x="2635295" y="44973"/>
+                  </a:lnTo>
+                  <a:lnTo>
+                    <a:pt x="2557661" y="49824"/>
+                  </a:lnTo>
+                  <a:lnTo>
+                    <a:pt x="2480027" y="54646"/>
+                  </a:lnTo>
+                  <a:lnTo>
+                    <a:pt x="2402393" y="59439"/>
+                  </a:lnTo>
+                  <a:lnTo>
+                    <a:pt x="2324759" y="64204"/>
+                  </a:lnTo>
+                  <a:lnTo>
+                    <a:pt x="2247125" y="68942"/>
+                  </a:lnTo>
+                  <a:lnTo>
+                    <a:pt x="2169491" y="73651"/>
+                  </a:lnTo>
+                  <a:lnTo>
+                    <a:pt x="2091857" y="78332"/>
+                  </a:lnTo>
+                  <a:lnTo>
+                    <a:pt x="2014223" y="82986"/>
+                  </a:lnTo>
+                  <a:lnTo>
+                    <a:pt x="1936589" y="87612"/>
+                  </a:lnTo>
+                  <a:lnTo>
+                    <a:pt x="1858955" y="92210"/>
+                  </a:lnTo>
+                  <a:lnTo>
+                    <a:pt x="1781321" y="96782"/>
+                  </a:lnTo>
+                  <a:lnTo>
+                    <a:pt x="1703687" y="101327"/>
+                  </a:lnTo>
+                  <a:lnTo>
+                    <a:pt x="1626053" y="105845"/>
+                  </a:lnTo>
+                  <a:lnTo>
+                    <a:pt x="1548419" y="110336"/>
+                  </a:lnTo>
+                  <a:lnTo>
+                    <a:pt x="1470785" y="114800"/>
+                  </a:lnTo>
+                  <a:lnTo>
+                    <a:pt x="1393151" y="119238"/>
+                  </a:lnTo>
+                  <a:lnTo>
+                    <a:pt x="1315517" y="123651"/>
+                  </a:lnTo>
+                  <a:lnTo>
+                    <a:pt x="1237883" y="128036"/>
+                  </a:lnTo>
+                  <a:lnTo>
+                    <a:pt x="1160249" y="132397"/>
+                  </a:lnTo>
+                  <a:lnTo>
+                    <a:pt x="1082615" y="136731"/>
+                  </a:lnTo>
+                  <a:lnTo>
+                    <a:pt x="1004981" y="141039"/>
+                  </a:lnTo>
+                  <a:lnTo>
+                    <a:pt x="927346" y="145323"/>
+                  </a:lnTo>
+                  <a:lnTo>
+                    <a:pt x="849712" y="149581"/>
+                  </a:lnTo>
+                  <a:lnTo>
+                    <a:pt x="772078" y="153813"/>
+                  </a:lnTo>
+                  <a:lnTo>
+                    <a:pt x="694444" y="158021"/>
+                  </a:lnTo>
+                  <a:lnTo>
+                    <a:pt x="616810" y="162204"/>
+                  </a:lnTo>
+                  <a:lnTo>
+                    <a:pt x="539176" y="166362"/>
+                  </a:lnTo>
+                  <a:lnTo>
+                    <a:pt x="461542" y="170496"/>
+                  </a:lnTo>
+                  <a:lnTo>
+                    <a:pt x="383908" y="174605"/>
+                  </a:lnTo>
+                  <a:lnTo>
+                    <a:pt x="306274" y="178690"/>
+                  </a:lnTo>
+                  <a:lnTo>
+                    <a:pt x="228640" y="182751"/>
+                  </a:lnTo>
+                  <a:lnTo>
+                    <a:pt x="151006" y="186788"/>
+                  </a:lnTo>
+                  <a:lnTo>
+                    <a:pt x="73372" y="190801"/>
+                  </a:lnTo>
+                  <a:lnTo>
+                    <a:pt x="0" y="194571"/>
                   </a:lnTo>
                 </a:path>
               </a:pathLst>
@@ -4235,300 +4193,300 @@
           </p:nvSpPr>
           <p:spPr>
             <a:xfrm>
-              <a:off x="817517" y="4114706"/>
-              <a:ext cx="7370972" cy="951895"/>
+              <a:off x="817517" y="3719324"/>
+              <a:ext cx="7370972" cy="1467489"/>
             </a:xfrm>
             <a:custGeom>
               <a:avLst/>
               <a:pathLst>
-                <a:path w="7370972" h="951895">
+                <a:path w="7370972" h="1467489">
                   <a:moveTo>
                     <a:pt x="0" y="0"/>
                   </a:moveTo>
                   <a:lnTo>
-                    <a:pt x="73372" y="15476"/>
-                  </a:lnTo>
-                  <a:lnTo>
-                    <a:pt x="151006" y="31664"/>
-                  </a:lnTo>
-                  <a:lnTo>
-                    <a:pt x="228640" y="47668"/>
-                  </a:lnTo>
-                  <a:lnTo>
-                    <a:pt x="306274" y="63489"/>
-                  </a:lnTo>
-                  <a:lnTo>
-                    <a:pt x="383908" y="79130"/>
-                  </a:lnTo>
-                  <a:lnTo>
-                    <a:pt x="461542" y="94592"/>
-                  </a:lnTo>
-                  <a:lnTo>
-                    <a:pt x="539176" y="109878"/>
-                  </a:lnTo>
-                  <a:lnTo>
-                    <a:pt x="616810" y="124989"/>
-                  </a:lnTo>
-                  <a:lnTo>
-                    <a:pt x="694444" y="139928"/>
-                  </a:lnTo>
-                  <a:lnTo>
-                    <a:pt x="772078" y="154697"/>
-                  </a:lnTo>
-                  <a:lnTo>
-                    <a:pt x="849712" y="169297"/>
-                  </a:lnTo>
-                  <a:lnTo>
-                    <a:pt x="927346" y="183731"/>
-                  </a:lnTo>
-                  <a:lnTo>
-                    <a:pt x="1004981" y="198000"/>
-                  </a:lnTo>
-                  <a:lnTo>
-                    <a:pt x="1082615" y="212106"/>
-                  </a:lnTo>
-                  <a:lnTo>
-                    <a:pt x="1160249" y="226051"/>
-                  </a:lnTo>
-                  <a:lnTo>
-                    <a:pt x="1237883" y="239837"/>
-                  </a:lnTo>
-                  <a:lnTo>
-                    <a:pt x="1315517" y="253466"/>
-                  </a:lnTo>
-                  <a:lnTo>
-                    <a:pt x="1393151" y="266939"/>
-                  </a:lnTo>
-                  <a:lnTo>
-                    <a:pt x="1470785" y="280259"/>
-                  </a:lnTo>
-                  <a:lnTo>
-                    <a:pt x="1548419" y="293427"/>
-                  </a:lnTo>
-                  <a:lnTo>
-                    <a:pt x="1626053" y="306444"/>
-                  </a:lnTo>
-                  <a:lnTo>
-                    <a:pt x="1703687" y="319313"/>
-                  </a:lnTo>
-                  <a:lnTo>
-                    <a:pt x="1781321" y="332035"/>
-                  </a:lnTo>
-                  <a:lnTo>
-                    <a:pt x="1858955" y="344612"/>
-                  </a:lnTo>
-                  <a:lnTo>
-                    <a:pt x="1936589" y="357046"/>
-                  </a:lnTo>
-                  <a:lnTo>
-                    <a:pt x="2014223" y="369338"/>
-                  </a:lnTo>
-                  <a:lnTo>
-                    <a:pt x="2091857" y="381489"/>
-                  </a:lnTo>
-                  <a:lnTo>
-                    <a:pt x="2169491" y="393502"/>
-                  </a:lnTo>
-                  <a:lnTo>
-                    <a:pt x="2247125" y="405378"/>
-                  </a:lnTo>
-                  <a:lnTo>
-                    <a:pt x="2324759" y="417118"/>
-                  </a:lnTo>
-                  <a:lnTo>
-                    <a:pt x="2402393" y="428725"/>
-                  </a:lnTo>
-                  <a:lnTo>
-                    <a:pt x="2480027" y="440199"/>
-                  </a:lnTo>
-                  <a:lnTo>
-                    <a:pt x="2557661" y="451542"/>
-                  </a:lnTo>
-                  <a:lnTo>
-                    <a:pt x="2635295" y="462756"/>
-                  </a:lnTo>
-                  <a:lnTo>
-                    <a:pt x="2712930" y="473841"/>
-                  </a:lnTo>
-                  <a:lnTo>
-                    <a:pt x="2790564" y="484801"/>
-                  </a:lnTo>
-                  <a:lnTo>
-                    <a:pt x="2868198" y="495635"/>
-                  </a:lnTo>
-                  <a:lnTo>
-                    <a:pt x="2945832" y="506346"/>
-                  </a:lnTo>
-                  <a:lnTo>
-                    <a:pt x="3023466" y="516934"/>
-                  </a:lnTo>
-                  <a:lnTo>
-                    <a:pt x="3101100" y="527402"/>
-                  </a:lnTo>
-                  <a:lnTo>
-                    <a:pt x="3178734" y="537750"/>
-                  </a:lnTo>
-                  <a:lnTo>
-                    <a:pt x="3256368" y="547980"/>
-                  </a:lnTo>
-                  <a:lnTo>
-                    <a:pt x="3334002" y="558094"/>
-                  </a:lnTo>
-                  <a:lnTo>
-                    <a:pt x="3411636" y="568092"/>
-                  </a:lnTo>
-                  <a:lnTo>
-                    <a:pt x="3489270" y="577976"/>
-                  </a:lnTo>
-                  <a:lnTo>
-                    <a:pt x="3566904" y="587747"/>
-                  </a:lnTo>
-                  <a:lnTo>
-                    <a:pt x="3644538" y="597407"/>
-                  </a:lnTo>
-                  <a:lnTo>
-                    <a:pt x="3722172" y="606957"/>
-                  </a:lnTo>
-                  <a:lnTo>
-                    <a:pt x="3799806" y="616398"/>
-                  </a:lnTo>
-                  <a:lnTo>
-                    <a:pt x="3877440" y="625731"/>
-                  </a:lnTo>
-                  <a:lnTo>
-                    <a:pt x="3955074" y="634957"/>
-                  </a:lnTo>
-                  <a:lnTo>
-                    <a:pt x="4032708" y="644078"/>
-                  </a:lnTo>
-                  <a:lnTo>
-                    <a:pt x="4110342" y="653096"/>
-                  </a:lnTo>
-                  <a:lnTo>
-                    <a:pt x="4187976" y="662010"/>
-                  </a:lnTo>
-                  <a:lnTo>
-                    <a:pt x="4265610" y="670823"/>
-                  </a:lnTo>
-                  <a:lnTo>
-                    <a:pt x="4343244" y="679535"/>
-                  </a:lnTo>
-                  <a:lnTo>
-                    <a:pt x="4420879" y="688148"/>
-                  </a:lnTo>
-                  <a:lnTo>
-                    <a:pt x="4498513" y="696662"/>
-                  </a:lnTo>
-                  <a:lnTo>
-                    <a:pt x="4576147" y="705079"/>
-                  </a:lnTo>
-                  <a:lnTo>
-                    <a:pt x="4653781" y="713401"/>
-                  </a:lnTo>
-                  <a:lnTo>
-                    <a:pt x="4731415" y="721627"/>
-                  </a:lnTo>
-                  <a:lnTo>
-                    <a:pt x="4809049" y="729760"/>
-                  </a:lnTo>
-                  <a:lnTo>
-                    <a:pt x="4886683" y="737799"/>
-                  </a:lnTo>
-                  <a:lnTo>
-                    <a:pt x="4964317" y="745747"/>
-                  </a:lnTo>
-                  <a:lnTo>
-                    <a:pt x="5041951" y="753605"/>
-                  </a:lnTo>
-                  <a:lnTo>
-                    <a:pt x="5119585" y="761373"/>
-                  </a:lnTo>
-                  <a:lnTo>
-                    <a:pt x="5197219" y="769052"/>
-                  </a:lnTo>
-                  <a:lnTo>
-                    <a:pt x="5274853" y="776643"/>
-                  </a:lnTo>
-                  <a:lnTo>
-                    <a:pt x="5352487" y="784148"/>
-                  </a:lnTo>
-                  <a:lnTo>
-                    <a:pt x="5430121" y="791567"/>
-                  </a:lnTo>
-                  <a:lnTo>
-                    <a:pt x="5507755" y="798902"/>
-                  </a:lnTo>
-                  <a:lnTo>
-                    <a:pt x="5585389" y="806153"/>
-                  </a:lnTo>
-                  <a:lnTo>
-                    <a:pt x="5663023" y="813321"/>
-                  </a:lnTo>
-                  <a:lnTo>
-                    <a:pt x="5740657" y="820408"/>
-                  </a:lnTo>
-                  <a:lnTo>
-                    <a:pt x="5818291" y="827413"/>
-                  </a:lnTo>
-                  <a:lnTo>
-                    <a:pt x="5895925" y="834339"/>
-                  </a:lnTo>
-                  <a:lnTo>
-                    <a:pt x="5973559" y="841186"/>
-                  </a:lnTo>
-                  <a:lnTo>
-                    <a:pt x="6051193" y="847954"/>
-                  </a:lnTo>
-                  <a:lnTo>
-                    <a:pt x="6128827" y="854646"/>
-                  </a:lnTo>
-                  <a:lnTo>
-                    <a:pt x="6206462" y="861261"/>
-                  </a:lnTo>
-                  <a:lnTo>
-                    <a:pt x="6284096" y="867800"/>
-                  </a:lnTo>
-                  <a:lnTo>
-                    <a:pt x="6361730" y="874265"/>
-                  </a:lnTo>
-                  <a:lnTo>
-                    <a:pt x="6439364" y="880657"/>
-                  </a:lnTo>
-                  <a:lnTo>
-                    <a:pt x="6516998" y="886975"/>
-                  </a:lnTo>
-                  <a:lnTo>
-                    <a:pt x="6594632" y="893221"/>
-                  </a:lnTo>
-                  <a:lnTo>
-                    <a:pt x="6672266" y="899396"/>
-                  </a:lnTo>
-                  <a:lnTo>
-                    <a:pt x="6749900" y="905501"/>
-                  </a:lnTo>
-                  <a:lnTo>
-                    <a:pt x="6827534" y="911536"/>
-                  </a:lnTo>
-                  <a:lnTo>
-                    <a:pt x="6905168" y="917502"/>
-                  </a:lnTo>
-                  <a:lnTo>
-                    <a:pt x="6982802" y="923400"/>
-                  </a:lnTo>
-                  <a:lnTo>
-                    <a:pt x="7060436" y="929230"/>
-                  </a:lnTo>
-                  <a:lnTo>
-                    <a:pt x="7138070" y="934994"/>
-                  </a:lnTo>
-                  <a:lnTo>
-                    <a:pt x="7215704" y="940693"/>
-                  </a:lnTo>
-                  <a:lnTo>
-                    <a:pt x="7293338" y="946326"/>
-                  </a:lnTo>
-                  <a:lnTo>
-                    <a:pt x="7370972" y="951895"/>
+                    <a:pt x="73372" y="29272"/>
+                  </a:lnTo>
+                  <a:lnTo>
+                    <a:pt x="151006" y="59720"/>
+                  </a:lnTo>
+                  <a:lnTo>
+                    <a:pt x="228640" y="89654"/>
+                  </a:lnTo>
+                  <a:lnTo>
+                    <a:pt x="306274" y="119082"/>
+                  </a:lnTo>
+                  <a:lnTo>
+                    <a:pt x="383908" y="148012"/>
+                  </a:lnTo>
+                  <a:lnTo>
+                    <a:pt x="461542" y="176453"/>
+                  </a:lnTo>
+                  <a:lnTo>
+                    <a:pt x="539176" y="204412"/>
+                  </a:lnTo>
+                  <a:lnTo>
+                    <a:pt x="616810" y="231899"/>
+                  </a:lnTo>
+                  <a:lnTo>
+                    <a:pt x="694444" y="258922"/>
+                  </a:lnTo>
+                  <a:lnTo>
+                    <a:pt x="772078" y="285487"/>
+                  </a:lnTo>
+                  <a:lnTo>
+                    <a:pt x="849712" y="311603"/>
+                  </a:lnTo>
+                  <a:lnTo>
+                    <a:pt x="927346" y="337277"/>
+                  </a:lnTo>
+                  <a:lnTo>
+                    <a:pt x="1004981" y="362518"/>
+                  </a:lnTo>
+                  <a:lnTo>
+                    <a:pt x="1082615" y="387331"/>
+                  </a:lnTo>
+                  <a:lnTo>
+                    <a:pt x="1160249" y="411725"/>
+                  </a:lnTo>
+                  <a:lnTo>
+                    <a:pt x="1237883" y="435706"/>
+                  </a:lnTo>
+                  <a:lnTo>
+                    <a:pt x="1315517" y="459282"/>
+                  </a:lnTo>
+                  <a:lnTo>
+                    <a:pt x="1393151" y="482459"/>
+                  </a:lnTo>
+                  <a:lnTo>
+                    <a:pt x="1470785" y="505244"/>
+                  </a:lnTo>
+                  <a:lnTo>
+                    <a:pt x="1548419" y="527644"/>
+                  </a:lnTo>
+                  <a:lnTo>
+                    <a:pt x="1626053" y="549665"/>
+                  </a:lnTo>
+                  <a:lnTo>
+                    <a:pt x="1703687" y="571314"/>
+                  </a:lnTo>
+                  <a:lnTo>
+                    <a:pt x="1781321" y="592597"/>
+                  </a:lnTo>
+                  <a:lnTo>
+                    <a:pt x="1858955" y="613519"/>
+                  </a:lnTo>
+                  <a:lnTo>
+                    <a:pt x="1936589" y="634088"/>
+                  </a:lnTo>
+                  <a:lnTo>
+                    <a:pt x="2014223" y="654309"/>
+                  </a:lnTo>
+                  <a:lnTo>
+                    <a:pt x="2091857" y="674189"/>
+                  </a:lnTo>
+                  <a:lnTo>
+                    <a:pt x="2169491" y="693732"/>
+                  </a:lnTo>
+                  <a:lnTo>
+                    <a:pt x="2247125" y="712944"/>
+                  </a:lnTo>
+                  <a:lnTo>
+                    <a:pt x="2324759" y="731832"/>
+                  </a:lnTo>
+                  <a:lnTo>
+                    <a:pt x="2402393" y="750400"/>
+                  </a:lnTo>
+                  <a:lnTo>
+                    <a:pt x="2480027" y="768654"/>
+                  </a:lnTo>
+                  <a:lnTo>
+                    <a:pt x="2557661" y="786600"/>
+                  </a:lnTo>
+                  <a:lnTo>
+                    <a:pt x="2635295" y="804242"/>
+                  </a:lnTo>
+                  <a:lnTo>
+                    <a:pt x="2712930" y="821586"/>
+                  </a:lnTo>
+                  <a:lnTo>
+                    <a:pt x="2790564" y="838636"/>
+                  </a:lnTo>
+                  <a:lnTo>
+                    <a:pt x="2868198" y="855398"/>
+                  </a:lnTo>
+                  <a:lnTo>
+                    <a:pt x="2945832" y="871877"/>
+                  </a:lnTo>
+                  <a:lnTo>
+                    <a:pt x="3023466" y="888077"/>
+                  </a:lnTo>
+                  <a:lnTo>
+                    <a:pt x="3101100" y="904003"/>
+                  </a:lnTo>
+                  <a:lnTo>
+                    <a:pt x="3178734" y="919660"/>
+                  </a:lnTo>
+                  <a:lnTo>
+                    <a:pt x="3256368" y="935052"/>
+                  </a:lnTo>
+                  <a:lnTo>
+                    <a:pt x="3334002" y="950184"/>
+                  </a:lnTo>
+                  <a:lnTo>
+                    <a:pt x="3411636" y="965060"/>
+                  </a:lnTo>
+                  <a:lnTo>
+                    <a:pt x="3489270" y="979684"/>
+                  </a:lnTo>
+                  <a:lnTo>
+                    <a:pt x="3566904" y="994061"/>
+                  </a:lnTo>
+                  <a:lnTo>
+                    <a:pt x="3644538" y="1008195"/>
+                  </a:lnTo>
+                  <a:lnTo>
+                    <a:pt x="3722172" y="1022090"/>
+                  </a:lnTo>
+                  <a:lnTo>
+                    <a:pt x="3799806" y="1035750"/>
+                  </a:lnTo>
+                  <a:lnTo>
+                    <a:pt x="3877440" y="1049179"/>
+                  </a:lnTo>
+                  <a:lnTo>
+                    <a:pt x="3955074" y="1062381"/>
+                  </a:lnTo>
+                  <a:lnTo>
+                    <a:pt x="4032708" y="1075359"/>
+                  </a:lnTo>
+                  <a:lnTo>
+                    <a:pt x="4110342" y="1088118"/>
+                  </a:lnTo>
+                  <a:lnTo>
+                    <a:pt x="4187976" y="1100662"/>
+                  </a:lnTo>
+                  <a:lnTo>
+                    <a:pt x="4265610" y="1112993"/>
+                  </a:lnTo>
+                  <a:lnTo>
+                    <a:pt x="4343244" y="1125116"/>
+                  </a:lnTo>
+                  <a:lnTo>
+                    <a:pt x="4420879" y="1137033"/>
+                  </a:lnTo>
+                  <a:lnTo>
+                    <a:pt x="4498513" y="1148750"/>
+                  </a:lnTo>
+                  <a:lnTo>
+                    <a:pt x="4576147" y="1160268"/>
+                  </a:lnTo>
+                  <a:lnTo>
+                    <a:pt x="4653781" y="1171591"/>
+                  </a:lnTo>
+                  <a:lnTo>
+                    <a:pt x="4731415" y="1182723"/>
+                  </a:lnTo>
+                  <a:lnTo>
+                    <a:pt x="4809049" y="1193666"/>
+                  </a:lnTo>
+                  <a:lnTo>
+                    <a:pt x="4886683" y="1204425"/>
+                  </a:lnTo>
+                  <a:lnTo>
+                    <a:pt x="4964317" y="1215002"/>
+                  </a:lnTo>
+                  <a:lnTo>
+                    <a:pt x="5041951" y="1225399"/>
+                  </a:lnTo>
+                  <a:lnTo>
+                    <a:pt x="5119585" y="1235621"/>
+                  </a:lnTo>
+                  <a:lnTo>
+                    <a:pt x="5197219" y="1245670"/>
+                  </a:lnTo>
+                  <a:lnTo>
+                    <a:pt x="5274853" y="1255550"/>
+                  </a:lnTo>
+                  <a:lnTo>
+                    <a:pt x="5352487" y="1265262"/>
+                  </a:lnTo>
+                  <a:lnTo>
+                    <a:pt x="5430121" y="1274809"/>
+                  </a:lnTo>
+                  <a:lnTo>
+                    <a:pt x="5507755" y="1284196"/>
+                  </a:lnTo>
+                  <a:lnTo>
+                    <a:pt x="5585389" y="1293423"/>
+                  </a:lnTo>
+                  <a:lnTo>
+                    <a:pt x="5663023" y="1302495"/>
+                  </a:lnTo>
+                  <a:lnTo>
+                    <a:pt x="5740657" y="1311413"/>
+                  </a:lnTo>
+                  <a:lnTo>
+                    <a:pt x="5818291" y="1320181"/>
+                  </a:lnTo>
+                  <a:lnTo>
+                    <a:pt x="5895925" y="1328800"/>
+                  </a:lnTo>
+                  <a:lnTo>
+                    <a:pt x="5973559" y="1337273"/>
+                  </a:lnTo>
+                  <a:lnTo>
+                    <a:pt x="6051193" y="1345603"/>
+                  </a:lnTo>
+                  <a:lnTo>
+                    <a:pt x="6128827" y="1353793"/>
+                  </a:lnTo>
+                  <a:lnTo>
+                    <a:pt x="6206462" y="1361843"/>
+                  </a:lnTo>
+                  <a:lnTo>
+                    <a:pt x="6284096" y="1369758"/>
+                  </a:lnTo>
+                  <a:lnTo>
+                    <a:pt x="6361730" y="1377539"/>
+                  </a:lnTo>
+                  <a:lnTo>
+                    <a:pt x="6439364" y="1385188"/>
+                  </a:lnTo>
+                  <a:lnTo>
+                    <a:pt x="6516998" y="1392708"/>
+                  </a:lnTo>
+                  <a:lnTo>
+                    <a:pt x="6594632" y="1400101"/>
+                  </a:lnTo>
+                  <a:lnTo>
+                    <a:pt x="6672266" y="1407368"/>
+                  </a:lnTo>
+                  <a:lnTo>
+                    <a:pt x="6749900" y="1414513"/>
+                  </a:lnTo>
+                  <a:lnTo>
+                    <a:pt x="6827534" y="1421537"/>
+                  </a:lnTo>
+                  <a:lnTo>
+                    <a:pt x="6905168" y="1428442"/>
+                  </a:lnTo>
+                  <a:lnTo>
+                    <a:pt x="6982802" y="1435231"/>
+                  </a:lnTo>
+                  <a:lnTo>
+                    <a:pt x="7060436" y="1441904"/>
+                  </a:lnTo>
+                  <a:lnTo>
+                    <a:pt x="7138070" y="1448465"/>
+                  </a:lnTo>
+                  <a:lnTo>
+                    <a:pt x="7215704" y="1454915"/>
+                  </a:lnTo>
+                  <a:lnTo>
+                    <a:pt x="7293338" y="1461256"/>
+                  </a:lnTo>
+                  <a:lnTo>
+                    <a:pt x="7370972" y="1467489"/>
                   </a:lnTo>
                 </a:path>
               </a:pathLst>

--- a/docs/plots/carbo/jx_carbo_linsubhr_ratio_hosp8.pptx
+++ b/docs/plots/carbo/jx_carbo_linsubhr_ratio_hosp8.pptx
@@ -3003,566 +3003,563 @@
           <p:spPr>
             <a:xfrm>
               <a:off x="817517" y="1896563"/>
-              <a:ext cx="7370972" cy="3541227"/>
+              <a:ext cx="7370972" cy="3548713"/>
             </a:xfrm>
             <a:custGeom>
               <a:avLst/>
               <a:pathLst>
-                <a:path w="7370972" h="3541227">
+                <a:path w="7370972" h="3548713">
                   <a:moveTo>
-                    <a:pt x="603428" y="0"/>
+                    <a:pt x="694320" y="0"/>
                   </a:moveTo>
                   <a:lnTo>
-                    <a:pt x="616810" y="25537"/>
-                  </a:lnTo>
-                  <a:lnTo>
-                    <a:pt x="694444" y="167875"/>
-                  </a:lnTo>
-                  <a:lnTo>
-                    <a:pt x="772078" y="304627"/>
-                  </a:lnTo>
-                  <a:lnTo>
-                    <a:pt x="849712" y="436013"/>
-                  </a:lnTo>
-                  <a:lnTo>
-                    <a:pt x="927346" y="562242"/>
-                  </a:lnTo>
-                  <a:lnTo>
-                    <a:pt x="1004981" y="683518"/>
-                  </a:lnTo>
-                  <a:lnTo>
-                    <a:pt x="1082615" y="800035"/>
-                  </a:lnTo>
-                  <a:lnTo>
-                    <a:pt x="1160249" y="911980"/>
-                  </a:lnTo>
-                  <a:lnTo>
-                    <a:pt x="1237883" y="1019531"/>
-                  </a:lnTo>
-                  <a:lnTo>
-                    <a:pt x="1315517" y="1122862"/>
-                  </a:lnTo>
-                  <a:lnTo>
-                    <a:pt x="1393151" y="1222137"/>
-                  </a:lnTo>
-                  <a:lnTo>
-                    <a:pt x="1470785" y="1317517"/>
-                  </a:lnTo>
-                  <a:lnTo>
-                    <a:pt x="1548419" y="1409154"/>
-                  </a:lnTo>
-                  <a:lnTo>
-                    <a:pt x="1626053" y="1497195"/>
-                  </a:lnTo>
-                  <a:lnTo>
-                    <a:pt x="1703687" y="1581781"/>
-                  </a:lnTo>
-                  <a:lnTo>
-                    <a:pt x="1781321" y="1663047"/>
-                  </a:lnTo>
-                  <a:lnTo>
-                    <a:pt x="1858955" y="1741125"/>
-                  </a:lnTo>
-                  <a:lnTo>
-                    <a:pt x="1936589" y="1816138"/>
-                  </a:lnTo>
-                  <a:lnTo>
-                    <a:pt x="2014223" y="1888208"/>
-                  </a:lnTo>
-                  <a:lnTo>
-                    <a:pt x="2091857" y="1957449"/>
-                  </a:lnTo>
-                  <a:lnTo>
-                    <a:pt x="2169491" y="2023973"/>
-                  </a:lnTo>
-                  <a:lnTo>
-                    <a:pt x="2247125" y="2087887"/>
-                  </a:lnTo>
-                  <a:lnTo>
-                    <a:pt x="2324759" y="2149292"/>
-                  </a:lnTo>
-                  <a:lnTo>
-                    <a:pt x="2402393" y="2208288"/>
-                  </a:lnTo>
-                  <a:lnTo>
-                    <a:pt x="2480027" y="2264968"/>
-                  </a:lnTo>
-                  <a:lnTo>
-                    <a:pt x="2557661" y="2319425"/>
-                  </a:lnTo>
-                  <a:lnTo>
-                    <a:pt x="2635295" y="2371744"/>
-                  </a:lnTo>
-                  <a:lnTo>
-                    <a:pt x="2712930" y="2422010"/>
-                  </a:lnTo>
-                  <a:lnTo>
-                    <a:pt x="2790564" y="2470304"/>
-                  </a:lnTo>
-                  <a:lnTo>
-                    <a:pt x="2868198" y="2516702"/>
-                  </a:lnTo>
-                  <a:lnTo>
-                    <a:pt x="2945832" y="2561279"/>
-                  </a:lnTo>
-                  <a:lnTo>
-                    <a:pt x="3023466" y="2604108"/>
-                  </a:lnTo>
-                  <a:lnTo>
-                    <a:pt x="3101100" y="2645255"/>
-                  </a:lnTo>
-                  <a:lnTo>
-                    <a:pt x="3178734" y="2684788"/>
-                  </a:lnTo>
-                  <a:lnTo>
-                    <a:pt x="3256368" y="2722769"/>
-                  </a:lnTo>
-                  <a:lnTo>
-                    <a:pt x="3334002" y="2759260"/>
-                  </a:lnTo>
-                  <a:lnTo>
-                    <a:pt x="3411636" y="2781274"/>
-                  </a:lnTo>
-                  <a:lnTo>
-                    <a:pt x="3489270" y="2776096"/>
-                  </a:lnTo>
-                  <a:lnTo>
-                    <a:pt x="3566904" y="2770888"/>
-                  </a:lnTo>
-                  <a:lnTo>
-                    <a:pt x="3644538" y="2765649"/>
-                  </a:lnTo>
-                  <a:lnTo>
-                    <a:pt x="3722172" y="2760379"/>
-                  </a:lnTo>
-                  <a:lnTo>
-                    <a:pt x="3799806" y="2755078"/>
-                  </a:lnTo>
-                  <a:lnTo>
-                    <a:pt x="3877440" y="2749745"/>
-                  </a:lnTo>
-                  <a:lnTo>
-                    <a:pt x="3955074" y="2744380"/>
-                  </a:lnTo>
-                  <a:lnTo>
-                    <a:pt x="4032708" y="2738984"/>
-                  </a:lnTo>
-                  <a:lnTo>
-                    <a:pt x="4110342" y="2733555"/>
-                  </a:lnTo>
-                  <a:lnTo>
-                    <a:pt x="4187976" y="2728095"/>
-                  </a:lnTo>
-                  <a:lnTo>
-                    <a:pt x="4265610" y="2722601"/>
-                  </a:lnTo>
-                  <a:lnTo>
-                    <a:pt x="4343244" y="2717075"/>
-                  </a:lnTo>
-                  <a:lnTo>
-                    <a:pt x="4420879" y="2711517"/>
-                  </a:lnTo>
-                  <a:lnTo>
-                    <a:pt x="4498513" y="2705925"/>
-                  </a:lnTo>
-                  <a:lnTo>
-                    <a:pt x="4576147" y="2700300"/>
-                  </a:lnTo>
-                  <a:lnTo>
-                    <a:pt x="4653781" y="2694642"/>
-                  </a:lnTo>
-                  <a:lnTo>
-                    <a:pt x="4731415" y="2688950"/>
-                  </a:lnTo>
-                  <a:lnTo>
-                    <a:pt x="4809049" y="2683224"/>
-                  </a:lnTo>
-                  <a:lnTo>
-                    <a:pt x="4886683" y="2677464"/>
-                  </a:lnTo>
-                  <a:lnTo>
-                    <a:pt x="4964317" y="2671670"/>
-                  </a:lnTo>
-                  <a:lnTo>
-                    <a:pt x="5041951" y="2665842"/>
-                  </a:lnTo>
-                  <a:lnTo>
-                    <a:pt x="5119585" y="2659978"/>
-                  </a:lnTo>
-                  <a:lnTo>
-                    <a:pt x="5197219" y="2654080"/>
-                  </a:lnTo>
-                  <a:lnTo>
-                    <a:pt x="5274853" y="2648147"/>
-                  </a:lnTo>
-                  <a:lnTo>
-                    <a:pt x="5352487" y="2642179"/>
-                  </a:lnTo>
-                  <a:lnTo>
-                    <a:pt x="5430121" y="2636176"/>
-                  </a:lnTo>
-                  <a:lnTo>
-                    <a:pt x="5507755" y="2630136"/>
-                  </a:lnTo>
-                  <a:lnTo>
-                    <a:pt x="5585389" y="2624061"/>
-                  </a:lnTo>
-                  <a:lnTo>
-                    <a:pt x="5663023" y="2617950"/>
-                  </a:lnTo>
-                  <a:lnTo>
-                    <a:pt x="5740657" y="2611802"/>
-                  </a:lnTo>
-                  <a:lnTo>
-                    <a:pt x="5818291" y="2605618"/>
-                  </a:lnTo>
-                  <a:lnTo>
-                    <a:pt x="5895925" y="2599397"/>
-                  </a:lnTo>
-                  <a:lnTo>
-                    <a:pt x="5973559" y="2593139"/>
-                  </a:lnTo>
-                  <a:lnTo>
-                    <a:pt x="6051193" y="2586844"/>
-                  </a:lnTo>
-                  <a:lnTo>
-                    <a:pt x="6128827" y="2580511"/>
-                  </a:lnTo>
-                  <a:lnTo>
-                    <a:pt x="6206462" y="2574141"/>
-                  </a:lnTo>
-                  <a:lnTo>
-                    <a:pt x="6284096" y="2567733"/>
-                  </a:lnTo>
-                  <a:lnTo>
-                    <a:pt x="6361730" y="2561287"/>
-                  </a:lnTo>
-                  <a:lnTo>
-                    <a:pt x="6439364" y="2554803"/>
-                  </a:lnTo>
-                  <a:lnTo>
-                    <a:pt x="6516998" y="2548280"/>
-                  </a:lnTo>
-                  <a:lnTo>
-                    <a:pt x="6594632" y="2541719"/>
-                  </a:lnTo>
-                  <a:lnTo>
-                    <a:pt x="6672266" y="2535118"/>
-                  </a:lnTo>
-                  <a:lnTo>
-                    <a:pt x="6749900" y="2528478"/>
-                  </a:lnTo>
-                  <a:lnTo>
-                    <a:pt x="6827534" y="2521799"/>
-                  </a:lnTo>
-                  <a:lnTo>
-                    <a:pt x="6905168" y="2515080"/>
-                  </a:lnTo>
-                  <a:lnTo>
-                    <a:pt x="6982802" y="2508321"/>
-                  </a:lnTo>
-                  <a:lnTo>
-                    <a:pt x="7060436" y="2501522"/>
-                  </a:lnTo>
-                  <a:lnTo>
-                    <a:pt x="7138070" y="2494683"/>
-                  </a:lnTo>
-                  <a:lnTo>
-                    <a:pt x="7215704" y="2487803"/>
-                  </a:lnTo>
-                  <a:lnTo>
-                    <a:pt x="7293338" y="2480882"/>
-                  </a:lnTo>
-                  <a:lnTo>
-                    <a:pt x="7370972" y="2473920"/>
-                  </a:lnTo>
-                  <a:lnTo>
-                    <a:pt x="7370972" y="3541227"/>
-                  </a:lnTo>
-                  <a:lnTo>
-                    <a:pt x="7293338" y="3536676"/>
-                  </a:lnTo>
-                  <a:lnTo>
-                    <a:pt x="7215704" y="3531940"/>
-                  </a:lnTo>
-                  <a:lnTo>
-                    <a:pt x="7138070" y="3527010"/>
-                  </a:lnTo>
-                  <a:lnTo>
-                    <a:pt x="7060436" y="3521878"/>
-                  </a:lnTo>
-                  <a:lnTo>
-                    <a:pt x="6982802" y="3516537"/>
-                  </a:lnTo>
-                  <a:lnTo>
-                    <a:pt x="6905168" y="3510977"/>
-                  </a:lnTo>
-                  <a:lnTo>
-                    <a:pt x="6827534" y="3505191"/>
-                  </a:lnTo>
-                  <a:lnTo>
-                    <a:pt x="6749900" y="3499168"/>
-                  </a:lnTo>
-                  <a:lnTo>
-                    <a:pt x="6672266" y="3492899"/>
-                  </a:lnTo>
-                  <a:lnTo>
-                    <a:pt x="6594632" y="3486374"/>
-                  </a:lnTo>
-                  <a:lnTo>
-                    <a:pt x="6516998" y="3479583"/>
-                  </a:lnTo>
-                  <a:lnTo>
-                    <a:pt x="6439364" y="3472514"/>
-                  </a:lnTo>
-                  <a:lnTo>
-                    <a:pt x="6361730" y="3465157"/>
-                  </a:lnTo>
-                  <a:lnTo>
-                    <a:pt x="6284096" y="3457499"/>
-                  </a:lnTo>
-                  <a:lnTo>
-                    <a:pt x="6206462" y="3449528"/>
-                  </a:lnTo>
-                  <a:lnTo>
-                    <a:pt x="6128827" y="3441232"/>
-                  </a:lnTo>
-                  <a:lnTo>
-                    <a:pt x="6051193" y="3432596"/>
-                  </a:lnTo>
-                  <a:lnTo>
-                    <a:pt x="5973559" y="3423608"/>
-                  </a:lnTo>
-                  <a:lnTo>
-                    <a:pt x="5895925" y="3414253"/>
-                  </a:lnTo>
-                  <a:lnTo>
-                    <a:pt x="5818291" y="3404516"/>
-                  </a:lnTo>
-                  <a:lnTo>
-                    <a:pt x="5740657" y="3394381"/>
-                  </a:lnTo>
-                  <a:lnTo>
-                    <a:pt x="5663023" y="3383832"/>
-                  </a:lnTo>
-                  <a:lnTo>
-                    <a:pt x="5585389" y="3372852"/>
-                  </a:lnTo>
-                  <a:lnTo>
-                    <a:pt x="5507755" y="3361424"/>
-                  </a:lnTo>
-                  <a:lnTo>
-                    <a:pt x="5430121" y="3349529"/>
-                  </a:lnTo>
-                  <a:lnTo>
-                    <a:pt x="5352487" y="3337148"/>
-                  </a:lnTo>
-                  <a:lnTo>
-                    <a:pt x="5274853" y="3324262"/>
-                  </a:lnTo>
-                  <a:lnTo>
-                    <a:pt x="5197219" y="3310849"/>
-                  </a:lnTo>
-                  <a:lnTo>
-                    <a:pt x="5119585" y="3296888"/>
-                  </a:lnTo>
-                  <a:lnTo>
-                    <a:pt x="5041951" y="3282357"/>
-                  </a:lnTo>
-                  <a:lnTo>
-                    <a:pt x="4964317" y="3267232"/>
-                  </a:lnTo>
-                  <a:lnTo>
-                    <a:pt x="4886683" y="3251490"/>
-                  </a:lnTo>
-                  <a:lnTo>
-                    <a:pt x="4809049" y="3235104"/>
-                  </a:lnTo>
-                  <a:lnTo>
-                    <a:pt x="4731415" y="3218050"/>
-                  </a:lnTo>
-                  <a:lnTo>
-                    <a:pt x="4653781" y="3200298"/>
-                  </a:lnTo>
-                  <a:lnTo>
-                    <a:pt x="4576147" y="3181822"/>
-                  </a:lnTo>
-                  <a:lnTo>
-                    <a:pt x="4498513" y="3162591"/>
-                  </a:lnTo>
-                  <a:lnTo>
-                    <a:pt x="4420879" y="3142574"/>
-                  </a:lnTo>
-                  <a:lnTo>
-                    <a:pt x="4343244" y="3121740"/>
-                  </a:lnTo>
-                  <a:lnTo>
-                    <a:pt x="4265610" y="3100055"/>
-                  </a:lnTo>
-                  <a:lnTo>
-                    <a:pt x="4187976" y="3077484"/>
-                  </a:lnTo>
-                  <a:lnTo>
-                    <a:pt x="4110342" y="3053992"/>
-                  </a:lnTo>
-                  <a:lnTo>
-                    <a:pt x="4032708" y="3029539"/>
-                  </a:lnTo>
-                  <a:lnTo>
-                    <a:pt x="3955074" y="3004088"/>
-                  </a:lnTo>
-                  <a:lnTo>
-                    <a:pt x="3877440" y="2977597"/>
-                  </a:lnTo>
-                  <a:lnTo>
-                    <a:pt x="3799806" y="2950025"/>
-                  </a:lnTo>
-                  <a:lnTo>
-                    <a:pt x="3722172" y="2921326"/>
-                  </a:lnTo>
-                  <a:lnTo>
-                    <a:pt x="3644538" y="2891454"/>
-                  </a:lnTo>
-                  <a:lnTo>
-                    <a:pt x="3566904" y="2860363"/>
-                  </a:lnTo>
-                  <a:lnTo>
-                    <a:pt x="3489270" y="2828002"/>
-                  </a:lnTo>
-                  <a:lnTo>
-                    <a:pt x="3411636" y="2794319"/>
-                  </a:lnTo>
-                  <a:lnTo>
-                    <a:pt x="3334002" y="2786420"/>
-                  </a:lnTo>
-                  <a:lnTo>
-                    <a:pt x="3256368" y="2791537"/>
-                  </a:lnTo>
-                  <a:lnTo>
-                    <a:pt x="3178734" y="2796623"/>
-                  </a:lnTo>
-                  <a:lnTo>
-                    <a:pt x="3101100" y="2801679"/>
-                  </a:lnTo>
-                  <a:lnTo>
-                    <a:pt x="3023466" y="2806705"/>
-                  </a:lnTo>
-                  <a:lnTo>
-                    <a:pt x="2945832" y="2811701"/>
-                  </a:lnTo>
-                  <a:lnTo>
-                    <a:pt x="2868198" y="2816668"/>
-                  </a:lnTo>
-                  <a:lnTo>
-                    <a:pt x="2790564" y="2821606"/>
-                  </a:lnTo>
-                  <a:lnTo>
-                    <a:pt x="2712930" y="2826514"/>
-                  </a:lnTo>
-                  <a:lnTo>
-                    <a:pt x="2635295" y="2831394"/>
-                  </a:lnTo>
-                  <a:lnTo>
-                    <a:pt x="2557661" y="2836244"/>
-                  </a:lnTo>
-                  <a:lnTo>
-                    <a:pt x="2480027" y="2841067"/>
-                  </a:lnTo>
-                  <a:lnTo>
-                    <a:pt x="2402393" y="2845860"/>
-                  </a:lnTo>
-                  <a:lnTo>
-                    <a:pt x="2324759" y="2850625"/>
-                  </a:lnTo>
-                  <a:lnTo>
-                    <a:pt x="2247125" y="2855362"/>
-                  </a:lnTo>
-                  <a:lnTo>
-                    <a:pt x="2169491" y="2860071"/>
-                  </a:lnTo>
-                  <a:lnTo>
-                    <a:pt x="2091857" y="2864753"/>
-                  </a:lnTo>
-                  <a:lnTo>
-                    <a:pt x="2014223" y="2869406"/>
-                  </a:lnTo>
-                  <a:lnTo>
-                    <a:pt x="1936589" y="2874032"/>
-                  </a:lnTo>
-                  <a:lnTo>
-                    <a:pt x="1858955" y="2878631"/>
-                  </a:lnTo>
-                  <a:lnTo>
-                    <a:pt x="1781321" y="2883203"/>
-                  </a:lnTo>
-                  <a:lnTo>
-                    <a:pt x="1703687" y="2887748"/>
-                  </a:lnTo>
-                  <a:lnTo>
-                    <a:pt x="1626053" y="2892265"/>
-                  </a:lnTo>
-                  <a:lnTo>
-                    <a:pt x="1548419" y="2896756"/>
-                  </a:lnTo>
-                  <a:lnTo>
-                    <a:pt x="1470785" y="2901221"/>
-                  </a:lnTo>
-                  <a:lnTo>
-                    <a:pt x="1393151" y="2905659"/>
-                  </a:lnTo>
-                  <a:lnTo>
-                    <a:pt x="1315517" y="2910071"/>
-                  </a:lnTo>
-                  <a:lnTo>
-                    <a:pt x="1237883" y="2914457"/>
-                  </a:lnTo>
-                  <a:lnTo>
-                    <a:pt x="1160249" y="2918817"/>
-                  </a:lnTo>
-                  <a:lnTo>
-                    <a:pt x="1082615" y="2923152"/>
-                  </a:lnTo>
-                  <a:lnTo>
-                    <a:pt x="1004981" y="2927460"/>
-                  </a:lnTo>
-                  <a:lnTo>
-                    <a:pt x="927346" y="2931744"/>
-                  </a:lnTo>
-                  <a:lnTo>
-                    <a:pt x="849712" y="2936001"/>
-                  </a:lnTo>
-                  <a:lnTo>
-                    <a:pt x="772078" y="2940234"/>
-                  </a:lnTo>
-                  <a:lnTo>
-                    <a:pt x="694444" y="2944442"/>
-                  </a:lnTo>
-                  <a:lnTo>
-                    <a:pt x="616810" y="2948625"/>
-                  </a:lnTo>
-                  <a:lnTo>
-                    <a:pt x="539176" y="2952783"/>
-                  </a:lnTo>
-                  <a:lnTo>
-                    <a:pt x="461542" y="2956917"/>
-                  </a:lnTo>
-                  <a:lnTo>
-                    <a:pt x="383908" y="2961026"/>
-                  </a:lnTo>
-                  <a:lnTo>
-                    <a:pt x="306274" y="2965111"/>
-                  </a:lnTo>
-                  <a:lnTo>
-                    <a:pt x="228640" y="2969172"/>
-                  </a:lnTo>
-                  <a:lnTo>
-                    <a:pt x="151006" y="2973209"/>
-                  </a:lnTo>
-                  <a:lnTo>
-                    <a:pt x="73372" y="2977222"/>
-                  </a:lnTo>
-                  <a:lnTo>
-                    <a:pt x="0" y="2980992"/>
+                    <a:pt x="694444" y="246"/>
+                  </a:lnTo>
+                  <a:lnTo>
+                    <a:pt x="772078" y="148328"/>
+                  </a:lnTo>
+                  <a:lnTo>
+                    <a:pt x="849712" y="290406"/>
+                  </a:lnTo>
+                  <a:lnTo>
+                    <a:pt x="927346" y="426724"/>
+                  </a:lnTo>
+                  <a:lnTo>
+                    <a:pt x="1004981" y="557515"/>
+                  </a:lnTo>
+                  <a:lnTo>
+                    <a:pt x="1082615" y="683003"/>
+                  </a:lnTo>
+                  <a:lnTo>
+                    <a:pt x="1160249" y="803404"/>
+                  </a:lnTo>
+                  <a:lnTo>
+                    <a:pt x="1237883" y="918923"/>
+                  </a:lnTo>
+                  <a:lnTo>
+                    <a:pt x="1315517" y="1029758"/>
+                  </a:lnTo>
+                  <a:lnTo>
+                    <a:pt x="1393151" y="1136100"/>
+                  </a:lnTo>
+                  <a:lnTo>
+                    <a:pt x="1470785" y="1238130"/>
+                  </a:lnTo>
+                  <a:lnTo>
+                    <a:pt x="1548419" y="1336024"/>
+                  </a:lnTo>
+                  <a:lnTo>
+                    <a:pt x="1626053" y="1429948"/>
+                  </a:lnTo>
+                  <a:lnTo>
+                    <a:pt x="1703687" y="1520065"/>
+                  </a:lnTo>
+                  <a:lnTo>
+                    <a:pt x="1781321" y="1606528"/>
+                  </a:lnTo>
+                  <a:lnTo>
+                    <a:pt x="1858955" y="1689485"/>
+                  </a:lnTo>
+                  <a:lnTo>
+                    <a:pt x="1936589" y="1769079"/>
+                  </a:lnTo>
+                  <a:lnTo>
+                    <a:pt x="2014223" y="1845446"/>
+                  </a:lnTo>
+                  <a:lnTo>
+                    <a:pt x="2091857" y="1918717"/>
+                  </a:lnTo>
+                  <a:lnTo>
+                    <a:pt x="2169491" y="1989017"/>
+                  </a:lnTo>
+                  <a:lnTo>
+                    <a:pt x="2247125" y="2056466"/>
+                  </a:lnTo>
+                  <a:lnTo>
+                    <a:pt x="2324759" y="2121181"/>
+                  </a:lnTo>
+                  <a:lnTo>
+                    <a:pt x="2402393" y="2183273"/>
+                  </a:lnTo>
+                  <a:lnTo>
+                    <a:pt x="2480027" y="2242847"/>
+                  </a:lnTo>
+                  <a:lnTo>
+                    <a:pt x="2557661" y="2300005"/>
+                  </a:lnTo>
+                  <a:lnTo>
+                    <a:pt x="2635295" y="2354846"/>
+                  </a:lnTo>
+                  <a:lnTo>
+                    <a:pt x="2712930" y="2407464"/>
+                  </a:lnTo>
+                  <a:lnTo>
+                    <a:pt x="2790564" y="2457948"/>
+                  </a:lnTo>
+                  <a:lnTo>
+                    <a:pt x="2868198" y="2506386"/>
+                  </a:lnTo>
+                  <a:lnTo>
+                    <a:pt x="2945832" y="2552859"/>
+                  </a:lnTo>
+                  <a:lnTo>
+                    <a:pt x="3023466" y="2597449"/>
+                  </a:lnTo>
+                  <a:lnTo>
+                    <a:pt x="3101100" y="2640230"/>
+                  </a:lnTo>
+                  <a:lnTo>
+                    <a:pt x="3178734" y="2681277"/>
+                  </a:lnTo>
+                  <a:lnTo>
+                    <a:pt x="3256368" y="2720660"/>
+                  </a:lnTo>
+                  <a:lnTo>
+                    <a:pt x="3334002" y="2758446"/>
+                  </a:lnTo>
+                  <a:lnTo>
+                    <a:pt x="3411636" y="2780652"/>
+                  </a:lnTo>
+                  <a:lnTo>
+                    <a:pt x="3489270" y="2773564"/>
+                  </a:lnTo>
+                  <a:lnTo>
+                    <a:pt x="3566904" y="2766419"/>
+                  </a:lnTo>
+                  <a:lnTo>
+                    <a:pt x="3644538" y="2759215"/>
+                  </a:lnTo>
+                  <a:lnTo>
+                    <a:pt x="3722172" y="2751953"/>
+                  </a:lnTo>
+                  <a:lnTo>
+                    <a:pt x="3799806" y="2744632"/>
+                  </a:lnTo>
+                  <a:lnTo>
+                    <a:pt x="3877440" y="2737251"/>
+                  </a:lnTo>
+                  <a:lnTo>
+                    <a:pt x="3955074" y="2729810"/>
+                  </a:lnTo>
+                  <a:lnTo>
+                    <a:pt x="4032708" y="2722309"/>
+                  </a:lnTo>
+                  <a:lnTo>
+                    <a:pt x="4110342" y="2714747"/>
+                  </a:lnTo>
+                  <a:lnTo>
+                    <a:pt x="4187976" y="2707123"/>
+                  </a:lnTo>
+                  <a:lnTo>
+                    <a:pt x="4265610" y="2699438"/>
+                  </a:lnTo>
+                  <a:lnTo>
+                    <a:pt x="4343244" y="2691690"/>
+                  </a:lnTo>
+                  <a:lnTo>
+                    <a:pt x="4420879" y="2683879"/>
+                  </a:lnTo>
+                  <a:lnTo>
+                    <a:pt x="4498513" y="2676004"/>
+                  </a:lnTo>
+                  <a:lnTo>
+                    <a:pt x="4576147" y="2668066"/>
+                  </a:lnTo>
+                  <a:lnTo>
+                    <a:pt x="4653781" y="2660063"/>
+                  </a:lnTo>
+                  <a:lnTo>
+                    <a:pt x="4731415" y="2651995"/>
+                  </a:lnTo>
+                  <a:lnTo>
+                    <a:pt x="4809049" y="2643861"/>
+                  </a:lnTo>
+                  <a:lnTo>
+                    <a:pt x="4886683" y="2635661"/>
+                  </a:lnTo>
+                  <a:lnTo>
+                    <a:pt x="4964317" y="2627395"/>
+                  </a:lnTo>
+                  <a:lnTo>
+                    <a:pt x="5041951" y="2619061"/>
+                  </a:lnTo>
+                  <a:lnTo>
+                    <a:pt x="5119585" y="2610659"/>
+                  </a:lnTo>
+                  <a:lnTo>
+                    <a:pt x="5197219" y="2602190"/>
+                  </a:lnTo>
+                  <a:lnTo>
+                    <a:pt x="5274853" y="2593651"/>
+                  </a:lnTo>
+                  <a:lnTo>
+                    <a:pt x="5352487" y="2585043"/>
+                  </a:lnTo>
+                  <a:lnTo>
+                    <a:pt x="5430121" y="2576365"/>
+                  </a:lnTo>
+                  <a:lnTo>
+                    <a:pt x="5507755" y="2567617"/>
+                  </a:lnTo>
+                  <a:lnTo>
+                    <a:pt x="5585389" y="2558797"/>
+                  </a:lnTo>
+                  <a:lnTo>
+                    <a:pt x="5663023" y="2549906"/>
+                  </a:lnTo>
+                  <a:lnTo>
+                    <a:pt x="5740657" y="2540943"/>
+                  </a:lnTo>
+                  <a:lnTo>
+                    <a:pt x="5818291" y="2531906"/>
+                  </a:lnTo>
+                  <a:lnTo>
+                    <a:pt x="5895925" y="2522796"/>
+                  </a:lnTo>
+                  <a:lnTo>
+                    <a:pt x="5973559" y="2513612"/>
+                  </a:lnTo>
+                  <a:lnTo>
+                    <a:pt x="6051193" y="2504354"/>
+                  </a:lnTo>
+                  <a:lnTo>
+                    <a:pt x="6128827" y="2495020"/>
+                  </a:lnTo>
+                  <a:lnTo>
+                    <a:pt x="6206462" y="2485610"/>
+                  </a:lnTo>
+                  <a:lnTo>
+                    <a:pt x="6284096" y="2476124"/>
+                  </a:lnTo>
+                  <a:lnTo>
+                    <a:pt x="6361730" y="2466561"/>
+                  </a:lnTo>
+                  <a:lnTo>
+                    <a:pt x="6439364" y="2456920"/>
+                  </a:lnTo>
+                  <a:lnTo>
+                    <a:pt x="6516998" y="2447201"/>
+                  </a:lnTo>
+                  <a:lnTo>
+                    <a:pt x="6594632" y="2437402"/>
+                  </a:lnTo>
+                  <a:lnTo>
+                    <a:pt x="6672266" y="2427524"/>
+                  </a:lnTo>
+                  <a:lnTo>
+                    <a:pt x="6749900" y="2417566"/>
+                  </a:lnTo>
+                  <a:lnTo>
+                    <a:pt x="6827534" y="2407527"/>
+                  </a:lnTo>
+                  <a:lnTo>
+                    <a:pt x="6905168" y="2397406"/>
+                  </a:lnTo>
+                  <a:lnTo>
+                    <a:pt x="6982802" y="2387203"/>
+                  </a:lnTo>
+                  <a:lnTo>
+                    <a:pt x="7060436" y="2376917"/>
+                  </a:lnTo>
+                  <a:lnTo>
+                    <a:pt x="7138070" y="2366547"/>
+                  </a:lnTo>
+                  <a:lnTo>
+                    <a:pt x="7215704" y="2356093"/>
+                  </a:lnTo>
+                  <a:lnTo>
+                    <a:pt x="7293338" y="2345554"/>
+                  </a:lnTo>
+                  <a:lnTo>
+                    <a:pt x="7370972" y="2334930"/>
+                  </a:lnTo>
+                  <a:lnTo>
+                    <a:pt x="7370972" y="3548713"/>
+                  </a:lnTo>
+                  <a:lnTo>
+                    <a:pt x="7293338" y="3544322"/>
+                  </a:lnTo>
+                  <a:lnTo>
+                    <a:pt x="7215704" y="3539744"/>
+                  </a:lnTo>
+                  <a:lnTo>
+                    <a:pt x="7138070" y="3534973"/>
+                  </a:lnTo>
+                  <a:lnTo>
+                    <a:pt x="7060436" y="3530001"/>
+                  </a:lnTo>
+                  <a:lnTo>
+                    <a:pt x="6982802" y="3524818"/>
+                  </a:lnTo>
+                  <a:lnTo>
+                    <a:pt x="6905168" y="3519417"/>
+                  </a:lnTo>
+                  <a:lnTo>
+                    <a:pt x="6827534" y="3513787"/>
+                  </a:lnTo>
+                  <a:lnTo>
+                    <a:pt x="6749900" y="3507920"/>
+                  </a:lnTo>
+                  <a:lnTo>
+                    <a:pt x="6672266" y="3501804"/>
+                  </a:lnTo>
+                  <a:lnTo>
+                    <a:pt x="6594632" y="3495430"/>
+                  </a:lnTo>
+                  <a:lnTo>
+                    <a:pt x="6516998" y="3488787"/>
+                  </a:lnTo>
+                  <a:lnTo>
+                    <a:pt x="6439364" y="3481862"/>
+                  </a:lnTo>
+                  <a:lnTo>
+                    <a:pt x="6361730" y="3474646"/>
+                  </a:lnTo>
+                  <a:lnTo>
+                    <a:pt x="6284096" y="3467124"/>
+                  </a:lnTo>
+                  <a:lnTo>
+                    <a:pt x="6206462" y="3459285"/>
+                  </a:lnTo>
+                  <a:lnTo>
+                    <a:pt x="6128827" y="3451114"/>
+                  </a:lnTo>
+                  <a:lnTo>
+                    <a:pt x="6051193" y="3442598"/>
+                  </a:lnTo>
+                  <a:lnTo>
+                    <a:pt x="5973559" y="3433722"/>
+                  </a:lnTo>
+                  <a:lnTo>
+                    <a:pt x="5895925" y="3424471"/>
+                  </a:lnTo>
+                  <a:lnTo>
+                    <a:pt x="5818291" y="3414829"/>
+                  </a:lnTo>
+                  <a:lnTo>
+                    <a:pt x="5740657" y="3404780"/>
+                  </a:lnTo>
+                  <a:lnTo>
+                    <a:pt x="5663023" y="3394306"/>
+                  </a:lnTo>
+                  <a:lnTo>
+                    <a:pt x="5585389" y="3383389"/>
+                  </a:lnTo>
+                  <a:lnTo>
+                    <a:pt x="5507755" y="3372011"/>
+                  </a:lnTo>
+                  <a:lnTo>
+                    <a:pt x="5430121" y="3360152"/>
+                  </a:lnTo>
+                  <a:lnTo>
+                    <a:pt x="5352487" y="3347793"/>
+                  </a:lnTo>
+                  <a:lnTo>
+                    <a:pt x="5274853" y="3334911"/>
+                  </a:lnTo>
+                  <a:lnTo>
+                    <a:pt x="5197219" y="3321484"/>
+                  </a:lnTo>
+                  <a:lnTo>
+                    <a:pt x="5119585" y="3307490"/>
+                  </a:lnTo>
+                  <a:lnTo>
+                    <a:pt x="5041951" y="3292905"/>
+                  </a:lnTo>
+                  <a:lnTo>
+                    <a:pt x="4964317" y="3277704"/>
+                  </a:lnTo>
+                  <a:lnTo>
+                    <a:pt x="4886683" y="3261860"/>
+                  </a:lnTo>
+                  <a:lnTo>
+                    <a:pt x="4809049" y="3245346"/>
+                  </a:lnTo>
+                  <a:lnTo>
+                    <a:pt x="4731415" y="3228135"/>
+                  </a:lnTo>
+                  <a:lnTo>
+                    <a:pt x="4653781" y="3210197"/>
+                  </a:lnTo>
+                  <a:lnTo>
+                    <a:pt x="4576147" y="3191500"/>
+                  </a:lnTo>
+                  <a:lnTo>
+                    <a:pt x="4498513" y="3172014"/>
+                  </a:lnTo>
+                  <a:lnTo>
+                    <a:pt x="4420879" y="3151704"/>
+                  </a:lnTo>
+                  <a:lnTo>
+                    <a:pt x="4343244" y="3130536"/>
+                  </a:lnTo>
+                  <a:lnTo>
+                    <a:pt x="4265610" y="3108473"/>
+                  </a:lnTo>
+                  <a:lnTo>
+                    <a:pt x="4187976" y="3085478"/>
+                  </a:lnTo>
+                  <a:lnTo>
+                    <a:pt x="4110342" y="3061511"/>
+                  </a:lnTo>
+                  <a:lnTo>
+                    <a:pt x="4032708" y="3036532"/>
+                  </a:lnTo>
+                  <a:lnTo>
+                    <a:pt x="3955074" y="3010496"/>
+                  </a:lnTo>
+                  <a:lnTo>
+                    <a:pt x="3877440" y="2983361"/>
+                  </a:lnTo>
+                  <a:lnTo>
+                    <a:pt x="3799806" y="2955079"/>
+                  </a:lnTo>
+                  <a:lnTo>
+                    <a:pt x="3722172" y="2925602"/>
+                  </a:lnTo>
+                  <a:lnTo>
+                    <a:pt x="3644538" y="2894880"/>
+                  </a:lnTo>
+                  <a:lnTo>
+                    <a:pt x="3566904" y="2862859"/>
+                  </a:lnTo>
+                  <a:lnTo>
+                    <a:pt x="3489270" y="2829485"/>
+                  </a:lnTo>
+                  <a:lnTo>
+                    <a:pt x="3411636" y="2794701"/>
+                  </a:lnTo>
+                  <a:lnTo>
+                    <a:pt x="3334002" y="2787683"/>
+                  </a:lnTo>
+                  <a:lnTo>
+                    <a:pt x="3256368" y="2794657"/>
+                  </a:lnTo>
+                  <a:lnTo>
+                    <a:pt x="3178734" y="2801575"/>
+                  </a:lnTo>
+                  <a:lnTo>
+                    <a:pt x="3101100" y="2808437"/>
+                  </a:lnTo>
+                  <a:lnTo>
+                    <a:pt x="3023466" y="2815244"/>
+                  </a:lnTo>
+                  <a:lnTo>
+                    <a:pt x="2945832" y="2821996"/>
+                  </a:lnTo>
+                  <a:lnTo>
+                    <a:pt x="2868198" y="2828693"/>
+                  </a:lnTo>
+                  <a:lnTo>
+                    <a:pt x="2790564" y="2835337"/>
+                  </a:lnTo>
+                  <a:lnTo>
+                    <a:pt x="2712930" y="2841926"/>
+                  </a:lnTo>
+                  <a:lnTo>
+                    <a:pt x="2635295" y="2848463"/>
+                  </a:lnTo>
+                  <a:lnTo>
+                    <a:pt x="2557661" y="2854947"/>
+                  </a:lnTo>
+                  <a:lnTo>
+                    <a:pt x="2480027" y="2861379"/>
+                  </a:lnTo>
+                  <a:lnTo>
+                    <a:pt x="2402393" y="2867759"/>
+                  </a:lnTo>
+                  <a:lnTo>
+                    <a:pt x="2324759" y="2874087"/>
+                  </a:lnTo>
+                  <a:lnTo>
+                    <a:pt x="2247125" y="2880365"/>
+                  </a:lnTo>
+                  <a:lnTo>
+                    <a:pt x="2169491" y="2886591"/>
+                  </a:lnTo>
+                  <a:lnTo>
+                    <a:pt x="2091857" y="2892768"/>
+                  </a:lnTo>
+                  <a:lnTo>
+                    <a:pt x="2014223" y="2898895"/>
+                  </a:lnTo>
+                  <a:lnTo>
+                    <a:pt x="1936589" y="2904972"/>
+                  </a:lnTo>
+                  <a:lnTo>
+                    <a:pt x="1858955" y="2911001"/>
+                  </a:lnTo>
+                  <a:lnTo>
+                    <a:pt x="1781321" y="2916980"/>
+                  </a:lnTo>
+                  <a:lnTo>
+                    <a:pt x="1703687" y="2922912"/>
+                  </a:lnTo>
+                  <a:lnTo>
+                    <a:pt x="1626053" y="2928796"/>
+                  </a:lnTo>
+                  <a:lnTo>
+                    <a:pt x="1548419" y="2934632"/>
+                  </a:lnTo>
+                  <a:lnTo>
+                    <a:pt x="1470785" y="2940421"/>
+                  </a:lnTo>
+                  <a:lnTo>
+                    <a:pt x="1393151" y="2946164"/>
+                  </a:lnTo>
+                  <a:lnTo>
+                    <a:pt x="1315517" y="2951860"/>
+                  </a:lnTo>
+                  <a:lnTo>
+                    <a:pt x="1237883" y="2957510"/>
+                  </a:lnTo>
+                  <a:lnTo>
+                    <a:pt x="1160249" y="2963115"/>
+                  </a:lnTo>
+                  <a:lnTo>
+                    <a:pt x="1082615" y="2968675"/>
+                  </a:lnTo>
+                  <a:lnTo>
+                    <a:pt x="1004981" y="2974190"/>
+                  </a:lnTo>
+                  <a:lnTo>
+                    <a:pt x="927346" y="2979660"/>
+                  </a:lnTo>
+                  <a:lnTo>
+                    <a:pt x="849712" y="2985086"/>
+                  </a:lnTo>
+                  <a:lnTo>
+                    <a:pt x="772078" y="2990468"/>
+                  </a:lnTo>
+                  <a:lnTo>
+                    <a:pt x="694444" y="2995807"/>
+                  </a:lnTo>
+                  <a:lnTo>
+                    <a:pt x="616810" y="3001103"/>
+                  </a:lnTo>
+                  <a:lnTo>
+                    <a:pt x="539176" y="3006357"/>
+                  </a:lnTo>
+                  <a:lnTo>
+                    <a:pt x="461542" y="3011568"/>
+                  </a:lnTo>
+                  <a:lnTo>
+                    <a:pt x="383908" y="3016737"/>
+                  </a:lnTo>
+                  <a:lnTo>
+                    <a:pt x="306274" y="3021864"/>
+                  </a:lnTo>
+                  <a:lnTo>
+                    <a:pt x="228640" y="3026950"/>
+                  </a:lnTo>
+                  <a:lnTo>
+                    <a:pt x="151006" y="3031995"/>
+                  </a:lnTo>
+                  <a:lnTo>
+                    <a:pt x="73372" y="3036999"/>
+                  </a:lnTo>
+                  <a:lnTo>
+                    <a:pt x="0" y="3041690"/>
                   </a:lnTo>
                   <a:close/>
                 </a:path>
@@ -3588,279 +3585,276 @@
           </p:nvSpPr>
           <p:spPr>
             <a:xfrm>
-              <a:off x="1420946" y="1896563"/>
-              <a:ext cx="6767544" cy="2781274"/>
+              <a:off x="1511838" y="1896563"/>
+              <a:ext cx="6676651" cy="2780652"/>
             </a:xfrm>
             <a:custGeom>
               <a:avLst/>
               <a:pathLst>
-                <a:path w="6767544" h="2781274">
+                <a:path w="6676651" h="2780652">
                   <a:moveTo>
                     <a:pt x="0" y="0"/>
                   </a:moveTo>
                   <a:lnTo>
-                    <a:pt x="13382" y="25537"/>
-                  </a:lnTo>
-                  <a:lnTo>
-                    <a:pt x="91016" y="167875"/>
-                  </a:lnTo>
-                  <a:lnTo>
-                    <a:pt x="168650" y="304627"/>
-                  </a:lnTo>
-                  <a:lnTo>
-                    <a:pt x="246284" y="436013"/>
-                  </a:lnTo>
-                  <a:lnTo>
-                    <a:pt x="323918" y="562242"/>
-                  </a:lnTo>
-                  <a:lnTo>
-                    <a:pt x="401552" y="683518"/>
-                  </a:lnTo>
-                  <a:lnTo>
-                    <a:pt x="479186" y="800035"/>
-                  </a:lnTo>
-                  <a:lnTo>
-                    <a:pt x="556820" y="911980"/>
-                  </a:lnTo>
-                  <a:lnTo>
-                    <a:pt x="634454" y="1019531"/>
-                  </a:lnTo>
-                  <a:lnTo>
-                    <a:pt x="712088" y="1122862"/>
-                  </a:lnTo>
-                  <a:lnTo>
-                    <a:pt x="789722" y="1222137"/>
-                  </a:lnTo>
-                  <a:lnTo>
-                    <a:pt x="867356" y="1317517"/>
-                  </a:lnTo>
-                  <a:lnTo>
-                    <a:pt x="944990" y="1409154"/>
-                  </a:lnTo>
-                  <a:lnTo>
-                    <a:pt x="1022624" y="1497195"/>
-                  </a:lnTo>
-                  <a:lnTo>
-                    <a:pt x="1100258" y="1581781"/>
-                  </a:lnTo>
-                  <a:lnTo>
-                    <a:pt x="1177892" y="1663047"/>
-                  </a:lnTo>
-                  <a:lnTo>
-                    <a:pt x="1255526" y="1741125"/>
-                  </a:lnTo>
-                  <a:lnTo>
-                    <a:pt x="1333161" y="1816138"/>
-                  </a:lnTo>
-                  <a:lnTo>
-                    <a:pt x="1410795" y="1888208"/>
-                  </a:lnTo>
-                  <a:lnTo>
-                    <a:pt x="1488429" y="1957449"/>
-                  </a:lnTo>
-                  <a:lnTo>
-                    <a:pt x="1566063" y="2023973"/>
-                  </a:lnTo>
-                  <a:lnTo>
-                    <a:pt x="1643697" y="2087887"/>
-                  </a:lnTo>
-                  <a:lnTo>
-                    <a:pt x="1721331" y="2149292"/>
-                  </a:lnTo>
-                  <a:lnTo>
-                    <a:pt x="1798965" y="2208288"/>
-                  </a:lnTo>
-                  <a:lnTo>
-                    <a:pt x="1876599" y="2264968"/>
-                  </a:lnTo>
-                  <a:lnTo>
-                    <a:pt x="1954233" y="2319425"/>
-                  </a:lnTo>
-                  <a:lnTo>
-                    <a:pt x="2031867" y="2371744"/>
-                  </a:lnTo>
-                  <a:lnTo>
-                    <a:pt x="2109501" y="2422010"/>
-                  </a:lnTo>
-                  <a:lnTo>
-                    <a:pt x="2187135" y="2470304"/>
-                  </a:lnTo>
-                  <a:lnTo>
-                    <a:pt x="2264769" y="2516702"/>
-                  </a:lnTo>
-                  <a:lnTo>
-                    <a:pt x="2342403" y="2561279"/>
-                  </a:lnTo>
-                  <a:lnTo>
-                    <a:pt x="2420037" y="2604108"/>
-                  </a:lnTo>
-                  <a:lnTo>
-                    <a:pt x="2497671" y="2645255"/>
-                  </a:lnTo>
-                  <a:lnTo>
-                    <a:pt x="2575305" y="2684788"/>
-                  </a:lnTo>
-                  <a:lnTo>
-                    <a:pt x="2652939" y="2722769"/>
-                  </a:lnTo>
-                  <a:lnTo>
-                    <a:pt x="2730573" y="2759260"/>
-                  </a:lnTo>
-                  <a:lnTo>
-                    <a:pt x="2808207" y="2781274"/>
-                  </a:lnTo>
-                  <a:lnTo>
-                    <a:pt x="2885841" y="2776096"/>
-                  </a:lnTo>
-                  <a:lnTo>
-                    <a:pt x="2963475" y="2770888"/>
-                  </a:lnTo>
-                  <a:lnTo>
-                    <a:pt x="3041110" y="2765649"/>
-                  </a:lnTo>
-                  <a:lnTo>
-                    <a:pt x="3118744" y="2760379"/>
-                  </a:lnTo>
-                  <a:lnTo>
-                    <a:pt x="3196378" y="2755078"/>
-                  </a:lnTo>
-                  <a:lnTo>
-                    <a:pt x="3274012" y="2749745"/>
-                  </a:lnTo>
-                  <a:lnTo>
-                    <a:pt x="3351646" y="2744380"/>
-                  </a:lnTo>
-                  <a:lnTo>
-                    <a:pt x="3429280" y="2738984"/>
-                  </a:lnTo>
-                  <a:lnTo>
-                    <a:pt x="3506914" y="2733555"/>
-                  </a:lnTo>
-                  <a:lnTo>
-                    <a:pt x="3584548" y="2728095"/>
-                  </a:lnTo>
-                  <a:lnTo>
-                    <a:pt x="3662182" y="2722601"/>
-                  </a:lnTo>
-                  <a:lnTo>
-                    <a:pt x="3739816" y="2717075"/>
-                  </a:lnTo>
-                  <a:lnTo>
-                    <a:pt x="3817450" y="2711517"/>
-                  </a:lnTo>
-                  <a:lnTo>
-                    <a:pt x="3895084" y="2705925"/>
-                  </a:lnTo>
-                  <a:lnTo>
-                    <a:pt x="3972718" y="2700300"/>
-                  </a:lnTo>
-                  <a:lnTo>
-                    <a:pt x="4050352" y="2694642"/>
-                  </a:lnTo>
-                  <a:lnTo>
-                    <a:pt x="4127986" y="2688950"/>
-                  </a:lnTo>
-                  <a:lnTo>
-                    <a:pt x="4205620" y="2683224"/>
-                  </a:lnTo>
-                  <a:lnTo>
-                    <a:pt x="4283254" y="2677464"/>
-                  </a:lnTo>
-                  <a:lnTo>
-                    <a:pt x="4360888" y="2671670"/>
-                  </a:lnTo>
-                  <a:lnTo>
-                    <a:pt x="4438522" y="2665842"/>
-                  </a:lnTo>
-                  <a:lnTo>
-                    <a:pt x="4516156" y="2659978"/>
-                  </a:lnTo>
-                  <a:lnTo>
-                    <a:pt x="4593790" y="2654080"/>
-                  </a:lnTo>
-                  <a:lnTo>
-                    <a:pt x="4671424" y="2648147"/>
-                  </a:lnTo>
-                  <a:lnTo>
-                    <a:pt x="4749059" y="2642179"/>
-                  </a:lnTo>
-                  <a:lnTo>
-                    <a:pt x="4826693" y="2636176"/>
-                  </a:lnTo>
-                  <a:lnTo>
-                    <a:pt x="4904327" y="2630136"/>
-                  </a:lnTo>
-                  <a:lnTo>
-                    <a:pt x="4981961" y="2624061"/>
-                  </a:lnTo>
-                  <a:lnTo>
-                    <a:pt x="5059595" y="2617950"/>
-                  </a:lnTo>
-                  <a:lnTo>
-                    <a:pt x="5137229" y="2611802"/>
-                  </a:lnTo>
-                  <a:lnTo>
-                    <a:pt x="5214863" y="2605618"/>
-                  </a:lnTo>
-                  <a:lnTo>
-                    <a:pt x="5292497" y="2599397"/>
-                  </a:lnTo>
-                  <a:lnTo>
-                    <a:pt x="5370131" y="2593139"/>
-                  </a:lnTo>
-                  <a:lnTo>
-                    <a:pt x="5447765" y="2586844"/>
-                  </a:lnTo>
-                  <a:lnTo>
-                    <a:pt x="5525399" y="2580511"/>
-                  </a:lnTo>
-                  <a:lnTo>
-                    <a:pt x="5603033" y="2574141"/>
-                  </a:lnTo>
-                  <a:lnTo>
-                    <a:pt x="5680667" y="2567733"/>
-                  </a:lnTo>
-                  <a:lnTo>
-                    <a:pt x="5758301" y="2561287"/>
-                  </a:lnTo>
-                  <a:lnTo>
-                    <a:pt x="5835935" y="2554803"/>
-                  </a:lnTo>
-                  <a:lnTo>
-                    <a:pt x="5913569" y="2548280"/>
-                  </a:lnTo>
-                  <a:lnTo>
-                    <a:pt x="5991203" y="2541719"/>
-                  </a:lnTo>
-                  <a:lnTo>
-                    <a:pt x="6068837" y="2535118"/>
-                  </a:lnTo>
-                  <a:lnTo>
-                    <a:pt x="6146471" y="2528478"/>
-                  </a:lnTo>
-                  <a:lnTo>
-                    <a:pt x="6224105" y="2521799"/>
-                  </a:lnTo>
-                  <a:lnTo>
-                    <a:pt x="6301739" y="2515080"/>
-                  </a:lnTo>
-                  <a:lnTo>
-                    <a:pt x="6379373" y="2508321"/>
-                  </a:lnTo>
-                  <a:lnTo>
-                    <a:pt x="6457008" y="2501522"/>
-                  </a:lnTo>
-                  <a:lnTo>
-                    <a:pt x="6534642" y="2494683"/>
-                  </a:lnTo>
-                  <a:lnTo>
-                    <a:pt x="6612276" y="2487803"/>
-                  </a:lnTo>
-                  <a:lnTo>
-                    <a:pt x="6689910" y="2480882"/>
-                  </a:lnTo>
-                  <a:lnTo>
-                    <a:pt x="6767544" y="2473920"/>
+                    <a:pt x="123" y="246"/>
+                  </a:lnTo>
+                  <a:lnTo>
+                    <a:pt x="77757" y="148328"/>
+                  </a:lnTo>
+                  <a:lnTo>
+                    <a:pt x="155391" y="290406"/>
+                  </a:lnTo>
+                  <a:lnTo>
+                    <a:pt x="233026" y="426724"/>
+                  </a:lnTo>
+                  <a:lnTo>
+                    <a:pt x="310660" y="557515"/>
+                  </a:lnTo>
+                  <a:lnTo>
+                    <a:pt x="388294" y="683003"/>
+                  </a:lnTo>
+                  <a:lnTo>
+                    <a:pt x="465928" y="803404"/>
+                  </a:lnTo>
+                  <a:lnTo>
+                    <a:pt x="543562" y="918923"/>
+                  </a:lnTo>
+                  <a:lnTo>
+                    <a:pt x="621196" y="1029758"/>
+                  </a:lnTo>
+                  <a:lnTo>
+                    <a:pt x="698830" y="1136100"/>
+                  </a:lnTo>
+                  <a:lnTo>
+                    <a:pt x="776464" y="1238130"/>
+                  </a:lnTo>
+                  <a:lnTo>
+                    <a:pt x="854098" y="1336024"/>
+                  </a:lnTo>
+                  <a:lnTo>
+                    <a:pt x="931732" y="1429948"/>
+                  </a:lnTo>
+                  <a:lnTo>
+                    <a:pt x="1009366" y="1520065"/>
+                  </a:lnTo>
+                  <a:lnTo>
+                    <a:pt x="1087000" y="1606528"/>
+                  </a:lnTo>
+                  <a:lnTo>
+                    <a:pt x="1164634" y="1689485"/>
+                  </a:lnTo>
+                  <a:lnTo>
+                    <a:pt x="1242268" y="1769079"/>
+                  </a:lnTo>
+                  <a:lnTo>
+                    <a:pt x="1319902" y="1845446"/>
+                  </a:lnTo>
+                  <a:lnTo>
+                    <a:pt x="1397536" y="1918717"/>
+                  </a:lnTo>
+                  <a:lnTo>
+                    <a:pt x="1475170" y="1989017"/>
+                  </a:lnTo>
+                  <a:lnTo>
+                    <a:pt x="1552804" y="2056466"/>
+                  </a:lnTo>
+                  <a:lnTo>
+                    <a:pt x="1630438" y="2121181"/>
+                  </a:lnTo>
+                  <a:lnTo>
+                    <a:pt x="1708072" y="2183273"/>
+                  </a:lnTo>
+                  <a:lnTo>
+                    <a:pt x="1785706" y="2242847"/>
+                  </a:lnTo>
+                  <a:lnTo>
+                    <a:pt x="1863340" y="2300005"/>
+                  </a:lnTo>
+                  <a:lnTo>
+                    <a:pt x="1940975" y="2354846"/>
+                  </a:lnTo>
+                  <a:lnTo>
+                    <a:pt x="2018609" y="2407464"/>
+                  </a:lnTo>
+                  <a:lnTo>
+                    <a:pt x="2096243" y="2457948"/>
+                  </a:lnTo>
+                  <a:lnTo>
+                    <a:pt x="2173877" y="2506386"/>
+                  </a:lnTo>
+                  <a:lnTo>
+                    <a:pt x="2251511" y="2552859"/>
+                  </a:lnTo>
+                  <a:lnTo>
+                    <a:pt x="2329145" y="2597449"/>
+                  </a:lnTo>
+                  <a:lnTo>
+                    <a:pt x="2406779" y="2640230"/>
+                  </a:lnTo>
+                  <a:lnTo>
+                    <a:pt x="2484413" y="2681277"/>
+                  </a:lnTo>
+                  <a:lnTo>
+                    <a:pt x="2562047" y="2720660"/>
+                  </a:lnTo>
+                  <a:lnTo>
+                    <a:pt x="2639681" y="2758446"/>
+                  </a:lnTo>
+                  <a:lnTo>
+                    <a:pt x="2717315" y="2780652"/>
+                  </a:lnTo>
+                  <a:lnTo>
+                    <a:pt x="2794949" y="2773564"/>
+                  </a:lnTo>
+                  <a:lnTo>
+                    <a:pt x="2872583" y="2766419"/>
+                  </a:lnTo>
+                  <a:lnTo>
+                    <a:pt x="2950217" y="2759215"/>
+                  </a:lnTo>
+                  <a:lnTo>
+                    <a:pt x="3027851" y="2751953"/>
+                  </a:lnTo>
+                  <a:lnTo>
+                    <a:pt x="3105485" y="2744632"/>
+                  </a:lnTo>
+                  <a:lnTo>
+                    <a:pt x="3183119" y="2737251"/>
+                  </a:lnTo>
+                  <a:lnTo>
+                    <a:pt x="3260753" y="2729810"/>
+                  </a:lnTo>
+                  <a:lnTo>
+                    <a:pt x="3338387" y="2722309"/>
+                  </a:lnTo>
+                  <a:lnTo>
+                    <a:pt x="3416021" y="2714747"/>
+                  </a:lnTo>
+                  <a:lnTo>
+                    <a:pt x="3493655" y="2707123"/>
+                  </a:lnTo>
+                  <a:lnTo>
+                    <a:pt x="3571289" y="2699438"/>
+                  </a:lnTo>
+                  <a:lnTo>
+                    <a:pt x="3648924" y="2691690"/>
+                  </a:lnTo>
+                  <a:lnTo>
+                    <a:pt x="3726558" y="2683879"/>
+                  </a:lnTo>
+                  <a:lnTo>
+                    <a:pt x="3804192" y="2676004"/>
+                  </a:lnTo>
+                  <a:lnTo>
+                    <a:pt x="3881826" y="2668066"/>
+                  </a:lnTo>
+                  <a:lnTo>
+                    <a:pt x="3959460" y="2660063"/>
+                  </a:lnTo>
+                  <a:lnTo>
+                    <a:pt x="4037094" y="2651995"/>
+                  </a:lnTo>
+                  <a:lnTo>
+                    <a:pt x="4114728" y="2643861"/>
+                  </a:lnTo>
+                  <a:lnTo>
+                    <a:pt x="4192362" y="2635661"/>
+                  </a:lnTo>
+                  <a:lnTo>
+                    <a:pt x="4269996" y="2627395"/>
+                  </a:lnTo>
+                  <a:lnTo>
+                    <a:pt x="4347630" y="2619061"/>
+                  </a:lnTo>
+                  <a:lnTo>
+                    <a:pt x="4425264" y="2610659"/>
+                  </a:lnTo>
+                  <a:lnTo>
+                    <a:pt x="4502898" y="2602190"/>
+                  </a:lnTo>
+                  <a:lnTo>
+                    <a:pt x="4580532" y="2593651"/>
+                  </a:lnTo>
+                  <a:lnTo>
+                    <a:pt x="4658166" y="2585043"/>
+                  </a:lnTo>
+                  <a:lnTo>
+                    <a:pt x="4735800" y="2576365"/>
+                  </a:lnTo>
+                  <a:lnTo>
+                    <a:pt x="4813434" y="2567617"/>
+                  </a:lnTo>
+                  <a:lnTo>
+                    <a:pt x="4891068" y="2558797"/>
+                  </a:lnTo>
+                  <a:lnTo>
+                    <a:pt x="4968702" y="2549906"/>
+                  </a:lnTo>
+                  <a:lnTo>
+                    <a:pt x="5046336" y="2540943"/>
+                  </a:lnTo>
+                  <a:lnTo>
+                    <a:pt x="5123970" y="2531906"/>
+                  </a:lnTo>
+                  <a:lnTo>
+                    <a:pt x="5201604" y="2522796"/>
+                  </a:lnTo>
+                  <a:lnTo>
+                    <a:pt x="5279238" y="2513612"/>
+                  </a:lnTo>
+                  <a:lnTo>
+                    <a:pt x="5356872" y="2504354"/>
+                  </a:lnTo>
+                  <a:lnTo>
+                    <a:pt x="5434507" y="2495020"/>
+                  </a:lnTo>
+                  <a:lnTo>
+                    <a:pt x="5512141" y="2485610"/>
+                  </a:lnTo>
+                  <a:lnTo>
+                    <a:pt x="5589775" y="2476124"/>
+                  </a:lnTo>
+                  <a:lnTo>
+                    <a:pt x="5667409" y="2466561"/>
+                  </a:lnTo>
+                  <a:lnTo>
+                    <a:pt x="5745043" y="2456920"/>
+                  </a:lnTo>
+                  <a:lnTo>
+                    <a:pt x="5822677" y="2447201"/>
+                  </a:lnTo>
+                  <a:lnTo>
+                    <a:pt x="5900311" y="2437402"/>
+                  </a:lnTo>
+                  <a:lnTo>
+                    <a:pt x="5977945" y="2427524"/>
+                  </a:lnTo>
+                  <a:lnTo>
+                    <a:pt x="6055579" y="2417566"/>
+                  </a:lnTo>
+                  <a:lnTo>
+                    <a:pt x="6133213" y="2407527"/>
+                  </a:lnTo>
+                  <a:lnTo>
+                    <a:pt x="6210847" y="2397406"/>
+                  </a:lnTo>
+                  <a:lnTo>
+                    <a:pt x="6288481" y="2387203"/>
+                  </a:lnTo>
+                  <a:lnTo>
+                    <a:pt x="6366115" y="2376917"/>
+                  </a:lnTo>
+                  <a:lnTo>
+                    <a:pt x="6443749" y="2366547"/>
+                  </a:lnTo>
+                  <a:lnTo>
+                    <a:pt x="6521383" y="2356093"/>
+                  </a:lnTo>
+                  <a:lnTo>
+                    <a:pt x="6599017" y="2345554"/>
+                  </a:lnTo>
+                  <a:lnTo>
+                    <a:pt x="6676651" y="2334930"/>
                   </a:lnTo>
                 </a:path>
               </a:pathLst>
@@ -3880,300 +3874,300 @@
           </p:nvSpPr>
           <p:spPr>
             <a:xfrm>
-              <a:off x="817517" y="4682984"/>
-              <a:ext cx="7370972" cy="754807"/>
+              <a:off x="817517" y="4684246"/>
+              <a:ext cx="7370972" cy="761030"/>
             </a:xfrm>
             <a:custGeom>
               <a:avLst/>
               <a:pathLst>
-                <a:path w="7370972" h="754807">
+                <a:path w="7370972" h="761030">
                   <a:moveTo>
-                    <a:pt x="7370972" y="754807"/>
+                    <a:pt x="7370972" y="761030"/>
                   </a:moveTo>
                   <a:lnTo>
-                    <a:pt x="7293338" y="750256"/>
-                  </a:lnTo>
-                  <a:lnTo>
-                    <a:pt x="7215704" y="745519"/>
-                  </a:lnTo>
-                  <a:lnTo>
-                    <a:pt x="7138070" y="740589"/>
-                  </a:lnTo>
-                  <a:lnTo>
-                    <a:pt x="7060436" y="735457"/>
-                  </a:lnTo>
-                  <a:lnTo>
-                    <a:pt x="6982802" y="730116"/>
-                  </a:lnTo>
-                  <a:lnTo>
-                    <a:pt x="6905168" y="724557"/>
-                  </a:lnTo>
-                  <a:lnTo>
-                    <a:pt x="6827534" y="718770"/>
-                  </a:lnTo>
-                  <a:lnTo>
-                    <a:pt x="6749900" y="712747"/>
-                  </a:lnTo>
-                  <a:lnTo>
-                    <a:pt x="6672266" y="706479"/>
-                  </a:lnTo>
-                  <a:lnTo>
-                    <a:pt x="6594632" y="699954"/>
-                  </a:lnTo>
-                  <a:lnTo>
-                    <a:pt x="6516998" y="693162"/>
-                  </a:lnTo>
-                  <a:lnTo>
-                    <a:pt x="6439364" y="686094"/>
-                  </a:lnTo>
-                  <a:lnTo>
-                    <a:pt x="6361730" y="678736"/>
-                  </a:lnTo>
-                  <a:lnTo>
-                    <a:pt x="6284096" y="671078"/>
-                  </a:lnTo>
-                  <a:lnTo>
-                    <a:pt x="6206462" y="663107"/>
-                  </a:lnTo>
-                  <a:lnTo>
-                    <a:pt x="6128827" y="654811"/>
-                  </a:lnTo>
-                  <a:lnTo>
-                    <a:pt x="6051193" y="646176"/>
-                  </a:lnTo>
-                  <a:lnTo>
-                    <a:pt x="5973559" y="637188"/>
-                  </a:lnTo>
-                  <a:lnTo>
-                    <a:pt x="5895925" y="627832"/>
-                  </a:lnTo>
-                  <a:lnTo>
-                    <a:pt x="5818291" y="618095"/>
-                  </a:lnTo>
-                  <a:lnTo>
-                    <a:pt x="5740657" y="607960"/>
-                  </a:lnTo>
-                  <a:lnTo>
-                    <a:pt x="5663023" y="597411"/>
-                  </a:lnTo>
-                  <a:lnTo>
-                    <a:pt x="5585389" y="586432"/>
-                  </a:lnTo>
-                  <a:lnTo>
-                    <a:pt x="5507755" y="575003"/>
-                  </a:lnTo>
-                  <a:lnTo>
-                    <a:pt x="5430121" y="563108"/>
-                  </a:lnTo>
-                  <a:lnTo>
-                    <a:pt x="5352487" y="550727"/>
-                  </a:lnTo>
-                  <a:lnTo>
-                    <a:pt x="5274853" y="537841"/>
-                  </a:lnTo>
-                  <a:lnTo>
-                    <a:pt x="5197219" y="524428"/>
-                  </a:lnTo>
-                  <a:lnTo>
-                    <a:pt x="5119585" y="510467"/>
-                  </a:lnTo>
-                  <a:lnTo>
-                    <a:pt x="5041951" y="495936"/>
-                  </a:lnTo>
-                  <a:lnTo>
-                    <a:pt x="4964317" y="480811"/>
-                  </a:lnTo>
-                  <a:lnTo>
-                    <a:pt x="4886683" y="465069"/>
-                  </a:lnTo>
-                  <a:lnTo>
-                    <a:pt x="4809049" y="448683"/>
-                  </a:lnTo>
-                  <a:lnTo>
-                    <a:pt x="4731415" y="431629"/>
-                  </a:lnTo>
-                  <a:lnTo>
-                    <a:pt x="4653781" y="413878"/>
-                  </a:lnTo>
-                  <a:lnTo>
-                    <a:pt x="4576147" y="395401"/>
-                  </a:lnTo>
-                  <a:lnTo>
-                    <a:pt x="4498513" y="376170"/>
-                  </a:lnTo>
-                  <a:lnTo>
-                    <a:pt x="4420879" y="356154"/>
-                  </a:lnTo>
-                  <a:lnTo>
-                    <a:pt x="4343244" y="335319"/>
-                  </a:lnTo>
-                  <a:lnTo>
-                    <a:pt x="4265610" y="313634"/>
-                  </a:lnTo>
-                  <a:lnTo>
-                    <a:pt x="4187976" y="291064"/>
-                  </a:lnTo>
-                  <a:lnTo>
-                    <a:pt x="4110342" y="267571"/>
-                  </a:lnTo>
-                  <a:lnTo>
-                    <a:pt x="4032708" y="243118"/>
-                  </a:lnTo>
-                  <a:lnTo>
-                    <a:pt x="3955074" y="217667"/>
-                  </a:lnTo>
-                  <a:lnTo>
-                    <a:pt x="3877440" y="191177"/>
-                  </a:lnTo>
-                  <a:lnTo>
-                    <a:pt x="3799806" y="163604"/>
-                  </a:lnTo>
-                  <a:lnTo>
-                    <a:pt x="3722172" y="134905"/>
-                  </a:lnTo>
-                  <a:lnTo>
-                    <a:pt x="3644538" y="105034"/>
-                  </a:lnTo>
-                  <a:lnTo>
-                    <a:pt x="3566904" y="73942"/>
-                  </a:lnTo>
-                  <a:lnTo>
-                    <a:pt x="3489270" y="41581"/>
-                  </a:lnTo>
-                  <a:lnTo>
-                    <a:pt x="3411636" y="7898"/>
+                    <a:pt x="7293338" y="756638"/>
+                  </a:lnTo>
+                  <a:lnTo>
+                    <a:pt x="7215704" y="752061"/>
+                  </a:lnTo>
+                  <a:lnTo>
+                    <a:pt x="7138070" y="747290"/>
+                  </a:lnTo>
+                  <a:lnTo>
+                    <a:pt x="7060436" y="742317"/>
+                  </a:lnTo>
+                  <a:lnTo>
+                    <a:pt x="6982802" y="737135"/>
+                  </a:lnTo>
+                  <a:lnTo>
+                    <a:pt x="6905168" y="731733"/>
+                  </a:lnTo>
+                  <a:lnTo>
+                    <a:pt x="6827534" y="726104"/>
+                  </a:lnTo>
+                  <a:lnTo>
+                    <a:pt x="6749900" y="720236"/>
+                  </a:lnTo>
+                  <a:lnTo>
+                    <a:pt x="6672266" y="714120"/>
+                  </a:lnTo>
+                  <a:lnTo>
+                    <a:pt x="6594632" y="707746"/>
+                  </a:lnTo>
+                  <a:lnTo>
+                    <a:pt x="6516998" y="701103"/>
+                  </a:lnTo>
+                  <a:lnTo>
+                    <a:pt x="6439364" y="694179"/>
+                  </a:lnTo>
+                  <a:lnTo>
+                    <a:pt x="6361730" y="686962"/>
+                  </a:lnTo>
+                  <a:lnTo>
+                    <a:pt x="6284096" y="679441"/>
+                  </a:lnTo>
+                  <a:lnTo>
+                    <a:pt x="6206462" y="671601"/>
+                  </a:lnTo>
+                  <a:lnTo>
+                    <a:pt x="6128827" y="663430"/>
+                  </a:lnTo>
+                  <a:lnTo>
+                    <a:pt x="6051193" y="654914"/>
+                  </a:lnTo>
+                  <a:lnTo>
+                    <a:pt x="5973559" y="646038"/>
+                  </a:lnTo>
+                  <a:lnTo>
+                    <a:pt x="5895925" y="636787"/>
+                  </a:lnTo>
+                  <a:lnTo>
+                    <a:pt x="5818291" y="627145"/>
+                  </a:lnTo>
+                  <a:lnTo>
+                    <a:pt x="5740657" y="617096"/>
+                  </a:lnTo>
+                  <a:lnTo>
+                    <a:pt x="5663023" y="606622"/>
+                  </a:lnTo>
+                  <a:lnTo>
+                    <a:pt x="5585389" y="595706"/>
+                  </a:lnTo>
+                  <a:lnTo>
+                    <a:pt x="5507755" y="584328"/>
+                  </a:lnTo>
+                  <a:lnTo>
+                    <a:pt x="5430121" y="572469"/>
+                  </a:lnTo>
+                  <a:lnTo>
+                    <a:pt x="5352487" y="560109"/>
+                  </a:lnTo>
+                  <a:lnTo>
+                    <a:pt x="5274853" y="547227"/>
+                  </a:lnTo>
+                  <a:lnTo>
+                    <a:pt x="5197219" y="533801"/>
+                  </a:lnTo>
+                  <a:lnTo>
+                    <a:pt x="5119585" y="519807"/>
+                  </a:lnTo>
+                  <a:lnTo>
+                    <a:pt x="5041951" y="505222"/>
+                  </a:lnTo>
+                  <a:lnTo>
+                    <a:pt x="4964317" y="490020"/>
+                  </a:lnTo>
+                  <a:lnTo>
+                    <a:pt x="4886683" y="474176"/>
+                  </a:lnTo>
+                  <a:lnTo>
+                    <a:pt x="4809049" y="457663"/>
+                  </a:lnTo>
+                  <a:lnTo>
+                    <a:pt x="4731415" y="440452"/>
+                  </a:lnTo>
+                  <a:lnTo>
+                    <a:pt x="4653781" y="422513"/>
+                  </a:lnTo>
+                  <a:lnTo>
+                    <a:pt x="4576147" y="403817"/>
+                  </a:lnTo>
+                  <a:lnTo>
+                    <a:pt x="4498513" y="384330"/>
+                  </a:lnTo>
+                  <a:lnTo>
+                    <a:pt x="4420879" y="364020"/>
+                  </a:lnTo>
+                  <a:lnTo>
+                    <a:pt x="4343244" y="342852"/>
+                  </a:lnTo>
+                  <a:lnTo>
+                    <a:pt x="4265610" y="320789"/>
+                  </a:lnTo>
+                  <a:lnTo>
+                    <a:pt x="4187976" y="297794"/>
+                  </a:lnTo>
+                  <a:lnTo>
+                    <a:pt x="4110342" y="273827"/>
+                  </a:lnTo>
+                  <a:lnTo>
+                    <a:pt x="4032708" y="248848"/>
+                  </a:lnTo>
+                  <a:lnTo>
+                    <a:pt x="3955074" y="222813"/>
+                  </a:lnTo>
+                  <a:lnTo>
+                    <a:pt x="3877440" y="195678"/>
+                  </a:lnTo>
+                  <a:lnTo>
+                    <a:pt x="3799806" y="167396"/>
+                  </a:lnTo>
+                  <a:lnTo>
+                    <a:pt x="3722172" y="137919"/>
+                  </a:lnTo>
+                  <a:lnTo>
+                    <a:pt x="3644538" y="107196"/>
+                  </a:lnTo>
+                  <a:lnTo>
+                    <a:pt x="3566904" y="75175"/>
+                  </a:lnTo>
+                  <a:lnTo>
+                    <a:pt x="3489270" y="41801"/>
+                  </a:lnTo>
+                  <a:lnTo>
+                    <a:pt x="3411636" y="7017"/>
                   </a:lnTo>
                   <a:lnTo>
                     <a:pt x="3334002" y="0"/>
                   </a:lnTo>
                   <a:lnTo>
-                    <a:pt x="3256368" y="5116"/>
-                  </a:lnTo>
-                  <a:lnTo>
-                    <a:pt x="3178734" y="10202"/>
-                  </a:lnTo>
-                  <a:lnTo>
-                    <a:pt x="3101100" y="15258"/>
-                  </a:lnTo>
-                  <a:lnTo>
-                    <a:pt x="3023466" y="20284"/>
-                  </a:lnTo>
-                  <a:lnTo>
-                    <a:pt x="2945832" y="25281"/>
-                  </a:lnTo>
-                  <a:lnTo>
-                    <a:pt x="2868198" y="30247"/>
-                  </a:lnTo>
-                  <a:lnTo>
-                    <a:pt x="2790564" y="35185"/>
-                  </a:lnTo>
-                  <a:lnTo>
-                    <a:pt x="2712930" y="40094"/>
-                  </a:lnTo>
-                  <a:lnTo>
-                    <a:pt x="2635295" y="44973"/>
-                  </a:lnTo>
-                  <a:lnTo>
-                    <a:pt x="2557661" y="49824"/>
-                  </a:lnTo>
-                  <a:lnTo>
-                    <a:pt x="2480027" y="54646"/>
-                  </a:lnTo>
-                  <a:lnTo>
-                    <a:pt x="2402393" y="59439"/>
-                  </a:lnTo>
-                  <a:lnTo>
-                    <a:pt x="2324759" y="64204"/>
-                  </a:lnTo>
-                  <a:lnTo>
-                    <a:pt x="2247125" y="68942"/>
-                  </a:lnTo>
-                  <a:lnTo>
-                    <a:pt x="2169491" y="73651"/>
-                  </a:lnTo>
-                  <a:lnTo>
-                    <a:pt x="2091857" y="78332"/>
-                  </a:lnTo>
-                  <a:lnTo>
-                    <a:pt x="2014223" y="82986"/>
-                  </a:lnTo>
-                  <a:lnTo>
-                    <a:pt x="1936589" y="87612"/>
-                  </a:lnTo>
-                  <a:lnTo>
-                    <a:pt x="1858955" y="92210"/>
-                  </a:lnTo>
-                  <a:lnTo>
-                    <a:pt x="1781321" y="96782"/>
-                  </a:lnTo>
-                  <a:lnTo>
-                    <a:pt x="1703687" y="101327"/>
-                  </a:lnTo>
-                  <a:lnTo>
-                    <a:pt x="1626053" y="105845"/>
-                  </a:lnTo>
-                  <a:lnTo>
-                    <a:pt x="1548419" y="110336"/>
-                  </a:lnTo>
-                  <a:lnTo>
-                    <a:pt x="1470785" y="114800"/>
-                  </a:lnTo>
-                  <a:lnTo>
-                    <a:pt x="1393151" y="119238"/>
-                  </a:lnTo>
-                  <a:lnTo>
-                    <a:pt x="1315517" y="123651"/>
-                  </a:lnTo>
-                  <a:lnTo>
-                    <a:pt x="1237883" y="128036"/>
-                  </a:lnTo>
-                  <a:lnTo>
-                    <a:pt x="1160249" y="132397"/>
-                  </a:lnTo>
-                  <a:lnTo>
-                    <a:pt x="1082615" y="136731"/>
-                  </a:lnTo>
-                  <a:lnTo>
-                    <a:pt x="1004981" y="141039"/>
-                  </a:lnTo>
-                  <a:lnTo>
-                    <a:pt x="927346" y="145323"/>
-                  </a:lnTo>
-                  <a:lnTo>
-                    <a:pt x="849712" y="149581"/>
-                  </a:lnTo>
-                  <a:lnTo>
-                    <a:pt x="772078" y="153813"/>
-                  </a:lnTo>
-                  <a:lnTo>
-                    <a:pt x="694444" y="158021"/>
-                  </a:lnTo>
-                  <a:lnTo>
-                    <a:pt x="616810" y="162204"/>
-                  </a:lnTo>
-                  <a:lnTo>
-                    <a:pt x="539176" y="166362"/>
-                  </a:lnTo>
-                  <a:lnTo>
-                    <a:pt x="461542" y="170496"/>
-                  </a:lnTo>
-                  <a:lnTo>
-                    <a:pt x="383908" y="174605"/>
-                  </a:lnTo>
-                  <a:lnTo>
-                    <a:pt x="306274" y="178690"/>
-                  </a:lnTo>
-                  <a:lnTo>
-                    <a:pt x="228640" y="182751"/>
-                  </a:lnTo>
-                  <a:lnTo>
-                    <a:pt x="151006" y="186788"/>
-                  </a:lnTo>
-                  <a:lnTo>
-                    <a:pt x="73372" y="190801"/>
-                  </a:lnTo>
-                  <a:lnTo>
-                    <a:pt x="0" y="194571"/>
+                    <a:pt x="3256368" y="6974"/>
+                  </a:lnTo>
+                  <a:lnTo>
+                    <a:pt x="3178734" y="13891"/>
+                  </a:lnTo>
+                  <a:lnTo>
+                    <a:pt x="3101100" y="20754"/>
+                  </a:lnTo>
+                  <a:lnTo>
+                    <a:pt x="3023466" y="27560"/>
+                  </a:lnTo>
+                  <a:lnTo>
+                    <a:pt x="2945832" y="34312"/>
+                  </a:lnTo>
+                  <a:lnTo>
+                    <a:pt x="2868198" y="41010"/>
+                  </a:lnTo>
+                  <a:lnTo>
+                    <a:pt x="2790564" y="47653"/>
+                  </a:lnTo>
+                  <a:lnTo>
+                    <a:pt x="2712930" y="54243"/>
+                  </a:lnTo>
+                  <a:lnTo>
+                    <a:pt x="2635295" y="60780"/>
+                  </a:lnTo>
+                  <a:lnTo>
+                    <a:pt x="2557661" y="67264"/>
+                  </a:lnTo>
+                  <a:lnTo>
+                    <a:pt x="2480027" y="73695"/>
+                  </a:lnTo>
+                  <a:lnTo>
+                    <a:pt x="2402393" y="80075"/>
+                  </a:lnTo>
+                  <a:lnTo>
+                    <a:pt x="2324759" y="86404"/>
+                  </a:lnTo>
+                  <a:lnTo>
+                    <a:pt x="2247125" y="92681"/>
+                  </a:lnTo>
+                  <a:lnTo>
+                    <a:pt x="2169491" y="98908"/>
+                  </a:lnTo>
+                  <a:lnTo>
+                    <a:pt x="2091857" y="105084"/>
+                  </a:lnTo>
+                  <a:lnTo>
+                    <a:pt x="2014223" y="111211"/>
+                  </a:lnTo>
+                  <a:lnTo>
+                    <a:pt x="1936589" y="117289"/>
+                  </a:lnTo>
+                  <a:lnTo>
+                    <a:pt x="1858955" y="123317"/>
+                  </a:lnTo>
+                  <a:lnTo>
+                    <a:pt x="1781321" y="129297"/>
+                  </a:lnTo>
+                  <a:lnTo>
+                    <a:pt x="1703687" y="135228"/>
+                  </a:lnTo>
+                  <a:lnTo>
+                    <a:pt x="1626053" y="141112"/>
+                  </a:lnTo>
+                  <a:lnTo>
+                    <a:pt x="1548419" y="146948"/>
+                  </a:lnTo>
+                  <a:lnTo>
+                    <a:pt x="1470785" y="152738"/>
+                  </a:lnTo>
+                  <a:lnTo>
+                    <a:pt x="1393151" y="158480"/>
+                  </a:lnTo>
+                  <a:lnTo>
+                    <a:pt x="1315517" y="164176"/>
+                  </a:lnTo>
+                  <a:lnTo>
+                    <a:pt x="1237883" y="169827"/>
+                  </a:lnTo>
+                  <a:lnTo>
+                    <a:pt x="1160249" y="175432"/>
+                  </a:lnTo>
+                  <a:lnTo>
+                    <a:pt x="1082615" y="180991"/>
+                  </a:lnTo>
+                  <a:lnTo>
+                    <a:pt x="1004981" y="186506"/>
+                  </a:lnTo>
+                  <a:lnTo>
+                    <a:pt x="927346" y="191976"/>
+                  </a:lnTo>
+                  <a:lnTo>
+                    <a:pt x="849712" y="197402"/>
+                  </a:lnTo>
+                  <a:lnTo>
+                    <a:pt x="772078" y="202785"/>
+                  </a:lnTo>
+                  <a:lnTo>
+                    <a:pt x="694444" y="208124"/>
+                  </a:lnTo>
+                  <a:lnTo>
+                    <a:pt x="616810" y="213420"/>
+                  </a:lnTo>
+                  <a:lnTo>
+                    <a:pt x="539176" y="218673"/>
+                  </a:lnTo>
+                  <a:lnTo>
+                    <a:pt x="461542" y="223884"/>
+                  </a:lnTo>
+                  <a:lnTo>
+                    <a:pt x="383908" y="229053"/>
+                  </a:lnTo>
+                  <a:lnTo>
+                    <a:pt x="306274" y="234180"/>
+                  </a:lnTo>
+                  <a:lnTo>
+                    <a:pt x="228640" y="239266"/>
+                  </a:lnTo>
+                  <a:lnTo>
+                    <a:pt x="151006" y="244311"/>
+                  </a:lnTo>
+                  <a:lnTo>
+                    <a:pt x="73372" y="249315"/>
+                  </a:lnTo>
+                  <a:lnTo>
+                    <a:pt x="0" y="254007"/>
                   </a:lnTo>
                 </a:path>
               </a:pathLst>
@@ -4193,300 +4187,300 @@
           </p:nvSpPr>
           <p:spPr>
             <a:xfrm>
-              <a:off x="817517" y="3719324"/>
-              <a:ext cx="7370972" cy="1467489"/>
+              <a:off x="817517" y="3751623"/>
+              <a:ext cx="7370972" cy="1427516"/>
             </a:xfrm>
             <a:custGeom>
               <a:avLst/>
               <a:pathLst>
-                <a:path w="7370972" h="1467489">
+                <a:path w="7370972" h="1427516">
                   <a:moveTo>
                     <a:pt x="0" y="0"/>
                   </a:moveTo>
                   <a:lnTo>
-                    <a:pt x="73372" y="29272"/>
-                  </a:lnTo>
-                  <a:lnTo>
-                    <a:pt x="151006" y="59720"/>
-                  </a:lnTo>
-                  <a:lnTo>
-                    <a:pt x="228640" y="89654"/>
-                  </a:lnTo>
-                  <a:lnTo>
-                    <a:pt x="306274" y="119082"/>
-                  </a:lnTo>
-                  <a:lnTo>
-                    <a:pt x="383908" y="148012"/>
-                  </a:lnTo>
-                  <a:lnTo>
-                    <a:pt x="461542" y="176453"/>
-                  </a:lnTo>
-                  <a:lnTo>
-                    <a:pt x="539176" y="204412"/>
-                  </a:lnTo>
-                  <a:lnTo>
-                    <a:pt x="616810" y="231899"/>
-                  </a:lnTo>
-                  <a:lnTo>
-                    <a:pt x="694444" y="258922"/>
-                  </a:lnTo>
-                  <a:lnTo>
-                    <a:pt x="772078" y="285487"/>
-                  </a:lnTo>
-                  <a:lnTo>
-                    <a:pt x="849712" y="311603"/>
-                  </a:lnTo>
-                  <a:lnTo>
-                    <a:pt x="927346" y="337277"/>
-                  </a:lnTo>
-                  <a:lnTo>
-                    <a:pt x="1004981" y="362518"/>
-                  </a:lnTo>
-                  <a:lnTo>
-                    <a:pt x="1082615" y="387331"/>
-                  </a:lnTo>
-                  <a:lnTo>
-                    <a:pt x="1160249" y="411725"/>
-                  </a:lnTo>
-                  <a:lnTo>
-                    <a:pt x="1237883" y="435706"/>
-                  </a:lnTo>
-                  <a:lnTo>
-                    <a:pt x="1315517" y="459282"/>
-                  </a:lnTo>
-                  <a:lnTo>
-                    <a:pt x="1393151" y="482459"/>
-                  </a:lnTo>
-                  <a:lnTo>
-                    <a:pt x="1470785" y="505244"/>
-                  </a:lnTo>
-                  <a:lnTo>
-                    <a:pt x="1548419" y="527644"/>
-                  </a:lnTo>
-                  <a:lnTo>
-                    <a:pt x="1626053" y="549665"/>
-                  </a:lnTo>
-                  <a:lnTo>
-                    <a:pt x="1703687" y="571314"/>
-                  </a:lnTo>
-                  <a:lnTo>
-                    <a:pt x="1781321" y="592597"/>
-                  </a:lnTo>
-                  <a:lnTo>
-                    <a:pt x="1858955" y="613519"/>
-                  </a:lnTo>
-                  <a:lnTo>
-                    <a:pt x="1936589" y="634088"/>
-                  </a:lnTo>
-                  <a:lnTo>
-                    <a:pt x="2014223" y="654309"/>
-                  </a:lnTo>
-                  <a:lnTo>
-                    <a:pt x="2091857" y="674189"/>
-                  </a:lnTo>
-                  <a:lnTo>
-                    <a:pt x="2169491" y="693732"/>
-                  </a:lnTo>
-                  <a:lnTo>
-                    <a:pt x="2247125" y="712944"/>
-                  </a:lnTo>
-                  <a:lnTo>
-                    <a:pt x="2324759" y="731832"/>
-                  </a:lnTo>
-                  <a:lnTo>
-                    <a:pt x="2402393" y="750400"/>
-                  </a:lnTo>
-                  <a:lnTo>
-                    <a:pt x="2480027" y="768654"/>
-                  </a:lnTo>
-                  <a:lnTo>
-                    <a:pt x="2557661" y="786600"/>
-                  </a:lnTo>
-                  <a:lnTo>
-                    <a:pt x="2635295" y="804242"/>
-                  </a:lnTo>
-                  <a:lnTo>
-                    <a:pt x="2712930" y="821586"/>
-                  </a:lnTo>
-                  <a:lnTo>
-                    <a:pt x="2790564" y="838636"/>
-                  </a:lnTo>
-                  <a:lnTo>
-                    <a:pt x="2868198" y="855398"/>
-                  </a:lnTo>
-                  <a:lnTo>
-                    <a:pt x="2945832" y="871877"/>
-                  </a:lnTo>
-                  <a:lnTo>
-                    <a:pt x="3023466" y="888077"/>
-                  </a:lnTo>
-                  <a:lnTo>
-                    <a:pt x="3101100" y="904003"/>
-                  </a:lnTo>
-                  <a:lnTo>
-                    <a:pt x="3178734" y="919660"/>
-                  </a:lnTo>
-                  <a:lnTo>
-                    <a:pt x="3256368" y="935052"/>
-                  </a:lnTo>
-                  <a:lnTo>
-                    <a:pt x="3334002" y="950184"/>
-                  </a:lnTo>
-                  <a:lnTo>
-                    <a:pt x="3411636" y="965060"/>
-                  </a:lnTo>
-                  <a:lnTo>
-                    <a:pt x="3489270" y="979684"/>
-                  </a:lnTo>
-                  <a:lnTo>
-                    <a:pt x="3566904" y="994061"/>
-                  </a:lnTo>
-                  <a:lnTo>
-                    <a:pt x="3644538" y="1008195"/>
-                  </a:lnTo>
-                  <a:lnTo>
-                    <a:pt x="3722172" y="1022090"/>
-                  </a:lnTo>
-                  <a:lnTo>
-                    <a:pt x="3799806" y="1035750"/>
-                  </a:lnTo>
-                  <a:lnTo>
-                    <a:pt x="3877440" y="1049179"/>
-                  </a:lnTo>
-                  <a:lnTo>
-                    <a:pt x="3955074" y="1062381"/>
-                  </a:lnTo>
-                  <a:lnTo>
-                    <a:pt x="4032708" y="1075359"/>
-                  </a:lnTo>
-                  <a:lnTo>
-                    <a:pt x="4110342" y="1088118"/>
-                  </a:lnTo>
-                  <a:lnTo>
-                    <a:pt x="4187976" y="1100662"/>
-                  </a:lnTo>
-                  <a:lnTo>
-                    <a:pt x="4265610" y="1112993"/>
-                  </a:lnTo>
-                  <a:lnTo>
-                    <a:pt x="4343244" y="1125116"/>
-                  </a:lnTo>
-                  <a:lnTo>
-                    <a:pt x="4420879" y="1137033"/>
-                  </a:lnTo>
-                  <a:lnTo>
-                    <a:pt x="4498513" y="1148750"/>
-                  </a:lnTo>
-                  <a:lnTo>
-                    <a:pt x="4576147" y="1160268"/>
-                  </a:lnTo>
-                  <a:lnTo>
-                    <a:pt x="4653781" y="1171591"/>
-                  </a:lnTo>
-                  <a:lnTo>
-                    <a:pt x="4731415" y="1182723"/>
-                  </a:lnTo>
-                  <a:lnTo>
-                    <a:pt x="4809049" y="1193666"/>
-                  </a:lnTo>
-                  <a:lnTo>
-                    <a:pt x="4886683" y="1204425"/>
-                  </a:lnTo>
-                  <a:lnTo>
-                    <a:pt x="4964317" y="1215002"/>
-                  </a:lnTo>
-                  <a:lnTo>
-                    <a:pt x="5041951" y="1225399"/>
-                  </a:lnTo>
-                  <a:lnTo>
-                    <a:pt x="5119585" y="1235621"/>
-                  </a:lnTo>
-                  <a:lnTo>
-                    <a:pt x="5197219" y="1245670"/>
-                  </a:lnTo>
-                  <a:lnTo>
-                    <a:pt x="5274853" y="1255550"/>
-                  </a:lnTo>
-                  <a:lnTo>
-                    <a:pt x="5352487" y="1265262"/>
-                  </a:lnTo>
-                  <a:lnTo>
-                    <a:pt x="5430121" y="1274809"/>
-                  </a:lnTo>
-                  <a:lnTo>
-                    <a:pt x="5507755" y="1284196"/>
-                  </a:lnTo>
-                  <a:lnTo>
-                    <a:pt x="5585389" y="1293423"/>
-                  </a:lnTo>
-                  <a:lnTo>
-                    <a:pt x="5663023" y="1302495"/>
-                  </a:lnTo>
-                  <a:lnTo>
-                    <a:pt x="5740657" y="1311413"/>
-                  </a:lnTo>
-                  <a:lnTo>
-                    <a:pt x="5818291" y="1320181"/>
-                  </a:lnTo>
-                  <a:lnTo>
-                    <a:pt x="5895925" y="1328800"/>
-                  </a:lnTo>
-                  <a:lnTo>
-                    <a:pt x="5973559" y="1337273"/>
-                  </a:lnTo>
-                  <a:lnTo>
-                    <a:pt x="6051193" y="1345603"/>
-                  </a:lnTo>
-                  <a:lnTo>
-                    <a:pt x="6128827" y="1353793"/>
-                  </a:lnTo>
-                  <a:lnTo>
-                    <a:pt x="6206462" y="1361843"/>
-                  </a:lnTo>
-                  <a:lnTo>
-                    <a:pt x="6284096" y="1369758"/>
-                  </a:lnTo>
-                  <a:lnTo>
-                    <a:pt x="6361730" y="1377539"/>
-                  </a:lnTo>
-                  <a:lnTo>
-                    <a:pt x="6439364" y="1385188"/>
-                  </a:lnTo>
-                  <a:lnTo>
-                    <a:pt x="6516998" y="1392708"/>
-                  </a:lnTo>
-                  <a:lnTo>
-                    <a:pt x="6594632" y="1400101"/>
-                  </a:lnTo>
-                  <a:lnTo>
-                    <a:pt x="6672266" y="1407368"/>
-                  </a:lnTo>
-                  <a:lnTo>
-                    <a:pt x="6749900" y="1414513"/>
-                  </a:lnTo>
-                  <a:lnTo>
-                    <a:pt x="6827534" y="1421537"/>
-                  </a:lnTo>
-                  <a:lnTo>
-                    <a:pt x="6905168" y="1428442"/>
-                  </a:lnTo>
-                  <a:lnTo>
-                    <a:pt x="6982802" y="1435231"/>
-                  </a:lnTo>
-                  <a:lnTo>
-                    <a:pt x="7060436" y="1441904"/>
-                  </a:lnTo>
-                  <a:lnTo>
-                    <a:pt x="7138070" y="1448465"/>
-                  </a:lnTo>
-                  <a:lnTo>
-                    <a:pt x="7215704" y="1454915"/>
-                  </a:lnTo>
-                  <a:lnTo>
-                    <a:pt x="7293338" y="1461256"/>
-                  </a:lnTo>
-                  <a:lnTo>
-                    <a:pt x="7370972" y="1467489"/>
+                    <a:pt x="73372" y="28072"/>
+                  </a:lnTo>
+                  <a:lnTo>
+                    <a:pt x="151006" y="57284"/>
+                  </a:lnTo>
+                  <a:lnTo>
+                    <a:pt x="228640" y="86014"/>
+                  </a:lnTo>
+                  <a:lnTo>
+                    <a:pt x="306274" y="114270"/>
+                  </a:lnTo>
+                  <a:lnTo>
+                    <a:pt x="383908" y="142060"/>
+                  </a:lnTo>
+                  <a:lnTo>
+                    <a:pt x="461542" y="169390"/>
+                  </a:lnTo>
+                  <a:lnTo>
+                    <a:pt x="539176" y="196270"/>
+                  </a:lnTo>
+                  <a:lnTo>
+                    <a:pt x="616810" y="222705"/>
+                  </a:lnTo>
+                  <a:lnTo>
+                    <a:pt x="694444" y="248704"/>
+                  </a:lnTo>
+                  <a:lnTo>
+                    <a:pt x="772078" y="274274"/>
+                  </a:lnTo>
+                  <a:lnTo>
+                    <a:pt x="849712" y="299422"/>
+                  </a:lnTo>
+                  <a:lnTo>
+                    <a:pt x="927346" y="324155"/>
+                  </a:lnTo>
+                  <a:lnTo>
+                    <a:pt x="1004981" y="348480"/>
+                  </a:lnTo>
+                  <a:lnTo>
+                    <a:pt x="1082615" y="372402"/>
+                  </a:lnTo>
+                  <a:lnTo>
+                    <a:pt x="1160249" y="395930"/>
+                  </a:lnTo>
+                  <a:lnTo>
+                    <a:pt x="1237883" y="419070"/>
+                  </a:lnTo>
+                  <a:lnTo>
+                    <a:pt x="1315517" y="441827"/>
+                  </a:lnTo>
+                  <a:lnTo>
+                    <a:pt x="1393151" y="464209"/>
+                  </a:lnTo>
+                  <a:lnTo>
+                    <a:pt x="1470785" y="486222"/>
+                  </a:lnTo>
+                  <a:lnTo>
+                    <a:pt x="1548419" y="507870"/>
+                  </a:lnTo>
+                  <a:lnTo>
+                    <a:pt x="1626053" y="529162"/>
+                  </a:lnTo>
+                  <a:lnTo>
+                    <a:pt x="1703687" y="550102"/>
+                  </a:lnTo>
+                  <a:lnTo>
+                    <a:pt x="1781321" y="570696"/>
+                  </a:lnTo>
+                  <a:lnTo>
+                    <a:pt x="1858955" y="590951"/>
+                  </a:lnTo>
+                  <a:lnTo>
+                    <a:pt x="1936589" y="610871"/>
+                  </a:lnTo>
+                  <a:lnTo>
+                    <a:pt x="2014223" y="630462"/>
+                  </a:lnTo>
+                  <a:lnTo>
+                    <a:pt x="2091857" y="649730"/>
+                  </a:lnTo>
+                  <a:lnTo>
+                    <a:pt x="2169491" y="668679"/>
+                  </a:lnTo>
+                  <a:lnTo>
+                    <a:pt x="2247125" y="687316"/>
+                  </a:lnTo>
+                  <a:lnTo>
+                    <a:pt x="2324759" y="705645"/>
+                  </a:lnTo>
+                  <a:lnTo>
+                    <a:pt x="2402393" y="723672"/>
+                  </a:lnTo>
+                  <a:lnTo>
+                    <a:pt x="2480027" y="741400"/>
+                  </a:lnTo>
+                  <a:lnTo>
+                    <a:pt x="2557661" y="758837"/>
+                  </a:lnTo>
+                  <a:lnTo>
+                    <a:pt x="2635295" y="775985"/>
+                  </a:lnTo>
+                  <a:lnTo>
+                    <a:pt x="2712930" y="792850"/>
+                  </a:lnTo>
+                  <a:lnTo>
+                    <a:pt x="2790564" y="809437"/>
+                  </a:lnTo>
+                  <a:lnTo>
+                    <a:pt x="2868198" y="825750"/>
+                  </a:lnTo>
+                  <a:lnTo>
+                    <a:pt x="2945832" y="841794"/>
+                  </a:lnTo>
+                  <a:lnTo>
+                    <a:pt x="3023466" y="857573"/>
+                  </a:lnTo>
+                  <a:lnTo>
+                    <a:pt x="3101100" y="873091"/>
+                  </a:lnTo>
+                  <a:lnTo>
+                    <a:pt x="3178734" y="888353"/>
+                  </a:lnTo>
+                  <a:lnTo>
+                    <a:pt x="3256368" y="903364"/>
+                  </a:lnTo>
+                  <a:lnTo>
+                    <a:pt x="3334002" y="918126"/>
+                  </a:lnTo>
+                  <a:lnTo>
+                    <a:pt x="3411636" y="932645"/>
+                  </a:lnTo>
+                  <a:lnTo>
+                    <a:pt x="3489270" y="946924"/>
+                  </a:lnTo>
+                  <a:lnTo>
+                    <a:pt x="3566904" y="960967"/>
+                  </a:lnTo>
+                  <a:lnTo>
+                    <a:pt x="3644538" y="974779"/>
+                  </a:lnTo>
+                  <a:lnTo>
+                    <a:pt x="3722172" y="988362"/>
+                  </a:lnTo>
+                  <a:lnTo>
+                    <a:pt x="3799806" y="1001721"/>
+                  </a:lnTo>
+                  <a:lnTo>
+                    <a:pt x="3877440" y="1014860"/>
+                  </a:lnTo>
+                  <a:lnTo>
+                    <a:pt x="3955074" y="1027782"/>
+                  </a:lnTo>
+                  <a:lnTo>
+                    <a:pt x="4032708" y="1040490"/>
+                  </a:lnTo>
+                  <a:lnTo>
+                    <a:pt x="4110342" y="1052989"/>
+                  </a:lnTo>
+                  <a:lnTo>
+                    <a:pt x="4187976" y="1065281"/>
+                  </a:lnTo>
+                  <a:lnTo>
+                    <a:pt x="4265610" y="1077371"/>
+                  </a:lnTo>
+                  <a:lnTo>
+                    <a:pt x="4343244" y="1089260"/>
+                  </a:lnTo>
+                  <a:lnTo>
+                    <a:pt x="4420879" y="1100954"/>
+                  </a:lnTo>
+                  <a:lnTo>
+                    <a:pt x="4498513" y="1112454"/>
+                  </a:lnTo>
+                  <a:lnTo>
+                    <a:pt x="4576147" y="1123765"/>
+                  </a:lnTo>
+                  <a:lnTo>
+                    <a:pt x="4653781" y="1134889"/>
+                  </a:lnTo>
+                  <a:lnTo>
+                    <a:pt x="4731415" y="1145829"/>
+                  </a:lnTo>
+                  <a:lnTo>
+                    <a:pt x="4809049" y="1156589"/>
+                  </a:lnTo>
+                  <a:lnTo>
+                    <a:pt x="4886683" y="1167171"/>
+                  </a:lnTo>
+                  <a:lnTo>
+                    <a:pt x="4964317" y="1177578"/>
+                  </a:lnTo>
+                  <a:lnTo>
+                    <a:pt x="5041951" y="1187814"/>
+                  </a:lnTo>
+                  <a:lnTo>
+                    <a:pt x="5119585" y="1197880"/>
+                  </a:lnTo>
+                  <a:lnTo>
+                    <a:pt x="5197219" y="1207780"/>
+                  </a:lnTo>
+                  <a:lnTo>
+                    <a:pt x="5274853" y="1217517"/>
+                  </a:lnTo>
+                  <a:lnTo>
+                    <a:pt x="5352487" y="1227094"/>
+                  </a:lnTo>
+                  <a:lnTo>
+                    <a:pt x="5430121" y="1236512"/>
+                  </a:lnTo>
+                  <a:lnTo>
+                    <a:pt x="5507755" y="1245774"/>
+                  </a:lnTo>
+                  <a:lnTo>
+                    <a:pt x="5585389" y="1254884"/>
+                  </a:lnTo>
+                  <a:lnTo>
+                    <a:pt x="5663023" y="1263843"/>
+                  </a:lnTo>
+                  <a:lnTo>
+                    <a:pt x="5740657" y="1272654"/>
+                  </a:lnTo>
+                  <a:lnTo>
+                    <a:pt x="5818291" y="1281320"/>
+                  </a:lnTo>
+                  <a:lnTo>
+                    <a:pt x="5895925" y="1289843"/>
+                  </a:lnTo>
+                  <a:lnTo>
+                    <a:pt x="5973559" y="1298225"/>
+                  </a:lnTo>
+                  <a:lnTo>
+                    <a:pt x="6051193" y="1306469"/>
+                  </a:lnTo>
+                  <a:lnTo>
+                    <a:pt x="6128827" y="1314577"/>
+                  </a:lnTo>
+                  <a:lnTo>
+                    <a:pt x="6206462" y="1322551"/>
+                  </a:lnTo>
+                  <a:lnTo>
+                    <a:pt x="6284096" y="1330393"/>
+                  </a:lnTo>
+                  <a:lnTo>
+                    <a:pt x="6361730" y="1338106"/>
+                  </a:lnTo>
+                  <a:lnTo>
+                    <a:pt x="6439364" y="1345691"/>
+                  </a:lnTo>
+                  <a:lnTo>
+                    <a:pt x="6516998" y="1353151"/>
+                  </a:lnTo>
+                  <a:lnTo>
+                    <a:pt x="6594632" y="1360488"/>
+                  </a:lnTo>
+                  <a:lnTo>
+                    <a:pt x="6672266" y="1367704"/>
+                  </a:lnTo>
+                  <a:lnTo>
+                    <a:pt x="6749900" y="1374801"/>
+                  </a:lnTo>
+                  <a:lnTo>
+                    <a:pt x="6827534" y="1381780"/>
+                  </a:lnTo>
+                  <a:lnTo>
+                    <a:pt x="6905168" y="1388645"/>
+                  </a:lnTo>
+                  <a:lnTo>
+                    <a:pt x="6982802" y="1395396"/>
+                  </a:lnTo>
+                  <a:lnTo>
+                    <a:pt x="7060436" y="1402035"/>
+                  </a:lnTo>
+                  <a:lnTo>
+                    <a:pt x="7138070" y="1408565"/>
+                  </a:lnTo>
+                  <a:lnTo>
+                    <a:pt x="7215704" y="1414988"/>
+                  </a:lnTo>
+                  <a:lnTo>
+                    <a:pt x="7293338" y="1421304"/>
+                  </a:lnTo>
+                  <a:lnTo>
+                    <a:pt x="7370972" y="1427516"/>
                   </a:lnTo>
                 </a:path>
               </a:pathLst>

--- a/docs/plots/carbo/jx_carbo_linsubhr_ratio_hosp8.pptx
+++ b/docs/plots/carbo/jx_carbo_linsubhr_ratio_hosp8.pptx
@@ -3003,563 +3003,566 @@
           <p:spPr>
             <a:xfrm>
               <a:off x="817517" y="1896563"/>
-              <a:ext cx="7370972" cy="3548713"/>
+              <a:ext cx="7370972" cy="3541227"/>
             </a:xfrm>
             <a:custGeom>
               <a:avLst/>
               <a:pathLst>
-                <a:path w="7370972" h="3548713">
+                <a:path w="7370972" h="3541227">
                   <a:moveTo>
-                    <a:pt x="694320" y="0"/>
+                    <a:pt x="603428" y="0"/>
                   </a:moveTo>
                   <a:lnTo>
-                    <a:pt x="694444" y="246"/>
-                  </a:lnTo>
-                  <a:lnTo>
-                    <a:pt x="772078" y="148328"/>
-                  </a:lnTo>
-                  <a:lnTo>
-                    <a:pt x="849712" y="290406"/>
-                  </a:lnTo>
-                  <a:lnTo>
-                    <a:pt x="927346" y="426724"/>
-                  </a:lnTo>
-                  <a:lnTo>
-                    <a:pt x="1004981" y="557515"/>
-                  </a:lnTo>
-                  <a:lnTo>
-                    <a:pt x="1082615" y="683003"/>
-                  </a:lnTo>
-                  <a:lnTo>
-                    <a:pt x="1160249" y="803404"/>
-                  </a:lnTo>
-                  <a:lnTo>
-                    <a:pt x="1237883" y="918923"/>
-                  </a:lnTo>
-                  <a:lnTo>
-                    <a:pt x="1315517" y="1029758"/>
-                  </a:lnTo>
-                  <a:lnTo>
-                    <a:pt x="1393151" y="1136100"/>
-                  </a:lnTo>
-                  <a:lnTo>
-                    <a:pt x="1470785" y="1238130"/>
-                  </a:lnTo>
-                  <a:lnTo>
-                    <a:pt x="1548419" y="1336024"/>
-                  </a:lnTo>
-                  <a:lnTo>
-                    <a:pt x="1626053" y="1429948"/>
-                  </a:lnTo>
-                  <a:lnTo>
-                    <a:pt x="1703687" y="1520065"/>
-                  </a:lnTo>
-                  <a:lnTo>
-                    <a:pt x="1781321" y="1606528"/>
-                  </a:lnTo>
-                  <a:lnTo>
-                    <a:pt x="1858955" y="1689485"/>
-                  </a:lnTo>
-                  <a:lnTo>
-                    <a:pt x="1936589" y="1769079"/>
-                  </a:lnTo>
-                  <a:lnTo>
-                    <a:pt x="2014223" y="1845446"/>
-                  </a:lnTo>
-                  <a:lnTo>
-                    <a:pt x="2091857" y="1918717"/>
-                  </a:lnTo>
-                  <a:lnTo>
-                    <a:pt x="2169491" y="1989017"/>
-                  </a:lnTo>
-                  <a:lnTo>
-                    <a:pt x="2247125" y="2056466"/>
-                  </a:lnTo>
-                  <a:lnTo>
-                    <a:pt x="2324759" y="2121181"/>
-                  </a:lnTo>
-                  <a:lnTo>
-                    <a:pt x="2402393" y="2183273"/>
-                  </a:lnTo>
-                  <a:lnTo>
-                    <a:pt x="2480027" y="2242847"/>
-                  </a:lnTo>
-                  <a:lnTo>
-                    <a:pt x="2557661" y="2300005"/>
-                  </a:lnTo>
-                  <a:lnTo>
-                    <a:pt x="2635295" y="2354846"/>
-                  </a:lnTo>
-                  <a:lnTo>
-                    <a:pt x="2712930" y="2407464"/>
-                  </a:lnTo>
-                  <a:lnTo>
-                    <a:pt x="2790564" y="2457948"/>
-                  </a:lnTo>
-                  <a:lnTo>
-                    <a:pt x="2868198" y="2506386"/>
-                  </a:lnTo>
-                  <a:lnTo>
-                    <a:pt x="2945832" y="2552859"/>
-                  </a:lnTo>
-                  <a:lnTo>
-                    <a:pt x="3023466" y="2597449"/>
-                  </a:lnTo>
-                  <a:lnTo>
-                    <a:pt x="3101100" y="2640230"/>
-                  </a:lnTo>
-                  <a:lnTo>
-                    <a:pt x="3178734" y="2681277"/>
-                  </a:lnTo>
-                  <a:lnTo>
-                    <a:pt x="3256368" y="2720660"/>
-                  </a:lnTo>
-                  <a:lnTo>
-                    <a:pt x="3334002" y="2758446"/>
-                  </a:lnTo>
-                  <a:lnTo>
-                    <a:pt x="3411636" y="2780652"/>
-                  </a:lnTo>
-                  <a:lnTo>
-                    <a:pt x="3489270" y="2773564"/>
-                  </a:lnTo>
-                  <a:lnTo>
-                    <a:pt x="3566904" y="2766419"/>
-                  </a:lnTo>
-                  <a:lnTo>
-                    <a:pt x="3644538" y="2759215"/>
-                  </a:lnTo>
-                  <a:lnTo>
-                    <a:pt x="3722172" y="2751953"/>
-                  </a:lnTo>
-                  <a:lnTo>
-                    <a:pt x="3799806" y="2744632"/>
-                  </a:lnTo>
-                  <a:lnTo>
-                    <a:pt x="3877440" y="2737251"/>
-                  </a:lnTo>
-                  <a:lnTo>
-                    <a:pt x="3955074" y="2729810"/>
-                  </a:lnTo>
-                  <a:lnTo>
-                    <a:pt x="4032708" y="2722309"/>
-                  </a:lnTo>
-                  <a:lnTo>
-                    <a:pt x="4110342" y="2714747"/>
-                  </a:lnTo>
-                  <a:lnTo>
-                    <a:pt x="4187976" y="2707123"/>
-                  </a:lnTo>
-                  <a:lnTo>
-                    <a:pt x="4265610" y="2699438"/>
-                  </a:lnTo>
-                  <a:lnTo>
-                    <a:pt x="4343244" y="2691690"/>
-                  </a:lnTo>
-                  <a:lnTo>
-                    <a:pt x="4420879" y="2683879"/>
-                  </a:lnTo>
-                  <a:lnTo>
-                    <a:pt x="4498513" y="2676004"/>
-                  </a:lnTo>
-                  <a:lnTo>
-                    <a:pt x="4576147" y="2668066"/>
-                  </a:lnTo>
-                  <a:lnTo>
-                    <a:pt x="4653781" y="2660063"/>
-                  </a:lnTo>
-                  <a:lnTo>
-                    <a:pt x="4731415" y="2651995"/>
-                  </a:lnTo>
-                  <a:lnTo>
-                    <a:pt x="4809049" y="2643861"/>
-                  </a:lnTo>
-                  <a:lnTo>
-                    <a:pt x="4886683" y="2635661"/>
-                  </a:lnTo>
-                  <a:lnTo>
-                    <a:pt x="4964317" y="2627395"/>
-                  </a:lnTo>
-                  <a:lnTo>
-                    <a:pt x="5041951" y="2619061"/>
-                  </a:lnTo>
-                  <a:lnTo>
-                    <a:pt x="5119585" y="2610659"/>
-                  </a:lnTo>
-                  <a:lnTo>
-                    <a:pt x="5197219" y="2602190"/>
-                  </a:lnTo>
-                  <a:lnTo>
-                    <a:pt x="5274853" y="2593651"/>
-                  </a:lnTo>
-                  <a:lnTo>
-                    <a:pt x="5352487" y="2585043"/>
-                  </a:lnTo>
-                  <a:lnTo>
-                    <a:pt x="5430121" y="2576365"/>
-                  </a:lnTo>
-                  <a:lnTo>
-                    <a:pt x="5507755" y="2567617"/>
-                  </a:lnTo>
-                  <a:lnTo>
-                    <a:pt x="5585389" y="2558797"/>
-                  </a:lnTo>
-                  <a:lnTo>
-                    <a:pt x="5663023" y="2549906"/>
-                  </a:lnTo>
-                  <a:lnTo>
-                    <a:pt x="5740657" y="2540943"/>
-                  </a:lnTo>
-                  <a:lnTo>
-                    <a:pt x="5818291" y="2531906"/>
-                  </a:lnTo>
-                  <a:lnTo>
-                    <a:pt x="5895925" y="2522796"/>
-                  </a:lnTo>
-                  <a:lnTo>
-                    <a:pt x="5973559" y="2513612"/>
-                  </a:lnTo>
-                  <a:lnTo>
-                    <a:pt x="6051193" y="2504354"/>
-                  </a:lnTo>
-                  <a:lnTo>
-                    <a:pt x="6128827" y="2495020"/>
-                  </a:lnTo>
-                  <a:lnTo>
-                    <a:pt x="6206462" y="2485610"/>
-                  </a:lnTo>
-                  <a:lnTo>
-                    <a:pt x="6284096" y="2476124"/>
-                  </a:lnTo>
-                  <a:lnTo>
-                    <a:pt x="6361730" y="2466561"/>
-                  </a:lnTo>
-                  <a:lnTo>
-                    <a:pt x="6439364" y="2456920"/>
-                  </a:lnTo>
-                  <a:lnTo>
-                    <a:pt x="6516998" y="2447201"/>
-                  </a:lnTo>
-                  <a:lnTo>
-                    <a:pt x="6594632" y="2437402"/>
-                  </a:lnTo>
-                  <a:lnTo>
-                    <a:pt x="6672266" y="2427524"/>
-                  </a:lnTo>
-                  <a:lnTo>
-                    <a:pt x="6749900" y="2417566"/>
-                  </a:lnTo>
-                  <a:lnTo>
-                    <a:pt x="6827534" y="2407527"/>
-                  </a:lnTo>
-                  <a:lnTo>
-                    <a:pt x="6905168" y="2397406"/>
-                  </a:lnTo>
-                  <a:lnTo>
-                    <a:pt x="6982802" y="2387203"/>
-                  </a:lnTo>
-                  <a:lnTo>
-                    <a:pt x="7060436" y="2376917"/>
-                  </a:lnTo>
-                  <a:lnTo>
-                    <a:pt x="7138070" y="2366547"/>
-                  </a:lnTo>
-                  <a:lnTo>
-                    <a:pt x="7215704" y="2356093"/>
-                  </a:lnTo>
-                  <a:lnTo>
-                    <a:pt x="7293338" y="2345554"/>
-                  </a:lnTo>
-                  <a:lnTo>
-                    <a:pt x="7370972" y="2334930"/>
-                  </a:lnTo>
-                  <a:lnTo>
-                    <a:pt x="7370972" y="3548713"/>
-                  </a:lnTo>
-                  <a:lnTo>
-                    <a:pt x="7293338" y="3544322"/>
-                  </a:lnTo>
-                  <a:lnTo>
-                    <a:pt x="7215704" y="3539744"/>
-                  </a:lnTo>
-                  <a:lnTo>
-                    <a:pt x="7138070" y="3534973"/>
-                  </a:lnTo>
-                  <a:lnTo>
-                    <a:pt x="7060436" y="3530001"/>
-                  </a:lnTo>
-                  <a:lnTo>
-                    <a:pt x="6982802" y="3524818"/>
-                  </a:lnTo>
-                  <a:lnTo>
-                    <a:pt x="6905168" y="3519417"/>
-                  </a:lnTo>
-                  <a:lnTo>
-                    <a:pt x="6827534" y="3513787"/>
-                  </a:lnTo>
-                  <a:lnTo>
-                    <a:pt x="6749900" y="3507920"/>
-                  </a:lnTo>
-                  <a:lnTo>
-                    <a:pt x="6672266" y="3501804"/>
-                  </a:lnTo>
-                  <a:lnTo>
-                    <a:pt x="6594632" y="3495430"/>
-                  </a:lnTo>
-                  <a:lnTo>
-                    <a:pt x="6516998" y="3488787"/>
-                  </a:lnTo>
-                  <a:lnTo>
-                    <a:pt x="6439364" y="3481862"/>
-                  </a:lnTo>
-                  <a:lnTo>
-                    <a:pt x="6361730" y="3474646"/>
-                  </a:lnTo>
-                  <a:lnTo>
-                    <a:pt x="6284096" y="3467124"/>
-                  </a:lnTo>
-                  <a:lnTo>
-                    <a:pt x="6206462" y="3459285"/>
-                  </a:lnTo>
-                  <a:lnTo>
-                    <a:pt x="6128827" y="3451114"/>
-                  </a:lnTo>
-                  <a:lnTo>
-                    <a:pt x="6051193" y="3442598"/>
-                  </a:lnTo>
-                  <a:lnTo>
-                    <a:pt x="5973559" y="3433722"/>
-                  </a:lnTo>
-                  <a:lnTo>
-                    <a:pt x="5895925" y="3424471"/>
-                  </a:lnTo>
-                  <a:lnTo>
-                    <a:pt x="5818291" y="3414829"/>
-                  </a:lnTo>
-                  <a:lnTo>
-                    <a:pt x="5740657" y="3404780"/>
-                  </a:lnTo>
-                  <a:lnTo>
-                    <a:pt x="5663023" y="3394306"/>
-                  </a:lnTo>
-                  <a:lnTo>
-                    <a:pt x="5585389" y="3383389"/>
-                  </a:lnTo>
-                  <a:lnTo>
-                    <a:pt x="5507755" y="3372011"/>
-                  </a:lnTo>
-                  <a:lnTo>
-                    <a:pt x="5430121" y="3360152"/>
-                  </a:lnTo>
-                  <a:lnTo>
-                    <a:pt x="5352487" y="3347793"/>
-                  </a:lnTo>
-                  <a:lnTo>
-                    <a:pt x="5274853" y="3334911"/>
-                  </a:lnTo>
-                  <a:lnTo>
-                    <a:pt x="5197219" y="3321484"/>
-                  </a:lnTo>
-                  <a:lnTo>
-                    <a:pt x="5119585" y="3307490"/>
-                  </a:lnTo>
-                  <a:lnTo>
-                    <a:pt x="5041951" y="3292905"/>
-                  </a:lnTo>
-                  <a:lnTo>
-                    <a:pt x="4964317" y="3277704"/>
-                  </a:lnTo>
-                  <a:lnTo>
-                    <a:pt x="4886683" y="3261860"/>
-                  </a:lnTo>
-                  <a:lnTo>
-                    <a:pt x="4809049" y="3245346"/>
-                  </a:lnTo>
-                  <a:lnTo>
-                    <a:pt x="4731415" y="3228135"/>
-                  </a:lnTo>
-                  <a:lnTo>
-                    <a:pt x="4653781" y="3210197"/>
-                  </a:lnTo>
-                  <a:lnTo>
-                    <a:pt x="4576147" y="3191500"/>
-                  </a:lnTo>
-                  <a:lnTo>
-                    <a:pt x="4498513" y="3172014"/>
-                  </a:lnTo>
-                  <a:lnTo>
-                    <a:pt x="4420879" y="3151704"/>
-                  </a:lnTo>
-                  <a:lnTo>
-                    <a:pt x="4343244" y="3130536"/>
-                  </a:lnTo>
-                  <a:lnTo>
-                    <a:pt x="4265610" y="3108473"/>
-                  </a:lnTo>
-                  <a:lnTo>
-                    <a:pt x="4187976" y="3085478"/>
-                  </a:lnTo>
-                  <a:lnTo>
-                    <a:pt x="4110342" y="3061511"/>
-                  </a:lnTo>
-                  <a:lnTo>
-                    <a:pt x="4032708" y="3036532"/>
-                  </a:lnTo>
-                  <a:lnTo>
-                    <a:pt x="3955074" y="3010496"/>
-                  </a:lnTo>
-                  <a:lnTo>
-                    <a:pt x="3877440" y="2983361"/>
-                  </a:lnTo>
-                  <a:lnTo>
-                    <a:pt x="3799806" y="2955079"/>
-                  </a:lnTo>
-                  <a:lnTo>
-                    <a:pt x="3722172" y="2925602"/>
-                  </a:lnTo>
-                  <a:lnTo>
-                    <a:pt x="3644538" y="2894880"/>
-                  </a:lnTo>
-                  <a:lnTo>
-                    <a:pt x="3566904" y="2862859"/>
-                  </a:lnTo>
-                  <a:lnTo>
-                    <a:pt x="3489270" y="2829485"/>
-                  </a:lnTo>
-                  <a:lnTo>
-                    <a:pt x="3411636" y="2794701"/>
-                  </a:lnTo>
-                  <a:lnTo>
-                    <a:pt x="3334002" y="2787683"/>
-                  </a:lnTo>
-                  <a:lnTo>
-                    <a:pt x="3256368" y="2794657"/>
-                  </a:lnTo>
-                  <a:lnTo>
-                    <a:pt x="3178734" y="2801575"/>
-                  </a:lnTo>
-                  <a:lnTo>
-                    <a:pt x="3101100" y="2808437"/>
-                  </a:lnTo>
-                  <a:lnTo>
-                    <a:pt x="3023466" y="2815244"/>
-                  </a:lnTo>
-                  <a:lnTo>
-                    <a:pt x="2945832" y="2821996"/>
-                  </a:lnTo>
-                  <a:lnTo>
-                    <a:pt x="2868198" y="2828693"/>
-                  </a:lnTo>
-                  <a:lnTo>
-                    <a:pt x="2790564" y="2835337"/>
-                  </a:lnTo>
-                  <a:lnTo>
-                    <a:pt x="2712930" y="2841926"/>
-                  </a:lnTo>
-                  <a:lnTo>
-                    <a:pt x="2635295" y="2848463"/>
-                  </a:lnTo>
-                  <a:lnTo>
-                    <a:pt x="2557661" y="2854947"/>
-                  </a:lnTo>
-                  <a:lnTo>
-                    <a:pt x="2480027" y="2861379"/>
-                  </a:lnTo>
-                  <a:lnTo>
-                    <a:pt x="2402393" y="2867759"/>
-                  </a:lnTo>
-                  <a:lnTo>
-                    <a:pt x="2324759" y="2874087"/>
-                  </a:lnTo>
-                  <a:lnTo>
-                    <a:pt x="2247125" y="2880365"/>
-                  </a:lnTo>
-                  <a:lnTo>
-                    <a:pt x="2169491" y="2886591"/>
-                  </a:lnTo>
-                  <a:lnTo>
-                    <a:pt x="2091857" y="2892768"/>
-                  </a:lnTo>
-                  <a:lnTo>
-                    <a:pt x="2014223" y="2898895"/>
-                  </a:lnTo>
-                  <a:lnTo>
-                    <a:pt x="1936589" y="2904972"/>
-                  </a:lnTo>
-                  <a:lnTo>
-                    <a:pt x="1858955" y="2911001"/>
-                  </a:lnTo>
-                  <a:lnTo>
-                    <a:pt x="1781321" y="2916980"/>
-                  </a:lnTo>
-                  <a:lnTo>
-                    <a:pt x="1703687" y="2922912"/>
-                  </a:lnTo>
-                  <a:lnTo>
-                    <a:pt x="1626053" y="2928796"/>
-                  </a:lnTo>
-                  <a:lnTo>
-                    <a:pt x="1548419" y="2934632"/>
-                  </a:lnTo>
-                  <a:lnTo>
-                    <a:pt x="1470785" y="2940421"/>
-                  </a:lnTo>
-                  <a:lnTo>
-                    <a:pt x="1393151" y="2946164"/>
-                  </a:lnTo>
-                  <a:lnTo>
-                    <a:pt x="1315517" y="2951860"/>
-                  </a:lnTo>
-                  <a:lnTo>
-                    <a:pt x="1237883" y="2957510"/>
-                  </a:lnTo>
-                  <a:lnTo>
-                    <a:pt x="1160249" y="2963115"/>
-                  </a:lnTo>
-                  <a:lnTo>
-                    <a:pt x="1082615" y="2968675"/>
-                  </a:lnTo>
-                  <a:lnTo>
-                    <a:pt x="1004981" y="2974190"/>
-                  </a:lnTo>
-                  <a:lnTo>
-                    <a:pt x="927346" y="2979660"/>
-                  </a:lnTo>
-                  <a:lnTo>
-                    <a:pt x="849712" y="2985086"/>
-                  </a:lnTo>
-                  <a:lnTo>
-                    <a:pt x="772078" y="2990468"/>
-                  </a:lnTo>
-                  <a:lnTo>
-                    <a:pt x="694444" y="2995807"/>
-                  </a:lnTo>
-                  <a:lnTo>
-                    <a:pt x="616810" y="3001103"/>
-                  </a:lnTo>
-                  <a:lnTo>
-                    <a:pt x="539176" y="3006357"/>
-                  </a:lnTo>
-                  <a:lnTo>
-                    <a:pt x="461542" y="3011568"/>
-                  </a:lnTo>
-                  <a:lnTo>
-                    <a:pt x="383908" y="3016737"/>
-                  </a:lnTo>
-                  <a:lnTo>
-                    <a:pt x="306274" y="3021864"/>
-                  </a:lnTo>
-                  <a:lnTo>
-                    <a:pt x="228640" y="3026950"/>
-                  </a:lnTo>
-                  <a:lnTo>
-                    <a:pt x="151006" y="3031995"/>
-                  </a:lnTo>
-                  <a:lnTo>
-                    <a:pt x="73372" y="3036999"/>
-                  </a:lnTo>
-                  <a:lnTo>
-                    <a:pt x="0" y="3041690"/>
+                    <a:pt x="616810" y="25537"/>
+                  </a:lnTo>
+                  <a:lnTo>
+                    <a:pt x="694444" y="167875"/>
+                  </a:lnTo>
+                  <a:lnTo>
+                    <a:pt x="772078" y="304627"/>
+                  </a:lnTo>
+                  <a:lnTo>
+                    <a:pt x="849712" y="436013"/>
+                  </a:lnTo>
+                  <a:lnTo>
+                    <a:pt x="927346" y="562242"/>
+                  </a:lnTo>
+                  <a:lnTo>
+                    <a:pt x="1004981" y="683518"/>
+                  </a:lnTo>
+                  <a:lnTo>
+                    <a:pt x="1082615" y="800035"/>
+                  </a:lnTo>
+                  <a:lnTo>
+                    <a:pt x="1160249" y="911980"/>
+                  </a:lnTo>
+                  <a:lnTo>
+                    <a:pt x="1237883" y="1019531"/>
+                  </a:lnTo>
+                  <a:lnTo>
+                    <a:pt x="1315517" y="1122862"/>
+                  </a:lnTo>
+                  <a:lnTo>
+                    <a:pt x="1393151" y="1222137"/>
+                  </a:lnTo>
+                  <a:lnTo>
+                    <a:pt x="1470785" y="1317517"/>
+                  </a:lnTo>
+                  <a:lnTo>
+                    <a:pt x="1548419" y="1409154"/>
+                  </a:lnTo>
+                  <a:lnTo>
+                    <a:pt x="1626053" y="1497195"/>
+                  </a:lnTo>
+                  <a:lnTo>
+                    <a:pt x="1703687" y="1581781"/>
+                  </a:lnTo>
+                  <a:lnTo>
+                    <a:pt x="1781321" y="1663047"/>
+                  </a:lnTo>
+                  <a:lnTo>
+                    <a:pt x="1858955" y="1741125"/>
+                  </a:lnTo>
+                  <a:lnTo>
+                    <a:pt x="1936589" y="1816138"/>
+                  </a:lnTo>
+                  <a:lnTo>
+                    <a:pt x="2014223" y="1888208"/>
+                  </a:lnTo>
+                  <a:lnTo>
+                    <a:pt x="2091857" y="1957449"/>
+                  </a:lnTo>
+                  <a:lnTo>
+                    <a:pt x="2169491" y="2023973"/>
+                  </a:lnTo>
+                  <a:lnTo>
+                    <a:pt x="2247125" y="2087887"/>
+                  </a:lnTo>
+                  <a:lnTo>
+                    <a:pt x="2324759" y="2149292"/>
+                  </a:lnTo>
+                  <a:lnTo>
+                    <a:pt x="2402393" y="2208288"/>
+                  </a:lnTo>
+                  <a:lnTo>
+                    <a:pt x="2480027" y="2264968"/>
+                  </a:lnTo>
+                  <a:lnTo>
+                    <a:pt x="2557661" y="2319425"/>
+                  </a:lnTo>
+                  <a:lnTo>
+                    <a:pt x="2635295" y="2371744"/>
+                  </a:lnTo>
+                  <a:lnTo>
+                    <a:pt x="2712930" y="2422010"/>
+                  </a:lnTo>
+                  <a:lnTo>
+                    <a:pt x="2790564" y="2470304"/>
+                  </a:lnTo>
+                  <a:lnTo>
+                    <a:pt x="2868198" y="2516702"/>
+                  </a:lnTo>
+                  <a:lnTo>
+                    <a:pt x="2945832" y="2561279"/>
+                  </a:lnTo>
+                  <a:lnTo>
+                    <a:pt x="3023466" y="2604108"/>
+                  </a:lnTo>
+                  <a:lnTo>
+                    <a:pt x="3101100" y="2645255"/>
+                  </a:lnTo>
+                  <a:lnTo>
+                    <a:pt x="3178734" y="2684788"/>
+                  </a:lnTo>
+                  <a:lnTo>
+                    <a:pt x="3256368" y="2722769"/>
+                  </a:lnTo>
+                  <a:lnTo>
+                    <a:pt x="3334002" y="2759260"/>
+                  </a:lnTo>
+                  <a:lnTo>
+                    <a:pt x="3411636" y="2781274"/>
+                  </a:lnTo>
+                  <a:lnTo>
+                    <a:pt x="3489270" y="2776096"/>
+                  </a:lnTo>
+                  <a:lnTo>
+                    <a:pt x="3566904" y="2770888"/>
+                  </a:lnTo>
+                  <a:lnTo>
+                    <a:pt x="3644538" y="2765649"/>
+                  </a:lnTo>
+                  <a:lnTo>
+                    <a:pt x="3722172" y="2760379"/>
+                  </a:lnTo>
+                  <a:lnTo>
+                    <a:pt x="3799806" y="2755078"/>
+                  </a:lnTo>
+                  <a:lnTo>
+                    <a:pt x="3877440" y="2749745"/>
+                  </a:lnTo>
+                  <a:lnTo>
+                    <a:pt x="3955074" y="2744380"/>
+                  </a:lnTo>
+                  <a:lnTo>
+                    <a:pt x="4032708" y="2738984"/>
+                  </a:lnTo>
+                  <a:lnTo>
+                    <a:pt x="4110342" y="2733555"/>
+                  </a:lnTo>
+                  <a:lnTo>
+                    <a:pt x="4187976" y="2728095"/>
+                  </a:lnTo>
+                  <a:lnTo>
+                    <a:pt x="4265610" y="2722601"/>
+                  </a:lnTo>
+                  <a:lnTo>
+                    <a:pt x="4343244" y="2717075"/>
+                  </a:lnTo>
+                  <a:lnTo>
+                    <a:pt x="4420879" y="2711517"/>
+                  </a:lnTo>
+                  <a:lnTo>
+                    <a:pt x="4498513" y="2705925"/>
+                  </a:lnTo>
+                  <a:lnTo>
+                    <a:pt x="4576147" y="2700300"/>
+                  </a:lnTo>
+                  <a:lnTo>
+                    <a:pt x="4653781" y="2694642"/>
+                  </a:lnTo>
+                  <a:lnTo>
+                    <a:pt x="4731415" y="2688950"/>
+                  </a:lnTo>
+                  <a:lnTo>
+                    <a:pt x="4809049" y="2683224"/>
+                  </a:lnTo>
+                  <a:lnTo>
+                    <a:pt x="4886683" y="2677464"/>
+                  </a:lnTo>
+                  <a:lnTo>
+                    <a:pt x="4964317" y="2671670"/>
+                  </a:lnTo>
+                  <a:lnTo>
+                    <a:pt x="5041951" y="2665842"/>
+                  </a:lnTo>
+                  <a:lnTo>
+                    <a:pt x="5119585" y="2659978"/>
+                  </a:lnTo>
+                  <a:lnTo>
+                    <a:pt x="5197219" y="2654080"/>
+                  </a:lnTo>
+                  <a:lnTo>
+                    <a:pt x="5274853" y="2648147"/>
+                  </a:lnTo>
+                  <a:lnTo>
+                    <a:pt x="5352487" y="2642179"/>
+                  </a:lnTo>
+                  <a:lnTo>
+                    <a:pt x="5430121" y="2636176"/>
+                  </a:lnTo>
+                  <a:lnTo>
+                    <a:pt x="5507755" y="2630136"/>
+                  </a:lnTo>
+                  <a:lnTo>
+                    <a:pt x="5585389" y="2624061"/>
+                  </a:lnTo>
+                  <a:lnTo>
+                    <a:pt x="5663023" y="2617950"/>
+                  </a:lnTo>
+                  <a:lnTo>
+                    <a:pt x="5740657" y="2611802"/>
+                  </a:lnTo>
+                  <a:lnTo>
+                    <a:pt x="5818291" y="2605618"/>
+                  </a:lnTo>
+                  <a:lnTo>
+                    <a:pt x="5895925" y="2599397"/>
+                  </a:lnTo>
+                  <a:lnTo>
+                    <a:pt x="5973559" y="2593139"/>
+                  </a:lnTo>
+                  <a:lnTo>
+                    <a:pt x="6051193" y="2586844"/>
+                  </a:lnTo>
+                  <a:lnTo>
+                    <a:pt x="6128827" y="2580511"/>
+                  </a:lnTo>
+                  <a:lnTo>
+                    <a:pt x="6206462" y="2574141"/>
+                  </a:lnTo>
+                  <a:lnTo>
+                    <a:pt x="6284096" y="2567733"/>
+                  </a:lnTo>
+                  <a:lnTo>
+                    <a:pt x="6361730" y="2561287"/>
+                  </a:lnTo>
+                  <a:lnTo>
+                    <a:pt x="6439364" y="2554803"/>
+                  </a:lnTo>
+                  <a:lnTo>
+                    <a:pt x="6516998" y="2548280"/>
+                  </a:lnTo>
+                  <a:lnTo>
+                    <a:pt x="6594632" y="2541719"/>
+                  </a:lnTo>
+                  <a:lnTo>
+                    <a:pt x="6672266" y="2535118"/>
+                  </a:lnTo>
+                  <a:lnTo>
+                    <a:pt x="6749900" y="2528478"/>
+                  </a:lnTo>
+                  <a:lnTo>
+                    <a:pt x="6827534" y="2521799"/>
+                  </a:lnTo>
+                  <a:lnTo>
+                    <a:pt x="6905168" y="2515080"/>
+                  </a:lnTo>
+                  <a:lnTo>
+                    <a:pt x="6982802" y="2508321"/>
+                  </a:lnTo>
+                  <a:lnTo>
+                    <a:pt x="7060436" y="2501522"/>
+                  </a:lnTo>
+                  <a:lnTo>
+                    <a:pt x="7138070" y="2494683"/>
+                  </a:lnTo>
+                  <a:lnTo>
+                    <a:pt x="7215704" y="2487803"/>
+                  </a:lnTo>
+                  <a:lnTo>
+                    <a:pt x="7293338" y="2480882"/>
+                  </a:lnTo>
+                  <a:lnTo>
+                    <a:pt x="7370972" y="2473920"/>
+                  </a:lnTo>
+                  <a:lnTo>
+                    <a:pt x="7370972" y="3541227"/>
+                  </a:lnTo>
+                  <a:lnTo>
+                    <a:pt x="7293338" y="3536676"/>
+                  </a:lnTo>
+                  <a:lnTo>
+                    <a:pt x="7215704" y="3531940"/>
+                  </a:lnTo>
+                  <a:lnTo>
+                    <a:pt x="7138070" y="3527010"/>
+                  </a:lnTo>
+                  <a:lnTo>
+                    <a:pt x="7060436" y="3521878"/>
+                  </a:lnTo>
+                  <a:lnTo>
+                    <a:pt x="6982802" y="3516537"/>
+                  </a:lnTo>
+                  <a:lnTo>
+                    <a:pt x="6905168" y="3510977"/>
+                  </a:lnTo>
+                  <a:lnTo>
+                    <a:pt x="6827534" y="3505191"/>
+                  </a:lnTo>
+                  <a:lnTo>
+                    <a:pt x="6749900" y="3499168"/>
+                  </a:lnTo>
+                  <a:lnTo>
+                    <a:pt x="6672266" y="3492899"/>
+                  </a:lnTo>
+                  <a:lnTo>
+                    <a:pt x="6594632" y="3486374"/>
+                  </a:lnTo>
+                  <a:lnTo>
+                    <a:pt x="6516998" y="3479583"/>
+                  </a:lnTo>
+                  <a:lnTo>
+                    <a:pt x="6439364" y="3472514"/>
+                  </a:lnTo>
+                  <a:lnTo>
+                    <a:pt x="6361730" y="3465157"/>
+                  </a:lnTo>
+                  <a:lnTo>
+                    <a:pt x="6284096" y="3457499"/>
+                  </a:lnTo>
+                  <a:lnTo>
+                    <a:pt x="6206462" y="3449528"/>
+                  </a:lnTo>
+                  <a:lnTo>
+                    <a:pt x="6128827" y="3441232"/>
+                  </a:lnTo>
+                  <a:lnTo>
+                    <a:pt x="6051193" y="3432596"/>
+                  </a:lnTo>
+                  <a:lnTo>
+                    <a:pt x="5973559" y="3423608"/>
+                  </a:lnTo>
+                  <a:lnTo>
+                    <a:pt x="5895925" y="3414253"/>
+                  </a:lnTo>
+                  <a:lnTo>
+                    <a:pt x="5818291" y="3404516"/>
+                  </a:lnTo>
+                  <a:lnTo>
+                    <a:pt x="5740657" y="3394381"/>
+                  </a:lnTo>
+                  <a:lnTo>
+                    <a:pt x="5663023" y="3383832"/>
+                  </a:lnTo>
+                  <a:lnTo>
+                    <a:pt x="5585389" y="3372852"/>
+                  </a:lnTo>
+                  <a:lnTo>
+                    <a:pt x="5507755" y="3361424"/>
+                  </a:lnTo>
+                  <a:lnTo>
+                    <a:pt x="5430121" y="3349529"/>
+                  </a:lnTo>
+                  <a:lnTo>
+                    <a:pt x="5352487" y="3337148"/>
+                  </a:lnTo>
+                  <a:lnTo>
+                    <a:pt x="5274853" y="3324262"/>
+                  </a:lnTo>
+                  <a:lnTo>
+                    <a:pt x="5197219" y="3310849"/>
+                  </a:lnTo>
+                  <a:lnTo>
+                    <a:pt x="5119585" y="3296888"/>
+                  </a:lnTo>
+                  <a:lnTo>
+                    <a:pt x="5041951" y="3282357"/>
+                  </a:lnTo>
+                  <a:lnTo>
+                    <a:pt x="4964317" y="3267232"/>
+                  </a:lnTo>
+                  <a:lnTo>
+                    <a:pt x="4886683" y="3251490"/>
+                  </a:lnTo>
+                  <a:lnTo>
+                    <a:pt x="4809049" y="3235104"/>
+                  </a:lnTo>
+                  <a:lnTo>
+                    <a:pt x="4731415" y="3218050"/>
+                  </a:lnTo>
+                  <a:lnTo>
+                    <a:pt x="4653781" y="3200298"/>
+                  </a:lnTo>
+                  <a:lnTo>
+                    <a:pt x="4576147" y="3181822"/>
+                  </a:lnTo>
+                  <a:lnTo>
+                    <a:pt x="4498513" y="3162591"/>
+                  </a:lnTo>
+                  <a:lnTo>
+                    <a:pt x="4420879" y="3142574"/>
+                  </a:lnTo>
+                  <a:lnTo>
+                    <a:pt x="4343244" y="3121740"/>
+                  </a:lnTo>
+                  <a:lnTo>
+                    <a:pt x="4265610" y="3100055"/>
+                  </a:lnTo>
+                  <a:lnTo>
+                    <a:pt x="4187976" y="3077484"/>
+                  </a:lnTo>
+                  <a:lnTo>
+                    <a:pt x="4110342" y="3053992"/>
+                  </a:lnTo>
+                  <a:lnTo>
+                    <a:pt x="4032708" y="3029539"/>
+                  </a:lnTo>
+                  <a:lnTo>
+                    <a:pt x="3955074" y="3004088"/>
+                  </a:lnTo>
+                  <a:lnTo>
+                    <a:pt x="3877440" y="2977597"/>
+                  </a:lnTo>
+                  <a:lnTo>
+                    <a:pt x="3799806" y="2950025"/>
+                  </a:lnTo>
+                  <a:lnTo>
+                    <a:pt x="3722172" y="2921326"/>
+                  </a:lnTo>
+                  <a:lnTo>
+                    <a:pt x="3644538" y="2891454"/>
+                  </a:lnTo>
+                  <a:lnTo>
+                    <a:pt x="3566904" y="2860363"/>
+                  </a:lnTo>
+                  <a:lnTo>
+                    <a:pt x="3489270" y="2828002"/>
+                  </a:lnTo>
+                  <a:lnTo>
+                    <a:pt x="3411636" y="2794319"/>
+                  </a:lnTo>
+                  <a:lnTo>
+                    <a:pt x="3334002" y="2786420"/>
+                  </a:lnTo>
+                  <a:lnTo>
+                    <a:pt x="3256368" y="2791537"/>
+                  </a:lnTo>
+                  <a:lnTo>
+                    <a:pt x="3178734" y="2796623"/>
+                  </a:lnTo>
+                  <a:lnTo>
+                    <a:pt x="3101100" y="2801679"/>
+                  </a:lnTo>
+                  <a:lnTo>
+                    <a:pt x="3023466" y="2806705"/>
+                  </a:lnTo>
+                  <a:lnTo>
+                    <a:pt x="2945832" y="2811701"/>
+                  </a:lnTo>
+                  <a:lnTo>
+                    <a:pt x="2868198" y="2816668"/>
+                  </a:lnTo>
+                  <a:lnTo>
+                    <a:pt x="2790564" y="2821606"/>
+                  </a:lnTo>
+                  <a:lnTo>
+                    <a:pt x="2712930" y="2826514"/>
+                  </a:lnTo>
+                  <a:lnTo>
+                    <a:pt x="2635295" y="2831394"/>
+                  </a:lnTo>
+                  <a:lnTo>
+                    <a:pt x="2557661" y="2836244"/>
+                  </a:lnTo>
+                  <a:lnTo>
+                    <a:pt x="2480027" y="2841067"/>
+                  </a:lnTo>
+                  <a:lnTo>
+                    <a:pt x="2402393" y="2845860"/>
+                  </a:lnTo>
+                  <a:lnTo>
+                    <a:pt x="2324759" y="2850625"/>
+                  </a:lnTo>
+                  <a:lnTo>
+                    <a:pt x="2247125" y="2855362"/>
+                  </a:lnTo>
+                  <a:lnTo>
+                    <a:pt x="2169491" y="2860071"/>
+                  </a:lnTo>
+                  <a:lnTo>
+                    <a:pt x="2091857" y="2864753"/>
+                  </a:lnTo>
+                  <a:lnTo>
+                    <a:pt x="2014223" y="2869406"/>
+                  </a:lnTo>
+                  <a:lnTo>
+                    <a:pt x="1936589" y="2874032"/>
+                  </a:lnTo>
+                  <a:lnTo>
+                    <a:pt x="1858955" y="2878631"/>
+                  </a:lnTo>
+                  <a:lnTo>
+                    <a:pt x="1781321" y="2883203"/>
+                  </a:lnTo>
+                  <a:lnTo>
+                    <a:pt x="1703687" y="2887748"/>
+                  </a:lnTo>
+                  <a:lnTo>
+                    <a:pt x="1626053" y="2892265"/>
+                  </a:lnTo>
+                  <a:lnTo>
+                    <a:pt x="1548419" y="2896756"/>
+                  </a:lnTo>
+                  <a:lnTo>
+                    <a:pt x="1470785" y="2901221"/>
+                  </a:lnTo>
+                  <a:lnTo>
+                    <a:pt x="1393151" y="2905659"/>
+                  </a:lnTo>
+                  <a:lnTo>
+                    <a:pt x="1315517" y="2910071"/>
+                  </a:lnTo>
+                  <a:lnTo>
+                    <a:pt x="1237883" y="2914457"/>
+                  </a:lnTo>
+                  <a:lnTo>
+                    <a:pt x="1160249" y="2918817"/>
+                  </a:lnTo>
+                  <a:lnTo>
+                    <a:pt x="1082615" y="2923152"/>
+                  </a:lnTo>
+                  <a:lnTo>
+                    <a:pt x="1004981" y="2927460"/>
+                  </a:lnTo>
+                  <a:lnTo>
+                    <a:pt x="927346" y="2931744"/>
+                  </a:lnTo>
+                  <a:lnTo>
+                    <a:pt x="849712" y="2936001"/>
+                  </a:lnTo>
+                  <a:lnTo>
+                    <a:pt x="772078" y="2940234"/>
+                  </a:lnTo>
+                  <a:lnTo>
+                    <a:pt x="694444" y="2944442"/>
+                  </a:lnTo>
+                  <a:lnTo>
+                    <a:pt x="616810" y="2948625"/>
+                  </a:lnTo>
+                  <a:lnTo>
+                    <a:pt x="539176" y="2952783"/>
+                  </a:lnTo>
+                  <a:lnTo>
+                    <a:pt x="461542" y="2956917"/>
+                  </a:lnTo>
+                  <a:lnTo>
+                    <a:pt x="383908" y="2961026"/>
+                  </a:lnTo>
+                  <a:lnTo>
+                    <a:pt x="306274" y="2965111"/>
+                  </a:lnTo>
+                  <a:lnTo>
+                    <a:pt x="228640" y="2969172"/>
+                  </a:lnTo>
+                  <a:lnTo>
+                    <a:pt x="151006" y="2973209"/>
+                  </a:lnTo>
+                  <a:lnTo>
+                    <a:pt x="73372" y="2977222"/>
+                  </a:lnTo>
+                  <a:lnTo>
+                    <a:pt x="0" y="2980992"/>
                   </a:lnTo>
                   <a:close/>
                 </a:path>
@@ -3585,276 +3588,279 @@
           </p:nvSpPr>
           <p:spPr>
             <a:xfrm>
-              <a:off x="1511838" y="1896563"/>
-              <a:ext cx="6676651" cy="2780652"/>
+              <a:off x="1420946" y="1896563"/>
+              <a:ext cx="6767544" cy="2781274"/>
             </a:xfrm>
             <a:custGeom>
               <a:avLst/>
               <a:pathLst>
-                <a:path w="6676651" h="2780652">
+                <a:path w="6767544" h="2781274">
                   <a:moveTo>
                     <a:pt x="0" y="0"/>
                   </a:moveTo>
                   <a:lnTo>
-                    <a:pt x="123" y="246"/>
-                  </a:lnTo>
-                  <a:lnTo>
-                    <a:pt x="77757" y="148328"/>
-                  </a:lnTo>
-                  <a:lnTo>
-                    <a:pt x="155391" y="290406"/>
-                  </a:lnTo>
-                  <a:lnTo>
-                    <a:pt x="233026" y="426724"/>
-                  </a:lnTo>
-                  <a:lnTo>
-                    <a:pt x="310660" y="557515"/>
-                  </a:lnTo>
-                  <a:lnTo>
-                    <a:pt x="388294" y="683003"/>
-                  </a:lnTo>
-                  <a:lnTo>
-                    <a:pt x="465928" y="803404"/>
-                  </a:lnTo>
-                  <a:lnTo>
-                    <a:pt x="543562" y="918923"/>
-                  </a:lnTo>
-                  <a:lnTo>
-                    <a:pt x="621196" y="1029758"/>
-                  </a:lnTo>
-                  <a:lnTo>
-                    <a:pt x="698830" y="1136100"/>
-                  </a:lnTo>
-                  <a:lnTo>
-                    <a:pt x="776464" y="1238130"/>
-                  </a:lnTo>
-                  <a:lnTo>
-                    <a:pt x="854098" y="1336024"/>
-                  </a:lnTo>
-                  <a:lnTo>
-                    <a:pt x="931732" y="1429948"/>
-                  </a:lnTo>
-                  <a:lnTo>
-                    <a:pt x="1009366" y="1520065"/>
-                  </a:lnTo>
-                  <a:lnTo>
-                    <a:pt x="1087000" y="1606528"/>
-                  </a:lnTo>
-                  <a:lnTo>
-                    <a:pt x="1164634" y="1689485"/>
-                  </a:lnTo>
-                  <a:lnTo>
-                    <a:pt x="1242268" y="1769079"/>
-                  </a:lnTo>
-                  <a:lnTo>
-                    <a:pt x="1319902" y="1845446"/>
-                  </a:lnTo>
-                  <a:lnTo>
-                    <a:pt x="1397536" y="1918717"/>
-                  </a:lnTo>
-                  <a:lnTo>
-                    <a:pt x="1475170" y="1989017"/>
-                  </a:lnTo>
-                  <a:lnTo>
-                    <a:pt x="1552804" y="2056466"/>
-                  </a:lnTo>
-                  <a:lnTo>
-                    <a:pt x="1630438" y="2121181"/>
-                  </a:lnTo>
-                  <a:lnTo>
-                    <a:pt x="1708072" y="2183273"/>
-                  </a:lnTo>
-                  <a:lnTo>
-                    <a:pt x="1785706" y="2242847"/>
-                  </a:lnTo>
-                  <a:lnTo>
-                    <a:pt x="1863340" y="2300005"/>
-                  </a:lnTo>
-                  <a:lnTo>
-                    <a:pt x="1940975" y="2354846"/>
-                  </a:lnTo>
-                  <a:lnTo>
-                    <a:pt x="2018609" y="2407464"/>
-                  </a:lnTo>
-                  <a:lnTo>
-                    <a:pt x="2096243" y="2457948"/>
-                  </a:lnTo>
-                  <a:lnTo>
-                    <a:pt x="2173877" y="2506386"/>
-                  </a:lnTo>
-                  <a:lnTo>
-                    <a:pt x="2251511" y="2552859"/>
-                  </a:lnTo>
-                  <a:lnTo>
-                    <a:pt x="2329145" y="2597449"/>
-                  </a:lnTo>
-                  <a:lnTo>
-                    <a:pt x="2406779" y="2640230"/>
-                  </a:lnTo>
-                  <a:lnTo>
-                    <a:pt x="2484413" y="2681277"/>
-                  </a:lnTo>
-                  <a:lnTo>
-                    <a:pt x="2562047" y="2720660"/>
-                  </a:lnTo>
-                  <a:lnTo>
-                    <a:pt x="2639681" y="2758446"/>
-                  </a:lnTo>
-                  <a:lnTo>
-                    <a:pt x="2717315" y="2780652"/>
-                  </a:lnTo>
-                  <a:lnTo>
-                    <a:pt x="2794949" y="2773564"/>
-                  </a:lnTo>
-                  <a:lnTo>
-                    <a:pt x="2872583" y="2766419"/>
-                  </a:lnTo>
-                  <a:lnTo>
-                    <a:pt x="2950217" y="2759215"/>
-                  </a:lnTo>
-                  <a:lnTo>
-                    <a:pt x="3027851" y="2751953"/>
-                  </a:lnTo>
-                  <a:lnTo>
-                    <a:pt x="3105485" y="2744632"/>
-                  </a:lnTo>
-                  <a:lnTo>
-                    <a:pt x="3183119" y="2737251"/>
-                  </a:lnTo>
-                  <a:lnTo>
-                    <a:pt x="3260753" y="2729810"/>
-                  </a:lnTo>
-                  <a:lnTo>
-                    <a:pt x="3338387" y="2722309"/>
-                  </a:lnTo>
-                  <a:lnTo>
-                    <a:pt x="3416021" y="2714747"/>
-                  </a:lnTo>
-                  <a:lnTo>
-                    <a:pt x="3493655" y="2707123"/>
-                  </a:lnTo>
-                  <a:lnTo>
-                    <a:pt x="3571289" y="2699438"/>
-                  </a:lnTo>
-                  <a:lnTo>
-                    <a:pt x="3648924" y="2691690"/>
-                  </a:lnTo>
-                  <a:lnTo>
-                    <a:pt x="3726558" y="2683879"/>
-                  </a:lnTo>
-                  <a:lnTo>
-                    <a:pt x="3804192" y="2676004"/>
-                  </a:lnTo>
-                  <a:lnTo>
-                    <a:pt x="3881826" y="2668066"/>
-                  </a:lnTo>
-                  <a:lnTo>
-                    <a:pt x="3959460" y="2660063"/>
-                  </a:lnTo>
-                  <a:lnTo>
-                    <a:pt x="4037094" y="2651995"/>
-                  </a:lnTo>
-                  <a:lnTo>
-                    <a:pt x="4114728" y="2643861"/>
-                  </a:lnTo>
-                  <a:lnTo>
-                    <a:pt x="4192362" y="2635661"/>
-                  </a:lnTo>
-                  <a:lnTo>
-                    <a:pt x="4269996" y="2627395"/>
-                  </a:lnTo>
-                  <a:lnTo>
-                    <a:pt x="4347630" y="2619061"/>
-                  </a:lnTo>
-                  <a:lnTo>
-                    <a:pt x="4425264" y="2610659"/>
-                  </a:lnTo>
-                  <a:lnTo>
-                    <a:pt x="4502898" y="2602190"/>
-                  </a:lnTo>
-                  <a:lnTo>
-                    <a:pt x="4580532" y="2593651"/>
-                  </a:lnTo>
-                  <a:lnTo>
-                    <a:pt x="4658166" y="2585043"/>
-                  </a:lnTo>
-                  <a:lnTo>
-                    <a:pt x="4735800" y="2576365"/>
-                  </a:lnTo>
-                  <a:lnTo>
-                    <a:pt x="4813434" y="2567617"/>
-                  </a:lnTo>
-                  <a:lnTo>
-                    <a:pt x="4891068" y="2558797"/>
-                  </a:lnTo>
-                  <a:lnTo>
-                    <a:pt x="4968702" y="2549906"/>
-                  </a:lnTo>
-                  <a:lnTo>
-                    <a:pt x="5046336" y="2540943"/>
-                  </a:lnTo>
-                  <a:lnTo>
-                    <a:pt x="5123970" y="2531906"/>
-                  </a:lnTo>
-                  <a:lnTo>
-                    <a:pt x="5201604" y="2522796"/>
-                  </a:lnTo>
-                  <a:lnTo>
-                    <a:pt x="5279238" y="2513612"/>
-                  </a:lnTo>
-                  <a:lnTo>
-                    <a:pt x="5356872" y="2504354"/>
-                  </a:lnTo>
-                  <a:lnTo>
-                    <a:pt x="5434507" y="2495020"/>
-                  </a:lnTo>
-                  <a:lnTo>
-                    <a:pt x="5512141" y="2485610"/>
-                  </a:lnTo>
-                  <a:lnTo>
-                    <a:pt x="5589775" y="2476124"/>
-                  </a:lnTo>
-                  <a:lnTo>
-                    <a:pt x="5667409" y="2466561"/>
-                  </a:lnTo>
-                  <a:lnTo>
-                    <a:pt x="5745043" y="2456920"/>
-                  </a:lnTo>
-                  <a:lnTo>
-                    <a:pt x="5822677" y="2447201"/>
-                  </a:lnTo>
-                  <a:lnTo>
-                    <a:pt x="5900311" y="2437402"/>
-                  </a:lnTo>
-                  <a:lnTo>
-                    <a:pt x="5977945" y="2427524"/>
-                  </a:lnTo>
-                  <a:lnTo>
-                    <a:pt x="6055579" y="2417566"/>
-                  </a:lnTo>
-                  <a:lnTo>
-                    <a:pt x="6133213" y="2407527"/>
-                  </a:lnTo>
-                  <a:lnTo>
-                    <a:pt x="6210847" y="2397406"/>
-                  </a:lnTo>
-                  <a:lnTo>
-                    <a:pt x="6288481" y="2387203"/>
-                  </a:lnTo>
-                  <a:lnTo>
-                    <a:pt x="6366115" y="2376917"/>
-                  </a:lnTo>
-                  <a:lnTo>
-                    <a:pt x="6443749" y="2366547"/>
-                  </a:lnTo>
-                  <a:lnTo>
-                    <a:pt x="6521383" y="2356093"/>
-                  </a:lnTo>
-                  <a:lnTo>
-                    <a:pt x="6599017" y="2345554"/>
-                  </a:lnTo>
-                  <a:lnTo>
-                    <a:pt x="6676651" y="2334930"/>
+                    <a:pt x="13382" y="25537"/>
+                  </a:lnTo>
+                  <a:lnTo>
+                    <a:pt x="91016" y="167875"/>
+                  </a:lnTo>
+                  <a:lnTo>
+                    <a:pt x="168650" y="304627"/>
+                  </a:lnTo>
+                  <a:lnTo>
+                    <a:pt x="246284" y="436013"/>
+                  </a:lnTo>
+                  <a:lnTo>
+                    <a:pt x="323918" y="562242"/>
+                  </a:lnTo>
+                  <a:lnTo>
+                    <a:pt x="401552" y="683518"/>
+                  </a:lnTo>
+                  <a:lnTo>
+                    <a:pt x="479186" y="800035"/>
+                  </a:lnTo>
+                  <a:lnTo>
+                    <a:pt x="556820" y="911980"/>
+                  </a:lnTo>
+                  <a:lnTo>
+                    <a:pt x="634454" y="1019531"/>
+                  </a:lnTo>
+                  <a:lnTo>
+                    <a:pt x="712088" y="1122862"/>
+                  </a:lnTo>
+                  <a:lnTo>
+                    <a:pt x="789722" y="1222137"/>
+                  </a:lnTo>
+                  <a:lnTo>
+                    <a:pt x="867356" y="1317517"/>
+                  </a:lnTo>
+                  <a:lnTo>
+                    <a:pt x="944990" y="1409154"/>
+                  </a:lnTo>
+                  <a:lnTo>
+                    <a:pt x="1022624" y="1497195"/>
+                  </a:lnTo>
+                  <a:lnTo>
+                    <a:pt x="1100258" y="1581781"/>
+                  </a:lnTo>
+                  <a:lnTo>
+                    <a:pt x="1177892" y="1663047"/>
+                  </a:lnTo>
+                  <a:lnTo>
+                    <a:pt x="1255526" y="1741125"/>
+                  </a:lnTo>
+                  <a:lnTo>
+                    <a:pt x="1333161" y="1816138"/>
+                  </a:lnTo>
+                  <a:lnTo>
+                    <a:pt x="1410795" y="1888208"/>
+                  </a:lnTo>
+                  <a:lnTo>
+                    <a:pt x="1488429" y="1957449"/>
+                  </a:lnTo>
+                  <a:lnTo>
+                    <a:pt x="1566063" y="2023973"/>
+                  </a:lnTo>
+                  <a:lnTo>
+                    <a:pt x="1643697" y="2087887"/>
+                  </a:lnTo>
+                  <a:lnTo>
+                    <a:pt x="1721331" y="2149292"/>
+                  </a:lnTo>
+                  <a:lnTo>
+                    <a:pt x="1798965" y="2208288"/>
+                  </a:lnTo>
+                  <a:lnTo>
+                    <a:pt x="1876599" y="2264968"/>
+                  </a:lnTo>
+                  <a:lnTo>
+                    <a:pt x="1954233" y="2319425"/>
+                  </a:lnTo>
+                  <a:lnTo>
+                    <a:pt x="2031867" y="2371744"/>
+                  </a:lnTo>
+                  <a:lnTo>
+                    <a:pt x="2109501" y="2422010"/>
+                  </a:lnTo>
+                  <a:lnTo>
+                    <a:pt x="2187135" y="2470304"/>
+                  </a:lnTo>
+                  <a:lnTo>
+                    <a:pt x="2264769" y="2516702"/>
+                  </a:lnTo>
+                  <a:lnTo>
+                    <a:pt x="2342403" y="2561279"/>
+                  </a:lnTo>
+                  <a:lnTo>
+                    <a:pt x="2420037" y="2604108"/>
+                  </a:lnTo>
+                  <a:lnTo>
+                    <a:pt x="2497671" y="2645255"/>
+                  </a:lnTo>
+                  <a:lnTo>
+                    <a:pt x="2575305" y="2684788"/>
+                  </a:lnTo>
+                  <a:lnTo>
+                    <a:pt x="2652939" y="2722769"/>
+                  </a:lnTo>
+                  <a:lnTo>
+                    <a:pt x="2730573" y="2759260"/>
+                  </a:lnTo>
+                  <a:lnTo>
+                    <a:pt x="2808207" y="2781274"/>
+                  </a:lnTo>
+                  <a:lnTo>
+                    <a:pt x="2885841" y="2776096"/>
+                  </a:lnTo>
+                  <a:lnTo>
+                    <a:pt x="2963475" y="2770888"/>
+                  </a:lnTo>
+                  <a:lnTo>
+                    <a:pt x="3041110" y="2765649"/>
+                  </a:lnTo>
+                  <a:lnTo>
+                    <a:pt x="3118744" y="2760379"/>
+                  </a:lnTo>
+                  <a:lnTo>
+                    <a:pt x="3196378" y="2755078"/>
+                  </a:lnTo>
+                  <a:lnTo>
+                    <a:pt x="3274012" y="2749745"/>
+                  </a:lnTo>
+                  <a:lnTo>
+                    <a:pt x="3351646" y="2744380"/>
+                  </a:lnTo>
+                  <a:lnTo>
+                    <a:pt x="3429280" y="2738984"/>
+                  </a:lnTo>
+                  <a:lnTo>
+                    <a:pt x="3506914" y="2733555"/>
+                  </a:lnTo>
+                  <a:lnTo>
+                    <a:pt x="3584548" y="2728095"/>
+                  </a:lnTo>
+                  <a:lnTo>
+                    <a:pt x="3662182" y="2722601"/>
+                  </a:lnTo>
+                  <a:lnTo>
+                    <a:pt x="3739816" y="2717075"/>
+                  </a:lnTo>
+                  <a:lnTo>
+                    <a:pt x="3817450" y="2711517"/>
+                  </a:lnTo>
+                  <a:lnTo>
+                    <a:pt x="3895084" y="2705925"/>
+                  </a:lnTo>
+                  <a:lnTo>
+                    <a:pt x="3972718" y="2700300"/>
+                  </a:lnTo>
+                  <a:lnTo>
+                    <a:pt x="4050352" y="2694642"/>
+                  </a:lnTo>
+                  <a:lnTo>
+                    <a:pt x="4127986" y="2688950"/>
+                  </a:lnTo>
+                  <a:lnTo>
+                    <a:pt x="4205620" y="2683224"/>
+                  </a:lnTo>
+                  <a:lnTo>
+                    <a:pt x="4283254" y="2677464"/>
+                  </a:lnTo>
+                  <a:lnTo>
+                    <a:pt x="4360888" y="2671670"/>
+                  </a:lnTo>
+                  <a:lnTo>
+                    <a:pt x="4438522" y="2665842"/>
+                  </a:lnTo>
+                  <a:lnTo>
+                    <a:pt x="4516156" y="2659978"/>
+                  </a:lnTo>
+                  <a:lnTo>
+                    <a:pt x="4593790" y="2654080"/>
+                  </a:lnTo>
+                  <a:lnTo>
+                    <a:pt x="4671424" y="2648147"/>
+                  </a:lnTo>
+                  <a:lnTo>
+                    <a:pt x="4749059" y="2642179"/>
+                  </a:lnTo>
+                  <a:lnTo>
+                    <a:pt x="4826693" y="2636176"/>
+                  </a:lnTo>
+                  <a:lnTo>
+                    <a:pt x="4904327" y="2630136"/>
+                  </a:lnTo>
+                  <a:lnTo>
+                    <a:pt x="4981961" y="2624061"/>
+                  </a:lnTo>
+                  <a:lnTo>
+                    <a:pt x="5059595" y="2617950"/>
+                  </a:lnTo>
+                  <a:lnTo>
+                    <a:pt x="5137229" y="2611802"/>
+                  </a:lnTo>
+                  <a:lnTo>
+                    <a:pt x="5214863" y="2605618"/>
+                  </a:lnTo>
+                  <a:lnTo>
+                    <a:pt x="5292497" y="2599397"/>
+                  </a:lnTo>
+                  <a:lnTo>
+                    <a:pt x="5370131" y="2593139"/>
+                  </a:lnTo>
+                  <a:lnTo>
+                    <a:pt x="5447765" y="2586844"/>
+                  </a:lnTo>
+                  <a:lnTo>
+                    <a:pt x="5525399" y="2580511"/>
+                  </a:lnTo>
+                  <a:lnTo>
+                    <a:pt x="5603033" y="2574141"/>
+                  </a:lnTo>
+                  <a:lnTo>
+                    <a:pt x="5680667" y="2567733"/>
+                  </a:lnTo>
+                  <a:lnTo>
+                    <a:pt x="5758301" y="2561287"/>
+                  </a:lnTo>
+                  <a:lnTo>
+                    <a:pt x="5835935" y="2554803"/>
+                  </a:lnTo>
+                  <a:lnTo>
+                    <a:pt x="5913569" y="2548280"/>
+                  </a:lnTo>
+                  <a:lnTo>
+                    <a:pt x="5991203" y="2541719"/>
+                  </a:lnTo>
+                  <a:lnTo>
+                    <a:pt x="6068837" y="2535118"/>
+                  </a:lnTo>
+                  <a:lnTo>
+                    <a:pt x="6146471" y="2528478"/>
+                  </a:lnTo>
+                  <a:lnTo>
+                    <a:pt x="6224105" y="2521799"/>
+                  </a:lnTo>
+                  <a:lnTo>
+                    <a:pt x="6301739" y="2515080"/>
+                  </a:lnTo>
+                  <a:lnTo>
+                    <a:pt x="6379373" y="2508321"/>
+                  </a:lnTo>
+                  <a:lnTo>
+                    <a:pt x="6457008" y="2501522"/>
+                  </a:lnTo>
+                  <a:lnTo>
+                    <a:pt x="6534642" y="2494683"/>
+                  </a:lnTo>
+                  <a:lnTo>
+                    <a:pt x="6612276" y="2487803"/>
+                  </a:lnTo>
+                  <a:lnTo>
+                    <a:pt x="6689910" y="2480882"/>
+                  </a:lnTo>
+                  <a:lnTo>
+                    <a:pt x="6767544" y="2473920"/>
                   </a:lnTo>
                 </a:path>
               </a:pathLst>
@@ -3874,300 +3880,300 @@
           </p:nvSpPr>
           <p:spPr>
             <a:xfrm>
-              <a:off x="817517" y="4684246"/>
-              <a:ext cx="7370972" cy="761030"/>
+              <a:off x="817517" y="4682984"/>
+              <a:ext cx="7370972" cy="754807"/>
             </a:xfrm>
             <a:custGeom>
               <a:avLst/>
               <a:pathLst>
-                <a:path w="7370972" h="761030">
+                <a:path w="7370972" h="754807">
                   <a:moveTo>
-                    <a:pt x="7370972" y="761030"/>
+                    <a:pt x="7370972" y="754807"/>
                   </a:moveTo>
                   <a:lnTo>
-                    <a:pt x="7293338" y="756638"/>
-                  </a:lnTo>
-                  <a:lnTo>
-                    <a:pt x="7215704" y="752061"/>
-                  </a:lnTo>
-                  <a:lnTo>
-                    <a:pt x="7138070" y="747290"/>
-                  </a:lnTo>
-                  <a:lnTo>
-                    <a:pt x="7060436" y="742317"/>
-                  </a:lnTo>
-                  <a:lnTo>
-                    <a:pt x="6982802" y="737135"/>
-                  </a:lnTo>
-                  <a:lnTo>
-                    <a:pt x="6905168" y="731733"/>
-                  </a:lnTo>
-                  <a:lnTo>
-                    <a:pt x="6827534" y="726104"/>
-                  </a:lnTo>
-                  <a:lnTo>
-                    <a:pt x="6749900" y="720236"/>
-                  </a:lnTo>
-                  <a:lnTo>
-                    <a:pt x="6672266" y="714120"/>
-                  </a:lnTo>
-                  <a:lnTo>
-                    <a:pt x="6594632" y="707746"/>
-                  </a:lnTo>
-                  <a:lnTo>
-                    <a:pt x="6516998" y="701103"/>
-                  </a:lnTo>
-                  <a:lnTo>
-                    <a:pt x="6439364" y="694179"/>
-                  </a:lnTo>
-                  <a:lnTo>
-                    <a:pt x="6361730" y="686962"/>
-                  </a:lnTo>
-                  <a:lnTo>
-                    <a:pt x="6284096" y="679441"/>
-                  </a:lnTo>
-                  <a:lnTo>
-                    <a:pt x="6206462" y="671601"/>
-                  </a:lnTo>
-                  <a:lnTo>
-                    <a:pt x="6128827" y="663430"/>
-                  </a:lnTo>
-                  <a:lnTo>
-                    <a:pt x="6051193" y="654914"/>
-                  </a:lnTo>
-                  <a:lnTo>
-                    <a:pt x="5973559" y="646038"/>
-                  </a:lnTo>
-                  <a:lnTo>
-                    <a:pt x="5895925" y="636787"/>
-                  </a:lnTo>
-                  <a:lnTo>
-                    <a:pt x="5818291" y="627145"/>
-                  </a:lnTo>
-                  <a:lnTo>
-                    <a:pt x="5740657" y="617096"/>
-                  </a:lnTo>
-                  <a:lnTo>
-                    <a:pt x="5663023" y="606622"/>
-                  </a:lnTo>
-                  <a:lnTo>
-                    <a:pt x="5585389" y="595706"/>
-                  </a:lnTo>
-                  <a:lnTo>
-                    <a:pt x="5507755" y="584328"/>
-                  </a:lnTo>
-                  <a:lnTo>
-                    <a:pt x="5430121" y="572469"/>
-                  </a:lnTo>
-                  <a:lnTo>
-                    <a:pt x="5352487" y="560109"/>
-                  </a:lnTo>
-                  <a:lnTo>
-                    <a:pt x="5274853" y="547227"/>
-                  </a:lnTo>
-                  <a:lnTo>
-                    <a:pt x="5197219" y="533801"/>
-                  </a:lnTo>
-                  <a:lnTo>
-                    <a:pt x="5119585" y="519807"/>
-                  </a:lnTo>
-                  <a:lnTo>
-                    <a:pt x="5041951" y="505222"/>
-                  </a:lnTo>
-                  <a:lnTo>
-                    <a:pt x="4964317" y="490020"/>
-                  </a:lnTo>
-                  <a:lnTo>
-                    <a:pt x="4886683" y="474176"/>
-                  </a:lnTo>
-                  <a:lnTo>
-                    <a:pt x="4809049" y="457663"/>
-                  </a:lnTo>
-                  <a:lnTo>
-                    <a:pt x="4731415" y="440452"/>
-                  </a:lnTo>
-                  <a:lnTo>
-                    <a:pt x="4653781" y="422513"/>
-                  </a:lnTo>
-                  <a:lnTo>
-                    <a:pt x="4576147" y="403817"/>
-                  </a:lnTo>
-                  <a:lnTo>
-                    <a:pt x="4498513" y="384330"/>
-                  </a:lnTo>
-                  <a:lnTo>
-                    <a:pt x="4420879" y="364020"/>
-                  </a:lnTo>
-                  <a:lnTo>
-                    <a:pt x="4343244" y="342852"/>
-                  </a:lnTo>
-                  <a:lnTo>
-                    <a:pt x="4265610" y="320789"/>
-                  </a:lnTo>
-                  <a:lnTo>
-                    <a:pt x="4187976" y="297794"/>
-                  </a:lnTo>
-                  <a:lnTo>
-                    <a:pt x="4110342" y="273827"/>
-                  </a:lnTo>
-                  <a:lnTo>
-                    <a:pt x="4032708" y="248848"/>
-                  </a:lnTo>
-                  <a:lnTo>
-                    <a:pt x="3955074" y="222813"/>
-                  </a:lnTo>
-                  <a:lnTo>
-                    <a:pt x="3877440" y="195678"/>
-                  </a:lnTo>
-                  <a:lnTo>
-                    <a:pt x="3799806" y="167396"/>
-                  </a:lnTo>
-                  <a:lnTo>
-                    <a:pt x="3722172" y="137919"/>
-                  </a:lnTo>
-                  <a:lnTo>
-                    <a:pt x="3644538" y="107196"/>
-                  </a:lnTo>
-                  <a:lnTo>
-                    <a:pt x="3566904" y="75175"/>
-                  </a:lnTo>
-                  <a:lnTo>
-                    <a:pt x="3489270" y="41801"/>
-                  </a:lnTo>
-                  <a:lnTo>
-                    <a:pt x="3411636" y="7017"/>
+                    <a:pt x="7293338" y="750256"/>
+                  </a:lnTo>
+                  <a:lnTo>
+                    <a:pt x="7215704" y="745519"/>
+                  </a:lnTo>
+                  <a:lnTo>
+                    <a:pt x="7138070" y="740589"/>
+                  </a:lnTo>
+                  <a:lnTo>
+                    <a:pt x="7060436" y="735457"/>
+                  </a:lnTo>
+                  <a:lnTo>
+                    <a:pt x="6982802" y="730116"/>
+                  </a:lnTo>
+                  <a:lnTo>
+                    <a:pt x="6905168" y="724557"/>
+                  </a:lnTo>
+                  <a:lnTo>
+                    <a:pt x="6827534" y="718770"/>
+                  </a:lnTo>
+                  <a:lnTo>
+                    <a:pt x="6749900" y="712747"/>
+                  </a:lnTo>
+                  <a:lnTo>
+                    <a:pt x="6672266" y="706479"/>
+                  </a:lnTo>
+                  <a:lnTo>
+                    <a:pt x="6594632" y="699954"/>
+                  </a:lnTo>
+                  <a:lnTo>
+                    <a:pt x="6516998" y="693162"/>
+                  </a:lnTo>
+                  <a:lnTo>
+                    <a:pt x="6439364" y="686094"/>
+                  </a:lnTo>
+                  <a:lnTo>
+                    <a:pt x="6361730" y="678736"/>
+                  </a:lnTo>
+                  <a:lnTo>
+                    <a:pt x="6284096" y="671078"/>
+                  </a:lnTo>
+                  <a:lnTo>
+                    <a:pt x="6206462" y="663107"/>
+                  </a:lnTo>
+                  <a:lnTo>
+                    <a:pt x="6128827" y="654811"/>
+                  </a:lnTo>
+                  <a:lnTo>
+                    <a:pt x="6051193" y="646176"/>
+                  </a:lnTo>
+                  <a:lnTo>
+                    <a:pt x="5973559" y="637188"/>
+                  </a:lnTo>
+                  <a:lnTo>
+                    <a:pt x="5895925" y="627832"/>
+                  </a:lnTo>
+                  <a:lnTo>
+                    <a:pt x="5818291" y="618095"/>
+                  </a:lnTo>
+                  <a:lnTo>
+                    <a:pt x="5740657" y="607960"/>
+                  </a:lnTo>
+                  <a:lnTo>
+                    <a:pt x="5663023" y="597411"/>
+                  </a:lnTo>
+                  <a:lnTo>
+                    <a:pt x="5585389" y="586432"/>
+                  </a:lnTo>
+                  <a:lnTo>
+                    <a:pt x="5507755" y="575003"/>
+                  </a:lnTo>
+                  <a:lnTo>
+                    <a:pt x="5430121" y="563108"/>
+                  </a:lnTo>
+                  <a:lnTo>
+                    <a:pt x="5352487" y="550727"/>
+                  </a:lnTo>
+                  <a:lnTo>
+                    <a:pt x="5274853" y="537841"/>
+                  </a:lnTo>
+                  <a:lnTo>
+                    <a:pt x="5197219" y="524428"/>
+                  </a:lnTo>
+                  <a:lnTo>
+                    <a:pt x="5119585" y="510467"/>
+                  </a:lnTo>
+                  <a:lnTo>
+                    <a:pt x="5041951" y="495936"/>
+                  </a:lnTo>
+                  <a:lnTo>
+                    <a:pt x="4964317" y="480811"/>
+                  </a:lnTo>
+                  <a:lnTo>
+                    <a:pt x="4886683" y="465069"/>
+                  </a:lnTo>
+                  <a:lnTo>
+                    <a:pt x="4809049" y="448683"/>
+                  </a:lnTo>
+                  <a:lnTo>
+                    <a:pt x="4731415" y="431629"/>
+                  </a:lnTo>
+                  <a:lnTo>
+                    <a:pt x="4653781" y="413878"/>
+                  </a:lnTo>
+                  <a:lnTo>
+                    <a:pt x="4576147" y="395401"/>
+                  </a:lnTo>
+                  <a:lnTo>
+                    <a:pt x="4498513" y="376170"/>
+                  </a:lnTo>
+                  <a:lnTo>
+                    <a:pt x="4420879" y="356154"/>
+                  </a:lnTo>
+                  <a:lnTo>
+                    <a:pt x="4343244" y="335319"/>
+                  </a:lnTo>
+                  <a:lnTo>
+                    <a:pt x="4265610" y="313634"/>
+                  </a:lnTo>
+                  <a:lnTo>
+                    <a:pt x="4187976" y="291064"/>
+                  </a:lnTo>
+                  <a:lnTo>
+                    <a:pt x="4110342" y="267571"/>
+                  </a:lnTo>
+                  <a:lnTo>
+                    <a:pt x="4032708" y="243118"/>
+                  </a:lnTo>
+                  <a:lnTo>
+                    <a:pt x="3955074" y="217667"/>
+                  </a:lnTo>
+                  <a:lnTo>
+                    <a:pt x="3877440" y="191177"/>
+                  </a:lnTo>
+                  <a:lnTo>
+                    <a:pt x="3799806" y="163604"/>
+                  </a:lnTo>
+                  <a:lnTo>
+                    <a:pt x="3722172" y="134905"/>
+                  </a:lnTo>
+                  <a:lnTo>
+                    <a:pt x="3644538" y="105034"/>
+                  </a:lnTo>
+                  <a:lnTo>
+                    <a:pt x="3566904" y="73942"/>
+                  </a:lnTo>
+                  <a:lnTo>
+                    <a:pt x="3489270" y="41581"/>
+                  </a:lnTo>
+                  <a:lnTo>
+                    <a:pt x="3411636" y="7898"/>
                   </a:lnTo>
                   <a:lnTo>
                     <a:pt x="3334002" y="0"/>
                   </a:lnTo>
                   <a:lnTo>
-                    <a:pt x="3256368" y="6974"/>
-                  </a:lnTo>
-                  <a:lnTo>
-                    <a:pt x="3178734" y="13891"/>
-                  </a:lnTo>
-                  <a:lnTo>
-                    <a:pt x="3101100" y="20754"/>
-                  </a:lnTo>
-                  <a:lnTo>
-                    <a:pt x="3023466" y="27560"/>
-                  </a:lnTo>
-                  <a:lnTo>
-                    <a:pt x="2945832" y="34312"/>
-                  </a:lnTo>
-                  <a:lnTo>
-                    <a:pt x="2868198" y="41010"/>
-                  </a:lnTo>
-                  <a:lnTo>
-                    <a:pt x="2790564" y="47653"/>
-                  </a:lnTo>
-                  <a:lnTo>
-                    <a:pt x="2712930" y="54243"/>
-                  </a:lnTo>
-                  <a:lnTo>
-                    <a:pt x="2635295" y="60780"/>
-                  </a:lnTo>
-                  <a:lnTo>
-                    <a:pt x="2557661" y="67264"/>
-                  </a:lnTo>
-                  <a:lnTo>
-                    <a:pt x="2480027" y="73695"/>
-                  </a:lnTo>
-                  <a:lnTo>
-                    <a:pt x="2402393" y="80075"/>
-                  </a:lnTo>
-                  <a:lnTo>
-                    <a:pt x="2324759" y="86404"/>
-                  </a:lnTo>
-                  <a:lnTo>
-                    <a:pt x="2247125" y="92681"/>
-                  </a:lnTo>
-                  <a:lnTo>
-                    <a:pt x="2169491" y="98908"/>
-                  </a:lnTo>
-                  <a:lnTo>
-                    <a:pt x="2091857" y="105084"/>
-                  </a:lnTo>
-                  <a:lnTo>
-                    <a:pt x="2014223" y="111211"/>
-                  </a:lnTo>
-                  <a:lnTo>
-                    <a:pt x="1936589" y="117289"/>
-                  </a:lnTo>
-                  <a:lnTo>
-                    <a:pt x="1858955" y="123317"/>
-                  </a:lnTo>
-                  <a:lnTo>
-                    <a:pt x="1781321" y="129297"/>
-                  </a:lnTo>
-                  <a:lnTo>
-                    <a:pt x="1703687" y="135228"/>
-                  </a:lnTo>
-                  <a:lnTo>
-                    <a:pt x="1626053" y="141112"/>
-                  </a:lnTo>
-                  <a:lnTo>
-                    <a:pt x="1548419" y="146948"/>
-                  </a:lnTo>
-                  <a:lnTo>
-                    <a:pt x="1470785" y="152738"/>
-                  </a:lnTo>
-                  <a:lnTo>
-                    <a:pt x="1393151" y="158480"/>
-                  </a:lnTo>
-                  <a:lnTo>
-                    <a:pt x="1315517" y="164176"/>
-                  </a:lnTo>
-                  <a:lnTo>
-                    <a:pt x="1237883" y="169827"/>
-                  </a:lnTo>
-                  <a:lnTo>
-                    <a:pt x="1160249" y="175432"/>
-                  </a:lnTo>
-                  <a:lnTo>
-                    <a:pt x="1082615" y="180991"/>
-                  </a:lnTo>
-                  <a:lnTo>
-                    <a:pt x="1004981" y="186506"/>
-                  </a:lnTo>
-                  <a:lnTo>
-                    <a:pt x="927346" y="191976"/>
-                  </a:lnTo>
-                  <a:lnTo>
-                    <a:pt x="849712" y="197402"/>
-                  </a:lnTo>
-                  <a:lnTo>
-                    <a:pt x="772078" y="202785"/>
-                  </a:lnTo>
-                  <a:lnTo>
-                    <a:pt x="694444" y="208124"/>
-                  </a:lnTo>
-                  <a:lnTo>
-                    <a:pt x="616810" y="213420"/>
-                  </a:lnTo>
-                  <a:lnTo>
-                    <a:pt x="539176" y="218673"/>
-                  </a:lnTo>
-                  <a:lnTo>
-                    <a:pt x="461542" y="223884"/>
-                  </a:lnTo>
-                  <a:lnTo>
-                    <a:pt x="383908" y="229053"/>
-                  </a:lnTo>
-                  <a:lnTo>
-                    <a:pt x="306274" y="234180"/>
-                  </a:lnTo>
-                  <a:lnTo>
-                    <a:pt x="228640" y="239266"/>
-                  </a:lnTo>
-                  <a:lnTo>
-                    <a:pt x="151006" y="244311"/>
-                  </a:lnTo>
-                  <a:lnTo>
-                    <a:pt x="73372" y="249315"/>
-                  </a:lnTo>
-                  <a:lnTo>
-                    <a:pt x="0" y="254007"/>
+                    <a:pt x="3256368" y="5116"/>
+                  </a:lnTo>
+                  <a:lnTo>
+                    <a:pt x="3178734" y="10202"/>
+                  </a:lnTo>
+                  <a:lnTo>
+                    <a:pt x="3101100" y="15258"/>
+                  </a:lnTo>
+                  <a:lnTo>
+                    <a:pt x="3023466" y="20284"/>
+                  </a:lnTo>
+                  <a:lnTo>
+                    <a:pt x="2945832" y="25281"/>
+                  </a:lnTo>
+                  <a:lnTo>
+                    <a:pt x="2868198" y="30247"/>
+                  </a:lnTo>
+                  <a:lnTo>
+                    <a:pt x="2790564" y="35185"/>
+                  </a:lnTo>
+                  <a:lnTo>
+                    <a:pt x="2712930" y="40094"/>
+                  </a:lnTo>
+                  <a:lnTo>
+                    <a:pt x="2635295" y="44973"/>
+                  </a:lnTo>
+                  <a:lnTo>
+                    <a:pt x="2557661" y="49824"/>
+                  </a:lnTo>
+                  <a:lnTo>
+                    <a:pt x="2480027" y="54646"/>
+                  </a:lnTo>
+                  <a:lnTo>
+                    <a:pt x="2402393" y="59439"/>
+                  </a:lnTo>
+                  <a:lnTo>
+                    <a:pt x="2324759" y="64204"/>
+                  </a:lnTo>
+                  <a:lnTo>
+                    <a:pt x="2247125" y="68942"/>
+                  </a:lnTo>
+                  <a:lnTo>
+                    <a:pt x="2169491" y="73651"/>
+                  </a:lnTo>
+                  <a:lnTo>
+                    <a:pt x="2091857" y="78332"/>
+                  </a:lnTo>
+                  <a:lnTo>
+                    <a:pt x="2014223" y="82986"/>
+                  </a:lnTo>
+                  <a:lnTo>
+                    <a:pt x="1936589" y="87612"/>
+                  </a:lnTo>
+                  <a:lnTo>
+                    <a:pt x="1858955" y="92210"/>
+                  </a:lnTo>
+                  <a:lnTo>
+                    <a:pt x="1781321" y="96782"/>
+                  </a:lnTo>
+                  <a:lnTo>
+                    <a:pt x="1703687" y="101327"/>
+                  </a:lnTo>
+                  <a:lnTo>
+                    <a:pt x="1626053" y="105845"/>
+                  </a:lnTo>
+                  <a:lnTo>
+                    <a:pt x="1548419" y="110336"/>
+                  </a:lnTo>
+                  <a:lnTo>
+                    <a:pt x="1470785" y="114800"/>
+                  </a:lnTo>
+                  <a:lnTo>
+                    <a:pt x="1393151" y="119238"/>
+                  </a:lnTo>
+                  <a:lnTo>
+                    <a:pt x="1315517" y="123651"/>
+                  </a:lnTo>
+                  <a:lnTo>
+                    <a:pt x="1237883" y="128036"/>
+                  </a:lnTo>
+                  <a:lnTo>
+                    <a:pt x="1160249" y="132397"/>
+                  </a:lnTo>
+                  <a:lnTo>
+                    <a:pt x="1082615" y="136731"/>
+                  </a:lnTo>
+                  <a:lnTo>
+                    <a:pt x="1004981" y="141039"/>
+                  </a:lnTo>
+                  <a:lnTo>
+                    <a:pt x="927346" y="145323"/>
+                  </a:lnTo>
+                  <a:lnTo>
+                    <a:pt x="849712" y="149581"/>
+                  </a:lnTo>
+                  <a:lnTo>
+                    <a:pt x="772078" y="153813"/>
+                  </a:lnTo>
+                  <a:lnTo>
+                    <a:pt x="694444" y="158021"/>
+                  </a:lnTo>
+                  <a:lnTo>
+                    <a:pt x="616810" y="162204"/>
+                  </a:lnTo>
+                  <a:lnTo>
+                    <a:pt x="539176" y="166362"/>
+                  </a:lnTo>
+                  <a:lnTo>
+                    <a:pt x="461542" y="170496"/>
+                  </a:lnTo>
+                  <a:lnTo>
+                    <a:pt x="383908" y="174605"/>
+                  </a:lnTo>
+                  <a:lnTo>
+                    <a:pt x="306274" y="178690"/>
+                  </a:lnTo>
+                  <a:lnTo>
+                    <a:pt x="228640" y="182751"/>
+                  </a:lnTo>
+                  <a:lnTo>
+                    <a:pt x="151006" y="186788"/>
+                  </a:lnTo>
+                  <a:lnTo>
+                    <a:pt x="73372" y="190801"/>
+                  </a:lnTo>
+                  <a:lnTo>
+                    <a:pt x="0" y="194571"/>
                   </a:lnTo>
                 </a:path>
               </a:pathLst>
@@ -4187,300 +4193,300 @@
           </p:nvSpPr>
           <p:spPr>
             <a:xfrm>
-              <a:off x="817517" y="3751623"/>
-              <a:ext cx="7370972" cy="1427516"/>
+              <a:off x="817517" y="3719324"/>
+              <a:ext cx="7370972" cy="1467489"/>
             </a:xfrm>
             <a:custGeom>
               <a:avLst/>
               <a:pathLst>
-                <a:path w="7370972" h="1427516">
+                <a:path w="7370972" h="1467489">
                   <a:moveTo>
                     <a:pt x="0" y="0"/>
                   </a:moveTo>
                   <a:lnTo>
-                    <a:pt x="73372" y="28072"/>
-                  </a:lnTo>
-                  <a:lnTo>
-                    <a:pt x="151006" y="57284"/>
-                  </a:lnTo>
-                  <a:lnTo>
-                    <a:pt x="228640" y="86014"/>
-                  </a:lnTo>
-                  <a:lnTo>
-                    <a:pt x="306274" y="114270"/>
-                  </a:lnTo>
-                  <a:lnTo>
-                    <a:pt x="383908" y="142060"/>
-                  </a:lnTo>
-                  <a:lnTo>
-                    <a:pt x="461542" y="169390"/>
-                  </a:lnTo>
-                  <a:lnTo>
-                    <a:pt x="539176" y="196270"/>
-                  </a:lnTo>
-                  <a:lnTo>
-                    <a:pt x="616810" y="222705"/>
-                  </a:lnTo>
-                  <a:lnTo>
-                    <a:pt x="694444" y="248704"/>
-                  </a:lnTo>
-                  <a:lnTo>
-                    <a:pt x="772078" y="274274"/>
-                  </a:lnTo>
-                  <a:lnTo>
-                    <a:pt x="849712" y="299422"/>
-                  </a:lnTo>
-                  <a:lnTo>
-                    <a:pt x="927346" y="324155"/>
-                  </a:lnTo>
-                  <a:lnTo>
-                    <a:pt x="1004981" y="348480"/>
-                  </a:lnTo>
-                  <a:lnTo>
-                    <a:pt x="1082615" y="372402"/>
-                  </a:lnTo>
-                  <a:lnTo>
-                    <a:pt x="1160249" y="395930"/>
-                  </a:lnTo>
-                  <a:lnTo>
-                    <a:pt x="1237883" y="419070"/>
-                  </a:lnTo>
-                  <a:lnTo>
-                    <a:pt x="1315517" y="441827"/>
-                  </a:lnTo>
-                  <a:lnTo>
-                    <a:pt x="1393151" y="464209"/>
-                  </a:lnTo>
-                  <a:lnTo>
-                    <a:pt x="1470785" y="486222"/>
-                  </a:lnTo>
-                  <a:lnTo>
-                    <a:pt x="1548419" y="507870"/>
-                  </a:lnTo>
-                  <a:lnTo>
-                    <a:pt x="1626053" y="529162"/>
-                  </a:lnTo>
-                  <a:lnTo>
-                    <a:pt x="1703687" y="550102"/>
-                  </a:lnTo>
-                  <a:lnTo>
-                    <a:pt x="1781321" y="570696"/>
-                  </a:lnTo>
-                  <a:lnTo>
-                    <a:pt x="1858955" y="590951"/>
-                  </a:lnTo>
-                  <a:lnTo>
-                    <a:pt x="1936589" y="610871"/>
-                  </a:lnTo>
-                  <a:lnTo>
-                    <a:pt x="2014223" y="630462"/>
-                  </a:lnTo>
-                  <a:lnTo>
-                    <a:pt x="2091857" y="649730"/>
-                  </a:lnTo>
-                  <a:lnTo>
-                    <a:pt x="2169491" y="668679"/>
-                  </a:lnTo>
-                  <a:lnTo>
-                    <a:pt x="2247125" y="687316"/>
-                  </a:lnTo>
-                  <a:lnTo>
-                    <a:pt x="2324759" y="705645"/>
-                  </a:lnTo>
-                  <a:lnTo>
-                    <a:pt x="2402393" y="723672"/>
-                  </a:lnTo>
-                  <a:lnTo>
-                    <a:pt x="2480027" y="741400"/>
-                  </a:lnTo>
-                  <a:lnTo>
-                    <a:pt x="2557661" y="758837"/>
-                  </a:lnTo>
-                  <a:lnTo>
-                    <a:pt x="2635295" y="775985"/>
-                  </a:lnTo>
-                  <a:lnTo>
-                    <a:pt x="2712930" y="792850"/>
-                  </a:lnTo>
-                  <a:lnTo>
-                    <a:pt x="2790564" y="809437"/>
-                  </a:lnTo>
-                  <a:lnTo>
-                    <a:pt x="2868198" y="825750"/>
-                  </a:lnTo>
-                  <a:lnTo>
-                    <a:pt x="2945832" y="841794"/>
-                  </a:lnTo>
-                  <a:lnTo>
-                    <a:pt x="3023466" y="857573"/>
-                  </a:lnTo>
-                  <a:lnTo>
-                    <a:pt x="3101100" y="873091"/>
-                  </a:lnTo>
-                  <a:lnTo>
-                    <a:pt x="3178734" y="888353"/>
-                  </a:lnTo>
-                  <a:lnTo>
-                    <a:pt x="3256368" y="903364"/>
-                  </a:lnTo>
-                  <a:lnTo>
-                    <a:pt x="3334002" y="918126"/>
-                  </a:lnTo>
-                  <a:lnTo>
-                    <a:pt x="3411636" y="932645"/>
-                  </a:lnTo>
-                  <a:lnTo>
-                    <a:pt x="3489270" y="946924"/>
-                  </a:lnTo>
-                  <a:lnTo>
-                    <a:pt x="3566904" y="960967"/>
-                  </a:lnTo>
-                  <a:lnTo>
-                    <a:pt x="3644538" y="974779"/>
-                  </a:lnTo>
-                  <a:lnTo>
-                    <a:pt x="3722172" y="988362"/>
-                  </a:lnTo>
-                  <a:lnTo>
-                    <a:pt x="3799806" y="1001721"/>
-                  </a:lnTo>
-                  <a:lnTo>
-                    <a:pt x="3877440" y="1014860"/>
-                  </a:lnTo>
-                  <a:lnTo>
-                    <a:pt x="3955074" y="1027782"/>
-                  </a:lnTo>
-                  <a:lnTo>
-                    <a:pt x="4032708" y="1040490"/>
-                  </a:lnTo>
-                  <a:lnTo>
-                    <a:pt x="4110342" y="1052989"/>
-                  </a:lnTo>
-                  <a:lnTo>
-                    <a:pt x="4187976" y="1065281"/>
-                  </a:lnTo>
-                  <a:lnTo>
-                    <a:pt x="4265610" y="1077371"/>
-                  </a:lnTo>
-                  <a:lnTo>
-                    <a:pt x="4343244" y="1089260"/>
-                  </a:lnTo>
-                  <a:lnTo>
-                    <a:pt x="4420879" y="1100954"/>
-                  </a:lnTo>
-                  <a:lnTo>
-                    <a:pt x="4498513" y="1112454"/>
-                  </a:lnTo>
-                  <a:lnTo>
-                    <a:pt x="4576147" y="1123765"/>
-                  </a:lnTo>
-                  <a:lnTo>
-                    <a:pt x="4653781" y="1134889"/>
-                  </a:lnTo>
-                  <a:lnTo>
-                    <a:pt x="4731415" y="1145829"/>
-                  </a:lnTo>
-                  <a:lnTo>
-                    <a:pt x="4809049" y="1156589"/>
-                  </a:lnTo>
-                  <a:lnTo>
-                    <a:pt x="4886683" y="1167171"/>
-                  </a:lnTo>
-                  <a:lnTo>
-                    <a:pt x="4964317" y="1177578"/>
-                  </a:lnTo>
-                  <a:lnTo>
-                    <a:pt x="5041951" y="1187814"/>
-                  </a:lnTo>
-                  <a:lnTo>
-                    <a:pt x="5119585" y="1197880"/>
-                  </a:lnTo>
-                  <a:lnTo>
-                    <a:pt x="5197219" y="1207780"/>
-                  </a:lnTo>
-                  <a:lnTo>
-                    <a:pt x="5274853" y="1217517"/>
-                  </a:lnTo>
-                  <a:lnTo>
-                    <a:pt x="5352487" y="1227094"/>
-                  </a:lnTo>
-                  <a:lnTo>
-                    <a:pt x="5430121" y="1236512"/>
-                  </a:lnTo>
-                  <a:lnTo>
-                    <a:pt x="5507755" y="1245774"/>
-                  </a:lnTo>
-                  <a:lnTo>
-                    <a:pt x="5585389" y="1254884"/>
-                  </a:lnTo>
-                  <a:lnTo>
-                    <a:pt x="5663023" y="1263843"/>
-                  </a:lnTo>
-                  <a:lnTo>
-                    <a:pt x="5740657" y="1272654"/>
-                  </a:lnTo>
-                  <a:lnTo>
-                    <a:pt x="5818291" y="1281320"/>
-                  </a:lnTo>
-                  <a:lnTo>
-                    <a:pt x="5895925" y="1289843"/>
-                  </a:lnTo>
-                  <a:lnTo>
-                    <a:pt x="5973559" y="1298225"/>
-                  </a:lnTo>
-                  <a:lnTo>
-                    <a:pt x="6051193" y="1306469"/>
-                  </a:lnTo>
-                  <a:lnTo>
-                    <a:pt x="6128827" y="1314577"/>
-                  </a:lnTo>
-                  <a:lnTo>
-                    <a:pt x="6206462" y="1322551"/>
-                  </a:lnTo>
-                  <a:lnTo>
-                    <a:pt x="6284096" y="1330393"/>
-                  </a:lnTo>
-                  <a:lnTo>
-                    <a:pt x="6361730" y="1338106"/>
-                  </a:lnTo>
-                  <a:lnTo>
-                    <a:pt x="6439364" y="1345691"/>
-                  </a:lnTo>
-                  <a:lnTo>
-                    <a:pt x="6516998" y="1353151"/>
-                  </a:lnTo>
-                  <a:lnTo>
-                    <a:pt x="6594632" y="1360488"/>
-                  </a:lnTo>
-                  <a:lnTo>
-                    <a:pt x="6672266" y="1367704"/>
-                  </a:lnTo>
-                  <a:lnTo>
-                    <a:pt x="6749900" y="1374801"/>
-                  </a:lnTo>
-                  <a:lnTo>
-                    <a:pt x="6827534" y="1381780"/>
-                  </a:lnTo>
-                  <a:lnTo>
-                    <a:pt x="6905168" y="1388645"/>
-                  </a:lnTo>
-                  <a:lnTo>
-                    <a:pt x="6982802" y="1395396"/>
-                  </a:lnTo>
-                  <a:lnTo>
-                    <a:pt x="7060436" y="1402035"/>
-                  </a:lnTo>
-                  <a:lnTo>
-                    <a:pt x="7138070" y="1408565"/>
-                  </a:lnTo>
-                  <a:lnTo>
-                    <a:pt x="7215704" y="1414988"/>
-                  </a:lnTo>
-                  <a:lnTo>
-                    <a:pt x="7293338" y="1421304"/>
-                  </a:lnTo>
-                  <a:lnTo>
-                    <a:pt x="7370972" y="1427516"/>
+                    <a:pt x="73372" y="29272"/>
+                  </a:lnTo>
+                  <a:lnTo>
+                    <a:pt x="151006" y="59720"/>
+                  </a:lnTo>
+                  <a:lnTo>
+                    <a:pt x="228640" y="89654"/>
+                  </a:lnTo>
+                  <a:lnTo>
+                    <a:pt x="306274" y="119082"/>
+                  </a:lnTo>
+                  <a:lnTo>
+                    <a:pt x="383908" y="148012"/>
+                  </a:lnTo>
+                  <a:lnTo>
+                    <a:pt x="461542" y="176453"/>
+                  </a:lnTo>
+                  <a:lnTo>
+                    <a:pt x="539176" y="204412"/>
+                  </a:lnTo>
+                  <a:lnTo>
+                    <a:pt x="616810" y="231899"/>
+                  </a:lnTo>
+                  <a:lnTo>
+                    <a:pt x="694444" y="258922"/>
+                  </a:lnTo>
+                  <a:lnTo>
+                    <a:pt x="772078" y="285487"/>
+                  </a:lnTo>
+                  <a:lnTo>
+                    <a:pt x="849712" y="311603"/>
+                  </a:lnTo>
+                  <a:lnTo>
+                    <a:pt x="927346" y="337277"/>
+                  </a:lnTo>
+                  <a:lnTo>
+                    <a:pt x="1004981" y="362518"/>
+                  </a:lnTo>
+                  <a:lnTo>
+                    <a:pt x="1082615" y="387331"/>
+                  </a:lnTo>
+                  <a:lnTo>
+                    <a:pt x="1160249" y="411725"/>
+                  </a:lnTo>
+                  <a:lnTo>
+                    <a:pt x="1237883" y="435706"/>
+                  </a:lnTo>
+                  <a:lnTo>
+                    <a:pt x="1315517" y="459282"/>
+                  </a:lnTo>
+                  <a:lnTo>
+                    <a:pt x="1393151" y="482459"/>
+                  </a:lnTo>
+                  <a:lnTo>
+                    <a:pt x="1470785" y="505244"/>
+                  </a:lnTo>
+                  <a:lnTo>
+                    <a:pt x="1548419" y="527644"/>
+                  </a:lnTo>
+                  <a:lnTo>
+                    <a:pt x="1626053" y="549665"/>
+                  </a:lnTo>
+                  <a:lnTo>
+                    <a:pt x="1703687" y="571314"/>
+                  </a:lnTo>
+                  <a:lnTo>
+                    <a:pt x="1781321" y="592597"/>
+                  </a:lnTo>
+                  <a:lnTo>
+                    <a:pt x="1858955" y="613519"/>
+                  </a:lnTo>
+                  <a:lnTo>
+                    <a:pt x="1936589" y="634088"/>
+                  </a:lnTo>
+                  <a:lnTo>
+                    <a:pt x="2014223" y="654309"/>
+                  </a:lnTo>
+                  <a:lnTo>
+                    <a:pt x="2091857" y="674189"/>
+                  </a:lnTo>
+                  <a:lnTo>
+                    <a:pt x="2169491" y="693732"/>
+                  </a:lnTo>
+                  <a:lnTo>
+                    <a:pt x="2247125" y="712944"/>
+                  </a:lnTo>
+                  <a:lnTo>
+                    <a:pt x="2324759" y="731832"/>
+                  </a:lnTo>
+                  <a:lnTo>
+                    <a:pt x="2402393" y="750400"/>
+                  </a:lnTo>
+                  <a:lnTo>
+                    <a:pt x="2480027" y="768654"/>
+                  </a:lnTo>
+                  <a:lnTo>
+                    <a:pt x="2557661" y="786600"/>
+                  </a:lnTo>
+                  <a:lnTo>
+                    <a:pt x="2635295" y="804242"/>
+                  </a:lnTo>
+                  <a:lnTo>
+                    <a:pt x="2712930" y="821586"/>
+                  </a:lnTo>
+                  <a:lnTo>
+                    <a:pt x="2790564" y="838636"/>
+                  </a:lnTo>
+                  <a:lnTo>
+                    <a:pt x="2868198" y="855398"/>
+                  </a:lnTo>
+                  <a:lnTo>
+                    <a:pt x="2945832" y="871877"/>
+                  </a:lnTo>
+                  <a:lnTo>
+                    <a:pt x="3023466" y="888077"/>
+                  </a:lnTo>
+                  <a:lnTo>
+                    <a:pt x="3101100" y="904003"/>
+                  </a:lnTo>
+                  <a:lnTo>
+                    <a:pt x="3178734" y="919660"/>
+                  </a:lnTo>
+                  <a:lnTo>
+                    <a:pt x="3256368" y="935052"/>
+                  </a:lnTo>
+                  <a:lnTo>
+                    <a:pt x="3334002" y="950184"/>
+                  </a:lnTo>
+                  <a:lnTo>
+                    <a:pt x="3411636" y="965060"/>
+                  </a:lnTo>
+                  <a:lnTo>
+                    <a:pt x="3489270" y="979684"/>
+                  </a:lnTo>
+                  <a:lnTo>
+                    <a:pt x="3566904" y="994061"/>
+                  </a:lnTo>
+                  <a:lnTo>
+                    <a:pt x="3644538" y="1008195"/>
+                  </a:lnTo>
+                  <a:lnTo>
+                    <a:pt x="3722172" y="1022090"/>
+                  </a:lnTo>
+                  <a:lnTo>
+                    <a:pt x="3799806" y="1035750"/>
+                  </a:lnTo>
+                  <a:lnTo>
+                    <a:pt x="3877440" y="1049179"/>
+                  </a:lnTo>
+                  <a:lnTo>
+                    <a:pt x="3955074" y="1062381"/>
+                  </a:lnTo>
+                  <a:lnTo>
+                    <a:pt x="4032708" y="1075359"/>
+                  </a:lnTo>
+                  <a:lnTo>
+                    <a:pt x="4110342" y="1088118"/>
+                  </a:lnTo>
+                  <a:lnTo>
+                    <a:pt x="4187976" y="1100662"/>
+                  </a:lnTo>
+                  <a:lnTo>
+                    <a:pt x="4265610" y="1112993"/>
+                  </a:lnTo>
+                  <a:lnTo>
+                    <a:pt x="4343244" y="1125116"/>
+                  </a:lnTo>
+                  <a:lnTo>
+                    <a:pt x="4420879" y="1137033"/>
+                  </a:lnTo>
+                  <a:lnTo>
+                    <a:pt x="4498513" y="1148750"/>
+                  </a:lnTo>
+                  <a:lnTo>
+                    <a:pt x="4576147" y="1160268"/>
+                  </a:lnTo>
+                  <a:lnTo>
+                    <a:pt x="4653781" y="1171591"/>
+                  </a:lnTo>
+                  <a:lnTo>
+                    <a:pt x="4731415" y="1182723"/>
+                  </a:lnTo>
+                  <a:lnTo>
+                    <a:pt x="4809049" y="1193666"/>
+                  </a:lnTo>
+                  <a:lnTo>
+                    <a:pt x="4886683" y="1204425"/>
+                  </a:lnTo>
+                  <a:lnTo>
+                    <a:pt x="4964317" y="1215002"/>
+                  </a:lnTo>
+                  <a:lnTo>
+                    <a:pt x="5041951" y="1225399"/>
+                  </a:lnTo>
+                  <a:lnTo>
+                    <a:pt x="5119585" y="1235621"/>
+                  </a:lnTo>
+                  <a:lnTo>
+                    <a:pt x="5197219" y="1245670"/>
+                  </a:lnTo>
+                  <a:lnTo>
+                    <a:pt x="5274853" y="1255550"/>
+                  </a:lnTo>
+                  <a:lnTo>
+                    <a:pt x="5352487" y="1265262"/>
+                  </a:lnTo>
+                  <a:lnTo>
+                    <a:pt x="5430121" y="1274809"/>
+                  </a:lnTo>
+                  <a:lnTo>
+                    <a:pt x="5507755" y="1284196"/>
+                  </a:lnTo>
+                  <a:lnTo>
+                    <a:pt x="5585389" y="1293423"/>
+                  </a:lnTo>
+                  <a:lnTo>
+                    <a:pt x="5663023" y="1302495"/>
+                  </a:lnTo>
+                  <a:lnTo>
+                    <a:pt x="5740657" y="1311413"/>
+                  </a:lnTo>
+                  <a:lnTo>
+                    <a:pt x="5818291" y="1320181"/>
+                  </a:lnTo>
+                  <a:lnTo>
+                    <a:pt x="5895925" y="1328800"/>
+                  </a:lnTo>
+                  <a:lnTo>
+                    <a:pt x="5973559" y="1337273"/>
+                  </a:lnTo>
+                  <a:lnTo>
+                    <a:pt x="6051193" y="1345603"/>
+                  </a:lnTo>
+                  <a:lnTo>
+                    <a:pt x="6128827" y="1353793"/>
+                  </a:lnTo>
+                  <a:lnTo>
+                    <a:pt x="6206462" y="1361843"/>
+                  </a:lnTo>
+                  <a:lnTo>
+                    <a:pt x="6284096" y="1369758"/>
+                  </a:lnTo>
+                  <a:lnTo>
+                    <a:pt x="6361730" y="1377539"/>
+                  </a:lnTo>
+                  <a:lnTo>
+                    <a:pt x="6439364" y="1385188"/>
+                  </a:lnTo>
+                  <a:lnTo>
+                    <a:pt x="6516998" y="1392708"/>
+                  </a:lnTo>
+                  <a:lnTo>
+                    <a:pt x="6594632" y="1400101"/>
+                  </a:lnTo>
+                  <a:lnTo>
+                    <a:pt x="6672266" y="1407368"/>
+                  </a:lnTo>
+                  <a:lnTo>
+                    <a:pt x="6749900" y="1414513"/>
+                  </a:lnTo>
+                  <a:lnTo>
+                    <a:pt x="6827534" y="1421537"/>
+                  </a:lnTo>
+                  <a:lnTo>
+                    <a:pt x="6905168" y="1428442"/>
+                  </a:lnTo>
+                  <a:lnTo>
+                    <a:pt x="6982802" y="1435231"/>
+                  </a:lnTo>
+                  <a:lnTo>
+                    <a:pt x="7060436" y="1441904"/>
+                  </a:lnTo>
+                  <a:lnTo>
+                    <a:pt x="7138070" y="1448465"/>
+                  </a:lnTo>
+                  <a:lnTo>
+                    <a:pt x="7215704" y="1454915"/>
+                  </a:lnTo>
+                  <a:lnTo>
+                    <a:pt x="7293338" y="1461256"/>
+                  </a:lnTo>
+                  <a:lnTo>
+                    <a:pt x="7370972" y="1467489"/>
                   </a:lnTo>
                 </a:path>
               </a:pathLst>

--- a/docs/plots/carbo/jx_carbo_linsubhr_ratio_hosp8.pptx
+++ b/docs/plots/carbo/jx_carbo_linsubhr_ratio_hosp8.pptx
@@ -3034,7 +3034,7 @@
                     <a:pt x="1082615" y="800035"/>
                   </a:lnTo>
                   <a:lnTo>
-                    <a:pt x="1160249" y="911980"/>
+                    <a:pt x="1160249" y="911979"/>
                   </a:lnTo>
                   <a:lnTo>
                     <a:pt x="1237883" y="1019531"/>
@@ -3193,7 +3193,7 @@
                     <a:pt x="5197219" y="2654080"/>
                   </a:lnTo>
                   <a:lnTo>
-                    <a:pt x="5274853" y="2648147"/>
+                    <a:pt x="5274853" y="2648148"/>
                   </a:lnTo>
                   <a:lnTo>
                     <a:pt x="5352487" y="2642179"/>
@@ -3466,7 +3466,7 @@
                     <a:pt x="2557661" y="2836244"/>
                   </a:lnTo>
                   <a:lnTo>
-                    <a:pt x="2480027" y="2841067"/>
+                    <a:pt x="2480027" y="2841066"/>
                   </a:lnTo>
                   <a:lnTo>
                     <a:pt x="2402393" y="2845860"/>
@@ -3526,7 +3526,7 @@
                     <a:pt x="1004981" y="2927460"/>
                   </a:lnTo>
                   <a:lnTo>
-                    <a:pt x="927346" y="2931744"/>
+                    <a:pt x="927346" y="2931743"/>
                   </a:lnTo>
                   <a:lnTo>
                     <a:pt x="849712" y="2936001"/>
@@ -3620,7 +3620,7 @@
                     <a:pt x="479186" y="800035"/>
                   </a:lnTo>
                   <a:lnTo>
-                    <a:pt x="556820" y="911980"/>
+                    <a:pt x="556820" y="911979"/>
                   </a:lnTo>
                   <a:lnTo>
                     <a:pt x="634454" y="1019531"/>
@@ -3650,7 +3650,7 @@
                     <a:pt x="1255526" y="1741125"/>
                   </a:lnTo>
                   <a:lnTo>
-                    <a:pt x="1333161" y="1816138"/>
+                    <a:pt x="1333160" y="1816138"/>
                   </a:lnTo>
                   <a:lnTo>
                     <a:pt x="1410795" y="1888208"/>
@@ -3716,7 +3716,7 @@
                     <a:pt x="2963475" y="2770888"/>
                   </a:lnTo>
                   <a:lnTo>
-                    <a:pt x="3041110" y="2765649"/>
+                    <a:pt x="3041109" y="2765649"/>
                   </a:lnTo>
                   <a:lnTo>
                     <a:pt x="3118744" y="2760379"/>
@@ -3779,10 +3779,10 @@
                     <a:pt x="4593790" y="2654080"/>
                   </a:lnTo>
                   <a:lnTo>
-                    <a:pt x="4671424" y="2648147"/>
-                  </a:lnTo>
-                  <a:lnTo>
-                    <a:pt x="4749059" y="2642179"/>
+                    <a:pt x="4671424" y="2648148"/>
+                  </a:lnTo>
+                  <a:lnTo>
+                    <a:pt x="4749058" y="2642179"/>
                   </a:lnTo>
                   <a:lnTo>
                     <a:pt x="4826693" y="2636176"/>
@@ -3848,10 +3848,10 @@
                     <a:pt x="6379373" y="2508321"/>
                   </a:lnTo>
                   <a:lnTo>
-                    <a:pt x="6457008" y="2501522"/>
-                  </a:lnTo>
-                  <a:lnTo>
-                    <a:pt x="6534642" y="2494683"/>
+                    <a:pt x="6457007" y="2501522"/>
+                  </a:lnTo>
+                  <a:lnTo>
+                    <a:pt x="6534641" y="2494683"/>
                   </a:lnTo>
                   <a:lnTo>
                     <a:pt x="6612276" y="2487803"/>
@@ -4095,7 +4095,7 @@
                     <a:pt x="2091857" y="78332"/>
                   </a:lnTo>
                   <a:lnTo>
-                    <a:pt x="2014223" y="82986"/>
+                    <a:pt x="2014223" y="82985"/>
                   </a:lnTo>
                   <a:lnTo>
                     <a:pt x="1936589" y="87612"/>
@@ -4122,13 +4122,13 @@
                     <a:pt x="1393151" y="119238"/>
                   </a:lnTo>
                   <a:lnTo>
-                    <a:pt x="1315517" y="123651"/>
+                    <a:pt x="1315517" y="123650"/>
                   </a:lnTo>
                   <a:lnTo>
                     <a:pt x="1237883" y="128036"/>
                   </a:lnTo>
                   <a:lnTo>
-                    <a:pt x="1160249" y="132397"/>
+                    <a:pt x="1160249" y="132396"/>
                   </a:lnTo>
                   <a:lnTo>
                     <a:pt x="1082615" y="136731"/>
@@ -4372,7 +4372,7 @@
                     <a:pt x="4343244" y="1125116"/>
                   </a:lnTo>
                   <a:lnTo>
-                    <a:pt x="4420879" y="1137033"/>
+                    <a:pt x="4420879" y="1137034"/>
                   </a:lnTo>
                   <a:lnTo>
                     <a:pt x="4498513" y="1148750"/>
@@ -4387,7 +4387,7 @@
                     <a:pt x="4731415" y="1182723"/>
                   </a:lnTo>
                   <a:lnTo>
-                    <a:pt x="4809049" y="1193666"/>
+                    <a:pt x="4809049" y="1193667"/>
                   </a:lnTo>
                   <a:lnTo>
                     <a:pt x="4886683" y="1204425"/>
@@ -4411,13 +4411,13 @@
                     <a:pt x="5352487" y="1265262"/>
                   </a:lnTo>
                   <a:lnTo>
-                    <a:pt x="5430121" y="1274809"/>
+                    <a:pt x="5430121" y="1274810"/>
                   </a:lnTo>
                   <a:lnTo>
                     <a:pt x="5507755" y="1284196"/>
                   </a:lnTo>
                   <a:lnTo>
-                    <a:pt x="5585389" y="1293423"/>
+                    <a:pt x="5585389" y="1293424"/>
                   </a:lnTo>
                   <a:lnTo>
                     <a:pt x="5663023" y="1302495"/>
@@ -4441,7 +4441,7 @@
                     <a:pt x="6128827" y="1353793"/>
                   </a:lnTo>
                   <a:lnTo>
-                    <a:pt x="6206462" y="1361843"/>
+                    <a:pt x="6206462" y="1361844"/>
                   </a:lnTo>
                   <a:lnTo>
                     <a:pt x="6284096" y="1369758"/>

--- a/docs/plots/carbo/jx_carbo_linsubhr_ratio_hosp8.pptx
+++ b/docs/plots/carbo/jx_carbo_linsubhr_ratio_hosp8.pptx
@@ -2271,7 +2271,7 @@
           </p:nvSpPr>
           <p:spPr>
             <a:xfrm>
-              <a:off x="817517" y="5114368"/>
+              <a:off x="817517" y="5142518"/>
               <a:ext cx="7799693" cy="0"/>
             </a:xfrm>
             <a:custGeom>
@@ -2314,7 +2314,7 @@
           </p:nvSpPr>
           <p:spPr>
             <a:xfrm>
-              <a:off x="817517" y="4244691"/>
+              <a:off x="817517" y="4313054"/>
               <a:ext cx="7799693" cy="0"/>
             </a:xfrm>
             <a:custGeom>
@@ -2357,7 +2357,7 @@
           </p:nvSpPr>
           <p:spPr>
             <a:xfrm>
-              <a:off x="817517" y="3375014"/>
+              <a:off x="817517" y="3483591"/>
               <a:ext cx="7799693" cy="0"/>
             </a:xfrm>
             <a:custGeom>
@@ -2400,7 +2400,7 @@
           </p:nvSpPr>
           <p:spPr>
             <a:xfrm>
-              <a:off x="817517" y="2505337"/>
+              <a:off x="817517" y="2654127"/>
               <a:ext cx="7799693" cy="0"/>
             </a:xfrm>
             <a:custGeom>
@@ -2443,15 +2443,15 @@
           </p:nvSpPr>
           <p:spPr>
             <a:xfrm>
-              <a:off x="1615213" y="1896563"/>
-              <a:ext cx="0" cy="3826579"/>
+              <a:off x="1615213" y="2073503"/>
+              <a:ext cx="0" cy="3649639"/>
             </a:xfrm>
             <a:custGeom>
               <a:avLst/>
               <a:pathLst>
-                <a:path w="0" h="3826579">
+                <a:path w="0" h="3649639">
                   <a:moveTo>
-                    <a:pt x="0" y="3826579"/>
+                    <a:pt x="0" y="3649639"/>
                   </a:moveTo>
                   <a:lnTo>
                     <a:pt x="0" y="0"/>
@@ -2486,15 +2486,15 @@
           </p:nvSpPr>
           <p:spPr>
             <a:xfrm>
-              <a:off x="3387871" y="1896563"/>
-              <a:ext cx="0" cy="3826579"/>
+              <a:off x="3387871" y="2073503"/>
+              <a:ext cx="0" cy="3649639"/>
             </a:xfrm>
             <a:custGeom>
               <a:avLst/>
               <a:pathLst>
-                <a:path w="0" h="3826579">
+                <a:path w="0" h="3649639">
                   <a:moveTo>
-                    <a:pt x="0" y="3826579"/>
+                    <a:pt x="0" y="3649639"/>
                   </a:moveTo>
                   <a:lnTo>
                     <a:pt x="0" y="0"/>
@@ -2529,15 +2529,15 @@
           </p:nvSpPr>
           <p:spPr>
             <a:xfrm>
-              <a:off x="5160528" y="1896563"/>
-              <a:ext cx="0" cy="3826579"/>
+              <a:off x="5160528" y="2073503"/>
+              <a:ext cx="0" cy="3649639"/>
             </a:xfrm>
             <a:custGeom>
               <a:avLst/>
               <a:pathLst>
-                <a:path w="0" h="3826579">
+                <a:path w="0" h="3649639">
                   <a:moveTo>
-                    <a:pt x="0" y="3826579"/>
+                    <a:pt x="0" y="3649639"/>
                   </a:moveTo>
                   <a:lnTo>
                     <a:pt x="0" y="0"/>
@@ -2572,15 +2572,15 @@
           </p:nvSpPr>
           <p:spPr>
             <a:xfrm>
-              <a:off x="6933186" y="1896563"/>
-              <a:ext cx="0" cy="3826579"/>
+              <a:off x="6933186" y="2073503"/>
+              <a:ext cx="0" cy="3649639"/>
             </a:xfrm>
             <a:custGeom>
               <a:avLst/>
               <a:pathLst>
-                <a:path w="0" h="3826579">
+                <a:path w="0" h="3649639">
                   <a:moveTo>
-                    <a:pt x="0" y="3826579"/>
+                    <a:pt x="0" y="3649639"/>
                   </a:moveTo>
                   <a:lnTo>
                     <a:pt x="0" y="0"/>
@@ -2615,7 +2615,7 @@
           </p:nvSpPr>
           <p:spPr>
             <a:xfrm>
-              <a:off x="817517" y="5549207"/>
+              <a:off x="817517" y="5557249"/>
               <a:ext cx="7799693" cy="0"/>
             </a:xfrm>
             <a:custGeom>
@@ -2658,7 +2658,7 @@
           </p:nvSpPr>
           <p:spPr>
             <a:xfrm>
-              <a:off x="817517" y="4679530"/>
+              <a:off x="817517" y="4727786"/>
               <a:ext cx="7799693" cy="0"/>
             </a:xfrm>
             <a:custGeom>
@@ -2701,7 +2701,7 @@
           </p:nvSpPr>
           <p:spPr>
             <a:xfrm>
-              <a:off x="817517" y="3809853"/>
+              <a:off x="817517" y="3898322"/>
               <a:ext cx="7799693" cy="0"/>
             </a:xfrm>
             <a:custGeom>
@@ -2744,7 +2744,7 @@
           </p:nvSpPr>
           <p:spPr>
             <a:xfrm>
-              <a:off x="817517" y="2940175"/>
+              <a:off x="817517" y="3068859"/>
               <a:ext cx="7799693" cy="0"/>
             </a:xfrm>
             <a:custGeom>
@@ -2787,7 +2787,7 @@
           </p:nvSpPr>
           <p:spPr>
             <a:xfrm>
-              <a:off x="817517" y="2070498"/>
+              <a:off x="817517" y="2239395"/>
               <a:ext cx="7799693" cy="0"/>
             </a:xfrm>
             <a:custGeom>
@@ -2830,15 +2830,15 @@
           </p:nvSpPr>
           <p:spPr>
             <a:xfrm>
-              <a:off x="2501542" y="1896563"/>
-              <a:ext cx="0" cy="3826579"/>
+              <a:off x="2501542" y="2073503"/>
+              <a:ext cx="0" cy="3649639"/>
             </a:xfrm>
             <a:custGeom>
               <a:avLst/>
               <a:pathLst>
-                <a:path w="0" h="3826579">
+                <a:path w="0" h="3649639">
                   <a:moveTo>
-                    <a:pt x="0" y="3826579"/>
+                    <a:pt x="0" y="3649639"/>
                   </a:moveTo>
                   <a:lnTo>
                     <a:pt x="0" y="0"/>
@@ -2873,15 +2873,15 @@
           </p:nvSpPr>
           <p:spPr>
             <a:xfrm>
-              <a:off x="4274200" y="1896563"/>
-              <a:ext cx="0" cy="3826579"/>
+              <a:off x="4274200" y="2073503"/>
+              <a:ext cx="0" cy="3649639"/>
             </a:xfrm>
             <a:custGeom>
               <a:avLst/>
               <a:pathLst>
-                <a:path w="0" h="3826579">
+                <a:path w="0" h="3649639">
                   <a:moveTo>
-                    <a:pt x="0" y="3826579"/>
+                    <a:pt x="0" y="3649639"/>
                   </a:moveTo>
                   <a:lnTo>
                     <a:pt x="0" y="0"/>
@@ -2916,15 +2916,15 @@
           </p:nvSpPr>
           <p:spPr>
             <a:xfrm>
-              <a:off x="6046857" y="1896563"/>
-              <a:ext cx="0" cy="3826579"/>
+              <a:off x="6046857" y="2073503"/>
+              <a:ext cx="0" cy="3649639"/>
             </a:xfrm>
             <a:custGeom>
               <a:avLst/>
               <a:pathLst>
-                <a:path w="0" h="3826579">
+                <a:path w="0" h="3649639">
                   <a:moveTo>
-                    <a:pt x="0" y="3826579"/>
+                    <a:pt x="0" y="3649639"/>
                   </a:moveTo>
                   <a:lnTo>
                     <a:pt x="0" y="0"/>
@@ -2959,15 +2959,15 @@
           </p:nvSpPr>
           <p:spPr>
             <a:xfrm>
-              <a:off x="7819515" y="1896563"/>
-              <a:ext cx="0" cy="3826579"/>
+              <a:off x="7819515" y="2073503"/>
+              <a:ext cx="0" cy="3649639"/>
             </a:xfrm>
             <a:custGeom>
               <a:avLst/>
               <a:pathLst>
-                <a:path w="0" h="3826579">
+                <a:path w="0" h="3649639">
                   <a:moveTo>
-                    <a:pt x="0" y="3826579"/>
+                    <a:pt x="0" y="3649639"/>
                   </a:moveTo>
                   <a:lnTo>
                     <a:pt x="0" y="0"/>
@@ -3002,567 +3002,567 @@
           </p:nvSpPr>
           <p:spPr>
             <a:xfrm>
-              <a:off x="817517" y="1896563"/>
-              <a:ext cx="7370972" cy="3541227"/>
+              <a:off x="817517" y="2073503"/>
+              <a:ext cx="7370972" cy="3377482"/>
             </a:xfrm>
             <a:custGeom>
               <a:avLst/>
               <a:pathLst>
-                <a:path w="7370972" h="3541227">
+                <a:path w="7370972" h="3377482">
                   <a:moveTo>
                     <a:pt x="603428" y="0"/>
                   </a:moveTo>
                   <a:lnTo>
-                    <a:pt x="616810" y="25537"/>
-                  </a:lnTo>
-                  <a:lnTo>
-                    <a:pt x="694444" y="167875"/>
-                  </a:lnTo>
-                  <a:lnTo>
-                    <a:pt x="772078" y="304627"/>
-                  </a:lnTo>
-                  <a:lnTo>
-                    <a:pt x="849712" y="436013"/>
-                  </a:lnTo>
-                  <a:lnTo>
-                    <a:pt x="927346" y="562242"/>
-                  </a:lnTo>
-                  <a:lnTo>
-                    <a:pt x="1004981" y="683518"/>
-                  </a:lnTo>
-                  <a:lnTo>
-                    <a:pt x="1082615" y="800035"/>
-                  </a:lnTo>
-                  <a:lnTo>
-                    <a:pt x="1160249" y="911979"/>
-                  </a:lnTo>
-                  <a:lnTo>
-                    <a:pt x="1237883" y="1019531"/>
-                  </a:lnTo>
-                  <a:lnTo>
-                    <a:pt x="1315517" y="1122862"/>
-                  </a:lnTo>
-                  <a:lnTo>
-                    <a:pt x="1393151" y="1222137"/>
-                  </a:lnTo>
-                  <a:lnTo>
-                    <a:pt x="1470785" y="1317517"/>
-                  </a:lnTo>
-                  <a:lnTo>
-                    <a:pt x="1548419" y="1409154"/>
-                  </a:lnTo>
-                  <a:lnTo>
-                    <a:pt x="1626053" y="1497195"/>
-                  </a:lnTo>
-                  <a:lnTo>
-                    <a:pt x="1703687" y="1581781"/>
-                  </a:lnTo>
-                  <a:lnTo>
-                    <a:pt x="1781321" y="1663047"/>
-                  </a:lnTo>
-                  <a:lnTo>
-                    <a:pt x="1858955" y="1741125"/>
-                  </a:lnTo>
-                  <a:lnTo>
-                    <a:pt x="1936589" y="1816138"/>
-                  </a:lnTo>
-                  <a:lnTo>
-                    <a:pt x="2014223" y="1888208"/>
-                  </a:lnTo>
-                  <a:lnTo>
-                    <a:pt x="2091857" y="1957449"/>
-                  </a:lnTo>
-                  <a:lnTo>
-                    <a:pt x="2169491" y="2023973"/>
-                  </a:lnTo>
-                  <a:lnTo>
-                    <a:pt x="2247125" y="2087887"/>
-                  </a:lnTo>
-                  <a:lnTo>
-                    <a:pt x="2324759" y="2149292"/>
-                  </a:lnTo>
-                  <a:lnTo>
-                    <a:pt x="2402393" y="2208288"/>
-                  </a:lnTo>
-                  <a:lnTo>
-                    <a:pt x="2480027" y="2264968"/>
-                  </a:lnTo>
-                  <a:lnTo>
-                    <a:pt x="2557661" y="2319425"/>
-                  </a:lnTo>
-                  <a:lnTo>
-                    <a:pt x="2635295" y="2371744"/>
-                  </a:lnTo>
-                  <a:lnTo>
-                    <a:pt x="2712930" y="2422010"/>
-                  </a:lnTo>
-                  <a:lnTo>
-                    <a:pt x="2790564" y="2470304"/>
-                  </a:lnTo>
-                  <a:lnTo>
-                    <a:pt x="2868198" y="2516702"/>
-                  </a:lnTo>
-                  <a:lnTo>
-                    <a:pt x="2945832" y="2561279"/>
-                  </a:lnTo>
-                  <a:lnTo>
-                    <a:pt x="3023466" y="2604108"/>
-                  </a:lnTo>
-                  <a:lnTo>
-                    <a:pt x="3101100" y="2645255"/>
-                  </a:lnTo>
-                  <a:lnTo>
-                    <a:pt x="3178734" y="2684788"/>
-                  </a:lnTo>
-                  <a:lnTo>
-                    <a:pt x="3256368" y="2722769"/>
-                  </a:lnTo>
-                  <a:lnTo>
-                    <a:pt x="3334002" y="2759260"/>
-                  </a:lnTo>
-                  <a:lnTo>
-                    <a:pt x="3411636" y="2781274"/>
-                  </a:lnTo>
-                  <a:lnTo>
-                    <a:pt x="3489270" y="2776096"/>
-                  </a:lnTo>
-                  <a:lnTo>
-                    <a:pt x="3566904" y="2770888"/>
-                  </a:lnTo>
-                  <a:lnTo>
-                    <a:pt x="3644538" y="2765649"/>
-                  </a:lnTo>
-                  <a:lnTo>
-                    <a:pt x="3722172" y="2760379"/>
-                  </a:lnTo>
-                  <a:lnTo>
-                    <a:pt x="3799806" y="2755078"/>
-                  </a:lnTo>
-                  <a:lnTo>
-                    <a:pt x="3877440" y="2749745"/>
-                  </a:lnTo>
-                  <a:lnTo>
-                    <a:pt x="3955074" y="2744380"/>
-                  </a:lnTo>
-                  <a:lnTo>
-                    <a:pt x="4032708" y="2738984"/>
-                  </a:lnTo>
-                  <a:lnTo>
-                    <a:pt x="4110342" y="2733555"/>
-                  </a:lnTo>
-                  <a:lnTo>
-                    <a:pt x="4187976" y="2728095"/>
-                  </a:lnTo>
-                  <a:lnTo>
-                    <a:pt x="4265610" y="2722601"/>
-                  </a:lnTo>
-                  <a:lnTo>
-                    <a:pt x="4343244" y="2717075"/>
-                  </a:lnTo>
-                  <a:lnTo>
-                    <a:pt x="4420879" y="2711517"/>
-                  </a:lnTo>
-                  <a:lnTo>
-                    <a:pt x="4498513" y="2705925"/>
-                  </a:lnTo>
-                  <a:lnTo>
-                    <a:pt x="4576147" y="2700300"/>
-                  </a:lnTo>
-                  <a:lnTo>
-                    <a:pt x="4653781" y="2694642"/>
-                  </a:lnTo>
-                  <a:lnTo>
-                    <a:pt x="4731415" y="2688950"/>
-                  </a:lnTo>
-                  <a:lnTo>
-                    <a:pt x="4809049" y="2683224"/>
-                  </a:lnTo>
-                  <a:lnTo>
-                    <a:pt x="4886683" y="2677464"/>
-                  </a:lnTo>
-                  <a:lnTo>
-                    <a:pt x="4964317" y="2671670"/>
-                  </a:lnTo>
-                  <a:lnTo>
-                    <a:pt x="5041951" y="2665842"/>
-                  </a:lnTo>
-                  <a:lnTo>
-                    <a:pt x="5119585" y="2659978"/>
-                  </a:lnTo>
-                  <a:lnTo>
-                    <a:pt x="5197219" y="2654080"/>
-                  </a:lnTo>
-                  <a:lnTo>
-                    <a:pt x="5274853" y="2648148"/>
-                  </a:lnTo>
-                  <a:lnTo>
-                    <a:pt x="5352487" y="2642179"/>
-                  </a:lnTo>
-                  <a:lnTo>
-                    <a:pt x="5430121" y="2636176"/>
-                  </a:lnTo>
-                  <a:lnTo>
-                    <a:pt x="5507755" y="2630136"/>
-                  </a:lnTo>
-                  <a:lnTo>
-                    <a:pt x="5585389" y="2624061"/>
-                  </a:lnTo>
-                  <a:lnTo>
-                    <a:pt x="5663023" y="2617950"/>
-                  </a:lnTo>
-                  <a:lnTo>
-                    <a:pt x="5740657" y="2611802"/>
-                  </a:lnTo>
-                  <a:lnTo>
-                    <a:pt x="5818291" y="2605618"/>
-                  </a:lnTo>
-                  <a:lnTo>
-                    <a:pt x="5895925" y="2599397"/>
-                  </a:lnTo>
-                  <a:lnTo>
-                    <a:pt x="5973559" y="2593139"/>
-                  </a:lnTo>
-                  <a:lnTo>
-                    <a:pt x="6051193" y="2586844"/>
-                  </a:lnTo>
-                  <a:lnTo>
-                    <a:pt x="6128827" y="2580511"/>
-                  </a:lnTo>
-                  <a:lnTo>
-                    <a:pt x="6206462" y="2574141"/>
-                  </a:lnTo>
-                  <a:lnTo>
-                    <a:pt x="6284096" y="2567733"/>
-                  </a:lnTo>
-                  <a:lnTo>
-                    <a:pt x="6361730" y="2561287"/>
-                  </a:lnTo>
-                  <a:lnTo>
-                    <a:pt x="6439364" y="2554803"/>
-                  </a:lnTo>
-                  <a:lnTo>
-                    <a:pt x="6516998" y="2548280"/>
-                  </a:lnTo>
-                  <a:lnTo>
-                    <a:pt x="6594632" y="2541719"/>
-                  </a:lnTo>
-                  <a:lnTo>
-                    <a:pt x="6672266" y="2535118"/>
-                  </a:lnTo>
-                  <a:lnTo>
-                    <a:pt x="6749900" y="2528478"/>
-                  </a:lnTo>
-                  <a:lnTo>
-                    <a:pt x="6827534" y="2521799"/>
-                  </a:lnTo>
-                  <a:lnTo>
-                    <a:pt x="6905168" y="2515080"/>
-                  </a:lnTo>
-                  <a:lnTo>
-                    <a:pt x="6982802" y="2508321"/>
-                  </a:lnTo>
-                  <a:lnTo>
-                    <a:pt x="7060436" y="2501522"/>
-                  </a:lnTo>
-                  <a:lnTo>
-                    <a:pt x="7138070" y="2494683"/>
-                  </a:lnTo>
-                  <a:lnTo>
-                    <a:pt x="7215704" y="2487803"/>
-                  </a:lnTo>
-                  <a:lnTo>
-                    <a:pt x="7293338" y="2480882"/>
-                  </a:lnTo>
-                  <a:lnTo>
-                    <a:pt x="7370972" y="2473920"/>
-                  </a:lnTo>
-                  <a:lnTo>
-                    <a:pt x="7370972" y="3541227"/>
-                  </a:lnTo>
-                  <a:lnTo>
-                    <a:pt x="7293338" y="3536676"/>
-                  </a:lnTo>
-                  <a:lnTo>
-                    <a:pt x="7215704" y="3531940"/>
-                  </a:lnTo>
-                  <a:lnTo>
-                    <a:pt x="7138070" y="3527010"/>
-                  </a:lnTo>
-                  <a:lnTo>
-                    <a:pt x="7060436" y="3521878"/>
-                  </a:lnTo>
-                  <a:lnTo>
-                    <a:pt x="6982802" y="3516537"/>
-                  </a:lnTo>
-                  <a:lnTo>
-                    <a:pt x="6905168" y="3510977"/>
-                  </a:lnTo>
-                  <a:lnTo>
-                    <a:pt x="6827534" y="3505191"/>
-                  </a:lnTo>
-                  <a:lnTo>
-                    <a:pt x="6749900" y="3499168"/>
-                  </a:lnTo>
-                  <a:lnTo>
-                    <a:pt x="6672266" y="3492899"/>
-                  </a:lnTo>
-                  <a:lnTo>
-                    <a:pt x="6594632" y="3486374"/>
-                  </a:lnTo>
-                  <a:lnTo>
-                    <a:pt x="6516998" y="3479583"/>
-                  </a:lnTo>
-                  <a:lnTo>
-                    <a:pt x="6439364" y="3472514"/>
-                  </a:lnTo>
-                  <a:lnTo>
-                    <a:pt x="6361730" y="3465157"/>
-                  </a:lnTo>
-                  <a:lnTo>
-                    <a:pt x="6284096" y="3457499"/>
-                  </a:lnTo>
-                  <a:lnTo>
-                    <a:pt x="6206462" y="3449528"/>
-                  </a:lnTo>
-                  <a:lnTo>
-                    <a:pt x="6128827" y="3441232"/>
-                  </a:lnTo>
-                  <a:lnTo>
-                    <a:pt x="6051193" y="3432596"/>
-                  </a:lnTo>
-                  <a:lnTo>
-                    <a:pt x="5973559" y="3423608"/>
-                  </a:lnTo>
-                  <a:lnTo>
-                    <a:pt x="5895925" y="3414253"/>
-                  </a:lnTo>
-                  <a:lnTo>
-                    <a:pt x="5818291" y="3404516"/>
-                  </a:lnTo>
-                  <a:lnTo>
-                    <a:pt x="5740657" y="3394381"/>
-                  </a:lnTo>
-                  <a:lnTo>
-                    <a:pt x="5663023" y="3383832"/>
-                  </a:lnTo>
-                  <a:lnTo>
-                    <a:pt x="5585389" y="3372852"/>
-                  </a:lnTo>
-                  <a:lnTo>
-                    <a:pt x="5507755" y="3361424"/>
-                  </a:lnTo>
-                  <a:lnTo>
-                    <a:pt x="5430121" y="3349529"/>
-                  </a:lnTo>
-                  <a:lnTo>
-                    <a:pt x="5352487" y="3337148"/>
-                  </a:lnTo>
-                  <a:lnTo>
-                    <a:pt x="5274853" y="3324262"/>
-                  </a:lnTo>
-                  <a:lnTo>
-                    <a:pt x="5197219" y="3310849"/>
-                  </a:lnTo>
-                  <a:lnTo>
-                    <a:pt x="5119585" y="3296888"/>
-                  </a:lnTo>
-                  <a:lnTo>
-                    <a:pt x="5041951" y="3282357"/>
-                  </a:lnTo>
-                  <a:lnTo>
-                    <a:pt x="4964317" y="3267232"/>
-                  </a:lnTo>
-                  <a:lnTo>
-                    <a:pt x="4886683" y="3251490"/>
-                  </a:lnTo>
-                  <a:lnTo>
-                    <a:pt x="4809049" y="3235104"/>
-                  </a:lnTo>
-                  <a:lnTo>
-                    <a:pt x="4731415" y="3218050"/>
-                  </a:lnTo>
-                  <a:lnTo>
-                    <a:pt x="4653781" y="3200298"/>
-                  </a:lnTo>
-                  <a:lnTo>
-                    <a:pt x="4576147" y="3181822"/>
-                  </a:lnTo>
-                  <a:lnTo>
-                    <a:pt x="4498513" y="3162591"/>
-                  </a:lnTo>
-                  <a:lnTo>
-                    <a:pt x="4420879" y="3142574"/>
-                  </a:lnTo>
-                  <a:lnTo>
-                    <a:pt x="4343244" y="3121740"/>
-                  </a:lnTo>
-                  <a:lnTo>
-                    <a:pt x="4265610" y="3100055"/>
-                  </a:lnTo>
-                  <a:lnTo>
-                    <a:pt x="4187976" y="3077484"/>
-                  </a:lnTo>
-                  <a:lnTo>
-                    <a:pt x="4110342" y="3053992"/>
-                  </a:lnTo>
-                  <a:lnTo>
-                    <a:pt x="4032708" y="3029539"/>
-                  </a:lnTo>
-                  <a:lnTo>
-                    <a:pt x="3955074" y="3004088"/>
-                  </a:lnTo>
-                  <a:lnTo>
-                    <a:pt x="3877440" y="2977597"/>
-                  </a:lnTo>
-                  <a:lnTo>
-                    <a:pt x="3799806" y="2950025"/>
-                  </a:lnTo>
-                  <a:lnTo>
-                    <a:pt x="3722172" y="2921326"/>
-                  </a:lnTo>
-                  <a:lnTo>
-                    <a:pt x="3644538" y="2891454"/>
-                  </a:lnTo>
-                  <a:lnTo>
-                    <a:pt x="3566904" y="2860363"/>
-                  </a:lnTo>
-                  <a:lnTo>
-                    <a:pt x="3489270" y="2828002"/>
-                  </a:lnTo>
-                  <a:lnTo>
-                    <a:pt x="3411636" y="2794319"/>
-                  </a:lnTo>
-                  <a:lnTo>
-                    <a:pt x="3334002" y="2786420"/>
-                  </a:lnTo>
-                  <a:lnTo>
-                    <a:pt x="3256368" y="2791537"/>
-                  </a:lnTo>
-                  <a:lnTo>
-                    <a:pt x="3178734" y="2796623"/>
-                  </a:lnTo>
-                  <a:lnTo>
-                    <a:pt x="3101100" y="2801679"/>
-                  </a:lnTo>
-                  <a:lnTo>
-                    <a:pt x="3023466" y="2806705"/>
-                  </a:lnTo>
-                  <a:lnTo>
-                    <a:pt x="2945832" y="2811701"/>
-                  </a:lnTo>
-                  <a:lnTo>
-                    <a:pt x="2868198" y="2816668"/>
-                  </a:lnTo>
-                  <a:lnTo>
-                    <a:pt x="2790564" y="2821606"/>
-                  </a:lnTo>
-                  <a:lnTo>
-                    <a:pt x="2712930" y="2826514"/>
-                  </a:lnTo>
-                  <a:lnTo>
-                    <a:pt x="2635295" y="2831394"/>
-                  </a:lnTo>
-                  <a:lnTo>
-                    <a:pt x="2557661" y="2836244"/>
-                  </a:lnTo>
-                  <a:lnTo>
-                    <a:pt x="2480027" y="2841066"/>
-                  </a:lnTo>
-                  <a:lnTo>
-                    <a:pt x="2402393" y="2845860"/>
-                  </a:lnTo>
-                  <a:lnTo>
-                    <a:pt x="2324759" y="2850625"/>
-                  </a:lnTo>
-                  <a:lnTo>
-                    <a:pt x="2247125" y="2855362"/>
-                  </a:lnTo>
-                  <a:lnTo>
-                    <a:pt x="2169491" y="2860071"/>
-                  </a:lnTo>
-                  <a:lnTo>
-                    <a:pt x="2091857" y="2864753"/>
-                  </a:lnTo>
-                  <a:lnTo>
-                    <a:pt x="2014223" y="2869406"/>
-                  </a:lnTo>
-                  <a:lnTo>
-                    <a:pt x="1936589" y="2874032"/>
-                  </a:lnTo>
-                  <a:lnTo>
-                    <a:pt x="1858955" y="2878631"/>
-                  </a:lnTo>
-                  <a:lnTo>
-                    <a:pt x="1781321" y="2883203"/>
-                  </a:lnTo>
-                  <a:lnTo>
-                    <a:pt x="1703687" y="2887748"/>
-                  </a:lnTo>
-                  <a:lnTo>
-                    <a:pt x="1626053" y="2892265"/>
-                  </a:lnTo>
-                  <a:lnTo>
-                    <a:pt x="1548419" y="2896756"/>
-                  </a:lnTo>
-                  <a:lnTo>
-                    <a:pt x="1470785" y="2901221"/>
-                  </a:lnTo>
-                  <a:lnTo>
-                    <a:pt x="1393151" y="2905659"/>
-                  </a:lnTo>
-                  <a:lnTo>
-                    <a:pt x="1315517" y="2910071"/>
-                  </a:lnTo>
-                  <a:lnTo>
-                    <a:pt x="1237883" y="2914457"/>
-                  </a:lnTo>
-                  <a:lnTo>
-                    <a:pt x="1160249" y="2918817"/>
-                  </a:lnTo>
-                  <a:lnTo>
-                    <a:pt x="1082615" y="2923152"/>
-                  </a:lnTo>
-                  <a:lnTo>
-                    <a:pt x="1004981" y="2927460"/>
-                  </a:lnTo>
-                  <a:lnTo>
-                    <a:pt x="927346" y="2931743"/>
-                  </a:lnTo>
-                  <a:lnTo>
-                    <a:pt x="849712" y="2936001"/>
-                  </a:lnTo>
-                  <a:lnTo>
-                    <a:pt x="772078" y="2940234"/>
-                  </a:lnTo>
-                  <a:lnTo>
-                    <a:pt x="694444" y="2944442"/>
-                  </a:lnTo>
-                  <a:lnTo>
-                    <a:pt x="616810" y="2948625"/>
-                  </a:lnTo>
-                  <a:lnTo>
-                    <a:pt x="539176" y="2952783"/>
-                  </a:lnTo>
-                  <a:lnTo>
-                    <a:pt x="461542" y="2956917"/>
-                  </a:lnTo>
-                  <a:lnTo>
-                    <a:pt x="383908" y="2961026"/>
-                  </a:lnTo>
-                  <a:lnTo>
-                    <a:pt x="306274" y="2965111"/>
-                  </a:lnTo>
-                  <a:lnTo>
-                    <a:pt x="228640" y="2969172"/>
-                  </a:lnTo>
-                  <a:lnTo>
-                    <a:pt x="151006" y="2973209"/>
-                  </a:lnTo>
-                  <a:lnTo>
-                    <a:pt x="73372" y="2977222"/>
-                  </a:lnTo>
-                  <a:lnTo>
-                    <a:pt x="0" y="2980992"/>
+                    <a:pt x="616810" y="24356"/>
+                  </a:lnTo>
+                  <a:lnTo>
+                    <a:pt x="694444" y="160113"/>
+                  </a:lnTo>
+                  <a:lnTo>
+                    <a:pt x="772078" y="290541"/>
+                  </a:lnTo>
+                  <a:lnTo>
+                    <a:pt x="849712" y="415852"/>
+                  </a:lnTo>
+                  <a:lnTo>
+                    <a:pt x="927346" y="536244"/>
+                  </a:lnTo>
+                  <a:lnTo>
+                    <a:pt x="1004981" y="651913"/>
+                  </a:lnTo>
+                  <a:lnTo>
+                    <a:pt x="1082615" y="763042"/>
+                  </a:lnTo>
+                  <a:lnTo>
+                    <a:pt x="1160249" y="869810"/>
+                  </a:lnTo>
+                  <a:lnTo>
+                    <a:pt x="1237883" y="972388"/>
+                  </a:lnTo>
+                  <a:lnTo>
+                    <a:pt x="1315517" y="1070941"/>
+                  </a:lnTo>
+                  <a:lnTo>
+                    <a:pt x="1393151" y="1165626"/>
+                  </a:lnTo>
+                  <a:lnTo>
+                    <a:pt x="1470785" y="1256596"/>
+                  </a:lnTo>
+                  <a:lnTo>
+                    <a:pt x="1548419" y="1343995"/>
+                  </a:lnTo>
+                  <a:lnTo>
+                    <a:pt x="1626053" y="1427965"/>
+                  </a:lnTo>
+                  <a:lnTo>
+                    <a:pt x="1703687" y="1508640"/>
+                  </a:lnTo>
+                  <a:lnTo>
+                    <a:pt x="1781321" y="1586148"/>
+                  </a:lnTo>
+                  <a:lnTo>
+                    <a:pt x="1858955" y="1660616"/>
+                  </a:lnTo>
+                  <a:lnTo>
+                    <a:pt x="1936589" y="1732160"/>
+                  </a:lnTo>
+                  <a:lnTo>
+                    <a:pt x="2014223" y="1800897"/>
+                  </a:lnTo>
+                  <a:lnTo>
+                    <a:pt x="2091857" y="1866937"/>
+                  </a:lnTo>
+                  <a:lnTo>
+                    <a:pt x="2169491" y="1930385"/>
+                  </a:lnTo>
+                  <a:lnTo>
+                    <a:pt x="2247125" y="1991344"/>
+                  </a:lnTo>
+                  <a:lnTo>
+                    <a:pt x="2324759" y="2049910"/>
+                  </a:lnTo>
+                  <a:lnTo>
+                    <a:pt x="2402393" y="2106177"/>
+                  </a:lnTo>
+                  <a:lnTo>
+                    <a:pt x="2480027" y="2160237"/>
+                  </a:lnTo>
+                  <a:lnTo>
+                    <a:pt x="2557661" y="2212175"/>
+                  </a:lnTo>
+                  <a:lnTo>
+                    <a:pt x="2635295" y="2262075"/>
+                  </a:lnTo>
+                  <a:lnTo>
+                    <a:pt x="2712930" y="2310017"/>
+                  </a:lnTo>
+                  <a:lnTo>
+                    <a:pt x="2790564" y="2356078"/>
+                  </a:lnTo>
+                  <a:lnTo>
+                    <a:pt x="2868198" y="2400330"/>
+                  </a:lnTo>
+                  <a:lnTo>
+                    <a:pt x="2945832" y="2442847"/>
+                  </a:lnTo>
+                  <a:lnTo>
+                    <a:pt x="3023466" y="2483695"/>
+                  </a:lnTo>
+                  <a:lnTo>
+                    <a:pt x="3101100" y="2522939"/>
+                  </a:lnTo>
+                  <a:lnTo>
+                    <a:pt x="3178734" y="2560644"/>
+                  </a:lnTo>
+                  <a:lnTo>
+                    <a:pt x="3256368" y="2596869"/>
+                  </a:lnTo>
+                  <a:lnTo>
+                    <a:pt x="3334002" y="2631673"/>
+                  </a:lnTo>
+                  <a:lnTo>
+                    <a:pt x="3411636" y="2652669"/>
+                  </a:lnTo>
+                  <a:lnTo>
+                    <a:pt x="3489270" y="2647731"/>
+                  </a:lnTo>
+                  <a:lnTo>
+                    <a:pt x="3566904" y="2642763"/>
+                  </a:lnTo>
+                  <a:lnTo>
+                    <a:pt x="3644538" y="2637767"/>
+                  </a:lnTo>
+                  <a:lnTo>
+                    <a:pt x="3722172" y="2632740"/>
+                  </a:lnTo>
+                  <a:lnTo>
+                    <a:pt x="3799806" y="2627684"/>
+                  </a:lnTo>
+                  <a:lnTo>
+                    <a:pt x="3877440" y="2622598"/>
+                  </a:lnTo>
+                  <a:lnTo>
+                    <a:pt x="3955074" y="2617481"/>
+                  </a:lnTo>
+                  <a:lnTo>
+                    <a:pt x="4032708" y="2612334"/>
+                  </a:lnTo>
+                  <a:lnTo>
+                    <a:pt x="4110342" y="2607157"/>
+                  </a:lnTo>
+                  <a:lnTo>
+                    <a:pt x="4187976" y="2601948"/>
+                  </a:lnTo>
+                  <a:lnTo>
+                    <a:pt x="4265610" y="2596709"/>
+                  </a:lnTo>
+                  <a:lnTo>
+                    <a:pt x="4343244" y="2591439"/>
+                  </a:lnTo>
+                  <a:lnTo>
+                    <a:pt x="4420879" y="2586137"/>
+                  </a:lnTo>
+                  <a:lnTo>
+                    <a:pt x="4498513" y="2580804"/>
+                  </a:lnTo>
+                  <a:lnTo>
+                    <a:pt x="4576147" y="2575439"/>
+                  </a:lnTo>
+                  <a:lnTo>
+                    <a:pt x="4653781" y="2570042"/>
+                  </a:lnTo>
+                  <a:lnTo>
+                    <a:pt x="4731415" y="2564614"/>
+                  </a:lnTo>
+                  <a:lnTo>
+                    <a:pt x="4809049" y="2559153"/>
+                  </a:lnTo>
+                  <a:lnTo>
+                    <a:pt x="4886683" y="2553659"/>
+                  </a:lnTo>
+                  <a:lnTo>
+                    <a:pt x="4964317" y="2548133"/>
+                  </a:lnTo>
+                  <a:lnTo>
+                    <a:pt x="5041951" y="2542574"/>
+                  </a:lnTo>
+                  <a:lnTo>
+                    <a:pt x="5119585" y="2536982"/>
+                  </a:lnTo>
+                  <a:lnTo>
+                    <a:pt x="5197219" y="2531357"/>
+                  </a:lnTo>
+                  <a:lnTo>
+                    <a:pt x="5274853" y="2525698"/>
+                  </a:lnTo>
+                  <a:lnTo>
+                    <a:pt x="5352487" y="2520006"/>
+                  </a:lnTo>
+                  <a:lnTo>
+                    <a:pt x="5430121" y="2514280"/>
+                  </a:lnTo>
+                  <a:lnTo>
+                    <a:pt x="5507755" y="2508520"/>
+                  </a:lnTo>
+                  <a:lnTo>
+                    <a:pt x="5585389" y="2502725"/>
+                  </a:lnTo>
+                  <a:lnTo>
+                    <a:pt x="5663023" y="2496897"/>
+                  </a:lnTo>
+                  <a:lnTo>
+                    <a:pt x="5740657" y="2491033"/>
+                  </a:lnTo>
+                  <a:lnTo>
+                    <a:pt x="5818291" y="2485135"/>
+                  </a:lnTo>
+                  <a:lnTo>
+                    <a:pt x="5895925" y="2479202"/>
+                  </a:lnTo>
+                  <a:lnTo>
+                    <a:pt x="5973559" y="2473233"/>
+                  </a:lnTo>
+                  <a:lnTo>
+                    <a:pt x="6051193" y="2467229"/>
+                  </a:lnTo>
+                  <a:lnTo>
+                    <a:pt x="6128827" y="2461189"/>
+                  </a:lnTo>
+                  <a:lnTo>
+                    <a:pt x="6206462" y="2455114"/>
+                  </a:lnTo>
+                  <a:lnTo>
+                    <a:pt x="6284096" y="2449002"/>
+                  </a:lnTo>
+                  <a:lnTo>
+                    <a:pt x="6361730" y="2442854"/>
+                  </a:lnTo>
+                  <a:lnTo>
+                    <a:pt x="6439364" y="2436670"/>
+                  </a:lnTo>
+                  <a:lnTo>
+                    <a:pt x="6516998" y="2430449"/>
+                  </a:lnTo>
+                  <a:lnTo>
+                    <a:pt x="6594632" y="2424190"/>
+                  </a:lnTo>
+                  <a:lnTo>
+                    <a:pt x="6672266" y="2417895"/>
+                  </a:lnTo>
+                  <a:lnTo>
+                    <a:pt x="6749900" y="2411562"/>
+                  </a:lnTo>
+                  <a:lnTo>
+                    <a:pt x="6827534" y="2405192"/>
+                  </a:lnTo>
+                  <a:lnTo>
+                    <a:pt x="6905168" y="2398784"/>
+                  </a:lnTo>
+                  <a:lnTo>
+                    <a:pt x="6982802" y="2392337"/>
+                  </a:lnTo>
+                  <a:lnTo>
+                    <a:pt x="7060436" y="2385853"/>
+                  </a:lnTo>
+                  <a:lnTo>
+                    <a:pt x="7138070" y="2379329"/>
+                  </a:lnTo>
+                  <a:lnTo>
+                    <a:pt x="7215704" y="2372768"/>
+                  </a:lnTo>
+                  <a:lnTo>
+                    <a:pt x="7293338" y="2366167"/>
+                  </a:lnTo>
+                  <a:lnTo>
+                    <a:pt x="7370972" y="2359527"/>
+                  </a:lnTo>
+                  <a:lnTo>
+                    <a:pt x="7370972" y="3377482"/>
+                  </a:lnTo>
+                  <a:lnTo>
+                    <a:pt x="7293338" y="3373142"/>
+                  </a:lnTo>
+                  <a:lnTo>
+                    <a:pt x="7215704" y="3368624"/>
+                  </a:lnTo>
+                  <a:lnTo>
+                    <a:pt x="7138070" y="3363922"/>
+                  </a:lnTo>
+                  <a:lnTo>
+                    <a:pt x="7060436" y="3359028"/>
+                  </a:lnTo>
+                  <a:lnTo>
+                    <a:pt x="6982802" y="3353933"/>
+                  </a:lnTo>
+                  <a:lnTo>
+                    <a:pt x="6905168" y="3348631"/>
+                  </a:lnTo>
+                  <a:lnTo>
+                    <a:pt x="6827534" y="3343112"/>
+                  </a:lnTo>
+                  <a:lnTo>
+                    <a:pt x="6749900" y="3337368"/>
+                  </a:lnTo>
+                  <a:lnTo>
+                    <a:pt x="6672266" y="3331389"/>
+                  </a:lnTo>
+                  <a:lnTo>
+                    <a:pt x="6594632" y="3325166"/>
+                  </a:lnTo>
+                  <a:lnTo>
+                    <a:pt x="6516998" y="3318688"/>
+                  </a:lnTo>
+                  <a:lnTo>
+                    <a:pt x="6439364" y="3311947"/>
+                  </a:lnTo>
+                  <a:lnTo>
+                    <a:pt x="6361730" y="3304929"/>
+                  </a:lnTo>
+                  <a:lnTo>
+                    <a:pt x="6284096" y="3297625"/>
+                  </a:lnTo>
+                  <a:lnTo>
+                    <a:pt x="6206462" y="3290023"/>
+                  </a:lnTo>
+                  <a:lnTo>
+                    <a:pt x="6128827" y="3282110"/>
+                  </a:lnTo>
+                  <a:lnTo>
+                    <a:pt x="6051193" y="3273874"/>
+                  </a:lnTo>
+                  <a:lnTo>
+                    <a:pt x="5973559" y="3265302"/>
+                  </a:lnTo>
+                  <a:lnTo>
+                    <a:pt x="5895925" y="3256379"/>
+                  </a:lnTo>
+                  <a:lnTo>
+                    <a:pt x="5818291" y="3247092"/>
+                  </a:lnTo>
+                  <a:lnTo>
+                    <a:pt x="5740657" y="3237426"/>
+                  </a:lnTo>
+                  <a:lnTo>
+                    <a:pt x="5663023" y="3227365"/>
+                  </a:lnTo>
+                  <a:lnTo>
+                    <a:pt x="5585389" y="3216893"/>
+                  </a:lnTo>
+                  <a:lnTo>
+                    <a:pt x="5507755" y="3205993"/>
+                  </a:lnTo>
+                  <a:lnTo>
+                    <a:pt x="5430121" y="3194648"/>
+                  </a:lnTo>
+                  <a:lnTo>
+                    <a:pt x="5352487" y="3182840"/>
+                  </a:lnTo>
+                  <a:lnTo>
+                    <a:pt x="5274853" y="3170549"/>
+                  </a:lnTo>
+                  <a:lnTo>
+                    <a:pt x="5197219" y="3157756"/>
+                  </a:lnTo>
+                  <a:lnTo>
+                    <a:pt x="5119585" y="3144441"/>
+                  </a:lnTo>
+                  <a:lnTo>
+                    <a:pt x="5041951" y="3130582"/>
+                  </a:lnTo>
+                  <a:lnTo>
+                    <a:pt x="4964317" y="3116156"/>
+                  </a:lnTo>
+                  <a:lnTo>
+                    <a:pt x="4886683" y="3101142"/>
+                  </a:lnTo>
+                  <a:lnTo>
+                    <a:pt x="4809049" y="3085514"/>
+                  </a:lnTo>
+                  <a:lnTo>
+                    <a:pt x="4731415" y="3069248"/>
+                  </a:lnTo>
+                  <a:lnTo>
+                    <a:pt x="4653781" y="3052318"/>
+                  </a:lnTo>
+                  <a:lnTo>
+                    <a:pt x="4576147" y="3034696"/>
+                  </a:lnTo>
+                  <a:lnTo>
+                    <a:pt x="4498513" y="3016354"/>
+                  </a:lnTo>
+                  <a:lnTo>
+                    <a:pt x="4420879" y="2997263"/>
+                  </a:lnTo>
+                  <a:lnTo>
+                    <a:pt x="4343244" y="2977392"/>
+                  </a:lnTo>
+                  <a:lnTo>
+                    <a:pt x="4265610" y="2956710"/>
+                  </a:lnTo>
+                  <a:lnTo>
+                    <a:pt x="4187976" y="2935183"/>
+                  </a:lnTo>
+                  <a:lnTo>
+                    <a:pt x="4110342" y="2912776"/>
+                  </a:lnTo>
+                  <a:lnTo>
+                    <a:pt x="4032708" y="2889454"/>
+                  </a:lnTo>
+                  <a:lnTo>
+                    <a:pt x="3955074" y="2865180"/>
+                  </a:lnTo>
+                  <a:lnTo>
+                    <a:pt x="3877440" y="2839914"/>
+                  </a:lnTo>
+                  <a:lnTo>
+                    <a:pt x="3799806" y="2813617"/>
+                  </a:lnTo>
+                  <a:lnTo>
+                    <a:pt x="3722172" y="2786245"/>
+                  </a:lnTo>
+                  <a:lnTo>
+                    <a:pt x="3644538" y="2757755"/>
+                  </a:lnTo>
+                  <a:lnTo>
+                    <a:pt x="3566904" y="2728101"/>
+                  </a:lnTo>
+                  <a:lnTo>
+                    <a:pt x="3489270" y="2697236"/>
+                  </a:lnTo>
+                  <a:lnTo>
+                    <a:pt x="3411636" y="2665111"/>
+                  </a:lnTo>
+                  <a:lnTo>
+                    <a:pt x="3334002" y="2657577"/>
+                  </a:lnTo>
+                  <a:lnTo>
+                    <a:pt x="3256368" y="2662457"/>
+                  </a:lnTo>
+                  <a:lnTo>
+                    <a:pt x="3178734" y="2667308"/>
+                  </a:lnTo>
+                  <a:lnTo>
+                    <a:pt x="3101100" y="2672130"/>
+                  </a:lnTo>
+                  <a:lnTo>
+                    <a:pt x="3023466" y="2676924"/>
+                  </a:lnTo>
+                  <a:lnTo>
+                    <a:pt x="2945832" y="2681689"/>
+                  </a:lnTo>
+                  <a:lnTo>
+                    <a:pt x="2868198" y="2686427"/>
+                  </a:lnTo>
+                  <a:lnTo>
+                    <a:pt x="2790564" y="2691136"/>
+                  </a:lnTo>
+                  <a:lnTo>
+                    <a:pt x="2712930" y="2695817"/>
+                  </a:lnTo>
+                  <a:lnTo>
+                    <a:pt x="2635295" y="2700471"/>
+                  </a:lnTo>
+                  <a:lnTo>
+                    <a:pt x="2557661" y="2705098"/>
+                  </a:lnTo>
+                  <a:lnTo>
+                    <a:pt x="2480027" y="2709697"/>
+                  </a:lnTo>
+                  <a:lnTo>
+                    <a:pt x="2402393" y="2714268"/>
+                  </a:lnTo>
+                  <a:lnTo>
+                    <a:pt x="2324759" y="2718813"/>
+                  </a:lnTo>
+                  <a:lnTo>
+                    <a:pt x="2247125" y="2723331"/>
+                  </a:lnTo>
+                  <a:lnTo>
+                    <a:pt x="2169491" y="2727823"/>
+                  </a:lnTo>
+                  <a:lnTo>
+                    <a:pt x="2091857" y="2732288"/>
+                  </a:lnTo>
+                  <a:lnTo>
+                    <a:pt x="2014223" y="2736726"/>
+                  </a:lnTo>
+                  <a:lnTo>
+                    <a:pt x="1936589" y="2741138"/>
+                  </a:lnTo>
+                  <a:lnTo>
+                    <a:pt x="1858955" y="2745524"/>
+                  </a:lnTo>
+                  <a:lnTo>
+                    <a:pt x="1781321" y="2749885"/>
+                  </a:lnTo>
+                  <a:lnTo>
+                    <a:pt x="1703687" y="2754219"/>
+                  </a:lnTo>
+                  <a:lnTo>
+                    <a:pt x="1626053" y="2758528"/>
+                  </a:lnTo>
+                  <a:lnTo>
+                    <a:pt x="1548419" y="2762811"/>
+                  </a:lnTo>
+                  <a:lnTo>
+                    <a:pt x="1470785" y="2767070"/>
+                  </a:lnTo>
+                  <a:lnTo>
+                    <a:pt x="1393151" y="2771303"/>
+                  </a:lnTo>
+                  <a:lnTo>
+                    <a:pt x="1315517" y="2775511"/>
+                  </a:lnTo>
+                  <a:lnTo>
+                    <a:pt x="1237883" y="2779694"/>
+                  </a:lnTo>
+                  <a:lnTo>
+                    <a:pt x="1160249" y="2783852"/>
+                  </a:lnTo>
+                  <a:lnTo>
+                    <a:pt x="1082615" y="2787986"/>
+                  </a:lnTo>
+                  <a:lnTo>
+                    <a:pt x="1004981" y="2792096"/>
+                  </a:lnTo>
+                  <a:lnTo>
+                    <a:pt x="927346" y="2796181"/>
+                  </a:lnTo>
+                  <a:lnTo>
+                    <a:pt x="849712" y="2800242"/>
+                  </a:lnTo>
+                  <a:lnTo>
+                    <a:pt x="772078" y="2804279"/>
+                  </a:lnTo>
+                  <a:lnTo>
+                    <a:pt x="694444" y="2808292"/>
+                  </a:lnTo>
+                  <a:lnTo>
+                    <a:pt x="616810" y="2812282"/>
+                  </a:lnTo>
+                  <a:lnTo>
+                    <a:pt x="539176" y="2816248"/>
+                  </a:lnTo>
+                  <a:lnTo>
+                    <a:pt x="461542" y="2820190"/>
+                  </a:lnTo>
+                  <a:lnTo>
+                    <a:pt x="383908" y="2824109"/>
+                  </a:lnTo>
+                  <a:lnTo>
+                    <a:pt x="306274" y="2828005"/>
+                  </a:lnTo>
+                  <a:lnTo>
+                    <a:pt x="228640" y="2831879"/>
+                  </a:lnTo>
+                  <a:lnTo>
+                    <a:pt x="151006" y="2835729"/>
+                  </a:lnTo>
+                  <a:lnTo>
+                    <a:pt x="73372" y="2839556"/>
+                  </a:lnTo>
+                  <a:lnTo>
+                    <a:pt x="0" y="2843152"/>
                   </a:lnTo>
                   <a:close/>
                 </a:path>
@@ -3588,279 +3588,279 @@
           </p:nvSpPr>
           <p:spPr>
             <a:xfrm>
-              <a:off x="1420946" y="1896563"/>
-              <a:ext cx="6767544" cy="2781274"/>
+              <a:off x="1420946" y="2073503"/>
+              <a:ext cx="6767544" cy="2652669"/>
             </a:xfrm>
             <a:custGeom>
               <a:avLst/>
               <a:pathLst>
-                <a:path w="6767544" h="2781274">
+                <a:path w="6767544" h="2652669">
                   <a:moveTo>
                     <a:pt x="0" y="0"/>
                   </a:moveTo>
                   <a:lnTo>
-                    <a:pt x="13382" y="25537"/>
-                  </a:lnTo>
-                  <a:lnTo>
-                    <a:pt x="91016" y="167875"/>
-                  </a:lnTo>
-                  <a:lnTo>
-                    <a:pt x="168650" y="304627"/>
-                  </a:lnTo>
-                  <a:lnTo>
-                    <a:pt x="246284" y="436013"/>
-                  </a:lnTo>
-                  <a:lnTo>
-                    <a:pt x="323918" y="562242"/>
-                  </a:lnTo>
-                  <a:lnTo>
-                    <a:pt x="401552" y="683518"/>
-                  </a:lnTo>
-                  <a:lnTo>
-                    <a:pt x="479186" y="800035"/>
-                  </a:lnTo>
-                  <a:lnTo>
-                    <a:pt x="556820" y="911979"/>
-                  </a:lnTo>
-                  <a:lnTo>
-                    <a:pt x="634454" y="1019531"/>
-                  </a:lnTo>
-                  <a:lnTo>
-                    <a:pt x="712088" y="1122862"/>
-                  </a:lnTo>
-                  <a:lnTo>
-                    <a:pt x="789722" y="1222137"/>
-                  </a:lnTo>
-                  <a:lnTo>
-                    <a:pt x="867356" y="1317517"/>
-                  </a:lnTo>
-                  <a:lnTo>
-                    <a:pt x="944990" y="1409154"/>
-                  </a:lnTo>
-                  <a:lnTo>
-                    <a:pt x="1022624" y="1497195"/>
-                  </a:lnTo>
-                  <a:lnTo>
-                    <a:pt x="1100258" y="1581781"/>
-                  </a:lnTo>
-                  <a:lnTo>
-                    <a:pt x="1177892" y="1663047"/>
-                  </a:lnTo>
-                  <a:lnTo>
-                    <a:pt x="1255526" y="1741125"/>
-                  </a:lnTo>
-                  <a:lnTo>
-                    <a:pt x="1333160" y="1816138"/>
-                  </a:lnTo>
-                  <a:lnTo>
-                    <a:pt x="1410795" y="1888208"/>
-                  </a:lnTo>
-                  <a:lnTo>
-                    <a:pt x="1488429" y="1957449"/>
-                  </a:lnTo>
-                  <a:lnTo>
-                    <a:pt x="1566063" y="2023973"/>
-                  </a:lnTo>
-                  <a:lnTo>
-                    <a:pt x="1643697" y="2087887"/>
-                  </a:lnTo>
-                  <a:lnTo>
-                    <a:pt x="1721331" y="2149292"/>
-                  </a:lnTo>
-                  <a:lnTo>
-                    <a:pt x="1798965" y="2208288"/>
-                  </a:lnTo>
-                  <a:lnTo>
-                    <a:pt x="1876599" y="2264968"/>
-                  </a:lnTo>
-                  <a:lnTo>
-                    <a:pt x="1954233" y="2319425"/>
-                  </a:lnTo>
-                  <a:lnTo>
-                    <a:pt x="2031867" y="2371744"/>
-                  </a:lnTo>
-                  <a:lnTo>
-                    <a:pt x="2109501" y="2422010"/>
-                  </a:lnTo>
-                  <a:lnTo>
-                    <a:pt x="2187135" y="2470304"/>
-                  </a:lnTo>
-                  <a:lnTo>
-                    <a:pt x="2264769" y="2516702"/>
-                  </a:lnTo>
-                  <a:lnTo>
-                    <a:pt x="2342403" y="2561279"/>
-                  </a:lnTo>
-                  <a:lnTo>
-                    <a:pt x="2420037" y="2604108"/>
-                  </a:lnTo>
-                  <a:lnTo>
-                    <a:pt x="2497671" y="2645255"/>
-                  </a:lnTo>
-                  <a:lnTo>
-                    <a:pt x="2575305" y="2684788"/>
-                  </a:lnTo>
-                  <a:lnTo>
-                    <a:pt x="2652939" y="2722769"/>
-                  </a:lnTo>
-                  <a:lnTo>
-                    <a:pt x="2730573" y="2759260"/>
-                  </a:lnTo>
-                  <a:lnTo>
-                    <a:pt x="2808207" y="2781274"/>
-                  </a:lnTo>
-                  <a:lnTo>
-                    <a:pt x="2885841" y="2776096"/>
-                  </a:lnTo>
-                  <a:lnTo>
-                    <a:pt x="2963475" y="2770888"/>
-                  </a:lnTo>
-                  <a:lnTo>
-                    <a:pt x="3041109" y="2765649"/>
-                  </a:lnTo>
-                  <a:lnTo>
-                    <a:pt x="3118744" y="2760379"/>
-                  </a:lnTo>
-                  <a:lnTo>
-                    <a:pt x="3196378" y="2755078"/>
-                  </a:lnTo>
-                  <a:lnTo>
-                    <a:pt x="3274012" y="2749745"/>
-                  </a:lnTo>
-                  <a:lnTo>
-                    <a:pt x="3351646" y="2744380"/>
-                  </a:lnTo>
-                  <a:lnTo>
-                    <a:pt x="3429280" y="2738984"/>
-                  </a:lnTo>
-                  <a:lnTo>
-                    <a:pt x="3506914" y="2733555"/>
-                  </a:lnTo>
-                  <a:lnTo>
-                    <a:pt x="3584548" y="2728095"/>
-                  </a:lnTo>
-                  <a:lnTo>
-                    <a:pt x="3662182" y="2722601"/>
-                  </a:lnTo>
-                  <a:lnTo>
-                    <a:pt x="3739816" y="2717075"/>
-                  </a:lnTo>
-                  <a:lnTo>
-                    <a:pt x="3817450" y="2711517"/>
-                  </a:lnTo>
-                  <a:lnTo>
-                    <a:pt x="3895084" y="2705925"/>
-                  </a:lnTo>
-                  <a:lnTo>
-                    <a:pt x="3972718" y="2700300"/>
-                  </a:lnTo>
-                  <a:lnTo>
-                    <a:pt x="4050352" y="2694642"/>
-                  </a:lnTo>
-                  <a:lnTo>
-                    <a:pt x="4127986" y="2688950"/>
-                  </a:lnTo>
-                  <a:lnTo>
-                    <a:pt x="4205620" y="2683224"/>
-                  </a:lnTo>
-                  <a:lnTo>
-                    <a:pt x="4283254" y="2677464"/>
-                  </a:lnTo>
-                  <a:lnTo>
-                    <a:pt x="4360888" y="2671670"/>
-                  </a:lnTo>
-                  <a:lnTo>
-                    <a:pt x="4438522" y="2665842"/>
-                  </a:lnTo>
-                  <a:lnTo>
-                    <a:pt x="4516156" y="2659978"/>
-                  </a:lnTo>
-                  <a:lnTo>
-                    <a:pt x="4593790" y="2654080"/>
-                  </a:lnTo>
-                  <a:lnTo>
-                    <a:pt x="4671424" y="2648148"/>
-                  </a:lnTo>
-                  <a:lnTo>
-                    <a:pt x="4749058" y="2642179"/>
-                  </a:lnTo>
-                  <a:lnTo>
-                    <a:pt x="4826693" y="2636176"/>
-                  </a:lnTo>
-                  <a:lnTo>
-                    <a:pt x="4904327" y="2630136"/>
-                  </a:lnTo>
-                  <a:lnTo>
-                    <a:pt x="4981961" y="2624061"/>
-                  </a:lnTo>
-                  <a:lnTo>
-                    <a:pt x="5059595" y="2617950"/>
-                  </a:lnTo>
-                  <a:lnTo>
-                    <a:pt x="5137229" y="2611802"/>
-                  </a:lnTo>
-                  <a:lnTo>
-                    <a:pt x="5214863" y="2605618"/>
-                  </a:lnTo>
-                  <a:lnTo>
-                    <a:pt x="5292497" y="2599397"/>
-                  </a:lnTo>
-                  <a:lnTo>
-                    <a:pt x="5370131" y="2593139"/>
-                  </a:lnTo>
-                  <a:lnTo>
-                    <a:pt x="5447765" y="2586844"/>
-                  </a:lnTo>
-                  <a:lnTo>
-                    <a:pt x="5525399" y="2580511"/>
-                  </a:lnTo>
-                  <a:lnTo>
-                    <a:pt x="5603033" y="2574141"/>
-                  </a:lnTo>
-                  <a:lnTo>
-                    <a:pt x="5680667" y="2567733"/>
-                  </a:lnTo>
-                  <a:lnTo>
-                    <a:pt x="5758301" y="2561287"/>
-                  </a:lnTo>
-                  <a:lnTo>
-                    <a:pt x="5835935" y="2554803"/>
-                  </a:lnTo>
-                  <a:lnTo>
-                    <a:pt x="5913569" y="2548280"/>
-                  </a:lnTo>
-                  <a:lnTo>
-                    <a:pt x="5991203" y="2541719"/>
-                  </a:lnTo>
-                  <a:lnTo>
-                    <a:pt x="6068837" y="2535118"/>
-                  </a:lnTo>
-                  <a:lnTo>
-                    <a:pt x="6146471" y="2528478"/>
-                  </a:lnTo>
-                  <a:lnTo>
-                    <a:pt x="6224105" y="2521799"/>
-                  </a:lnTo>
-                  <a:lnTo>
-                    <a:pt x="6301739" y="2515080"/>
-                  </a:lnTo>
-                  <a:lnTo>
-                    <a:pt x="6379373" y="2508321"/>
-                  </a:lnTo>
-                  <a:lnTo>
-                    <a:pt x="6457007" y="2501522"/>
-                  </a:lnTo>
-                  <a:lnTo>
-                    <a:pt x="6534641" y="2494683"/>
-                  </a:lnTo>
-                  <a:lnTo>
-                    <a:pt x="6612276" y="2487803"/>
-                  </a:lnTo>
-                  <a:lnTo>
-                    <a:pt x="6689910" y="2480882"/>
-                  </a:lnTo>
-                  <a:lnTo>
-                    <a:pt x="6767544" y="2473920"/>
+                    <a:pt x="13382" y="24356"/>
+                  </a:lnTo>
+                  <a:lnTo>
+                    <a:pt x="91016" y="160113"/>
+                  </a:lnTo>
+                  <a:lnTo>
+                    <a:pt x="168650" y="290541"/>
+                  </a:lnTo>
+                  <a:lnTo>
+                    <a:pt x="246284" y="415852"/>
+                  </a:lnTo>
+                  <a:lnTo>
+                    <a:pt x="323918" y="536244"/>
+                  </a:lnTo>
+                  <a:lnTo>
+                    <a:pt x="401552" y="651913"/>
+                  </a:lnTo>
+                  <a:lnTo>
+                    <a:pt x="479186" y="763042"/>
+                  </a:lnTo>
+                  <a:lnTo>
+                    <a:pt x="556820" y="869810"/>
+                  </a:lnTo>
+                  <a:lnTo>
+                    <a:pt x="634454" y="972388"/>
+                  </a:lnTo>
+                  <a:lnTo>
+                    <a:pt x="712088" y="1070941"/>
+                  </a:lnTo>
+                  <a:lnTo>
+                    <a:pt x="789722" y="1165626"/>
+                  </a:lnTo>
+                  <a:lnTo>
+                    <a:pt x="867356" y="1256596"/>
+                  </a:lnTo>
+                  <a:lnTo>
+                    <a:pt x="944990" y="1343995"/>
+                  </a:lnTo>
+                  <a:lnTo>
+                    <a:pt x="1022624" y="1427965"/>
+                  </a:lnTo>
+                  <a:lnTo>
+                    <a:pt x="1100258" y="1508640"/>
+                  </a:lnTo>
+                  <a:lnTo>
+                    <a:pt x="1177892" y="1586148"/>
+                  </a:lnTo>
+                  <a:lnTo>
+                    <a:pt x="1255526" y="1660616"/>
+                  </a:lnTo>
+                  <a:lnTo>
+                    <a:pt x="1333160" y="1732160"/>
+                  </a:lnTo>
+                  <a:lnTo>
+                    <a:pt x="1410795" y="1800897"/>
+                  </a:lnTo>
+                  <a:lnTo>
+                    <a:pt x="1488429" y="1866937"/>
+                  </a:lnTo>
+                  <a:lnTo>
+                    <a:pt x="1566063" y="1930385"/>
+                  </a:lnTo>
+                  <a:lnTo>
+                    <a:pt x="1643697" y="1991344"/>
+                  </a:lnTo>
+                  <a:lnTo>
+                    <a:pt x="1721331" y="2049910"/>
+                  </a:lnTo>
+                  <a:lnTo>
+                    <a:pt x="1798965" y="2106177"/>
+                  </a:lnTo>
+                  <a:lnTo>
+                    <a:pt x="1876599" y="2160237"/>
+                  </a:lnTo>
+                  <a:lnTo>
+                    <a:pt x="1954233" y="2212175"/>
+                  </a:lnTo>
+                  <a:lnTo>
+                    <a:pt x="2031867" y="2262075"/>
+                  </a:lnTo>
+                  <a:lnTo>
+                    <a:pt x="2109501" y="2310017"/>
+                  </a:lnTo>
+                  <a:lnTo>
+                    <a:pt x="2187135" y="2356078"/>
+                  </a:lnTo>
+                  <a:lnTo>
+                    <a:pt x="2264769" y="2400330"/>
+                  </a:lnTo>
+                  <a:lnTo>
+                    <a:pt x="2342403" y="2442847"/>
+                  </a:lnTo>
+                  <a:lnTo>
+                    <a:pt x="2420037" y="2483695"/>
+                  </a:lnTo>
+                  <a:lnTo>
+                    <a:pt x="2497671" y="2522939"/>
+                  </a:lnTo>
+                  <a:lnTo>
+                    <a:pt x="2575305" y="2560644"/>
+                  </a:lnTo>
+                  <a:lnTo>
+                    <a:pt x="2652939" y="2596869"/>
+                  </a:lnTo>
+                  <a:lnTo>
+                    <a:pt x="2730573" y="2631673"/>
+                  </a:lnTo>
+                  <a:lnTo>
+                    <a:pt x="2808207" y="2652669"/>
+                  </a:lnTo>
+                  <a:lnTo>
+                    <a:pt x="2885841" y="2647731"/>
+                  </a:lnTo>
+                  <a:lnTo>
+                    <a:pt x="2963475" y="2642763"/>
+                  </a:lnTo>
+                  <a:lnTo>
+                    <a:pt x="3041109" y="2637767"/>
+                  </a:lnTo>
+                  <a:lnTo>
+                    <a:pt x="3118744" y="2632740"/>
+                  </a:lnTo>
+                  <a:lnTo>
+                    <a:pt x="3196378" y="2627684"/>
+                  </a:lnTo>
+                  <a:lnTo>
+                    <a:pt x="3274012" y="2622598"/>
+                  </a:lnTo>
+                  <a:lnTo>
+                    <a:pt x="3351646" y="2617481"/>
+                  </a:lnTo>
+                  <a:lnTo>
+                    <a:pt x="3429280" y="2612334"/>
+                  </a:lnTo>
+                  <a:lnTo>
+                    <a:pt x="3506914" y="2607157"/>
+                  </a:lnTo>
+                  <a:lnTo>
+                    <a:pt x="3584548" y="2601948"/>
+                  </a:lnTo>
+                  <a:lnTo>
+                    <a:pt x="3662182" y="2596709"/>
+                  </a:lnTo>
+                  <a:lnTo>
+                    <a:pt x="3739816" y="2591439"/>
+                  </a:lnTo>
+                  <a:lnTo>
+                    <a:pt x="3817450" y="2586137"/>
+                  </a:lnTo>
+                  <a:lnTo>
+                    <a:pt x="3895084" y="2580804"/>
+                  </a:lnTo>
+                  <a:lnTo>
+                    <a:pt x="3972718" y="2575439"/>
+                  </a:lnTo>
+                  <a:lnTo>
+                    <a:pt x="4050352" y="2570042"/>
+                  </a:lnTo>
+                  <a:lnTo>
+                    <a:pt x="4127986" y="2564614"/>
+                  </a:lnTo>
+                  <a:lnTo>
+                    <a:pt x="4205620" y="2559153"/>
+                  </a:lnTo>
+                  <a:lnTo>
+                    <a:pt x="4283254" y="2553659"/>
+                  </a:lnTo>
+                  <a:lnTo>
+                    <a:pt x="4360888" y="2548133"/>
+                  </a:lnTo>
+                  <a:lnTo>
+                    <a:pt x="4438522" y="2542574"/>
+                  </a:lnTo>
+                  <a:lnTo>
+                    <a:pt x="4516156" y="2536982"/>
+                  </a:lnTo>
+                  <a:lnTo>
+                    <a:pt x="4593790" y="2531357"/>
+                  </a:lnTo>
+                  <a:lnTo>
+                    <a:pt x="4671424" y="2525698"/>
+                  </a:lnTo>
+                  <a:lnTo>
+                    <a:pt x="4749058" y="2520006"/>
+                  </a:lnTo>
+                  <a:lnTo>
+                    <a:pt x="4826693" y="2514280"/>
+                  </a:lnTo>
+                  <a:lnTo>
+                    <a:pt x="4904327" y="2508520"/>
+                  </a:lnTo>
+                  <a:lnTo>
+                    <a:pt x="4981961" y="2502725"/>
+                  </a:lnTo>
+                  <a:lnTo>
+                    <a:pt x="5059595" y="2496897"/>
+                  </a:lnTo>
+                  <a:lnTo>
+                    <a:pt x="5137229" y="2491033"/>
+                  </a:lnTo>
+                  <a:lnTo>
+                    <a:pt x="5214863" y="2485135"/>
+                  </a:lnTo>
+                  <a:lnTo>
+                    <a:pt x="5292497" y="2479202"/>
+                  </a:lnTo>
+                  <a:lnTo>
+                    <a:pt x="5370131" y="2473233"/>
+                  </a:lnTo>
+                  <a:lnTo>
+                    <a:pt x="5447765" y="2467229"/>
+                  </a:lnTo>
+                  <a:lnTo>
+                    <a:pt x="5525399" y="2461189"/>
+                  </a:lnTo>
+                  <a:lnTo>
+                    <a:pt x="5603033" y="2455114"/>
+                  </a:lnTo>
+                  <a:lnTo>
+                    <a:pt x="5680667" y="2449002"/>
+                  </a:lnTo>
+                  <a:lnTo>
+                    <a:pt x="5758301" y="2442854"/>
+                  </a:lnTo>
+                  <a:lnTo>
+                    <a:pt x="5835935" y="2436670"/>
+                  </a:lnTo>
+                  <a:lnTo>
+                    <a:pt x="5913569" y="2430449"/>
+                  </a:lnTo>
+                  <a:lnTo>
+                    <a:pt x="5991203" y="2424190"/>
+                  </a:lnTo>
+                  <a:lnTo>
+                    <a:pt x="6068837" y="2417895"/>
+                  </a:lnTo>
+                  <a:lnTo>
+                    <a:pt x="6146471" y="2411562"/>
+                  </a:lnTo>
+                  <a:lnTo>
+                    <a:pt x="6224105" y="2405192"/>
+                  </a:lnTo>
+                  <a:lnTo>
+                    <a:pt x="6301739" y="2398784"/>
+                  </a:lnTo>
+                  <a:lnTo>
+                    <a:pt x="6379373" y="2392337"/>
+                  </a:lnTo>
+                  <a:lnTo>
+                    <a:pt x="6457007" y="2385853"/>
+                  </a:lnTo>
+                  <a:lnTo>
+                    <a:pt x="6534641" y="2379329"/>
+                  </a:lnTo>
+                  <a:lnTo>
+                    <a:pt x="6612276" y="2372768"/>
+                  </a:lnTo>
+                  <a:lnTo>
+                    <a:pt x="6689910" y="2366167"/>
+                  </a:lnTo>
+                  <a:lnTo>
+                    <a:pt x="6767544" y="2359527"/>
                   </a:lnTo>
                 </a:path>
               </a:pathLst>
@@ -3880,300 +3880,300 @@
           </p:nvSpPr>
           <p:spPr>
             <a:xfrm>
-              <a:off x="817517" y="4682984"/>
-              <a:ext cx="7370972" cy="754807"/>
+              <a:off x="817517" y="4731080"/>
+              <a:ext cx="7370972" cy="719905"/>
             </a:xfrm>
             <a:custGeom>
               <a:avLst/>
               <a:pathLst>
-                <a:path w="7370972" h="754807">
+                <a:path w="7370972" h="719905">
                   <a:moveTo>
-                    <a:pt x="7370972" y="754807"/>
+                    <a:pt x="7370972" y="719905"/>
                   </a:moveTo>
                   <a:lnTo>
-                    <a:pt x="7293338" y="750256"/>
-                  </a:lnTo>
-                  <a:lnTo>
-                    <a:pt x="7215704" y="745519"/>
-                  </a:lnTo>
-                  <a:lnTo>
-                    <a:pt x="7138070" y="740589"/>
-                  </a:lnTo>
-                  <a:lnTo>
-                    <a:pt x="7060436" y="735457"/>
-                  </a:lnTo>
-                  <a:lnTo>
-                    <a:pt x="6982802" y="730116"/>
-                  </a:lnTo>
-                  <a:lnTo>
-                    <a:pt x="6905168" y="724557"/>
-                  </a:lnTo>
-                  <a:lnTo>
-                    <a:pt x="6827534" y="718770"/>
-                  </a:lnTo>
-                  <a:lnTo>
-                    <a:pt x="6749900" y="712747"/>
-                  </a:lnTo>
-                  <a:lnTo>
-                    <a:pt x="6672266" y="706479"/>
-                  </a:lnTo>
-                  <a:lnTo>
-                    <a:pt x="6594632" y="699954"/>
-                  </a:lnTo>
-                  <a:lnTo>
-                    <a:pt x="6516998" y="693162"/>
-                  </a:lnTo>
-                  <a:lnTo>
-                    <a:pt x="6439364" y="686094"/>
-                  </a:lnTo>
-                  <a:lnTo>
-                    <a:pt x="6361730" y="678736"/>
-                  </a:lnTo>
-                  <a:lnTo>
-                    <a:pt x="6284096" y="671078"/>
-                  </a:lnTo>
-                  <a:lnTo>
-                    <a:pt x="6206462" y="663107"/>
-                  </a:lnTo>
-                  <a:lnTo>
-                    <a:pt x="6128827" y="654811"/>
-                  </a:lnTo>
-                  <a:lnTo>
-                    <a:pt x="6051193" y="646176"/>
-                  </a:lnTo>
-                  <a:lnTo>
-                    <a:pt x="5973559" y="637188"/>
-                  </a:lnTo>
-                  <a:lnTo>
-                    <a:pt x="5895925" y="627832"/>
-                  </a:lnTo>
-                  <a:lnTo>
-                    <a:pt x="5818291" y="618095"/>
-                  </a:lnTo>
-                  <a:lnTo>
-                    <a:pt x="5740657" y="607960"/>
-                  </a:lnTo>
-                  <a:lnTo>
-                    <a:pt x="5663023" y="597411"/>
-                  </a:lnTo>
-                  <a:lnTo>
-                    <a:pt x="5585389" y="586432"/>
-                  </a:lnTo>
-                  <a:lnTo>
-                    <a:pt x="5507755" y="575003"/>
-                  </a:lnTo>
-                  <a:lnTo>
-                    <a:pt x="5430121" y="563108"/>
-                  </a:lnTo>
-                  <a:lnTo>
-                    <a:pt x="5352487" y="550727"/>
-                  </a:lnTo>
-                  <a:lnTo>
-                    <a:pt x="5274853" y="537841"/>
-                  </a:lnTo>
-                  <a:lnTo>
-                    <a:pt x="5197219" y="524428"/>
-                  </a:lnTo>
-                  <a:lnTo>
-                    <a:pt x="5119585" y="510467"/>
-                  </a:lnTo>
-                  <a:lnTo>
-                    <a:pt x="5041951" y="495936"/>
-                  </a:lnTo>
-                  <a:lnTo>
-                    <a:pt x="4964317" y="480811"/>
-                  </a:lnTo>
-                  <a:lnTo>
-                    <a:pt x="4886683" y="465069"/>
-                  </a:lnTo>
-                  <a:lnTo>
-                    <a:pt x="4809049" y="448683"/>
-                  </a:lnTo>
-                  <a:lnTo>
-                    <a:pt x="4731415" y="431629"/>
-                  </a:lnTo>
-                  <a:lnTo>
-                    <a:pt x="4653781" y="413878"/>
-                  </a:lnTo>
-                  <a:lnTo>
-                    <a:pt x="4576147" y="395401"/>
-                  </a:lnTo>
-                  <a:lnTo>
-                    <a:pt x="4498513" y="376170"/>
-                  </a:lnTo>
-                  <a:lnTo>
-                    <a:pt x="4420879" y="356154"/>
-                  </a:lnTo>
-                  <a:lnTo>
-                    <a:pt x="4343244" y="335319"/>
-                  </a:lnTo>
-                  <a:lnTo>
-                    <a:pt x="4265610" y="313634"/>
-                  </a:lnTo>
-                  <a:lnTo>
-                    <a:pt x="4187976" y="291064"/>
-                  </a:lnTo>
-                  <a:lnTo>
-                    <a:pt x="4110342" y="267571"/>
-                  </a:lnTo>
-                  <a:lnTo>
-                    <a:pt x="4032708" y="243118"/>
-                  </a:lnTo>
-                  <a:lnTo>
-                    <a:pt x="3955074" y="217667"/>
-                  </a:lnTo>
-                  <a:lnTo>
-                    <a:pt x="3877440" y="191177"/>
-                  </a:lnTo>
-                  <a:lnTo>
-                    <a:pt x="3799806" y="163604"/>
-                  </a:lnTo>
-                  <a:lnTo>
-                    <a:pt x="3722172" y="134905"/>
-                  </a:lnTo>
-                  <a:lnTo>
-                    <a:pt x="3644538" y="105034"/>
-                  </a:lnTo>
-                  <a:lnTo>
-                    <a:pt x="3566904" y="73942"/>
-                  </a:lnTo>
-                  <a:lnTo>
-                    <a:pt x="3489270" y="41581"/>
-                  </a:lnTo>
-                  <a:lnTo>
-                    <a:pt x="3411636" y="7898"/>
+                    <a:pt x="7293338" y="715564"/>
+                  </a:lnTo>
+                  <a:lnTo>
+                    <a:pt x="7215704" y="711046"/>
+                  </a:lnTo>
+                  <a:lnTo>
+                    <a:pt x="7138070" y="706344"/>
+                  </a:lnTo>
+                  <a:lnTo>
+                    <a:pt x="7060436" y="701450"/>
+                  </a:lnTo>
+                  <a:lnTo>
+                    <a:pt x="6982802" y="696356"/>
+                  </a:lnTo>
+                  <a:lnTo>
+                    <a:pt x="6905168" y="691053"/>
+                  </a:lnTo>
+                  <a:lnTo>
+                    <a:pt x="6827534" y="685534"/>
+                  </a:lnTo>
+                  <a:lnTo>
+                    <a:pt x="6749900" y="679790"/>
+                  </a:lnTo>
+                  <a:lnTo>
+                    <a:pt x="6672266" y="673811"/>
+                  </a:lnTo>
+                  <a:lnTo>
+                    <a:pt x="6594632" y="667588"/>
+                  </a:lnTo>
+                  <a:lnTo>
+                    <a:pt x="6516998" y="661111"/>
+                  </a:lnTo>
+                  <a:lnTo>
+                    <a:pt x="6439364" y="654369"/>
+                  </a:lnTo>
+                  <a:lnTo>
+                    <a:pt x="6361730" y="647352"/>
+                  </a:lnTo>
+                  <a:lnTo>
+                    <a:pt x="6284096" y="640048"/>
+                  </a:lnTo>
+                  <a:lnTo>
+                    <a:pt x="6206462" y="632445"/>
+                  </a:lnTo>
+                  <a:lnTo>
+                    <a:pt x="6128827" y="624533"/>
+                  </a:lnTo>
+                  <a:lnTo>
+                    <a:pt x="6051193" y="616297"/>
+                  </a:lnTo>
+                  <a:lnTo>
+                    <a:pt x="5973559" y="607724"/>
+                  </a:lnTo>
+                  <a:lnTo>
+                    <a:pt x="5895925" y="598802"/>
+                  </a:lnTo>
+                  <a:lnTo>
+                    <a:pt x="5818291" y="589515"/>
+                  </a:lnTo>
+                  <a:lnTo>
+                    <a:pt x="5740657" y="579848"/>
+                  </a:lnTo>
+                  <a:lnTo>
+                    <a:pt x="5663023" y="569787"/>
+                  </a:lnTo>
+                  <a:lnTo>
+                    <a:pt x="5585389" y="559315"/>
+                  </a:lnTo>
+                  <a:lnTo>
+                    <a:pt x="5507755" y="548415"/>
+                  </a:lnTo>
+                  <a:lnTo>
+                    <a:pt x="5430121" y="537070"/>
+                  </a:lnTo>
+                  <a:lnTo>
+                    <a:pt x="5352487" y="525262"/>
+                  </a:lnTo>
+                  <a:lnTo>
+                    <a:pt x="5274853" y="512971"/>
+                  </a:lnTo>
+                  <a:lnTo>
+                    <a:pt x="5197219" y="500178"/>
+                  </a:lnTo>
+                  <a:lnTo>
+                    <a:pt x="5119585" y="486863"/>
+                  </a:lnTo>
+                  <a:lnTo>
+                    <a:pt x="5041951" y="473004"/>
+                  </a:lnTo>
+                  <a:lnTo>
+                    <a:pt x="4964317" y="458579"/>
+                  </a:lnTo>
+                  <a:lnTo>
+                    <a:pt x="4886683" y="443564"/>
+                  </a:lnTo>
+                  <a:lnTo>
+                    <a:pt x="4809049" y="427937"/>
+                  </a:lnTo>
+                  <a:lnTo>
+                    <a:pt x="4731415" y="411670"/>
+                  </a:lnTo>
+                  <a:lnTo>
+                    <a:pt x="4653781" y="394740"/>
+                  </a:lnTo>
+                  <a:lnTo>
+                    <a:pt x="4576147" y="377118"/>
+                  </a:lnTo>
+                  <a:lnTo>
+                    <a:pt x="4498513" y="358776"/>
+                  </a:lnTo>
+                  <a:lnTo>
+                    <a:pt x="4420879" y="339685"/>
+                  </a:lnTo>
+                  <a:lnTo>
+                    <a:pt x="4343244" y="319814"/>
+                  </a:lnTo>
+                  <a:lnTo>
+                    <a:pt x="4265610" y="299132"/>
+                  </a:lnTo>
+                  <a:lnTo>
+                    <a:pt x="4187976" y="277605"/>
+                  </a:lnTo>
+                  <a:lnTo>
+                    <a:pt x="4110342" y="255198"/>
+                  </a:lnTo>
+                  <a:lnTo>
+                    <a:pt x="4032708" y="231877"/>
+                  </a:lnTo>
+                  <a:lnTo>
+                    <a:pt x="3955074" y="207602"/>
+                  </a:lnTo>
+                  <a:lnTo>
+                    <a:pt x="3877440" y="182337"/>
+                  </a:lnTo>
+                  <a:lnTo>
+                    <a:pt x="3799806" y="156039"/>
+                  </a:lnTo>
+                  <a:lnTo>
+                    <a:pt x="3722172" y="128667"/>
+                  </a:lnTo>
+                  <a:lnTo>
+                    <a:pt x="3644538" y="100177"/>
+                  </a:lnTo>
+                  <a:lnTo>
+                    <a:pt x="3566904" y="70523"/>
+                  </a:lnTo>
+                  <a:lnTo>
+                    <a:pt x="3489270" y="39658"/>
+                  </a:lnTo>
+                  <a:lnTo>
+                    <a:pt x="3411636" y="7533"/>
                   </a:lnTo>
                   <a:lnTo>
                     <a:pt x="3334002" y="0"/>
                   </a:lnTo>
                   <a:lnTo>
-                    <a:pt x="3256368" y="5116"/>
-                  </a:lnTo>
-                  <a:lnTo>
-                    <a:pt x="3178734" y="10202"/>
-                  </a:lnTo>
-                  <a:lnTo>
-                    <a:pt x="3101100" y="15258"/>
-                  </a:lnTo>
-                  <a:lnTo>
-                    <a:pt x="3023466" y="20284"/>
-                  </a:lnTo>
-                  <a:lnTo>
-                    <a:pt x="2945832" y="25281"/>
-                  </a:lnTo>
-                  <a:lnTo>
-                    <a:pt x="2868198" y="30247"/>
-                  </a:lnTo>
-                  <a:lnTo>
-                    <a:pt x="2790564" y="35185"/>
-                  </a:lnTo>
-                  <a:lnTo>
-                    <a:pt x="2712930" y="40094"/>
-                  </a:lnTo>
-                  <a:lnTo>
-                    <a:pt x="2635295" y="44973"/>
-                  </a:lnTo>
-                  <a:lnTo>
-                    <a:pt x="2557661" y="49824"/>
-                  </a:lnTo>
-                  <a:lnTo>
-                    <a:pt x="2480027" y="54646"/>
-                  </a:lnTo>
-                  <a:lnTo>
-                    <a:pt x="2402393" y="59439"/>
-                  </a:lnTo>
-                  <a:lnTo>
-                    <a:pt x="2324759" y="64204"/>
-                  </a:lnTo>
-                  <a:lnTo>
-                    <a:pt x="2247125" y="68942"/>
-                  </a:lnTo>
-                  <a:lnTo>
-                    <a:pt x="2169491" y="73651"/>
-                  </a:lnTo>
-                  <a:lnTo>
-                    <a:pt x="2091857" y="78332"/>
-                  </a:lnTo>
-                  <a:lnTo>
-                    <a:pt x="2014223" y="82985"/>
-                  </a:lnTo>
-                  <a:lnTo>
-                    <a:pt x="1936589" y="87612"/>
-                  </a:lnTo>
-                  <a:lnTo>
-                    <a:pt x="1858955" y="92210"/>
-                  </a:lnTo>
-                  <a:lnTo>
-                    <a:pt x="1781321" y="96782"/>
-                  </a:lnTo>
-                  <a:lnTo>
-                    <a:pt x="1703687" y="101327"/>
-                  </a:lnTo>
-                  <a:lnTo>
-                    <a:pt x="1626053" y="105845"/>
-                  </a:lnTo>
-                  <a:lnTo>
-                    <a:pt x="1548419" y="110336"/>
-                  </a:lnTo>
-                  <a:lnTo>
-                    <a:pt x="1470785" y="114800"/>
-                  </a:lnTo>
-                  <a:lnTo>
-                    <a:pt x="1393151" y="119238"/>
-                  </a:lnTo>
-                  <a:lnTo>
-                    <a:pt x="1315517" y="123650"/>
-                  </a:lnTo>
-                  <a:lnTo>
-                    <a:pt x="1237883" y="128036"/>
-                  </a:lnTo>
-                  <a:lnTo>
-                    <a:pt x="1160249" y="132396"/>
-                  </a:lnTo>
-                  <a:lnTo>
-                    <a:pt x="1082615" y="136731"/>
-                  </a:lnTo>
-                  <a:lnTo>
-                    <a:pt x="1004981" y="141039"/>
-                  </a:lnTo>
-                  <a:lnTo>
-                    <a:pt x="927346" y="145323"/>
-                  </a:lnTo>
-                  <a:lnTo>
-                    <a:pt x="849712" y="149581"/>
-                  </a:lnTo>
-                  <a:lnTo>
-                    <a:pt x="772078" y="153813"/>
-                  </a:lnTo>
-                  <a:lnTo>
-                    <a:pt x="694444" y="158021"/>
-                  </a:lnTo>
-                  <a:lnTo>
-                    <a:pt x="616810" y="162204"/>
-                  </a:lnTo>
-                  <a:lnTo>
-                    <a:pt x="539176" y="166362"/>
-                  </a:lnTo>
-                  <a:lnTo>
-                    <a:pt x="461542" y="170496"/>
-                  </a:lnTo>
-                  <a:lnTo>
-                    <a:pt x="383908" y="174605"/>
-                  </a:lnTo>
-                  <a:lnTo>
-                    <a:pt x="306274" y="178690"/>
-                  </a:lnTo>
-                  <a:lnTo>
-                    <a:pt x="228640" y="182751"/>
-                  </a:lnTo>
-                  <a:lnTo>
-                    <a:pt x="151006" y="186788"/>
-                  </a:lnTo>
-                  <a:lnTo>
-                    <a:pt x="73372" y="190801"/>
-                  </a:lnTo>
-                  <a:lnTo>
-                    <a:pt x="0" y="194571"/>
+                    <a:pt x="3256368" y="4879"/>
+                  </a:lnTo>
+                  <a:lnTo>
+                    <a:pt x="3178734" y="9730"/>
+                  </a:lnTo>
+                  <a:lnTo>
+                    <a:pt x="3101100" y="14552"/>
+                  </a:lnTo>
+                  <a:lnTo>
+                    <a:pt x="3023466" y="19346"/>
+                  </a:lnTo>
+                  <a:lnTo>
+                    <a:pt x="2945832" y="24112"/>
+                  </a:lnTo>
+                  <a:lnTo>
+                    <a:pt x="2868198" y="28849"/>
+                  </a:lnTo>
+                  <a:lnTo>
+                    <a:pt x="2790564" y="33558"/>
+                  </a:lnTo>
+                  <a:lnTo>
+                    <a:pt x="2712930" y="38240"/>
+                  </a:lnTo>
+                  <a:lnTo>
+                    <a:pt x="2635295" y="42893"/>
+                  </a:lnTo>
+                  <a:lnTo>
+                    <a:pt x="2557661" y="47520"/>
+                  </a:lnTo>
+                  <a:lnTo>
+                    <a:pt x="2480027" y="52119"/>
+                  </a:lnTo>
+                  <a:lnTo>
+                    <a:pt x="2402393" y="56691"/>
+                  </a:lnTo>
+                  <a:lnTo>
+                    <a:pt x="2324759" y="61236"/>
+                  </a:lnTo>
+                  <a:lnTo>
+                    <a:pt x="2247125" y="65754"/>
+                  </a:lnTo>
+                  <a:lnTo>
+                    <a:pt x="2169491" y="70245"/>
+                  </a:lnTo>
+                  <a:lnTo>
+                    <a:pt x="2091857" y="74710"/>
+                  </a:lnTo>
+                  <a:lnTo>
+                    <a:pt x="2014223" y="79148"/>
+                  </a:lnTo>
+                  <a:lnTo>
+                    <a:pt x="1936589" y="83560"/>
+                  </a:lnTo>
+                  <a:lnTo>
+                    <a:pt x="1858955" y="87947"/>
+                  </a:lnTo>
+                  <a:lnTo>
+                    <a:pt x="1781321" y="92307"/>
+                  </a:lnTo>
+                  <a:lnTo>
+                    <a:pt x="1703687" y="96641"/>
+                  </a:lnTo>
+                  <a:lnTo>
+                    <a:pt x="1626053" y="100950"/>
+                  </a:lnTo>
+                  <a:lnTo>
+                    <a:pt x="1548419" y="105234"/>
+                  </a:lnTo>
+                  <a:lnTo>
+                    <a:pt x="1470785" y="109492"/>
+                  </a:lnTo>
+                  <a:lnTo>
+                    <a:pt x="1393151" y="113725"/>
+                  </a:lnTo>
+                  <a:lnTo>
+                    <a:pt x="1315517" y="117933"/>
+                  </a:lnTo>
+                  <a:lnTo>
+                    <a:pt x="1237883" y="122116"/>
+                  </a:lnTo>
+                  <a:lnTo>
+                    <a:pt x="1160249" y="126274"/>
+                  </a:lnTo>
+                  <a:lnTo>
+                    <a:pt x="1082615" y="130408"/>
+                  </a:lnTo>
+                  <a:lnTo>
+                    <a:pt x="1004981" y="134518"/>
+                  </a:lnTo>
+                  <a:lnTo>
+                    <a:pt x="927346" y="138603"/>
+                  </a:lnTo>
+                  <a:lnTo>
+                    <a:pt x="849712" y="142664"/>
+                  </a:lnTo>
+                  <a:lnTo>
+                    <a:pt x="772078" y="146701"/>
+                  </a:lnTo>
+                  <a:lnTo>
+                    <a:pt x="694444" y="150714"/>
+                  </a:lnTo>
+                  <a:lnTo>
+                    <a:pt x="616810" y="154704"/>
+                  </a:lnTo>
+                  <a:lnTo>
+                    <a:pt x="539176" y="158670"/>
+                  </a:lnTo>
+                  <a:lnTo>
+                    <a:pt x="461542" y="162612"/>
+                  </a:lnTo>
+                  <a:lnTo>
+                    <a:pt x="383908" y="166532"/>
+                  </a:lnTo>
+                  <a:lnTo>
+                    <a:pt x="306274" y="170428"/>
+                  </a:lnTo>
+                  <a:lnTo>
+                    <a:pt x="228640" y="174301"/>
+                  </a:lnTo>
+                  <a:lnTo>
+                    <a:pt x="151006" y="178151"/>
+                  </a:lnTo>
+                  <a:lnTo>
+                    <a:pt x="73372" y="181979"/>
+                  </a:lnTo>
+                  <a:lnTo>
+                    <a:pt x="0" y="185575"/>
                   </a:lnTo>
                 </a:path>
               </a:pathLst>
@@ -4193,300 +4193,300 @@
           </p:nvSpPr>
           <p:spPr>
             <a:xfrm>
-              <a:off x="817517" y="3719324"/>
-              <a:ext cx="7370972" cy="1467489"/>
+              <a:off x="817517" y="3811980"/>
+              <a:ext cx="7370972" cy="1399633"/>
             </a:xfrm>
             <a:custGeom>
               <a:avLst/>
               <a:pathLst>
-                <a:path w="7370972" h="1467489">
+                <a:path w="7370972" h="1399633">
                   <a:moveTo>
                     <a:pt x="0" y="0"/>
                   </a:moveTo>
                   <a:lnTo>
-                    <a:pt x="73372" y="29272"/>
-                  </a:lnTo>
-                  <a:lnTo>
-                    <a:pt x="151006" y="59720"/>
-                  </a:lnTo>
-                  <a:lnTo>
-                    <a:pt x="228640" y="89654"/>
-                  </a:lnTo>
-                  <a:lnTo>
-                    <a:pt x="306274" y="119082"/>
-                  </a:lnTo>
-                  <a:lnTo>
-                    <a:pt x="383908" y="148012"/>
-                  </a:lnTo>
-                  <a:lnTo>
-                    <a:pt x="461542" y="176453"/>
-                  </a:lnTo>
-                  <a:lnTo>
-                    <a:pt x="539176" y="204412"/>
-                  </a:lnTo>
-                  <a:lnTo>
-                    <a:pt x="616810" y="231899"/>
-                  </a:lnTo>
-                  <a:lnTo>
-                    <a:pt x="694444" y="258922"/>
-                  </a:lnTo>
-                  <a:lnTo>
-                    <a:pt x="772078" y="285487"/>
-                  </a:lnTo>
-                  <a:lnTo>
-                    <a:pt x="849712" y="311603"/>
-                  </a:lnTo>
-                  <a:lnTo>
-                    <a:pt x="927346" y="337277"/>
-                  </a:lnTo>
-                  <a:lnTo>
-                    <a:pt x="1004981" y="362518"/>
-                  </a:lnTo>
-                  <a:lnTo>
-                    <a:pt x="1082615" y="387331"/>
-                  </a:lnTo>
-                  <a:lnTo>
-                    <a:pt x="1160249" y="411725"/>
-                  </a:lnTo>
-                  <a:lnTo>
-                    <a:pt x="1237883" y="435706"/>
-                  </a:lnTo>
-                  <a:lnTo>
-                    <a:pt x="1315517" y="459282"/>
-                  </a:lnTo>
-                  <a:lnTo>
-                    <a:pt x="1393151" y="482459"/>
-                  </a:lnTo>
-                  <a:lnTo>
-                    <a:pt x="1470785" y="505244"/>
-                  </a:lnTo>
-                  <a:lnTo>
-                    <a:pt x="1548419" y="527644"/>
-                  </a:lnTo>
-                  <a:lnTo>
-                    <a:pt x="1626053" y="549665"/>
-                  </a:lnTo>
-                  <a:lnTo>
-                    <a:pt x="1703687" y="571314"/>
-                  </a:lnTo>
-                  <a:lnTo>
-                    <a:pt x="1781321" y="592597"/>
-                  </a:lnTo>
-                  <a:lnTo>
-                    <a:pt x="1858955" y="613519"/>
-                  </a:lnTo>
-                  <a:lnTo>
-                    <a:pt x="1936589" y="634088"/>
-                  </a:lnTo>
-                  <a:lnTo>
-                    <a:pt x="2014223" y="654309"/>
-                  </a:lnTo>
-                  <a:lnTo>
-                    <a:pt x="2091857" y="674189"/>
-                  </a:lnTo>
-                  <a:lnTo>
-                    <a:pt x="2169491" y="693732"/>
-                  </a:lnTo>
-                  <a:lnTo>
-                    <a:pt x="2247125" y="712944"/>
-                  </a:lnTo>
-                  <a:lnTo>
-                    <a:pt x="2324759" y="731832"/>
-                  </a:lnTo>
-                  <a:lnTo>
-                    <a:pt x="2402393" y="750400"/>
-                  </a:lnTo>
-                  <a:lnTo>
-                    <a:pt x="2480027" y="768654"/>
-                  </a:lnTo>
-                  <a:lnTo>
-                    <a:pt x="2557661" y="786600"/>
-                  </a:lnTo>
-                  <a:lnTo>
-                    <a:pt x="2635295" y="804242"/>
-                  </a:lnTo>
-                  <a:lnTo>
-                    <a:pt x="2712930" y="821586"/>
-                  </a:lnTo>
-                  <a:lnTo>
-                    <a:pt x="2790564" y="838636"/>
-                  </a:lnTo>
-                  <a:lnTo>
-                    <a:pt x="2868198" y="855398"/>
-                  </a:lnTo>
-                  <a:lnTo>
-                    <a:pt x="2945832" y="871877"/>
-                  </a:lnTo>
-                  <a:lnTo>
-                    <a:pt x="3023466" y="888077"/>
-                  </a:lnTo>
-                  <a:lnTo>
-                    <a:pt x="3101100" y="904003"/>
-                  </a:lnTo>
-                  <a:lnTo>
-                    <a:pt x="3178734" y="919660"/>
-                  </a:lnTo>
-                  <a:lnTo>
-                    <a:pt x="3256368" y="935052"/>
-                  </a:lnTo>
-                  <a:lnTo>
-                    <a:pt x="3334002" y="950184"/>
-                  </a:lnTo>
-                  <a:lnTo>
-                    <a:pt x="3411636" y="965060"/>
-                  </a:lnTo>
-                  <a:lnTo>
-                    <a:pt x="3489270" y="979684"/>
-                  </a:lnTo>
-                  <a:lnTo>
-                    <a:pt x="3566904" y="994061"/>
-                  </a:lnTo>
-                  <a:lnTo>
-                    <a:pt x="3644538" y="1008195"/>
-                  </a:lnTo>
-                  <a:lnTo>
-                    <a:pt x="3722172" y="1022090"/>
-                  </a:lnTo>
-                  <a:lnTo>
-                    <a:pt x="3799806" y="1035750"/>
-                  </a:lnTo>
-                  <a:lnTo>
-                    <a:pt x="3877440" y="1049179"/>
-                  </a:lnTo>
-                  <a:lnTo>
-                    <a:pt x="3955074" y="1062381"/>
-                  </a:lnTo>
-                  <a:lnTo>
-                    <a:pt x="4032708" y="1075359"/>
-                  </a:lnTo>
-                  <a:lnTo>
-                    <a:pt x="4110342" y="1088118"/>
-                  </a:lnTo>
-                  <a:lnTo>
-                    <a:pt x="4187976" y="1100662"/>
-                  </a:lnTo>
-                  <a:lnTo>
-                    <a:pt x="4265610" y="1112993"/>
-                  </a:lnTo>
-                  <a:lnTo>
-                    <a:pt x="4343244" y="1125116"/>
-                  </a:lnTo>
-                  <a:lnTo>
-                    <a:pt x="4420879" y="1137034"/>
-                  </a:lnTo>
-                  <a:lnTo>
-                    <a:pt x="4498513" y="1148750"/>
-                  </a:lnTo>
-                  <a:lnTo>
-                    <a:pt x="4576147" y="1160268"/>
-                  </a:lnTo>
-                  <a:lnTo>
-                    <a:pt x="4653781" y="1171591"/>
-                  </a:lnTo>
-                  <a:lnTo>
-                    <a:pt x="4731415" y="1182723"/>
-                  </a:lnTo>
-                  <a:lnTo>
-                    <a:pt x="4809049" y="1193667"/>
-                  </a:lnTo>
-                  <a:lnTo>
-                    <a:pt x="4886683" y="1204425"/>
-                  </a:lnTo>
-                  <a:lnTo>
-                    <a:pt x="4964317" y="1215002"/>
-                  </a:lnTo>
-                  <a:lnTo>
-                    <a:pt x="5041951" y="1225399"/>
-                  </a:lnTo>
-                  <a:lnTo>
-                    <a:pt x="5119585" y="1235621"/>
-                  </a:lnTo>
-                  <a:lnTo>
-                    <a:pt x="5197219" y="1245670"/>
-                  </a:lnTo>
-                  <a:lnTo>
-                    <a:pt x="5274853" y="1255550"/>
-                  </a:lnTo>
-                  <a:lnTo>
-                    <a:pt x="5352487" y="1265262"/>
-                  </a:lnTo>
-                  <a:lnTo>
-                    <a:pt x="5430121" y="1274810"/>
-                  </a:lnTo>
-                  <a:lnTo>
-                    <a:pt x="5507755" y="1284196"/>
-                  </a:lnTo>
-                  <a:lnTo>
-                    <a:pt x="5585389" y="1293424"/>
-                  </a:lnTo>
-                  <a:lnTo>
-                    <a:pt x="5663023" y="1302495"/>
-                  </a:lnTo>
-                  <a:lnTo>
-                    <a:pt x="5740657" y="1311413"/>
-                  </a:lnTo>
-                  <a:lnTo>
-                    <a:pt x="5818291" y="1320181"/>
-                  </a:lnTo>
-                  <a:lnTo>
-                    <a:pt x="5895925" y="1328800"/>
-                  </a:lnTo>
-                  <a:lnTo>
-                    <a:pt x="5973559" y="1337273"/>
-                  </a:lnTo>
-                  <a:lnTo>
-                    <a:pt x="6051193" y="1345603"/>
-                  </a:lnTo>
-                  <a:lnTo>
-                    <a:pt x="6128827" y="1353793"/>
-                  </a:lnTo>
-                  <a:lnTo>
-                    <a:pt x="6206462" y="1361844"/>
-                  </a:lnTo>
-                  <a:lnTo>
-                    <a:pt x="6284096" y="1369758"/>
-                  </a:lnTo>
-                  <a:lnTo>
-                    <a:pt x="6361730" y="1377539"/>
-                  </a:lnTo>
-                  <a:lnTo>
-                    <a:pt x="6439364" y="1385188"/>
-                  </a:lnTo>
-                  <a:lnTo>
-                    <a:pt x="6516998" y="1392708"/>
-                  </a:lnTo>
-                  <a:lnTo>
-                    <a:pt x="6594632" y="1400101"/>
-                  </a:lnTo>
-                  <a:lnTo>
-                    <a:pt x="6672266" y="1407368"/>
-                  </a:lnTo>
-                  <a:lnTo>
-                    <a:pt x="6749900" y="1414513"/>
-                  </a:lnTo>
-                  <a:lnTo>
-                    <a:pt x="6827534" y="1421537"/>
-                  </a:lnTo>
-                  <a:lnTo>
-                    <a:pt x="6905168" y="1428442"/>
-                  </a:lnTo>
-                  <a:lnTo>
-                    <a:pt x="6982802" y="1435231"/>
-                  </a:lnTo>
-                  <a:lnTo>
-                    <a:pt x="7060436" y="1441904"/>
-                  </a:lnTo>
-                  <a:lnTo>
-                    <a:pt x="7138070" y="1448465"/>
-                  </a:lnTo>
-                  <a:lnTo>
-                    <a:pt x="7215704" y="1454915"/>
-                  </a:lnTo>
-                  <a:lnTo>
-                    <a:pt x="7293338" y="1461256"/>
-                  </a:lnTo>
-                  <a:lnTo>
-                    <a:pt x="7370972" y="1467489"/>
+                    <a:pt x="73372" y="27918"/>
+                  </a:lnTo>
+                  <a:lnTo>
+                    <a:pt x="151006" y="56959"/>
+                  </a:lnTo>
+                  <a:lnTo>
+                    <a:pt x="228640" y="85509"/>
+                  </a:lnTo>
+                  <a:lnTo>
+                    <a:pt x="306274" y="113576"/>
+                  </a:lnTo>
+                  <a:lnTo>
+                    <a:pt x="383908" y="141168"/>
+                  </a:lnTo>
+                  <a:lnTo>
+                    <a:pt x="461542" y="168293"/>
+                  </a:lnTo>
+                  <a:lnTo>
+                    <a:pt x="539176" y="194960"/>
+                  </a:lnTo>
+                  <a:lnTo>
+                    <a:pt x="616810" y="221176"/>
+                  </a:lnTo>
+                  <a:lnTo>
+                    <a:pt x="694444" y="246949"/>
+                  </a:lnTo>
+                  <a:lnTo>
+                    <a:pt x="772078" y="272286"/>
+                  </a:lnTo>
+                  <a:lnTo>
+                    <a:pt x="849712" y="297195"/>
+                  </a:lnTo>
+                  <a:lnTo>
+                    <a:pt x="927346" y="321682"/>
+                  </a:lnTo>
+                  <a:lnTo>
+                    <a:pt x="1004981" y="345755"/>
+                  </a:lnTo>
+                  <a:lnTo>
+                    <a:pt x="1082615" y="369421"/>
+                  </a:lnTo>
+                  <a:lnTo>
+                    <a:pt x="1160249" y="392687"/>
+                  </a:lnTo>
+                  <a:lnTo>
+                    <a:pt x="1237883" y="415559"/>
+                  </a:lnTo>
+                  <a:lnTo>
+                    <a:pt x="1315517" y="438045"/>
+                  </a:lnTo>
+                  <a:lnTo>
+                    <a:pt x="1393151" y="460150"/>
+                  </a:lnTo>
+                  <a:lnTo>
+                    <a:pt x="1470785" y="481882"/>
+                  </a:lnTo>
+                  <a:lnTo>
+                    <a:pt x="1548419" y="503246"/>
+                  </a:lnTo>
+                  <a:lnTo>
+                    <a:pt x="1626053" y="524249"/>
+                  </a:lnTo>
+                  <a:lnTo>
+                    <a:pt x="1703687" y="544897"/>
+                  </a:lnTo>
+                  <a:lnTo>
+                    <a:pt x="1781321" y="565195"/>
+                  </a:lnTo>
+                  <a:lnTo>
+                    <a:pt x="1858955" y="585150"/>
+                  </a:lnTo>
+                  <a:lnTo>
+                    <a:pt x="1936589" y="604768"/>
+                  </a:lnTo>
+                  <a:lnTo>
+                    <a:pt x="2014223" y="624054"/>
+                  </a:lnTo>
+                  <a:lnTo>
+                    <a:pt x="2091857" y="643014"/>
+                  </a:lnTo>
+                  <a:lnTo>
+                    <a:pt x="2169491" y="661654"/>
+                  </a:lnTo>
+                  <a:lnTo>
+                    <a:pt x="2247125" y="679978"/>
+                  </a:lnTo>
+                  <a:lnTo>
+                    <a:pt x="2324759" y="697992"/>
+                  </a:lnTo>
+                  <a:lnTo>
+                    <a:pt x="2402393" y="715702"/>
+                  </a:lnTo>
+                  <a:lnTo>
+                    <a:pt x="2480027" y="733112"/>
+                  </a:lnTo>
+                  <a:lnTo>
+                    <a:pt x="2557661" y="750228"/>
+                  </a:lnTo>
+                  <a:lnTo>
+                    <a:pt x="2635295" y="767054"/>
+                  </a:lnTo>
+                  <a:lnTo>
+                    <a:pt x="2712930" y="783596"/>
+                  </a:lnTo>
+                  <a:lnTo>
+                    <a:pt x="2790564" y="799858"/>
+                  </a:lnTo>
+                  <a:lnTo>
+                    <a:pt x="2868198" y="815845"/>
+                  </a:lnTo>
+                  <a:lnTo>
+                    <a:pt x="2945832" y="831562"/>
+                  </a:lnTo>
+                  <a:lnTo>
+                    <a:pt x="3023466" y="847013"/>
+                  </a:lnTo>
+                  <a:lnTo>
+                    <a:pt x="3101100" y="862203"/>
+                  </a:lnTo>
+                  <a:lnTo>
+                    <a:pt x="3178734" y="877135"/>
+                  </a:lnTo>
+                  <a:lnTo>
+                    <a:pt x="3256368" y="891816"/>
+                  </a:lnTo>
+                  <a:lnTo>
+                    <a:pt x="3334002" y="906248"/>
+                  </a:lnTo>
+                  <a:lnTo>
+                    <a:pt x="3411636" y="920436"/>
+                  </a:lnTo>
+                  <a:lnTo>
+                    <a:pt x="3489270" y="934384"/>
+                  </a:lnTo>
+                  <a:lnTo>
+                    <a:pt x="3566904" y="948096"/>
+                  </a:lnTo>
+                  <a:lnTo>
+                    <a:pt x="3644538" y="961576"/>
+                  </a:lnTo>
+                  <a:lnTo>
+                    <a:pt x="3722172" y="974829"/>
+                  </a:lnTo>
+                  <a:lnTo>
+                    <a:pt x="3799806" y="987857"/>
+                  </a:lnTo>
+                  <a:lnTo>
+                    <a:pt x="3877440" y="1000665"/>
+                  </a:lnTo>
+                  <a:lnTo>
+                    <a:pt x="3955074" y="1013257"/>
+                  </a:lnTo>
+                  <a:lnTo>
+                    <a:pt x="4032708" y="1025635"/>
+                  </a:lnTo>
+                  <a:lnTo>
+                    <a:pt x="4110342" y="1037804"/>
+                  </a:lnTo>
+                  <a:lnTo>
+                    <a:pt x="4187976" y="1049768"/>
+                  </a:lnTo>
+                  <a:lnTo>
+                    <a:pt x="4265610" y="1061529"/>
+                  </a:lnTo>
+                  <a:lnTo>
+                    <a:pt x="4343244" y="1073091"/>
+                  </a:lnTo>
+                  <a:lnTo>
+                    <a:pt x="4420879" y="1084457"/>
+                  </a:lnTo>
+                  <a:lnTo>
+                    <a:pt x="4498513" y="1095632"/>
+                  </a:lnTo>
+                  <a:lnTo>
+                    <a:pt x="4576147" y="1106617"/>
+                  </a:lnTo>
+                  <a:lnTo>
+                    <a:pt x="4653781" y="1117417"/>
+                  </a:lnTo>
+                  <a:lnTo>
+                    <a:pt x="4731415" y="1128034"/>
+                  </a:lnTo>
+                  <a:lnTo>
+                    <a:pt x="4809049" y="1138472"/>
+                  </a:lnTo>
+                  <a:lnTo>
+                    <a:pt x="4886683" y="1148733"/>
+                  </a:lnTo>
+                  <a:lnTo>
+                    <a:pt x="4964317" y="1158820"/>
+                  </a:lnTo>
+                  <a:lnTo>
+                    <a:pt x="5041951" y="1168737"/>
+                  </a:lnTo>
+                  <a:lnTo>
+                    <a:pt x="5119585" y="1178487"/>
+                  </a:lnTo>
+                  <a:lnTo>
+                    <a:pt x="5197219" y="1188071"/>
+                  </a:lnTo>
+                  <a:lnTo>
+                    <a:pt x="5274853" y="1197493"/>
+                  </a:lnTo>
+                  <a:lnTo>
+                    <a:pt x="5352487" y="1206756"/>
+                  </a:lnTo>
+                  <a:lnTo>
+                    <a:pt x="5430121" y="1215863"/>
+                  </a:lnTo>
+                  <a:lnTo>
+                    <a:pt x="5507755" y="1224815"/>
+                  </a:lnTo>
+                  <a:lnTo>
+                    <a:pt x="5585389" y="1233616"/>
+                  </a:lnTo>
+                  <a:lnTo>
+                    <a:pt x="5663023" y="1242268"/>
+                  </a:lnTo>
+                  <a:lnTo>
+                    <a:pt x="5740657" y="1250774"/>
+                  </a:lnTo>
+                  <a:lnTo>
+                    <a:pt x="5818291" y="1259136"/>
+                  </a:lnTo>
+                  <a:lnTo>
+                    <a:pt x="5895925" y="1267357"/>
+                  </a:lnTo>
+                  <a:lnTo>
+                    <a:pt x="5973559" y="1275438"/>
+                  </a:lnTo>
+                  <a:lnTo>
+                    <a:pt x="6051193" y="1283383"/>
+                  </a:lnTo>
+                  <a:lnTo>
+                    <a:pt x="6128827" y="1291194"/>
+                  </a:lnTo>
+                  <a:lnTo>
+                    <a:pt x="6206462" y="1298872"/>
+                  </a:lnTo>
+                  <a:lnTo>
+                    <a:pt x="6284096" y="1306421"/>
+                  </a:lnTo>
+                  <a:lnTo>
+                    <a:pt x="6361730" y="1313842"/>
+                  </a:lnTo>
+                  <a:lnTo>
+                    <a:pt x="6439364" y="1321138"/>
+                  </a:lnTo>
+                  <a:lnTo>
+                    <a:pt x="6516998" y="1328310"/>
+                  </a:lnTo>
+                  <a:lnTo>
+                    <a:pt x="6594632" y="1335361"/>
+                  </a:lnTo>
+                  <a:lnTo>
+                    <a:pt x="6672266" y="1342292"/>
+                  </a:lnTo>
+                  <a:lnTo>
+                    <a:pt x="6749900" y="1349107"/>
+                  </a:lnTo>
+                  <a:lnTo>
+                    <a:pt x="6827534" y="1355806"/>
+                  </a:lnTo>
+                  <a:lnTo>
+                    <a:pt x="6905168" y="1362392"/>
+                  </a:lnTo>
+                  <a:lnTo>
+                    <a:pt x="6982802" y="1368866"/>
+                  </a:lnTo>
+                  <a:lnTo>
+                    <a:pt x="7060436" y="1375231"/>
+                  </a:lnTo>
+                  <a:lnTo>
+                    <a:pt x="7138070" y="1381489"/>
+                  </a:lnTo>
+                  <a:lnTo>
+                    <a:pt x="7215704" y="1387640"/>
+                  </a:lnTo>
+                  <a:lnTo>
+                    <a:pt x="7293338" y="1393688"/>
+                  </a:lnTo>
+                  <a:lnTo>
+                    <a:pt x="7370972" y="1399633"/>
                   </a:lnTo>
                 </a:path>
               </a:pathLst>
@@ -4515,7 +4515,7 @@
           </p:nvSpPr>
           <p:spPr>
             <a:xfrm>
-              <a:off x="817517" y="4679530"/>
+              <a:off x="817517" y="4727786"/>
               <a:ext cx="7799693" cy="0"/>
             </a:xfrm>
             <a:custGeom>
@@ -4558,15 +4558,15 @@
           </p:nvSpPr>
           <p:spPr>
             <a:xfrm>
-              <a:off x="4203673" y="1896563"/>
-              <a:ext cx="0" cy="3826579"/>
+              <a:off x="4203673" y="2073503"/>
+              <a:ext cx="0" cy="3649639"/>
             </a:xfrm>
             <a:custGeom>
               <a:avLst/>
               <a:pathLst>
-                <a:path w="0" h="3826579">
+                <a:path w="0" h="3649639">
                   <a:moveTo>
-                    <a:pt x="0" y="3826579"/>
+                    <a:pt x="0" y="3649639"/>
                   </a:moveTo>
                   <a:lnTo>
                     <a:pt x="0" y="0"/>
@@ -4601,7 +4601,7 @@
           </p:nvSpPr>
           <p:spPr>
             <a:xfrm>
-              <a:off x="692708" y="5509156"/>
+              <a:off x="692708" y="5517199"/>
               <a:ext cx="62179" cy="80101"/>
             </a:xfrm>
             <a:prstGeom prst="rect">
@@ -4647,7 +4647,7 @@
           </p:nvSpPr>
           <p:spPr>
             <a:xfrm>
-              <a:off x="692708" y="4639479"/>
+              <a:off x="692708" y="4687735"/>
               <a:ext cx="62179" cy="80101"/>
             </a:xfrm>
             <a:prstGeom prst="rect">
@@ -4693,7 +4693,7 @@
           </p:nvSpPr>
           <p:spPr>
             <a:xfrm>
-              <a:off x="692708" y="3769802"/>
+              <a:off x="692708" y="3858272"/>
               <a:ext cx="62179" cy="80101"/>
             </a:xfrm>
             <a:prstGeom prst="rect">
@@ -4739,7 +4739,7 @@
           </p:nvSpPr>
           <p:spPr>
             <a:xfrm>
-              <a:off x="692708" y="2900125"/>
+              <a:off x="692708" y="3028808"/>
               <a:ext cx="62179" cy="80101"/>
             </a:xfrm>
             <a:prstGeom prst="rect">
@@ -4785,7 +4785,7 @@
           </p:nvSpPr>
           <p:spPr>
             <a:xfrm>
-              <a:off x="692708" y="2030448"/>
+              <a:off x="692708" y="2199345"/>
               <a:ext cx="62179" cy="80101"/>
             </a:xfrm>
             <a:prstGeom prst="rect">
@@ -5061,7 +5061,7 @@
           </p:nvSpPr>
           <p:spPr>
             <a:xfrm rot="-5400000">
-              <a:off x="68446" y="3759743"/>
+              <a:off x="68446" y="3848213"/>
               <a:ext cx="1016904" cy="100218"/>
             </a:xfrm>
             <a:prstGeom prst="rect">
@@ -5102,6 +5102,52 @@
         <p:sp>
           <p:nvSpPr>
             <p:cNvPr id="38" name="tx38"/>
+            <p:cNvSpPr/>
+            <p:nvPr/>
+          </p:nvSpPr>
+          <p:spPr>
+            <a:xfrm>
+              <a:off x="817517" y="1896563"/>
+              <a:ext cx="4166463" cy="82021"/>
+            </a:xfrm>
+            <a:prstGeom prst="rect">
+              <a:avLst/>
+            </a:prstGeom>
+            <a:noFill/>
+          </p:spPr>
+          <p:txBody>
+            <a:bodyPr lIns="0" rIns="0" tIns="0" bIns="0" anchorCtr="1" anchor="ctr" wrap="none"/>
+            <a:lstStyle/>
+            <a:p>
+              <a:pPr algn="l" marL="0" marR="0" indent="0">
+                <a:lnSpc>
+                  <a:spcPts val="900"/>
+                </a:lnSpc>
+                <a:spcBef>
+                  <a:spcPts val="0"/>
+                </a:spcBef>
+                <a:spcAft>
+                  <a:spcPts val="0"/>
+                </a:spcAft>
+              </a:pPr>
+              <a:r>
+                <a:rPr sz="900">
+                  <a:solidFill>
+                    <a:srgbClr val="404040">
+                      <a:alpha val="100000"/>
+                    </a:srgbClr>
+                  </a:solidFill>
+                  <a:latin typeface="Helvetica"/>
+                  <a:cs typeface="Helvetica"/>
+                </a:rPr>
+                <a:t>subHR = 0.82 (95% CI 0.63-1.07), p = 0.146   (per 0.1-unit increase in eGFR ratio)</a:t>
+              </a:r>
+            </a:p>
+          </p:txBody>
+        </p:sp>
+        <p:sp>
+          <p:nvSpPr>
+            <p:cNvPr id="39" name="tx39"/>
             <p:cNvSpPr/>
             <p:nvPr/>
           </p:nvSpPr>

--- a/docs/plots/carbo/jx_carbo_linsubhr_ratio_hosp8.pptx
+++ b/docs/plots/carbo/jx_carbo_linsubhr_ratio_hosp8.pptx
@@ -2271,26 +2271,26 @@
           </p:nvSpPr>
           <p:spPr>
             <a:xfrm>
-              <a:off x="817517" y="5142518"/>
-              <a:ext cx="7799693" cy="0"/>
+              <a:off x="915645" y="5071743"/>
+              <a:ext cx="7682587" cy="0"/>
             </a:xfrm>
             <a:custGeom>
               <a:avLst/>
               <a:pathLst>
-                <a:path w="7799693" h="0">
+                <a:path w="7682587" h="0">
                   <a:moveTo>
                     <a:pt x="0" y="0"/>
                   </a:moveTo>
                   <a:lnTo>
-                    <a:pt x="7799693" y="0"/>
-                  </a:lnTo>
-                  <a:lnTo>
-                    <a:pt x="7799693" y="0"/>
+                    <a:pt x="7682587" y="0"/>
+                  </a:lnTo>
+                  <a:lnTo>
+                    <a:pt x="7682587" y="0"/>
                   </a:lnTo>
                 </a:path>
               </a:pathLst>
             </a:custGeom>
-            <a:ln w="6775" cap="flat">
+            <a:ln w="8623" cap="flat">
               <a:solidFill>
                 <a:srgbClr val="EBEBEB">
                   <a:alpha val="100000"/>
@@ -2314,26 +2314,26 @@
           </p:nvSpPr>
           <p:spPr>
             <a:xfrm>
-              <a:off x="817517" y="4313054"/>
-              <a:ext cx="7799693" cy="0"/>
+              <a:off x="915645" y="4298074"/>
+              <a:ext cx="7682587" cy="0"/>
             </a:xfrm>
             <a:custGeom>
               <a:avLst/>
               <a:pathLst>
-                <a:path w="7799693" h="0">
+                <a:path w="7682587" h="0">
                   <a:moveTo>
                     <a:pt x="0" y="0"/>
                   </a:moveTo>
                   <a:lnTo>
-                    <a:pt x="7799693" y="0"/>
-                  </a:lnTo>
-                  <a:lnTo>
-                    <a:pt x="7799693" y="0"/>
+                    <a:pt x="7682587" y="0"/>
+                  </a:lnTo>
+                  <a:lnTo>
+                    <a:pt x="7682587" y="0"/>
                   </a:lnTo>
                 </a:path>
               </a:pathLst>
             </a:custGeom>
-            <a:ln w="6775" cap="flat">
+            <a:ln w="8623" cap="flat">
               <a:solidFill>
                 <a:srgbClr val="EBEBEB">
                   <a:alpha val="100000"/>
@@ -2357,26 +2357,26 @@
           </p:nvSpPr>
           <p:spPr>
             <a:xfrm>
-              <a:off x="817517" y="3483591"/>
-              <a:ext cx="7799693" cy="0"/>
+              <a:off x="915645" y="3524405"/>
+              <a:ext cx="7682587" cy="0"/>
             </a:xfrm>
             <a:custGeom>
               <a:avLst/>
               <a:pathLst>
-                <a:path w="7799693" h="0">
+                <a:path w="7682587" h="0">
                   <a:moveTo>
                     <a:pt x="0" y="0"/>
                   </a:moveTo>
                   <a:lnTo>
-                    <a:pt x="7799693" y="0"/>
-                  </a:lnTo>
-                  <a:lnTo>
-                    <a:pt x="7799693" y="0"/>
+                    <a:pt x="7682587" y="0"/>
+                  </a:lnTo>
+                  <a:lnTo>
+                    <a:pt x="7682587" y="0"/>
                   </a:lnTo>
                 </a:path>
               </a:pathLst>
             </a:custGeom>
-            <a:ln w="6775" cap="flat">
+            <a:ln w="8623" cap="flat">
               <a:solidFill>
                 <a:srgbClr val="EBEBEB">
                   <a:alpha val="100000"/>
@@ -2400,26 +2400,26 @@
           </p:nvSpPr>
           <p:spPr>
             <a:xfrm>
-              <a:off x="817517" y="2654127"/>
-              <a:ext cx="7799693" cy="0"/>
+              <a:off x="915645" y="2750737"/>
+              <a:ext cx="7682587" cy="0"/>
             </a:xfrm>
             <a:custGeom>
               <a:avLst/>
               <a:pathLst>
-                <a:path w="7799693" h="0">
+                <a:path w="7682587" h="0">
                   <a:moveTo>
                     <a:pt x="0" y="0"/>
                   </a:moveTo>
                   <a:lnTo>
-                    <a:pt x="7799693" y="0"/>
-                  </a:lnTo>
-                  <a:lnTo>
-                    <a:pt x="7799693" y="0"/>
+                    <a:pt x="7682587" y="0"/>
+                  </a:lnTo>
+                  <a:lnTo>
+                    <a:pt x="7682587" y="0"/>
                   </a:lnTo>
                 </a:path>
               </a:pathLst>
             </a:custGeom>
-            <a:ln w="6775" cap="flat">
+            <a:ln w="8623" cap="flat">
               <a:solidFill>
                 <a:srgbClr val="EBEBEB">
                   <a:alpha val="100000"/>
@@ -2443,15 +2443,15 @@
           </p:nvSpPr>
           <p:spPr>
             <a:xfrm>
-              <a:off x="1615213" y="2073503"/>
-              <a:ext cx="0" cy="3649639"/>
+              <a:off x="1701364" y="2209169"/>
+              <a:ext cx="0" cy="3404141"/>
             </a:xfrm>
             <a:custGeom>
               <a:avLst/>
               <a:pathLst>
-                <a:path w="0" h="3649639">
+                <a:path w="0" h="3404141">
                   <a:moveTo>
-                    <a:pt x="0" y="3649639"/>
+                    <a:pt x="0" y="3404141"/>
                   </a:moveTo>
                   <a:lnTo>
                     <a:pt x="0" y="0"/>
@@ -2462,7 +2462,7 @@
                 </a:path>
               </a:pathLst>
             </a:custGeom>
-            <a:ln w="6775" cap="flat">
+            <a:ln w="8623" cap="flat">
               <a:solidFill>
                 <a:srgbClr val="EBEBEB">
                   <a:alpha val="100000"/>
@@ -2486,15 +2486,15 @@
           </p:nvSpPr>
           <p:spPr>
             <a:xfrm>
-              <a:off x="3387871" y="2073503"/>
-              <a:ext cx="0" cy="3649639"/>
+              <a:off x="3447406" y="2209169"/>
+              <a:ext cx="0" cy="3404141"/>
             </a:xfrm>
             <a:custGeom>
               <a:avLst/>
               <a:pathLst>
-                <a:path w="0" h="3649639">
+                <a:path w="0" h="3404141">
                   <a:moveTo>
-                    <a:pt x="0" y="3649639"/>
+                    <a:pt x="0" y="3404141"/>
                   </a:moveTo>
                   <a:lnTo>
                     <a:pt x="0" y="0"/>
@@ -2505,7 +2505,7 @@
                 </a:path>
               </a:pathLst>
             </a:custGeom>
-            <a:ln w="6775" cap="flat">
+            <a:ln w="8623" cap="flat">
               <a:solidFill>
                 <a:srgbClr val="EBEBEB">
                   <a:alpha val="100000"/>
@@ -2529,15 +2529,15 @@
           </p:nvSpPr>
           <p:spPr>
             <a:xfrm>
-              <a:off x="5160528" y="2073503"/>
-              <a:ext cx="0" cy="3649639"/>
+              <a:off x="5193449" y="2209169"/>
+              <a:ext cx="0" cy="3404141"/>
             </a:xfrm>
             <a:custGeom>
               <a:avLst/>
               <a:pathLst>
-                <a:path w="0" h="3649639">
+                <a:path w="0" h="3404141">
                   <a:moveTo>
-                    <a:pt x="0" y="3649639"/>
+                    <a:pt x="0" y="3404141"/>
                   </a:moveTo>
                   <a:lnTo>
                     <a:pt x="0" y="0"/>
@@ -2548,7 +2548,7 @@
                 </a:path>
               </a:pathLst>
             </a:custGeom>
-            <a:ln w="6775" cap="flat">
+            <a:ln w="8623" cap="flat">
               <a:solidFill>
                 <a:srgbClr val="EBEBEB">
                   <a:alpha val="100000"/>
@@ -2572,15 +2572,15 @@
           </p:nvSpPr>
           <p:spPr>
             <a:xfrm>
-              <a:off x="6933186" y="2073503"/>
-              <a:ext cx="0" cy="3649639"/>
+              <a:off x="6939491" y="2209169"/>
+              <a:ext cx="0" cy="3404141"/>
             </a:xfrm>
             <a:custGeom>
               <a:avLst/>
               <a:pathLst>
-                <a:path w="0" h="3649639">
+                <a:path w="0" h="3404141">
                   <a:moveTo>
-                    <a:pt x="0" y="3649639"/>
+                    <a:pt x="0" y="3404141"/>
                   </a:moveTo>
                   <a:lnTo>
                     <a:pt x="0" y="0"/>
@@ -2591,7 +2591,7 @@
                 </a:path>
               </a:pathLst>
             </a:custGeom>
-            <a:ln w="6775" cap="flat">
+            <a:ln w="8623" cap="flat">
               <a:solidFill>
                 <a:srgbClr val="EBEBEB">
                   <a:alpha val="100000"/>
@@ -2615,26 +2615,26 @@
           </p:nvSpPr>
           <p:spPr>
             <a:xfrm>
-              <a:off x="817517" y="5557249"/>
-              <a:ext cx="7799693" cy="0"/>
+              <a:off x="915645" y="5458577"/>
+              <a:ext cx="7682587" cy="0"/>
             </a:xfrm>
             <a:custGeom>
               <a:avLst/>
               <a:pathLst>
-                <a:path w="7799693" h="0">
+                <a:path w="7682587" h="0">
                   <a:moveTo>
                     <a:pt x="0" y="0"/>
                   </a:moveTo>
                   <a:lnTo>
-                    <a:pt x="7799693" y="0"/>
-                  </a:lnTo>
-                  <a:lnTo>
-                    <a:pt x="7799693" y="0"/>
+                    <a:pt x="7682587" y="0"/>
+                  </a:lnTo>
+                  <a:lnTo>
+                    <a:pt x="7682587" y="0"/>
                   </a:lnTo>
                 </a:path>
               </a:pathLst>
             </a:custGeom>
-            <a:ln w="13550" cap="flat">
+            <a:ln w="17246" cap="flat">
               <a:solidFill>
                 <a:srgbClr val="EBEBEB">
                   <a:alpha val="100000"/>
@@ -2658,26 +2658,26 @@
           </p:nvSpPr>
           <p:spPr>
             <a:xfrm>
-              <a:off x="817517" y="4727786"/>
-              <a:ext cx="7799693" cy="0"/>
+              <a:off x="915645" y="4684908"/>
+              <a:ext cx="7682587" cy="0"/>
             </a:xfrm>
             <a:custGeom>
               <a:avLst/>
               <a:pathLst>
-                <a:path w="7799693" h="0">
+                <a:path w="7682587" h="0">
                   <a:moveTo>
                     <a:pt x="0" y="0"/>
                   </a:moveTo>
                   <a:lnTo>
-                    <a:pt x="7799693" y="0"/>
-                  </a:lnTo>
-                  <a:lnTo>
-                    <a:pt x="7799693" y="0"/>
+                    <a:pt x="7682587" y="0"/>
+                  </a:lnTo>
+                  <a:lnTo>
+                    <a:pt x="7682587" y="0"/>
                   </a:lnTo>
                 </a:path>
               </a:pathLst>
             </a:custGeom>
-            <a:ln w="13550" cap="flat">
+            <a:ln w="17246" cap="flat">
               <a:solidFill>
                 <a:srgbClr val="EBEBEB">
                   <a:alpha val="100000"/>
@@ -2701,26 +2701,26 @@
           </p:nvSpPr>
           <p:spPr>
             <a:xfrm>
-              <a:off x="817517" y="3898322"/>
-              <a:ext cx="7799693" cy="0"/>
+              <a:off x="915645" y="3911240"/>
+              <a:ext cx="7682587" cy="0"/>
             </a:xfrm>
             <a:custGeom>
               <a:avLst/>
               <a:pathLst>
-                <a:path w="7799693" h="0">
+                <a:path w="7682587" h="0">
                   <a:moveTo>
                     <a:pt x="0" y="0"/>
                   </a:moveTo>
                   <a:lnTo>
-                    <a:pt x="7799693" y="0"/>
-                  </a:lnTo>
-                  <a:lnTo>
-                    <a:pt x="7799693" y="0"/>
+                    <a:pt x="7682587" y="0"/>
+                  </a:lnTo>
+                  <a:lnTo>
+                    <a:pt x="7682587" y="0"/>
                   </a:lnTo>
                 </a:path>
               </a:pathLst>
             </a:custGeom>
-            <a:ln w="13550" cap="flat">
+            <a:ln w="17246" cap="flat">
               <a:solidFill>
                 <a:srgbClr val="EBEBEB">
                   <a:alpha val="100000"/>
@@ -2744,26 +2744,26 @@
           </p:nvSpPr>
           <p:spPr>
             <a:xfrm>
-              <a:off x="817517" y="3068859"/>
-              <a:ext cx="7799693" cy="0"/>
+              <a:off x="915645" y="3137571"/>
+              <a:ext cx="7682587" cy="0"/>
             </a:xfrm>
             <a:custGeom>
               <a:avLst/>
               <a:pathLst>
-                <a:path w="7799693" h="0">
+                <a:path w="7682587" h="0">
                   <a:moveTo>
                     <a:pt x="0" y="0"/>
                   </a:moveTo>
                   <a:lnTo>
-                    <a:pt x="7799693" y="0"/>
-                  </a:lnTo>
-                  <a:lnTo>
-                    <a:pt x="7799693" y="0"/>
+                    <a:pt x="7682587" y="0"/>
+                  </a:lnTo>
+                  <a:lnTo>
+                    <a:pt x="7682587" y="0"/>
                   </a:lnTo>
                 </a:path>
               </a:pathLst>
             </a:custGeom>
-            <a:ln w="13550" cap="flat">
+            <a:ln w="17246" cap="flat">
               <a:solidFill>
                 <a:srgbClr val="EBEBEB">
                   <a:alpha val="100000"/>
@@ -2787,26 +2787,26 @@
           </p:nvSpPr>
           <p:spPr>
             <a:xfrm>
-              <a:off x="817517" y="2239395"/>
-              <a:ext cx="7799693" cy="0"/>
+              <a:off x="915645" y="2363903"/>
+              <a:ext cx="7682587" cy="0"/>
             </a:xfrm>
             <a:custGeom>
               <a:avLst/>
               <a:pathLst>
-                <a:path w="7799693" h="0">
+                <a:path w="7682587" h="0">
                   <a:moveTo>
                     <a:pt x="0" y="0"/>
                   </a:moveTo>
                   <a:lnTo>
-                    <a:pt x="7799693" y="0"/>
-                  </a:lnTo>
-                  <a:lnTo>
-                    <a:pt x="7799693" y="0"/>
+                    <a:pt x="7682587" y="0"/>
+                  </a:lnTo>
+                  <a:lnTo>
+                    <a:pt x="7682587" y="0"/>
                   </a:lnTo>
                 </a:path>
               </a:pathLst>
             </a:custGeom>
-            <a:ln w="13550" cap="flat">
+            <a:ln w="17246" cap="flat">
               <a:solidFill>
                 <a:srgbClr val="EBEBEB">
                   <a:alpha val="100000"/>
@@ -2830,15 +2830,15 @@
           </p:nvSpPr>
           <p:spPr>
             <a:xfrm>
-              <a:off x="2501542" y="2073503"/>
-              <a:ext cx="0" cy="3649639"/>
+              <a:off x="2574385" y="2209169"/>
+              <a:ext cx="0" cy="3404141"/>
             </a:xfrm>
             <a:custGeom>
               <a:avLst/>
               <a:pathLst>
-                <a:path w="0" h="3649639">
+                <a:path w="0" h="3404141">
                   <a:moveTo>
-                    <a:pt x="0" y="3649639"/>
+                    <a:pt x="0" y="3404141"/>
                   </a:moveTo>
                   <a:lnTo>
                     <a:pt x="0" y="0"/>
@@ -2849,7 +2849,7 @@
                 </a:path>
               </a:pathLst>
             </a:custGeom>
-            <a:ln w="13550" cap="flat">
+            <a:ln w="17246" cap="flat">
               <a:solidFill>
                 <a:srgbClr val="EBEBEB">
                   <a:alpha val="100000"/>
@@ -2873,15 +2873,15 @@
           </p:nvSpPr>
           <p:spPr>
             <a:xfrm>
-              <a:off x="4274200" y="2073503"/>
-              <a:ext cx="0" cy="3649639"/>
+              <a:off x="4320427" y="2209169"/>
+              <a:ext cx="0" cy="3404141"/>
             </a:xfrm>
             <a:custGeom>
               <a:avLst/>
               <a:pathLst>
-                <a:path w="0" h="3649639">
+                <a:path w="0" h="3404141">
                   <a:moveTo>
-                    <a:pt x="0" y="3649639"/>
+                    <a:pt x="0" y="3404141"/>
                   </a:moveTo>
                   <a:lnTo>
                     <a:pt x="0" y="0"/>
@@ -2892,7 +2892,7 @@
                 </a:path>
               </a:pathLst>
             </a:custGeom>
-            <a:ln w="13550" cap="flat">
+            <a:ln w="17246" cap="flat">
               <a:solidFill>
                 <a:srgbClr val="EBEBEB">
                   <a:alpha val="100000"/>
@@ -2916,15 +2916,15 @@
           </p:nvSpPr>
           <p:spPr>
             <a:xfrm>
-              <a:off x="6046857" y="2073503"/>
-              <a:ext cx="0" cy="3649639"/>
+              <a:off x="6066470" y="2209169"/>
+              <a:ext cx="0" cy="3404141"/>
             </a:xfrm>
             <a:custGeom>
               <a:avLst/>
               <a:pathLst>
-                <a:path w="0" h="3649639">
+                <a:path w="0" h="3404141">
                   <a:moveTo>
-                    <a:pt x="0" y="3649639"/>
+                    <a:pt x="0" y="3404141"/>
                   </a:moveTo>
                   <a:lnTo>
                     <a:pt x="0" y="0"/>
@@ -2935,7 +2935,7 @@
                 </a:path>
               </a:pathLst>
             </a:custGeom>
-            <a:ln w="13550" cap="flat">
+            <a:ln w="17246" cap="flat">
               <a:solidFill>
                 <a:srgbClr val="EBEBEB">
                   <a:alpha val="100000"/>
@@ -2959,15 +2959,15 @@
           </p:nvSpPr>
           <p:spPr>
             <a:xfrm>
-              <a:off x="7819515" y="2073503"/>
-              <a:ext cx="0" cy="3649639"/>
+              <a:off x="7812512" y="2209169"/>
+              <a:ext cx="0" cy="3404141"/>
             </a:xfrm>
             <a:custGeom>
               <a:avLst/>
               <a:pathLst>
-                <a:path w="0" h="3649639">
+                <a:path w="0" h="3404141">
                   <a:moveTo>
-                    <a:pt x="0" y="3649639"/>
+                    <a:pt x="0" y="3404141"/>
                   </a:moveTo>
                   <a:lnTo>
                     <a:pt x="0" y="0"/>
@@ -2978,7 +2978,7 @@
                 </a:path>
               </a:pathLst>
             </a:custGeom>
-            <a:ln w="13550" cap="flat">
+            <a:ln w="17246" cap="flat">
               <a:solidFill>
                 <a:srgbClr val="EBEBEB">
                   <a:alpha val="100000"/>
@@ -3002,567 +3002,567 @@
           </p:nvSpPr>
           <p:spPr>
             <a:xfrm>
-              <a:off x="817517" y="2073503"/>
-              <a:ext cx="7370972" cy="3377482"/>
+              <a:off x="915645" y="2209169"/>
+              <a:ext cx="7260303" cy="3150291"/>
             </a:xfrm>
             <a:custGeom>
               <a:avLst/>
               <a:pathLst>
-                <a:path w="7370972" h="3377482">
+                <a:path w="7260303" h="3150291">
                   <a:moveTo>
-                    <a:pt x="603428" y="0"/>
+                    <a:pt x="594368" y="0"/>
                   </a:moveTo>
                   <a:lnTo>
-                    <a:pt x="616810" y="24356"/>
-                  </a:lnTo>
-                  <a:lnTo>
-                    <a:pt x="694444" y="160113"/>
-                  </a:lnTo>
-                  <a:lnTo>
-                    <a:pt x="772078" y="290541"/>
-                  </a:lnTo>
-                  <a:lnTo>
-                    <a:pt x="849712" y="415852"/>
-                  </a:lnTo>
-                  <a:lnTo>
-                    <a:pt x="927346" y="536244"/>
-                  </a:lnTo>
-                  <a:lnTo>
-                    <a:pt x="1004981" y="651913"/>
-                  </a:lnTo>
-                  <a:lnTo>
-                    <a:pt x="1082615" y="763042"/>
-                  </a:lnTo>
-                  <a:lnTo>
-                    <a:pt x="1160249" y="869810"/>
-                  </a:lnTo>
-                  <a:lnTo>
-                    <a:pt x="1237883" y="972388"/>
-                  </a:lnTo>
-                  <a:lnTo>
-                    <a:pt x="1315517" y="1070941"/>
-                  </a:lnTo>
-                  <a:lnTo>
-                    <a:pt x="1393151" y="1165626"/>
-                  </a:lnTo>
-                  <a:lnTo>
-                    <a:pt x="1470785" y="1256596"/>
-                  </a:lnTo>
-                  <a:lnTo>
-                    <a:pt x="1548419" y="1343995"/>
-                  </a:lnTo>
-                  <a:lnTo>
-                    <a:pt x="1626053" y="1427965"/>
-                  </a:lnTo>
-                  <a:lnTo>
-                    <a:pt x="1703687" y="1508640"/>
-                  </a:lnTo>
-                  <a:lnTo>
-                    <a:pt x="1781321" y="1586148"/>
-                  </a:lnTo>
-                  <a:lnTo>
-                    <a:pt x="1858955" y="1660616"/>
-                  </a:lnTo>
-                  <a:lnTo>
-                    <a:pt x="1936589" y="1732160"/>
-                  </a:lnTo>
-                  <a:lnTo>
-                    <a:pt x="2014223" y="1800897"/>
-                  </a:lnTo>
-                  <a:lnTo>
-                    <a:pt x="2091857" y="1866937"/>
-                  </a:lnTo>
-                  <a:lnTo>
-                    <a:pt x="2169491" y="1930385"/>
-                  </a:lnTo>
-                  <a:lnTo>
-                    <a:pt x="2247125" y="1991344"/>
-                  </a:lnTo>
-                  <a:lnTo>
-                    <a:pt x="2324759" y="2049910"/>
-                  </a:lnTo>
-                  <a:lnTo>
-                    <a:pt x="2402393" y="2106177"/>
-                  </a:lnTo>
-                  <a:lnTo>
-                    <a:pt x="2480027" y="2160237"/>
-                  </a:lnTo>
-                  <a:lnTo>
-                    <a:pt x="2557661" y="2212175"/>
-                  </a:lnTo>
-                  <a:lnTo>
-                    <a:pt x="2635295" y="2262075"/>
-                  </a:lnTo>
-                  <a:lnTo>
-                    <a:pt x="2712930" y="2310017"/>
-                  </a:lnTo>
-                  <a:lnTo>
-                    <a:pt x="2790564" y="2356078"/>
-                  </a:lnTo>
-                  <a:lnTo>
-                    <a:pt x="2868198" y="2400330"/>
-                  </a:lnTo>
-                  <a:lnTo>
-                    <a:pt x="2945832" y="2442847"/>
-                  </a:lnTo>
-                  <a:lnTo>
-                    <a:pt x="3023466" y="2483695"/>
-                  </a:lnTo>
-                  <a:lnTo>
-                    <a:pt x="3101100" y="2522939"/>
-                  </a:lnTo>
-                  <a:lnTo>
-                    <a:pt x="3178734" y="2560644"/>
-                  </a:lnTo>
-                  <a:lnTo>
-                    <a:pt x="3256368" y="2596869"/>
-                  </a:lnTo>
-                  <a:lnTo>
-                    <a:pt x="3334002" y="2631673"/>
-                  </a:lnTo>
-                  <a:lnTo>
-                    <a:pt x="3411636" y="2652669"/>
-                  </a:lnTo>
-                  <a:lnTo>
-                    <a:pt x="3489270" y="2647731"/>
-                  </a:lnTo>
-                  <a:lnTo>
-                    <a:pt x="3566904" y="2642763"/>
-                  </a:lnTo>
-                  <a:lnTo>
-                    <a:pt x="3644538" y="2637767"/>
-                  </a:lnTo>
-                  <a:lnTo>
-                    <a:pt x="3722172" y="2632740"/>
-                  </a:lnTo>
-                  <a:lnTo>
-                    <a:pt x="3799806" y="2627684"/>
-                  </a:lnTo>
-                  <a:lnTo>
-                    <a:pt x="3877440" y="2622598"/>
-                  </a:lnTo>
-                  <a:lnTo>
-                    <a:pt x="3955074" y="2617481"/>
-                  </a:lnTo>
-                  <a:lnTo>
-                    <a:pt x="4032708" y="2612334"/>
-                  </a:lnTo>
-                  <a:lnTo>
-                    <a:pt x="4110342" y="2607157"/>
-                  </a:lnTo>
-                  <a:lnTo>
-                    <a:pt x="4187976" y="2601948"/>
-                  </a:lnTo>
-                  <a:lnTo>
-                    <a:pt x="4265610" y="2596709"/>
-                  </a:lnTo>
-                  <a:lnTo>
-                    <a:pt x="4343244" y="2591439"/>
-                  </a:lnTo>
-                  <a:lnTo>
-                    <a:pt x="4420879" y="2586137"/>
-                  </a:lnTo>
-                  <a:lnTo>
-                    <a:pt x="4498513" y="2580804"/>
-                  </a:lnTo>
-                  <a:lnTo>
-                    <a:pt x="4576147" y="2575439"/>
-                  </a:lnTo>
-                  <a:lnTo>
-                    <a:pt x="4653781" y="2570042"/>
-                  </a:lnTo>
-                  <a:lnTo>
-                    <a:pt x="4731415" y="2564614"/>
-                  </a:lnTo>
-                  <a:lnTo>
-                    <a:pt x="4809049" y="2559153"/>
-                  </a:lnTo>
-                  <a:lnTo>
-                    <a:pt x="4886683" y="2553659"/>
-                  </a:lnTo>
-                  <a:lnTo>
-                    <a:pt x="4964317" y="2548133"/>
-                  </a:lnTo>
-                  <a:lnTo>
-                    <a:pt x="5041951" y="2542574"/>
-                  </a:lnTo>
-                  <a:lnTo>
-                    <a:pt x="5119585" y="2536982"/>
-                  </a:lnTo>
-                  <a:lnTo>
-                    <a:pt x="5197219" y="2531357"/>
-                  </a:lnTo>
-                  <a:lnTo>
-                    <a:pt x="5274853" y="2525698"/>
-                  </a:lnTo>
-                  <a:lnTo>
-                    <a:pt x="5352487" y="2520006"/>
-                  </a:lnTo>
-                  <a:lnTo>
-                    <a:pt x="5430121" y="2514280"/>
-                  </a:lnTo>
-                  <a:lnTo>
-                    <a:pt x="5507755" y="2508520"/>
-                  </a:lnTo>
-                  <a:lnTo>
-                    <a:pt x="5585389" y="2502725"/>
-                  </a:lnTo>
-                  <a:lnTo>
-                    <a:pt x="5663023" y="2496897"/>
-                  </a:lnTo>
-                  <a:lnTo>
-                    <a:pt x="5740657" y="2491033"/>
-                  </a:lnTo>
-                  <a:lnTo>
-                    <a:pt x="5818291" y="2485135"/>
-                  </a:lnTo>
-                  <a:lnTo>
-                    <a:pt x="5895925" y="2479202"/>
-                  </a:lnTo>
-                  <a:lnTo>
-                    <a:pt x="5973559" y="2473233"/>
-                  </a:lnTo>
-                  <a:lnTo>
-                    <a:pt x="6051193" y="2467229"/>
-                  </a:lnTo>
-                  <a:lnTo>
-                    <a:pt x="6128827" y="2461189"/>
-                  </a:lnTo>
-                  <a:lnTo>
-                    <a:pt x="6206462" y="2455114"/>
-                  </a:lnTo>
-                  <a:lnTo>
-                    <a:pt x="6284096" y="2449002"/>
-                  </a:lnTo>
-                  <a:lnTo>
-                    <a:pt x="6361730" y="2442854"/>
-                  </a:lnTo>
-                  <a:lnTo>
-                    <a:pt x="6439364" y="2436670"/>
-                  </a:lnTo>
-                  <a:lnTo>
-                    <a:pt x="6516998" y="2430449"/>
-                  </a:lnTo>
-                  <a:lnTo>
-                    <a:pt x="6594632" y="2424190"/>
-                  </a:lnTo>
-                  <a:lnTo>
-                    <a:pt x="6672266" y="2417895"/>
-                  </a:lnTo>
-                  <a:lnTo>
-                    <a:pt x="6749900" y="2411562"/>
-                  </a:lnTo>
-                  <a:lnTo>
-                    <a:pt x="6827534" y="2405192"/>
-                  </a:lnTo>
-                  <a:lnTo>
-                    <a:pt x="6905168" y="2398784"/>
-                  </a:lnTo>
-                  <a:lnTo>
-                    <a:pt x="6982802" y="2392337"/>
-                  </a:lnTo>
-                  <a:lnTo>
-                    <a:pt x="7060436" y="2385853"/>
-                  </a:lnTo>
-                  <a:lnTo>
-                    <a:pt x="7138070" y="2379329"/>
-                  </a:lnTo>
-                  <a:lnTo>
-                    <a:pt x="7215704" y="2372768"/>
-                  </a:lnTo>
-                  <a:lnTo>
-                    <a:pt x="7293338" y="2366167"/>
-                  </a:lnTo>
-                  <a:lnTo>
-                    <a:pt x="7370972" y="2359527"/>
-                  </a:lnTo>
-                  <a:lnTo>
-                    <a:pt x="7370972" y="3377482"/>
-                  </a:lnTo>
-                  <a:lnTo>
-                    <a:pt x="7293338" y="3373142"/>
-                  </a:lnTo>
-                  <a:lnTo>
-                    <a:pt x="7215704" y="3368624"/>
-                  </a:lnTo>
-                  <a:lnTo>
-                    <a:pt x="7138070" y="3363922"/>
-                  </a:lnTo>
-                  <a:lnTo>
-                    <a:pt x="7060436" y="3359028"/>
-                  </a:lnTo>
-                  <a:lnTo>
-                    <a:pt x="6982802" y="3353933"/>
-                  </a:lnTo>
-                  <a:lnTo>
-                    <a:pt x="6905168" y="3348631"/>
-                  </a:lnTo>
-                  <a:lnTo>
-                    <a:pt x="6827534" y="3343112"/>
-                  </a:lnTo>
-                  <a:lnTo>
-                    <a:pt x="6749900" y="3337368"/>
-                  </a:lnTo>
-                  <a:lnTo>
-                    <a:pt x="6672266" y="3331389"/>
-                  </a:lnTo>
-                  <a:lnTo>
-                    <a:pt x="6594632" y="3325166"/>
-                  </a:lnTo>
-                  <a:lnTo>
-                    <a:pt x="6516998" y="3318688"/>
-                  </a:lnTo>
-                  <a:lnTo>
-                    <a:pt x="6439364" y="3311947"/>
-                  </a:lnTo>
-                  <a:lnTo>
-                    <a:pt x="6361730" y="3304929"/>
-                  </a:lnTo>
-                  <a:lnTo>
-                    <a:pt x="6284096" y="3297625"/>
-                  </a:lnTo>
-                  <a:lnTo>
-                    <a:pt x="6206462" y="3290023"/>
-                  </a:lnTo>
-                  <a:lnTo>
-                    <a:pt x="6128827" y="3282110"/>
-                  </a:lnTo>
-                  <a:lnTo>
-                    <a:pt x="6051193" y="3273874"/>
-                  </a:lnTo>
-                  <a:lnTo>
-                    <a:pt x="5973559" y="3265302"/>
-                  </a:lnTo>
-                  <a:lnTo>
-                    <a:pt x="5895925" y="3256379"/>
-                  </a:lnTo>
-                  <a:lnTo>
-                    <a:pt x="5818291" y="3247092"/>
-                  </a:lnTo>
-                  <a:lnTo>
-                    <a:pt x="5740657" y="3237426"/>
-                  </a:lnTo>
-                  <a:lnTo>
-                    <a:pt x="5663023" y="3227365"/>
-                  </a:lnTo>
-                  <a:lnTo>
-                    <a:pt x="5585389" y="3216893"/>
-                  </a:lnTo>
-                  <a:lnTo>
-                    <a:pt x="5507755" y="3205993"/>
-                  </a:lnTo>
-                  <a:lnTo>
-                    <a:pt x="5430121" y="3194648"/>
-                  </a:lnTo>
-                  <a:lnTo>
-                    <a:pt x="5352487" y="3182840"/>
-                  </a:lnTo>
-                  <a:lnTo>
-                    <a:pt x="5274853" y="3170549"/>
-                  </a:lnTo>
-                  <a:lnTo>
-                    <a:pt x="5197219" y="3157756"/>
-                  </a:lnTo>
-                  <a:lnTo>
-                    <a:pt x="5119585" y="3144441"/>
-                  </a:lnTo>
-                  <a:lnTo>
-                    <a:pt x="5041951" y="3130582"/>
-                  </a:lnTo>
-                  <a:lnTo>
-                    <a:pt x="4964317" y="3116156"/>
-                  </a:lnTo>
-                  <a:lnTo>
-                    <a:pt x="4886683" y="3101142"/>
-                  </a:lnTo>
-                  <a:lnTo>
-                    <a:pt x="4809049" y="3085514"/>
-                  </a:lnTo>
-                  <a:lnTo>
-                    <a:pt x="4731415" y="3069248"/>
-                  </a:lnTo>
-                  <a:lnTo>
-                    <a:pt x="4653781" y="3052318"/>
-                  </a:lnTo>
-                  <a:lnTo>
-                    <a:pt x="4576147" y="3034696"/>
-                  </a:lnTo>
-                  <a:lnTo>
-                    <a:pt x="4498513" y="3016354"/>
-                  </a:lnTo>
-                  <a:lnTo>
-                    <a:pt x="4420879" y="2997263"/>
-                  </a:lnTo>
-                  <a:lnTo>
-                    <a:pt x="4343244" y="2977392"/>
-                  </a:lnTo>
-                  <a:lnTo>
-                    <a:pt x="4265610" y="2956710"/>
-                  </a:lnTo>
-                  <a:lnTo>
-                    <a:pt x="4187976" y="2935183"/>
-                  </a:lnTo>
-                  <a:lnTo>
-                    <a:pt x="4110342" y="2912776"/>
-                  </a:lnTo>
-                  <a:lnTo>
-                    <a:pt x="4032708" y="2889454"/>
-                  </a:lnTo>
-                  <a:lnTo>
-                    <a:pt x="3955074" y="2865180"/>
-                  </a:lnTo>
-                  <a:lnTo>
-                    <a:pt x="3877440" y="2839914"/>
-                  </a:lnTo>
-                  <a:lnTo>
-                    <a:pt x="3799806" y="2813617"/>
-                  </a:lnTo>
-                  <a:lnTo>
-                    <a:pt x="3722172" y="2786245"/>
-                  </a:lnTo>
-                  <a:lnTo>
-                    <a:pt x="3644538" y="2757755"/>
-                  </a:lnTo>
-                  <a:lnTo>
-                    <a:pt x="3566904" y="2728101"/>
-                  </a:lnTo>
-                  <a:lnTo>
-                    <a:pt x="3489270" y="2697236"/>
-                  </a:lnTo>
-                  <a:lnTo>
-                    <a:pt x="3411636" y="2665111"/>
-                  </a:lnTo>
-                  <a:lnTo>
-                    <a:pt x="3334002" y="2657577"/>
-                  </a:lnTo>
-                  <a:lnTo>
-                    <a:pt x="3256368" y="2662457"/>
-                  </a:lnTo>
-                  <a:lnTo>
-                    <a:pt x="3178734" y="2667308"/>
-                  </a:lnTo>
-                  <a:lnTo>
-                    <a:pt x="3101100" y="2672130"/>
-                  </a:lnTo>
-                  <a:lnTo>
-                    <a:pt x="3023466" y="2676924"/>
-                  </a:lnTo>
-                  <a:lnTo>
-                    <a:pt x="2945832" y="2681689"/>
-                  </a:lnTo>
-                  <a:lnTo>
-                    <a:pt x="2868198" y="2686427"/>
-                  </a:lnTo>
-                  <a:lnTo>
-                    <a:pt x="2790564" y="2691136"/>
-                  </a:lnTo>
-                  <a:lnTo>
-                    <a:pt x="2712930" y="2695817"/>
-                  </a:lnTo>
-                  <a:lnTo>
-                    <a:pt x="2635295" y="2700471"/>
-                  </a:lnTo>
-                  <a:lnTo>
-                    <a:pt x="2557661" y="2705098"/>
-                  </a:lnTo>
-                  <a:lnTo>
-                    <a:pt x="2480027" y="2709697"/>
-                  </a:lnTo>
-                  <a:lnTo>
-                    <a:pt x="2402393" y="2714268"/>
-                  </a:lnTo>
-                  <a:lnTo>
-                    <a:pt x="2324759" y="2718813"/>
-                  </a:lnTo>
-                  <a:lnTo>
-                    <a:pt x="2247125" y="2723331"/>
-                  </a:lnTo>
-                  <a:lnTo>
-                    <a:pt x="2169491" y="2727823"/>
-                  </a:lnTo>
-                  <a:lnTo>
-                    <a:pt x="2091857" y="2732288"/>
-                  </a:lnTo>
-                  <a:lnTo>
-                    <a:pt x="2014223" y="2736726"/>
-                  </a:lnTo>
-                  <a:lnTo>
-                    <a:pt x="1936589" y="2741138"/>
-                  </a:lnTo>
-                  <a:lnTo>
-                    <a:pt x="1858955" y="2745524"/>
-                  </a:lnTo>
-                  <a:lnTo>
-                    <a:pt x="1781321" y="2749885"/>
-                  </a:lnTo>
-                  <a:lnTo>
-                    <a:pt x="1703687" y="2754219"/>
-                  </a:lnTo>
-                  <a:lnTo>
-                    <a:pt x="1626053" y="2758528"/>
-                  </a:lnTo>
-                  <a:lnTo>
-                    <a:pt x="1548419" y="2762811"/>
-                  </a:lnTo>
-                  <a:lnTo>
-                    <a:pt x="1470785" y="2767070"/>
-                  </a:lnTo>
-                  <a:lnTo>
-                    <a:pt x="1393151" y="2771303"/>
-                  </a:lnTo>
-                  <a:lnTo>
-                    <a:pt x="1315517" y="2775511"/>
-                  </a:lnTo>
-                  <a:lnTo>
-                    <a:pt x="1237883" y="2779694"/>
-                  </a:lnTo>
-                  <a:lnTo>
-                    <a:pt x="1160249" y="2783852"/>
-                  </a:lnTo>
-                  <a:lnTo>
-                    <a:pt x="1082615" y="2787986"/>
-                  </a:lnTo>
-                  <a:lnTo>
-                    <a:pt x="1004981" y="2792096"/>
-                  </a:lnTo>
-                  <a:lnTo>
-                    <a:pt x="927346" y="2796181"/>
-                  </a:lnTo>
-                  <a:lnTo>
-                    <a:pt x="849712" y="2800242"/>
-                  </a:lnTo>
-                  <a:lnTo>
-                    <a:pt x="772078" y="2804279"/>
-                  </a:lnTo>
-                  <a:lnTo>
-                    <a:pt x="694444" y="2808292"/>
-                  </a:lnTo>
-                  <a:lnTo>
-                    <a:pt x="616810" y="2812282"/>
-                  </a:lnTo>
-                  <a:lnTo>
-                    <a:pt x="539176" y="2816248"/>
-                  </a:lnTo>
-                  <a:lnTo>
-                    <a:pt x="461542" y="2820190"/>
-                  </a:lnTo>
-                  <a:lnTo>
-                    <a:pt x="383908" y="2824109"/>
-                  </a:lnTo>
-                  <a:lnTo>
-                    <a:pt x="306274" y="2828005"/>
-                  </a:lnTo>
-                  <a:lnTo>
-                    <a:pt x="228640" y="2831879"/>
-                  </a:lnTo>
-                  <a:lnTo>
-                    <a:pt x="151006" y="2835729"/>
-                  </a:lnTo>
-                  <a:lnTo>
-                    <a:pt x="73372" y="2839556"/>
-                  </a:lnTo>
-                  <a:lnTo>
-                    <a:pt x="0" y="2843152"/>
+                    <a:pt x="607549" y="22718"/>
+                  </a:lnTo>
+                  <a:lnTo>
+                    <a:pt x="684018" y="149342"/>
+                  </a:lnTo>
+                  <a:lnTo>
+                    <a:pt x="760486" y="270998"/>
+                  </a:lnTo>
+                  <a:lnTo>
+                    <a:pt x="836955" y="387879"/>
+                  </a:lnTo>
+                  <a:lnTo>
+                    <a:pt x="913423" y="500173"/>
+                  </a:lnTo>
+                  <a:lnTo>
+                    <a:pt x="989892" y="608061"/>
+                  </a:lnTo>
+                  <a:lnTo>
+                    <a:pt x="1066360" y="711715"/>
+                  </a:lnTo>
+                  <a:lnTo>
+                    <a:pt x="1142828" y="811301"/>
+                  </a:lnTo>
+                  <a:lnTo>
+                    <a:pt x="1219297" y="906979"/>
+                  </a:lnTo>
+                  <a:lnTo>
+                    <a:pt x="1295765" y="998903"/>
+                  </a:lnTo>
+                  <a:lnTo>
+                    <a:pt x="1372234" y="1087219"/>
+                  </a:lnTo>
+                  <a:lnTo>
+                    <a:pt x="1448702" y="1172069"/>
+                  </a:lnTo>
+                  <a:lnTo>
+                    <a:pt x="1525171" y="1253590"/>
+                  </a:lnTo>
+                  <a:lnTo>
+                    <a:pt x="1601639" y="1331911"/>
+                  </a:lnTo>
+                  <a:lnTo>
+                    <a:pt x="1678107" y="1407159"/>
+                  </a:lnTo>
+                  <a:lnTo>
+                    <a:pt x="1754576" y="1479454"/>
+                  </a:lnTo>
+                  <a:lnTo>
+                    <a:pt x="1831044" y="1548912"/>
+                  </a:lnTo>
+                  <a:lnTo>
+                    <a:pt x="1907513" y="1615644"/>
+                  </a:lnTo>
+                  <a:lnTo>
+                    <a:pt x="1983981" y="1679758"/>
+                  </a:lnTo>
+                  <a:lnTo>
+                    <a:pt x="2060450" y="1741355"/>
+                  </a:lnTo>
+                  <a:lnTo>
+                    <a:pt x="2136918" y="1800535"/>
+                  </a:lnTo>
+                  <a:lnTo>
+                    <a:pt x="2213386" y="1857393"/>
+                  </a:lnTo>
+                  <a:lnTo>
+                    <a:pt x="2289855" y="1912020"/>
+                  </a:lnTo>
+                  <a:lnTo>
+                    <a:pt x="2366323" y="1964503"/>
+                  </a:lnTo>
+                  <a:lnTo>
+                    <a:pt x="2442792" y="2014926"/>
+                  </a:lnTo>
+                  <a:lnTo>
+                    <a:pt x="2519260" y="2063370"/>
+                  </a:lnTo>
+                  <a:lnTo>
+                    <a:pt x="2595729" y="2109914"/>
+                  </a:lnTo>
+                  <a:lnTo>
+                    <a:pt x="2672197" y="2154631"/>
+                  </a:lnTo>
+                  <a:lnTo>
+                    <a:pt x="2748666" y="2197593"/>
+                  </a:lnTo>
+                  <a:lnTo>
+                    <a:pt x="2825134" y="2238869"/>
+                  </a:lnTo>
+                  <a:lnTo>
+                    <a:pt x="2901602" y="2278525"/>
+                  </a:lnTo>
+                  <a:lnTo>
+                    <a:pt x="2978071" y="2316626"/>
+                  </a:lnTo>
+                  <a:lnTo>
+                    <a:pt x="3054539" y="2353231"/>
+                  </a:lnTo>
+                  <a:lnTo>
+                    <a:pt x="3131008" y="2388399"/>
+                  </a:lnTo>
+                  <a:lnTo>
+                    <a:pt x="3207476" y="2422187"/>
+                  </a:lnTo>
+                  <a:lnTo>
+                    <a:pt x="3283945" y="2454650"/>
+                  </a:lnTo>
+                  <a:lnTo>
+                    <a:pt x="3360413" y="2474233"/>
+                  </a:lnTo>
+                  <a:lnTo>
+                    <a:pt x="3436881" y="2469628"/>
+                  </a:lnTo>
+                  <a:lnTo>
+                    <a:pt x="3513350" y="2464994"/>
+                  </a:lnTo>
+                  <a:lnTo>
+                    <a:pt x="3589818" y="2460334"/>
+                  </a:lnTo>
+                  <a:lnTo>
+                    <a:pt x="3666287" y="2455646"/>
+                  </a:lnTo>
+                  <a:lnTo>
+                    <a:pt x="3742755" y="2450929"/>
+                  </a:lnTo>
+                  <a:lnTo>
+                    <a:pt x="3819224" y="2446185"/>
+                  </a:lnTo>
+                  <a:lnTo>
+                    <a:pt x="3895692" y="2441413"/>
+                  </a:lnTo>
+                  <a:lnTo>
+                    <a:pt x="3972160" y="2436612"/>
+                  </a:lnTo>
+                  <a:lnTo>
+                    <a:pt x="4048629" y="2431783"/>
+                  </a:lnTo>
+                  <a:lnTo>
+                    <a:pt x="4125097" y="2426925"/>
+                  </a:lnTo>
+                  <a:lnTo>
+                    <a:pt x="4201566" y="2422038"/>
+                  </a:lnTo>
+                  <a:lnTo>
+                    <a:pt x="4278034" y="2417122"/>
+                  </a:lnTo>
+                  <a:lnTo>
+                    <a:pt x="4354503" y="2412177"/>
+                  </a:lnTo>
+                  <a:lnTo>
+                    <a:pt x="4430971" y="2407203"/>
+                  </a:lnTo>
+                  <a:lnTo>
+                    <a:pt x="4507439" y="2402199"/>
+                  </a:lnTo>
+                  <a:lnTo>
+                    <a:pt x="4583908" y="2397165"/>
+                  </a:lnTo>
+                  <a:lnTo>
+                    <a:pt x="4660376" y="2392101"/>
+                  </a:lnTo>
+                  <a:lnTo>
+                    <a:pt x="4736845" y="2387008"/>
+                  </a:lnTo>
+                  <a:lnTo>
+                    <a:pt x="4813313" y="2381884"/>
+                  </a:lnTo>
+                  <a:lnTo>
+                    <a:pt x="4889782" y="2376729"/>
+                  </a:lnTo>
+                  <a:lnTo>
+                    <a:pt x="4966250" y="2371544"/>
+                  </a:lnTo>
+                  <a:lnTo>
+                    <a:pt x="5042719" y="2366329"/>
+                  </a:lnTo>
+                  <a:lnTo>
+                    <a:pt x="5119187" y="2361082"/>
+                  </a:lnTo>
+                  <a:lnTo>
+                    <a:pt x="5195655" y="2355804"/>
+                  </a:lnTo>
+                  <a:lnTo>
+                    <a:pt x="5272124" y="2350494"/>
+                  </a:lnTo>
+                  <a:lnTo>
+                    <a:pt x="5348592" y="2345153"/>
+                  </a:lnTo>
+                  <a:lnTo>
+                    <a:pt x="5425061" y="2339781"/>
+                  </a:lnTo>
+                  <a:lnTo>
+                    <a:pt x="5501529" y="2334376"/>
+                  </a:lnTo>
+                  <a:lnTo>
+                    <a:pt x="5577998" y="2328939"/>
+                  </a:lnTo>
+                  <a:lnTo>
+                    <a:pt x="5654466" y="2323471"/>
+                  </a:lnTo>
+                  <a:lnTo>
+                    <a:pt x="5730934" y="2317969"/>
+                  </a:lnTo>
+                  <a:lnTo>
+                    <a:pt x="5807403" y="2312435"/>
+                  </a:lnTo>
+                  <a:lnTo>
+                    <a:pt x="5883871" y="2306868"/>
+                  </a:lnTo>
+                  <a:lnTo>
+                    <a:pt x="5960340" y="2301268"/>
+                  </a:lnTo>
+                  <a:lnTo>
+                    <a:pt x="6036808" y="2295634"/>
+                  </a:lnTo>
+                  <a:lnTo>
+                    <a:pt x="6113277" y="2289967"/>
+                  </a:lnTo>
+                  <a:lnTo>
+                    <a:pt x="6189745" y="2284267"/>
+                  </a:lnTo>
+                  <a:lnTo>
+                    <a:pt x="6266213" y="2278532"/>
+                  </a:lnTo>
+                  <a:lnTo>
+                    <a:pt x="6342682" y="2272764"/>
+                  </a:lnTo>
+                  <a:lnTo>
+                    <a:pt x="6419150" y="2266961"/>
+                  </a:lnTo>
+                  <a:lnTo>
+                    <a:pt x="6495619" y="2261124"/>
+                  </a:lnTo>
+                  <a:lnTo>
+                    <a:pt x="6572087" y="2255252"/>
+                  </a:lnTo>
+                  <a:lnTo>
+                    <a:pt x="6648556" y="2249345"/>
+                  </a:lnTo>
+                  <a:lnTo>
+                    <a:pt x="6725024" y="2243403"/>
+                  </a:lnTo>
+                  <a:lnTo>
+                    <a:pt x="6801492" y="2237426"/>
+                  </a:lnTo>
+                  <a:lnTo>
+                    <a:pt x="6877961" y="2231414"/>
+                  </a:lnTo>
+                  <a:lnTo>
+                    <a:pt x="6954429" y="2225365"/>
+                  </a:lnTo>
+                  <a:lnTo>
+                    <a:pt x="7030898" y="2219281"/>
+                  </a:lnTo>
+                  <a:lnTo>
+                    <a:pt x="7107366" y="2213160"/>
+                  </a:lnTo>
+                  <a:lnTo>
+                    <a:pt x="7183835" y="2207003"/>
+                  </a:lnTo>
+                  <a:lnTo>
+                    <a:pt x="7260303" y="2200810"/>
+                  </a:lnTo>
+                  <a:lnTo>
+                    <a:pt x="7260303" y="3150291"/>
+                  </a:lnTo>
+                  <a:lnTo>
+                    <a:pt x="7183835" y="3146243"/>
+                  </a:lnTo>
+                  <a:lnTo>
+                    <a:pt x="7107366" y="3142029"/>
+                  </a:lnTo>
+                  <a:lnTo>
+                    <a:pt x="7030898" y="3137643"/>
+                  </a:lnTo>
+                  <a:lnTo>
+                    <a:pt x="6954429" y="3133078"/>
+                  </a:lnTo>
+                  <a:lnTo>
+                    <a:pt x="6877961" y="3128327"/>
+                  </a:lnTo>
+                  <a:lnTo>
+                    <a:pt x="6801492" y="3123381"/>
+                  </a:lnTo>
+                  <a:lnTo>
+                    <a:pt x="6725024" y="3118233"/>
+                  </a:lnTo>
+                  <a:lnTo>
+                    <a:pt x="6648556" y="3112875"/>
+                  </a:lnTo>
+                  <a:lnTo>
+                    <a:pt x="6572087" y="3107299"/>
+                  </a:lnTo>
+                  <a:lnTo>
+                    <a:pt x="6495619" y="3101494"/>
+                  </a:lnTo>
+                  <a:lnTo>
+                    <a:pt x="6419150" y="3095452"/>
+                  </a:lnTo>
+                  <a:lnTo>
+                    <a:pt x="6342682" y="3089164"/>
+                  </a:lnTo>
+                  <a:lnTo>
+                    <a:pt x="6266213" y="3082619"/>
+                  </a:lnTo>
+                  <a:lnTo>
+                    <a:pt x="6189745" y="3075806"/>
+                  </a:lnTo>
+                  <a:lnTo>
+                    <a:pt x="6113277" y="3068715"/>
+                  </a:lnTo>
+                  <a:lnTo>
+                    <a:pt x="6036808" y="3061335"/>
+                  </a:lnTo>
+                  <a:lnTo>
+                    <a:pt x="5960340" y="3053653"/>
+                  </a:lnTo>
+                  <a:lnTo>
+                    <a:pt x="5883871" y="3045657"/>
+                  </a:lnTo>
+                  <a:lnTo>
+                    <a:pt x="5807403" y="3037335"/>
+                  </a:lnTo>
+                  <a:lnTo>
+                    <a:pt x="5730934" y="3028672"/>
+                  </a:lnTo>
+                  <a:lnTo>
+                    <a:pt x="5654466" y="3019656"/>
+                  </a:lnTo>
+                  <a:lnTo>
+                    <a:pt x="5577998" y="3010272"/>
+                  </a:lnTo>
+                  <a:lnTo>
+                    <a:pt x="5501529" y="3000504"/>
+                  </a:lnTo>
+                  <a:lnTo>
+                    <a:pt x="5425061" y="2990338"/>
+                  </a:lnTo>
+                  <a:lnTo>
+                    <a:pt x="5348592" y="2979756"/>
+                  </a:lnTo>
+                  <a:lnTo>
+                    <a:pt x="5272124" y="2968742"/>
+                  </a:lnTo>
+                  <a:lnTo>
+                    <a:pt x="5195655" y="2957278"/>
+                  </a:lnTo>
+                  <a:lnTo>
+                    <a:pt x="5119187" y="2945346"/>
+                  </a:lnTo>
+                  <a:lnTo>
+                    <a:pt x="5042719" y="2932926"/>
+                  </a:lnTo>
+                  <a:lnTo>
+                    <a:pt x="4966250" y="2919999"/>
+                  </a:lnTo>
+                  <a:lnTo>
+                    <a:pt x="4889782" y="2906544"/>
+                  </a:lnTo>
+                  <a:lnTo>
+                    <a:pt x="4813313" y="2892540"/>
+                  </a:lnTo>
+                  <a:lnTo>
+                    <a:pt x="4736845" y="2877963"/>
+                  </a:lnTo>
+                  <a:lnTo>
+                    <a:pt x="4660376" y="2862791"/>
+                  </a:lnTo>
+                  <a:lnTo>
+                    <a:pt x="4583908" y="2846999"/>
+                  </a:lnTo>
+                  <a:lnTo>
+                    <a:pt x="4507439" y="2830563"/>
+                  </a:lnTo>
+                  <a:lnTo>
+                    <a:pt x="4430971" y="2813455"/>
+                  </a:lnTo>
+                  <a:lnTo>
+                    <a:pt x="4354503" y="2795648"/>
+                  </a:lnTo>
+                  <a:lnTo>
+                    <a:pt x="4278034" y="2777114"/>
+                  </a:lnTo>
+                  <a:lnTo>
+                    <a:pt x="4201566" y="2757823"/>
+                  </a:lnTo>
+                  <a:lnTo>
+                    <a:pt x="4125097" y="2737744"/>
+                  </a:lnTo>
+                  <a:lnTo>
+                    <a:pt x="4048629" y="2716844"/>
+                  </a:lnTo>
+                  <a:lnTo>
+                    <a:pt x="3972160" y="2695091"/>
+                  </a:lnTo>
+                  <a:lnTo>
+                    <a:pt x="3895692" y="2672450"/>
+                  </a:lnTo>
+                  <a:lnTo>
+                    <a:pt x="3819224" y="2648884"/>
+                  </a:lnTo>
+                  <a:lnTo>
+                    <a:pt x="3742755" y="2624355"/>
+                  </a:lnTo>
+                  <a:lnTo>
+                    <a:pt x="3666287" y="2598824"/>
+                  </a:lnTo>
+                  <a:lnTo>
+                    <a:pt x="3589818" y="2572251"/>
+                  </a:lnTo>
+                  <a:lnTo>
+                    <a:pt x="3513350" y="2544592"/>
+                  </a:lnTo>
+                  <a:lnTo>
+                    <a:pt x="3436881" y="2515803"/>
+                  </a:lnTo>
+                  <a:lnTo>
+                    <a:pt x="3360413" y="2485838"/>
+                  </a:lnTo>
+                  <a:lnTo>
+                    <a:pt x="3283945" y="2478812"/>
+                  </a:lnTo>
+                  <a:lnTo>
+                    <a:pt x="3207476" y="2483363"/>
+                  </a:lnTo>
+                  <a:lnTo>
+                    <a:pt x="3131008" y="2487888"/>
+                  </a:lnTo>
+                  <a:lnTo>
+                    <a:pt x="3054539" y="2492386"/>
+                  </a:lnTo>
+                  <a:lnTo>
+                    <a:pt x="2978071" y="2496857"/>
+                  </a:lnTo>
+                  <a:lnTo>
+                    <a:pt x="2901602" y="2501302"/>
+                  </a:lnTo>
+                  <a:lnTo>
+                    <a:pt x="2825134" y="2505720"/>
+                  </a:lnTo>
+                  <a:lnTo>
+                    <a:pt x="2748666" y="2510113"/>
+                  </a:lnTo>
+                  <a:lnTo>
+                    <a:pt x="2672197" y="2514480"/>
+                  </a:lnTo>
+                  <a:lnTo>
+                    <a:pt x="2595729" y="2518820"/>
+                  </a:lnTo>
+                  <a:lnTo>
+                    <a:pt x="2519260" y="2523136"/>
+                  </a:lnTo>
+                  <a:lnTo>
+                    <a:pt x="2442792" y="2527425"/>
+                  </a:lnTo>
+                  <a:lnTo>
+                    <a:pt x="2366323" y="2531690"/>
+                  </a:lnTo>
+                  <a:lnTo>
+                    <a:pt x="2289855" y="2535929"/>
+                  </a:lnTo>
+                  <a:lnTo>
+                    <a:pt x="2213386" y="2540143"/>
+                  </a:lnTo>
+                  <a:lnTo>
+                    <a:pt x="2136918" y="2544332"/>
+                  </a:lnTo>
+                  <a:lnTo>
+                    <a:pt x="2060450" y="2548497"/>
+                  </a:lnTo>
+                  <a:lnTo>
+                    <a:pt x="1983981" y="2552636"/>
+                  </a:lnTo>
+                  <a:lnTo>
+                    <a:pt x="1907513" y="2556752"/>
+                  </a:lnTo>
+                  <a:lnTo>
+                    <a:pt x="1831044" y="2560843"/>
+                  </a:lnTo>
+                  <a:lnTo>
+                    <a:pt x="1754576" y="2564910"/>
+                  </a:lnTo>
+                  <a:lnTo>
+                    <a:pt x="1678107" y="2568953"/>
+                  </a:lnTo>
+                  <a:lnTo>
+                    <a:pt x="1601639" y="2572972"/>
+                  </a:lnTo>
+                  <a:lnTo>
+                    <a:pt x="1525171" y="2576967"/>
+                  </a:lnTo>
+                  <a:lnTo>
+                    <a:pt x="1448702" y="2580939"/>
+                  </a:lnTo>
+                  <a:lnTo>
+                    <a:pt x="1372234" y="2584887"/>
+                  </a:lnTo>
+                  <a:lnTo>
+                    <a:pt x="1295765" y="2588812"/>
+                  </a:lnTo>
+                  <a:lnTo>
+                    <a:pt x="1219297" y="2592714"/>
+                  </a:lnTo>
+                  <a:lnTo>
+                    <a:pt x="1142828" y="2596593"/>
+                  </a:lnTo>
+                  <a:lnTo>
+                    <a:pt x="1066360" y="2600448"/>
+                  </a:lnTo>
+                  <a:lnTo>
+                    <a:pt x="989892" y="2604282"/>
+                  </a:lnTo>
+                  <a:lnTo>
+                    <a:pt x="913423" y="2608092"/>
+                  </a:lnTo>
+                  <a:lnTo>
+                    <a:pt x="836955" y="2611880"/>
+                  </a:lnTo>
+                  <a:lnTo>
+                    <a:pt x="760486" y="2615645"/>
+                  </a:lnTo>
+                  <a:lnTo>
+                    <a:pt x="684018" y="2619389"/>
+                  </a:lnTo>
+                  <a:lnTo>
+                    <a:pt x="607549" y="2623110"/>
+                  </a:lnTo>
+                  <a:lnTo>
+                    <a:pt x="531081" y="2626809"/>
+                  </a:lnTo>
+                  <a:lnTo>
+                    <a:pt x="454613" y="2630486"/>
+                  </a:lnTo>
+                  <a:lnTo>
+                    <a:pt x="378144" y="2634142"/>
+                  </a:lnTo>
+                  <a:lnTo>
+                    <a:pt x="301676" y="2637776"/>
+                  </a:lnTo>
+                  <a:lnTo>
+                    <a:pt x="225207" y="2641388"/>
+                  </a:lnTo>
+                  <a:lnTo>
+                    <a:pt x="148739" y="2644980"/>
+                  </a:lnTo>
+                  <a:lnTo>
+                    <a:pt x="72270" y="2648550"/>
+                  </a:lnTo>
+                  <a:lnTo>
+                    <a:pt x="0" y="2651904"/>
                   </a:lnTo>
                   <a:close/>
                 </a:path>
@@ -3588,279 +3588,279 @@
           </p:nvSpPr>
           <p:spPr>
             <a:xfrm>
-              <a:off x="1420946" y="2073503"/>
-              <a:ext cx="6767544" cy="2652669"/>
+              <a:off x="1510013" y="2209169"/>
+              <a:ext cx="6665934" cy="2474233"/>
             </a:xfrm>
             <a:custGeom>
               <a:avLst/>
               <a:pathLst>
-                <a:path w="6767544" h="2652669">
+                <a:path w="6665934" h="2474233">
                   <a:moveTo>
                     <a:pt x="0" y="0"/>
                   </a:moveTo>
                   <a:lnTo>
-                    <a:pt x="13382" y="24356"/>
-                  </a:lnTo>
-                  <a:lnTo>
-                    <a:pt x="91016" y="160113"/>
-                  </a:lnTo>
-                  <a:lnTo>
-                    <a:pt x="168650" y="290541"/>
-                  </a:lnTo>
-                  <a:lnTo>
-                    <a:pt x="246284" y="415852"/>
-                  </a:lnTo>
-                  <a:lnTo>
-                    <a:pt x="323918" y="536244"/>
-                  </a:lnTo>
-                  <a:lnTo>
-                    <a:pt x="401552" y="651913"/>
-                  </a:lnTo>
-                  <a:lnTo>
-                    <a:pt x="479186" y="763042"/>
-                  </a:lnTo>
-                  <a:lnTo>
-                    <a:pt x="556820" y="869810"/>
-                  </a:lnTo>
-                  <a:lnTo>
-                    <a:pt x="634454" y="972388"/>
-                  </a:lnTo>
-                  <a:lnTo>
-                    <a:pt x="712088" y="1070941"/>
-                  </a:lnTo>
-                  <a:lnTo>
-                    <a:pt x="789722" y="1165626"/>
-                  </a:lnTo>
-                  <a:lnTo>
-                    <a:pt x="867356" y="1256596"/>
-                  </a:lnTo>
-                  <a:lnTo>
-                    <a:pt x="944990" y="1343995"/>
-                  </a:lnTo>
-                  <a:lnTo>
-                    <a:pt x="1022624" y="1427965"/>
-                  </a:lnTo>
-                  <a:lnTo>
-                    <a:pt x="1100258" y="1508640"/>
-                  </a:lnTo>
-                  <a:lnTo>
-                    <a:pt x="1177892" y="1586148"/>
-                  </a:lnTo>
-                  <a:lnTo>
-                    <a:pt x="1255526" y="1660616"/>
-                  </a:lnTo>
-                  <a:lnTo>
-                    <a:pt x="1333160" y="1732160"/>
-                  </a:lnTo>
-                  <a:lnTo>
-                    <a:pt x="1410795" y="1800897"/>
-                  </a:lnTo>
-                  <a:lnTo>
-                    <a:pt x="1488429" y="1866937"/>
-                  </a:lnTo>
-                  <a:lnTo>
-                    <a:pt x="1566063" y="1930385"/>
-                  </a:lnTo>
-                  <a:lnTo>
-                    <a:pt x="1643697" y="1991344"/>
-                  </a:lnTo>
-                  <a:lnTo>
-                    <a:pt x="1721331" y="2049910"/>
-                  </a:lnTo>
-                  <a:lnTo>
-                    <a:pt x="1798965" y="2106177"/>
-                  </a:lnTo>
-                  <a:lnTo>
-                    <a:pt x="1876599" y="2160237"/>
-                  </a:lnTo>
-                  <a:lnTo>
-                    <a:pt x="1954233" y="2212175"/>
-                  </a:lnTo>
-                  <a:lnTo>
-                    <a:pt x="2031867" y="2262075"/>
-                  </a:lnTo>
-                  <a:lnTo>
-                    <a:pt x="2109501" y="2310017"/>
-                  </a:lnTo>
-                  <a:lnTo>
-                    <a:pt x="2187135" y="2356078"/>
-                  </a:lnTo>
-                  <a:lnTo>
-                    <a:pt x="2264769" y="2400330"/>
-                  </a:lnTo>
-                  <a:lnTo>
-                    <a:pt x="2342403" y="2442847"/>
-                  </a:lnTo>
-                  <a:lnTo>
-                    <a:pt x="2420037" y="2483695"/>
-                  </a:lnTo>
-                  <a:lnTo>
-                    <a:pt x="2497671" y="2522939"/>
-                  </a:lnTo>
-                  <a:lnTo>
-                    <a:pt x="2575305" y="2560644"/>
-                  </a:lnTo>
-                  <a:lnTo>
-                    <a:pt x="2652939" y="2596869"/>
-                  </a:lnTo>
-                  <a:lnTo>
-                    <a:pt x="2730573" y="2631673"/>
-                  </a:lnTo>
-                  <a:lnTo>
-                    <a:pt x="2808207" y="2652669"/>
-                  </a:lnTo>
-                  <a:lnTo>
-                    <a:pt x="2885841" y="2647731"/>
-                  </a:lnTo>
-                  <a:lnTo>
-                    <a:pt x="2963475" y="2642763"/>
-                  </a:lnTo>
-                  <a:lnTo>
-                    <a:pt x="3041109" y="2637767"/>
-                  </a:lnTo>
-                  <a:lnTo>
-                    <a:pt x="3118744" y="2632740"/>
-                  </a:lnTo>
-                  <a:lnTo>
-                    <a:pt x="3196378" y="2627684"/>
-                  </a:lnTo>
-                  <a:lnTo>
-                    <a:pt x="3274012" y="2622598"/>
-                  </a:lnTo>
-                  <a:lnTo>
-                    <a:pt x="3351646" y="2617481"/>
-                  </a:lnTo>
-                  <a:lnTo>
-                    <a:pt x="3429280" y="2612334"/>
-                  </a:lnTo>
-                  <a:lnTo>
-                    <a:pt x="3506914" y="2607157"/>
-                  </a:lnTo>
-                  <a:lnTo>
-                    <a:pt x="3584548" y="2601948"/>
-                  </a:lnTo>
-                  <a:lnTo>
-                    <a:pt x="3662182" y="2596709"/>
-                  </a:lnTo>
-                  <a:lnTo>
-                    <a:pt x="3739816" y="2591439"/>
-                  </a:lnTo>
-                  <a:lnTo>
-                    <a:pt x="3817450" y="2586137"/>
-                  </a:lnTo>
-                  <a:lnTo>
-                    <a:pt x="3895084" y="2580804"/>
-                  </a:lnTo>
-                  <a:lnTo>
-                    <a:pt x="3972718" y="2575439"/>
-                  </a:lnTo>
-                  <a:lnTo>
-                    <a:pt x="4050352" y="2570042"/>
-                  </a:lnTo>
-                  <a:lnTo>
-                    <a:pt x="4127986" y="2564614"/>
-                  </a:lnTo>
-                  <a:lnTo>
-                    <a:pt x="4205620" y="2559153"/>
-                  </a:lnTo>
-                  <a:lnTo>
-                    <a:pt x="4283254" y="2553659"/>
-                  </a:lnTo>
-                  <a:lnTo>
-                    <a:pt x="4360888" y="2548133"/>
-                  </a:lnTo>
-                  <a:lnTo>
-                    <a:pt x="4438522" y="2542574"/>
-                  </a:lnTo>
-                  <a:lnTo>
-                    <a:pt x="4516156" y="2536982"/>
-                  </a:lnTo>
-                  <a:lnTo>
-                    <a:pt x="4593790" y="2531357"/>
-                  </a:lnTo>
-                  <a:lnTo>
-                    <a:pt x="4671424" y="2525698"/>
-                  </a:lnTo>
-                  <a:lnTo>
-                    <a:pt x="4749058" y="2520006"/>
-                  </a:lnTo>
-                  <a:lnTo>
-                    <a:pt x="4826693" y="2514280"/>
-                  </a:lnTo>
-                  <a:lnTo>
-                    <a:pt x="4904327" y="2508520"/>
-                  </a:lnTo>
-                  <a:lnTo>
-                    <a:pt x="4981961" y="2502725"/>
-                  </a:lnTo>
-                  <a:lnTo>
-                    <a:pt x="5059595" y="2496897"/>
-                  </a:lnTo>
-                  <a:lnTo>
-                    <a:pt x="5137229" y="2491033"/>
-                  </a:lnTo>
-                  <a:lnTo>
-                    <a:pt x="5214863" y="2485135"/>
-                  </a:lnTo>
-                  <a:lnTo>
-                    <a:pt x="5292497" y="2479202"/>
-                  </a:lnTo>
-                  <a:lnTo>
-                    <a:pt x="5370131" y="2473233"/>
-                  </a:lnTo>
-                  <a:lnTo>
-                    <a:pt x="5447765" y="2467229"/>
-                  </a:lnTo>
-                  <a:lnTo>
-                    <a:pt x="5525399" y="2461189"/>
-                  </a:lnTo>
-                  <a:lnTo>
-                    <a:pt x="5603033" y="2455114"/>
-                  </a:lnTo>
-                  <a:lnTo>
-                    <a:pt x="5680667" y="2449002"/>
-                  </a:lnTo>
-                  <a:lnTo>
-                    <a:pt x="5758301" y="2442854"/>
-                  </a:lnTo>
-                  <a:lnTo>
-                    <a:pt x="5835935" y="2436670"/>
-                  </a:lnTo>
-                  <a:lnTo>
-                    <a:pt x="5913569" y="2430449"/>
-                  </a:lnTo>
-                  <a:lnTo>
-                    <a:pt x="5991203" y="2424190"/>
-                  </a:lnTo>
-                  <a:lnTo>
-                    <a:pt x="6068837" y="2417895"/>
-                  </a:lnTo>
-                  <a:lnTo>
-                    <a:pt x="6146471" y="2411562"/>
-                  </a:lnTo>
-                  <a:lnTo>
-                    <a:pt x="6224105" y="2405192"/>
-                  </a:lnTo>
-                  <a:lnTo>
-                    <a:pt x="6301739" y="2398784"/>
-                  </a:lnTo>
-                  <a:lnTo>
-                    <a:pt x="6379373" y="2392337"/>
-                  </a:lnTo>
-                  <a:lnTo>
-                    <a:pt x="6457007" y="2385853"/>
-                  </a:lnTo>
-                  <a:lnTo>
-                    <a:pt x="6534641" y="2379329"/>
-                  </a:lnTo>
-                  <a:lnTo>
-                    <a:pt x="6612276" y="2372768"/>
-                  </a:lnTo>
-                  <a:lnTo>
-                    <a:pt x="6689910" y="2366167"/>
-                  </a:lnTo>
-                  <a:lnTo>
-                    <a:pt x="6767544" y="2359527"/>
+                    <a:pt x="13181" y="22718"/>
+                  </a:lnTo>
+                  <a:lnTo>
+                    <a:pt x="89649" y="149342"/>
+                  </a:lnTo>
+                  <a:lnTo>
+                    <a:pt x="166118" y="270998"/>
+                  </a:lnTo>
+                  <a:lnTo>
+                    <a:pt x="242586" y="387879"/>
+                  </a:lnTo>
+                  <a:lnTo>
+                    <a:pt x="319055" y="500173"/>
+                  </a:lnTo>
+                  <a:lnTo>
+                    <a:pt x="395523" y="608061"/>
+                  </a:lnTo>
+                  <a:lnTo>
+                    <a:pt x="471991" y="711715"/>
+                  </a:lnTo>
+                  <a:lnTo>
+                    <a:pt x="548460" y="811301"/>
+                  </a:lnTo>
+                  <a:lnTo>
+                    <a:pt x="624928" y="906979"/>
+                  </a:lnTo>
+                  <a:lnTo>
+                    <a:pt x="701397" y="998903"/>
+                  </a:lnTo>
+                  <a:lnTo>
+                    <a:pt x="777865" y="1087219"/>
+                  </a:lnTo>
+                  <a:lnTo>
+                    <a:pt x="854334" y="1172069"/>
+                  </a:lnTo>
+                  <a:lnTo>
+                    <a:pt x="930802" y="1253590"/>
+                  </a:lnTo>
+                  <a:lnTo>
+                    <a:pt x="1007270" y="1331911"/>
+                  </a:lnTo>
+                  <a:lnTo>
+                    <a:pt x="1083739" y="1407159"/>
+                  </a:lnTo>
+                  <a:lnTo>
+                    <a:pt x="1160207" y="1479454"/>
+                  </a:lnTo>
+                  <a:lnTo>
+                    <a:pt x="1236676" y="1548912"/>
+                  </a:lnTo>
+                  <a:lnTo>
+                    <a:pt x="1313144" y="1615644"/>
+                  </a:lnTo>
+                  <a:lnTo>
+                    <a:pt x="1389613" y="1679758"/>
+                  </a:lnTo>
+                  <a:lnTo>
+                    <a:pt x="1466081" y="1741355"/>
+                  </a:lnTo>
+                  <a:lnTo>
+                    <a:pt x="1542549" y="1800535"/>
+                  </a:lnTo>
+                  <a:lnTo>
+                    <a:pt x="1619018" y="1857393"/>
+                  </a:lnTo>
+                  <a:lnTo>
+                    <a:pt x="1695486" y="1912020"/>
+                  </a:lnTo>
+                  <a:lnTo>
+                    <a:pt x="1771955" y="1964503"/>
+                  </a:lnTo>
+                  <a:lnTo>
+                    <a:pt x="1848423" y="2014926"/>
+                  </a:lnTo>
+                  <a:lnTo>
+                    <a:pt x="1924892" y="2063370"/>
+                  </a:lnTo>
+                  <a:lnTo>
+                    <a:pt x="2001360" y="2109914"/>
+                  </a:lnTo>
+                  <a:lnTo>
+                    <a:pt x="2077828" y="2154631"/>
+                  </a:lnTo>
+                  <a:lnTo>
+                    <a:pt x="2154297" y="2197593"/>
+                  </a:lnTo>
+                  <a:lnTo>
+                    <a:pt x="2230765" y="2238869"/>
+                  </a:lnTo>
+                  <a:lnTo>
+                    <a:pt x="2307234" y="2278525"/>
+                  </a:lnTo>
+                  <a:lnTo>
+                    <a:pt x="2383702" y="2316626"/>
+                  </a:lnTo>
+                  <a:lnTo>
+                    <a:pt x="2460171" y="2353231"/>
+                  </a:lnTo>
+                  <a:lnTo>
+                    <a:pt x="2536639" y="2388399"/>
+                  </a:lnTo>
+                  <a:lnTo>
+                    <a:pt x="2613108" y="2422187"/>
+                  </a:lnTo>
+                  <a:lnTo>
+                    <a:pt x="2689576" y="2454650"/>
+                  </a:lnTo>
+                  <a:lnTo>
+                    <a:pt x="2766044" y="2474233"/>
+                  </a:lnTo>
+                  <a:lnTo>
+                    <a:pt x="2842513" y="2469628"/>
+                  </a:lnTo>
+                  <a:lnTo>
+                    <a:pt x="2918981" y="2464994"/>
+                  </a:lnTo>
+                  <a:lnTo>
+                    <a:pt x="2995450" y="2460334"/>
+                  </a:lnTo>
+                  <a:lnTo>
+                    <a:pt x="3071918" y="2455646"/>
+                  </a:lnTo>
+                  <a:lnTo>
+                    <a:pt x="3148387" y="2450929"/>
+                  </a:lnTo>
+                  <a:lnTo>
+                    <a:pt x="3224855" y="2446185"/>
+                  </a:lnTo>
+                  <a:lnTo>
+                    <a:pt x="3301323" y="2441413"/>
+                  </a:lnTo>
+                  <a:lnTo>
+                    <a:pt x="3377792" y="2436612"/>
+                  </a:lnTo>
+                  <a:lnTo>
+                    <a:pt x="3454260" y="2431783"/>
+                  </a:lnTo>
+                  <a:lnTo>
+                    <a:pt x="3530729" y="2426925"/>
+                  </a:lnTo>
+                  <a:lnTo>
+                    <a:pt x="3607197" y="2422038"/>
+                  </a:lnTo>
+                  <a:lnTo>
+                    <a:pt x="3683666" y="2417122"/>
+                  </a:lnTo>
+                  <a:lnTo>
+                    <a:pt x="3760134" y="2412177"/>
+                  </a:lnTo>
+                  <a:lnTo>
+                    <a:pt x="3836602" y="2407203"/>
+                  </a:lnTo>
+                  <a:lnTo>
+                    <a:pt x="3913071" y="2402199"/>
+                  </a:lnTo>
+                  <a:lnTo>
+                    <a:pt x="3989539" y="2397165"/>
+                  </a:lnTo>
+                  <a:lnTo>
+                    <a:pt x="4066008" y="2392101"/>
+                  </a:lnTo>
+                  <a:lnTo>
+                    <a:pt x="4142476" y="2387008"/>
+                  </a:lnTo>
+                  <a:lnTo>
+                    <a:pt x="4218945" y="2381884"/>
+                  </a:lnTo>
+                  <a:lnTo>
+                    <a:pt x="4295413" y="2376729"/>
+                  </a:lnTo>
+                  <a:lnTo>
+                    <a:pt x="4371881" y="2371544"/>
+                  </a:lnTo>
+                  <a:lnTo>
+                    <a:pt x="4448350" y="2366329"/>
+                  </a:lnTo>
+                  <a:lnTo>
+                    <a:pt x="4524818" y="2361082"/>
+                  </a:lnTo>
+                  <a:lnTo>
+                    <a:pt x="4601287" y="2355804"/>
+                  </a:lnTo>
+                  <a:lnTo>
+                    <a:pt x="4677755" y="2350494"/>
+                  </a:lnTo>
+                  <a:lnTo>
+                    <a:pt x="4754224" y="2345153"/>
+                  </a:lnTo>
+                  <a:lnTo>
+                    <a:pt x="4830692" y="2339781"/>
+                  </a:lnTo>
+                  <a:lnTo>
+                    <a:pt x="4907161" y="2334376"/>
+                  </a:lnTo>
+                  <a:lnTo>
+                    <a:pt x="4983629" y="2328939"/>
+                  </a:lnTo>
+                  <a:lnTo>
+                    <a:pt x="5060097" y="2323471"/>
+                  </a:lnTo>
+                  <a:lnTo>
+                    <a:pt x="5136566" y="2317969"/>
+                  </a:lnTo>
+                  <a:lnTo>
+                    <a:pt x="5213034" y="2312435"/>
+                  </a:lnTo>
+                  <a:lnTo>
+                    <a:pt x="5289503" y="2306868"/>
+                  </a:lnTo>
+                  <a:lnTo>
+                    <a:pt x="5365971" y="2301268"/>
+                  </a:lnTo>
+                  <a:lnTo>
+                    <a:pt x="5442440" y="2295634"/>
+                  </a:lnTo>
+                  <a:lnTo>
+                    <a:pt x="5518908" y="2289967"/>
+                  </a:lnTo>
+                  <a:lnTo>
+                    <a:pt x="5595376" y="2284267"/>
+                  </a:lnTo>
+                  <a:lnTo>
+                    <a:pt x="5671845" y="2278532"/>
+                  </a:lnTo>
+                  <a:lnTo>
+                    <a:pt x="5748313" y="2272764"/>
+                  </a:lnTo>
+                  <a:lnTo>
+                    <a:pt x="5824782" y="2266961"/>
+                  </a:lnTo>
+                  <a:lnTo>
+                    <a:pt x="5901250" y="2261124"/>
+                  </a:lnTo>
+                  <a:lnTo>
+                    <a:pt x="5977719" y="2255252"/>
+                  </a:lnTo>
+                  <a:lnTo>
+                    <a:pt x="6054187" y="2249345"/>
+                  </a:lnTo>
+                  <a:lnTo>
+                    <a:pt x="6130655" y="2243403"/>
+                  </a:lnTo>
+                  <a:lnTo>
+                    <a:pt x="6207124" y="2237426"/>
+                  </a:lnTo>
+                  <a:lnTo>
+                    <a:pt x="6283592" y="2231414"/>
+                  </a:lnTo>
+                  <a:lnTo>
+                    <a:pt x="6360061" y="2225365"/>
+                  </a:lnTo>
+                  <a:lnTo>
+                    <a:pt x="6436529" y="2219281"/>
+                  </a:lnTo>
+                  <a:lnTo>
+                    <a:pt x="6512998" y="2213160"/>
+                  </a:lnTo>
+                  <a:lnTo>
+                    <a:pt x="6589466" y="2207003"/>
+                  </a:lnTo>
+                  <a:lnTo>
+                    <a:pt x="6665934" y="2200810"/>
                   </a:lnTo>
                 </a:path>
               </a:pathLst>
@@ -3880,300 +3880,300 @@
           </p:nvSpPr>
           <p:spPr>
             <a:xfrm>
-              <a:off x="817517" y="4731080"/>
-              <a:ext cx="7370972" cy="719905"/>
+              <a:off x="915645" y="4687981"/>
+              <a:ext cx="7260303" cy="671479"/>
             </a:xfrm>
             <a:custGeom>
               <a:avLst/>
               <a:pathLst>
-                <a:path w="7370972" h="719905">
+                <a:path w="7260303" h="671479">
                   <a:moveTo>
-                    <a:pt x="7370972" y="719905"/>
+                    <a:pt x="7260303" y="671479"/>
                   </a:moveTo>
                   <a:lnTo>
-                    <a:pt x="7293338" y="715564"/>
-                  </a:lnTo>
-                  <a:lnTo>
-                    <a:pt x="7215704" y="711046"/>
-                  </a:lnTo>
-                  <a:lnTo>
-                    <a:pt x="7138070" y="706344"/>
-                  </a:lnTo>
-                  <a:lnTo>
-                    <a:pt x="7060436" y="701450"/>
-                  </a:lnTo>
-                  <a:lnTo>
-                    <a:pt x="6982802" y="696356"/>
-                  </a:lnTo>
-                  <a:lnTo>
-                    <a:pt x="6905168" y="691053"/>
-                  </a:lnTo>
-                  <a:lnTo>
-                    <a:pt x="6827534" y="685534"/>
-                  </a:lnTo>
-                  <a:lnTo>
-                    <a:pt x="6749900" y="679790"/>
-                  </a:lnTo>
-                  <a:lnTo>
-                    <a:pt x="6672266" y="673811"/>
-                  </a:lnTo>
-                  <a:lnTo>
-                    <a:pt x="6594632" y="667588"/>
-                  </a:lnTo>
-                  <a:lnTo>
-                    <a:pt x="6516998" y="661111"/>
-                  </a:lnTo>
-                  <a:lnTo>
-                    <a:pt x="6439364" y="654369"/>
-                  </a:lnTo>
-                  <a:lnTo>
-                    <a:pt x="6361730" y="647352"/>
-                  </a:lnTo>
-                  <a:lnTo>
-                    <a:pt x="6284096" y="640048"/>
-                  </a:lnTo>
-                  <a:lnTo>
-                    <a:pt x="6206462" y="632445"/>
-                  </a:lnTo>
-                  <a:lnTo>
-                    <a:pt x="6128827" y="624533"/>
-                  </a:lnTo>
-                  <a:lnTo>
-                    <a:pt x="6051193" y="616297"/>
-                  </a:lnTo>
-                  <a:lnTo>
-                    <a:pt x="5973559" y="607724"/>
-                  </a:lnTo>
-                  <a:lnTo>
-                    <a:pt x="5895925" y="598802"/>
-                  </a:lnTo>
-                  <a:lnTo>
-                    <a:pt x="5818291" y="589515"/>
-                  </a:lnTo>
-                  <a:lnTo>
-                    <a:pt x="5740657" y="579848"/>
-                  </a:lnTo>
-                  <a:lnTo>
-                    <a:pt x="5663023" y="569787"/>
-                  </a:lnTo>
-                  <a:lnTo>
-                    <a:pt x="5585389" y="559315"/>
-                  </a:lnTo>
-                  <a:lnTo>
-                    <a:pt x="5507755" y="548415"/>
-                  </a:lnTo>
-                  <a:lnTo>
-                    <a:pt x="5430121" y="537070"/>
-                  </a:lnTo>
-                  <a:lnTo>
-                    <a:pt x="5352487" y="525262"/>
-                  </a:lnTo>
-                  <a:lnTo>
-                    <a:pt x="5274853" y="512971"/>
-                  </a:lnTo>
-                  <a:lnTo>
-                    <a:pt x="5197219" y="500178"/>
-                  </a:lnTo>
-                  <a:lnTo>
-                    <a:pt x="5119585" y="486863"/>
-                  </a:lnTo>
-                  <a:lnTo>
-                    <a:pt x="5041951" y="473004"/>
-                  </a:lnTo>
-                  <a:lnTo>
-                    <a:pt x="4964317" y="458579"/>
-                  </a:lnTo>
-                  <a:lnTo>
-                    <a:pt x="4886683" y="443564"/>
-                  </a:lnTo>
-                  <a:lnTo>
-                    <a:pt x="4809049" y="427937"/>
-                  </a:lnTo>
-                  <a:lnTo>
-                    <a:pt x="4731415" y="411670"/>
-                  </a:lnTo>
-                  <a:lnTo>
-                    <a:pt x="4653781" y="394740"/>
-                  </a:lnTo>
-                  <a:lnTo>
-                    <a:pt x="4576147" y="377118"/>
-                  </a:lnTo>
-                  <a:lnTo>
-                    <a:pt x="4498513" y="358776"/>
-                  </a:lnTo>
-                  <a:lnTo>
-                    <a:pt x="4420879" y="339685"/>
-                  </a:lnTo>
-                  <a:lnTo>
-                    <a:pt x="4343244" y="319814"/>
-                  </a:lnTo>
-                  <a:lnTo>
-                    <a:pt x="4265610" y="299132"/>
-                  </a:lnTo>
-                  <a:lnTo>
-                    <a:pt x="4187976" y="277605"/>
-                  </a:lnTo>
-                  <a:lnTo>
-                    <a:pt x="4110342" y="255198"/>
-                  </a:lnTo>
-                  <a:lnTo>
-                    <a:pt x="4032708" y="231877"/>
-                  </a:lnTo>
-                  <a:lnTo>
-                    <a:pt x="3955074" y="207602"/>
-                  </a:lnTo>
-                  <a:lnTo>
-                    <a:pt x="3877440" y="182337"/>
-                  </a:lnTo>
-                  <a:lnTo>
-                    <a:pt x="3799806" y="156039"/>
-                  </a:lnTo>
-                  <a:lnTo>
-                    <a:pt x="3722172" y="128667"/>
-                  </a:lnTo>
-                  <a:lnTo>
-                    <a:pt x="3644538" y="100177"/>
-                  </a:lnTo>
-                  <a:lnTo>
-                    <a:pt x="3566904" y="70523"/>
-                  </a:lnTo>
-                  <a:lnTo>
-                    <a:pt x="3489270" y="39658"/>
-                  </a:lnTo>
-                  <a:lnTo>
-                    <a:pt x="3411636" y="7533"/>
-                  </a:lnTo>
-                  <a:lnTo>
-                    <a:pt x="3334002" y="0"/>
-                  </a:lnTo>
-                  <a:lnTo>
-                    <a:pt x="3256368" y="4879"/>
-                  </a:lnTo>
-                  <a:lnTo>
-                    <a:pt x="3178734" y="9730"/>
-                  </a:lnTo>
-                  <a:lnTo>
-                    <a:pt x="3101100" y="14552"/>
-                  </a:lnTo>
-                  <a:lnTo>
-                    <a:pt x="3023466" y="19346"/>
-                  </a:lnTo>
-                  <a:lnTo>
-                    <a:pt x="2945832" y="24112"/>
-                  </a:lnTo>
-                  <a:lnTo>
-                    <a:pt x="2868198" y="28849"/>
-                  </a:lnTo>
-                  <a:lnTo>
-                    <a:pt x="2790564" y="33558"/>
-                  </a:lnTo>
-                  <a:lnTo>
-                    <a:pt x="2712930" y="38240"/>
-                  </a:lnTo>
-                  <a:lnTo>
-                    <a:pt x="2635295" y="42893"/>
-                  </a:lnTo>
-                  <a:lnTo>
-                    <a:pt x="2557661" y="47520"/>
-                  </a:lnTo>
-                  <a:lnTo>
-                    <a:pt x="2480027" y="52119"/>
-                  </a:lnTo>
-                  <a:lnTo>
-                    <a:pt x="2402393" y="56691"/>
-                  </a:lnTo>
-                  <a:lnTo>
-                    <a:pt x="2324759" y="61236"/>
-                  </a:lnTo>
-                  <a:lnTo>
-                    <a:pt x="2247125" y="65754"/>
-                  </a:lnTo>
-                  <a:lnTo>
-                    <a:pt x="2169491" y="70245"/>
-                  </a:lnTo>
-                  <a:lnTo>
-                    <a:pt x="2091857" y="74710"/>
-                  </a:lnTo>
-                  <a:lnTo>
-                    <a:pt x="2014223" y="79148"/>
-                  </a:lnTo>
-                  <a:lnTo>
-                    <a:pt x="1936589" y="83560"/>
-                  </a:lnTo>
-                  <a:lnTo>
-                    <a:pt x="1858955" y="87947"/>
-                  </a:lnTo>
-                  <a:lnTo>
-                    <a:pt x="1781321" y="92307"/>
-                  </a:lnTo>
-                  <a:lnTo>
-                    <a:pt x="1703687" y="96641"/>
-                  </a:lnTo>
-                  <a:lnTo>
-                    <a:pt x="1626053" y="100950"/>
-                  </a:lnTo>
-                  <a:lnTo>
-                    <a:pt x="1548419" y="105234"/>
-                  </a:lnTo>
-                  <a:lnTo>
-                    <a:pt x="1470785" y="109492"/>
-                  </a:lnTo>
-                  <a:lnTo>
-                    <a:pt x="1393151" y="113725"/>
-                  </a:lnTo>
-                  <a:lnTo>
-                    <a:pt x="1315517" y="117933"/>
-                  </a:lnTo>
-                  <a:lnTo>
-                    <a:pt x="1237883" y="122116"/>
-                  </a:lnTo>
-                  <a:lnTo>
-                    <a:pt x="1160249" y="126274"/>
-                  </a:lnTo>
-                  <a:lnTo>
-                    <a:pt x="1082615" y="130408"/>
-                  </a:lnTo>
-                  <a:lnTo>
-                    <a:pt x="1004981" y="134518"/>
-                  </a:lnTo>
-                  <a:lnTo>
-                    <a:pt x="927346" y="138603"/>
-                  </a:lnTo>
-                  <a:lnTo>
-                    <a:pt x="849712" y="142664"/>
-                  </a:lnTo>
-                  <a:lnTo>
-                    <a:pt x="772078" y="146701"/>
-                  </a:lnTo>
-                  <a:lnTo>
-                    <a:pt x="694444" y="150714"/>
-                  </a:lnTo>
-                  <a:lnTo>
-                    <a:pt x="616810" y="154704"/>
-                  </a:lnTo>
-                  <a:lnTo>
-                    <a:pt x="539176" y="158670"/>
-                  </a:lnTo>
-                  <a:lnTo>
-                    <a:pt x="461542" y="162612"/>
-                  </a:lnTo>
-                  <a:lnTo>
-                    <a:pt x="383908" y="166532"/>
-                  </a:lnTo>
-                  <a:lnTo>
-                    <a:pt x="306274" y="170428"/>
-                  </a:lnTo>
-                  <a:lnTo>
-                    <a:pt x="228640" y="174301"/>
-                  </a:lnTo>
-                  <a:lnTo>
-                    <a:pt x="151006" y="178151"/>
-                  </a:lnTo>
-                  <a:lnTo>
-                    <a:pt x="73372" y="181979"/>
-                  </a:lnTo>
-                  <a:lnTo>
-                    <a:pt x="0" y="185575"/>
+                    <a:pt x="7183835" y="667431"/>
+                  </a:lnTo>
+                  <a:lnTo>
+                    <a:pt x="7107366" y="663217"/>
+                  </a:lnTo>
+                  <a:lnTo>
+                    <a:pt x="7030898" y="658831"/>
+                  </a:lnTo>
+                  <a:lnTo>
+                    <a:pt x="6954429" y="654266"/>
+                  </a:lnTo>
+                  <a:lnTo>
+                    <a:pt x="6877961" y="649514"/>
+                  </a:lnTo>
+                  <a:lnTo>
+                    <a:pt x="6801492" y="644569"/>
+                  </a:lnTo>
+                  <a:lnTo>
+                    <a:pt x="6725024" y="639421"/>
+                  </a:lnTo>
+                  <a:lnTo>
+                    <a:pt x="6648556" y="634063"/>
+                  </a:lnTo>
+                  <a:lnTo>
+                    <a:pt x="6572087" y="628486"/>
+                  </a:lnTo>
+                  <a:lnTo>
+                    <a:pt x="6495619" y="622682"/>
+                  </a:lnTo>
+                  <a:lnTo>
+                    <a:pt x="6419150" y="616640"/>
+                  </a:lnTo>
+                  <a:lnTo>
+                    <a:pt x="6342682" y="610352"/>
+                  </a:lnTo>
+                  <a:lnTo>
+                    <a:pt x="6266213" y="603807"/>
+                  </a:lnTo>
+                  <a:lnTo>
+                    <a:pt x="6189745" y="596994"/>
+                  </a:lnTo>
+                  <a:lnTo>
+                    <a:pt x="6113277" y="589903"/>
+                  </a:lnTo>
+                  <a:lnTo>
+                    <a:pt x="6036808" y="582523"/>
+                  </a:lnTo>
+                  <a:lnTo>
+                    <a:pt x="5960340" y="574841"/>
+                  </a:lnTo>
+                  <a:lnTo>
+                    <a:pt x="5883871" y="566845"/>
+                  </a:lnTo>
+                  <a:lnTo>
+                    <a:pt x="5807403" y="558522"/>
+                  </a:lnTo>
+                  <a:lnTo>
+                    <a:pt x="5730934" y="549860"/>
+                  </a:lnTo>
+                  <a:lnTo>
+                    <a:pt x="5654466" y="540844"/>
+                  </a:lnTo>
+                  <a:lnTo>
+                    <a:pt x="5577998" y="531460"/>
+                  </a:lnTo>
+                  <a:lnTo>
+                    <a:pt x="5501529" y="521692"/>
+                  </a:lnTo>
+                  <a:lnTo>
+                    <a:pt x="5425061" y="511526"/>
+                  </a:lnTo>
+                  <a:lnTo>
+                    <a:pt x="5348592" y="500944"/>
+                  </a:lnTo>
+                  <a:lnTo>
+                    <a:pt x="5272124" y="489930"/>
+                  </a:lnTo>
+                  <a:lnTo>
+                    <a:pt x="5195655" y="478466"/>
+                  </a:lnTo>
+                  <a:lnTo>
+                    <a:pt x="5119187" y="466533"/>
+                  </a:lnTo>
+                  <a:lnTo>
+                    <a:pt x="5042719" y="454114"/>
+                  </a:lnTo>
+                  <a:lnTo>
+                    <a:pt x="4966250" y="441187"/>
+                  </a:lnTo>
+                  <a:lnTo>
+                    <a:pt x="4889782" y="427732"/>
+                  </a:lnTo>
+                  <a:lnTo>
+                    <a:pt x="4813313" y="413727"/>
+                  </a:lnTo>
+                  <a:lnTo>
+                    <a:pt x="4736845" y="399151"/>
+                  </a:lnTo>
+                  <a:lnTo>
+                    <a:pt x="4660376" y="383979"/>
+                  </a:lnTo>
+                  <a:lnTo>
+                    <a:pt x="4583908" y="368187"/>
+                  </a:lnTo>
+                  <a:lnTo>
+                    <a:pt x="4507439" y="351751"/>
+                  </a:lnTo>
+                  <a:lnTo>
+                    <a:pt x="4430971" y="334643"/>
+                  </a:lnTo>
+                  <a:lnTo>
+                    <a:pt x="4354503" y="316836"/>
+                  </a:lnTo>
+                  <a:lnTo>
+                    <a:pt x="4278034" y="298302"/>
+                  </a:lnTo>
+                  <a:lnTo>
+                    <a:pt x="4201566" y="279010"/>
+                  </a:lnTo>
+                  <a:lnTo>
+                    <a:pt x="4125097" y="258931"/>
+                  </a:lnTo>
+                  <a:lnTo>
+                    <a:pt x="4048629" y="238032"/>
+                  </a:lnTo>
+                  <a:lnTo>
+                    <a:pt x="3972160" y="216279"/>
+                  </a:lnTo>
+                  <a:lnTo>
+                    <a:pt x="3895692" y="193638"/>
+                  </a:lnTo>
+                  <a:lnTo>
+                    <a:pt x="3819224" y="170071"/>
+                  </a:lnTo>
+                  <a:lnTo>
+                    <a:pt x="3742755" y="145543"/>
+                  </a:lnTo>
+                  <a:lnTo>
+                    <a:pt x="3666287" y="120012"/>
+                  </a:lnTo>
+                  <a:lnTo>
+                    <a:pt x="3589818" y="93438"/>
+                  </a:lnTo>
+                  <a:lnTo>
+                    <a:pt x="3513350" y="65779"/>
+                  </a:lnTo>
+                  <a:lnTo>
+                    <a:pt x="3436881" y="36991"/>
+                  </a:lnTo>
+                  <a:lnTo>
+                    <a:pt x="3360413" y="7026"/>
+                  </a:lnTo>
+                  <a:lnTo>
+                    <a:pt x="3283945" y="0"/>
+                  </a:lnTo>
+                  <a:lnTo>
+                    <a:pt x="3207476" y="4551"/>
+                  </a:lnTo>
+                  <a:lnTo>
+                    <a:pt x="3131008" y="9076"/>
+                  </a:lnTo>
+                  <a:lnTo>
+                    <a:pt x="3054539" y="13573"/>
+                  </a:lnTo>
+                  <a:lnTo>
+                    <a:pt x="2978071" y="18045"/>
+                  </a:lnTo>
+                  <a:lnTo>
+                    <a:pt x="2901602" y="22490"/>
+                  </a:lnTo>
+                  <a:lnTo>
+                    <a:pt x="2825134" y="26908"/>
+                  </a:lnTo>
+                  <a:lnTo>
+                    <a:pt x="2748666" y="31301"/>
+                  </a:lnTo>
+                  <a:lnTo>
+                    <a:pt x="2672197" y="35667"/>
+                  </a:lnTo>
+                  <a:lnTo>
+                    <a:pt x="2595729" y="40008"/>
+                  </a:lnTo>
+                  <a:lnTo>
+                    <a:pt x="2519260" y="44323"/>
+                  </a:lnTo>
+                  <a:lnTo>
+                    <a:pt x="2442792" y="48613"/>
+                  </a:lnTo>
+                  <a:lnTo>
+                    <a:pt x="2366323" y="52877"/>
+                  </a:lnTo>
+                  <a:lnTo>
+                    <a:pt x="2289855" y="57117"/>
+                  </a:lnTo>
+                  <a:lnTo>
+                    <a:pt x="2213386" y="61331"/>
+                  </a:lnTo>
+                  <a:lnTo>
+                    <a:pt x="2136918" y="65520"/>
+                  </a:lnTo>
+                  <a:lnTo>
+                    <a:pt x="2060450" y="69684"/>
+                  </a:lnTo>
+                  <a:lnTo>
+                    <a:pt x="1983981" y="73824"/>
+                  </a:lnTo>
+                  <a:lnTo>
+                    <a:pt x="1907513" y="77940"/>
+                  </a:lnTo>
+                  <a:lnTo>
+                    <a:pt x="1831044" y="82031"/>
+                  </a:lnTo>
+                  <a:lnTo>
+                    <a:pt x="1754576" y="86098"/>
+                  </a:lnTo>
+                  <a:lnTo>
+                    <a:pt x="1678107" y="90141"/>
+                  </a:lnTo>
+                  <a:lnTo>
+                    <a:pt x="1601639" y="94160"/>
+                  </a:lnTo>
+                  <a:lnTo>
+                    <a:pt x="1525171" y="98155"/>
+                  </a:lnTo>
+                  <a:lnTo>
+                    <a:pt x="1448702" y="102127"/>
+                  </a:lnTo>
+                  <a:lnTo>
+                    <a:pt x="1372234" y="106075"/>
+                  </a:lnTo>
+                  <a:lnTo>
+                    <a:pt x="1295765" y="110000"/>
+                  </a:lnTo>
+                  <a:lnTo>
+                    <a:pt x="1219297" y="113902"/>
+                  </a:lnTo>
+                  <a:lnTo>
+                    <a:pt x="1142828" y="117780"/>
+                  </a:lnTo>
+                  <a:lnTo>
+                    <a:pt x="1066360" y="121636"/>
+                  </a:lnTo>
+                  <a:lnTo>
+                    <a:pt x="989892" y="125469"/>
+                  </a:lnTo>
+                  <a:lnTo>
+                    <a:pt x="913423" y="129280"/>
+                  </a:lnTo>
+                  <a:lnTo>
+                    <a:pt x="836955" y="133068"/>
+                  </a:lnTo>
+                  <a:lnTo>
+                    <a:pt x="760486" y="136833"/>
+                  </a:lnTo>
+                  <a:lnTo>
+                    <a:pt x="684018" y="140576"/>
+                  </a:lnTo>
+                  <a:lnTo>
+                    <a:pt x="607549" y="144298"/>
+                  </a:lnTo>
+                  <a:lnTo>
+                    <a:pt x="531081" y="147997"/>
+                  </a:lnTo>
+                  <a:lnTo>
+                    <a:pt x="454613" y="151674"/>
+                  </a:lnTo>
+                  <a:lnTo>
+                    <a:pt x="378144" y="155330"/>
+                  </a:lnTo>
+                  <a:lnTo>
+                    <a:pt x="301676" y="158964"/>
+                  </a:lnTo>
+                  <a:lnTo>
+                    <a:pt x="225207" y="162576"/>
+                  </a:lnTo>
+                  <a:lnTo>
+                    <a:pt x="148739" y="166167"/>
+                  </a:lnTo>
+                  <a:lnTo>
+                    <a:pt x="72270" y="169737"/>
+                  </a:lnTo>
+                  <a:lnTo>
+                    <a:pt x="0" y="173092"/>
                   </a:lnTo>
                 </a:path>
               </a:pathLst>
@@ -4193,300 +4193,300 @@
           </p:nvSpPr>
           <p:spPr>
             <a:xfrm>
-              <a:off x="817517" y="3811980"/>
-              <a:ext cx="7370972" cy="1399633"/>
+              <a:off x="915645" y="3830705"/>
+              <a:ext cx="7260303" cy="1305485"/>
             </a:xfrm>
             <a:custGeom>
               <a:avLst/>
               <a:pathLst>
-                <a:path w="7370972" h="1399633">
+                <a:path w="7260303" h="1305485">
                   <a:moveTo>
                     <a:pt x="0" y="0"/>
                   </a:moveTo>
                   <a:lnTo>
-                    <a:pt x="73372" y="27918"/>
-                  </a:lnTo>
-                  <a:lnTo>
-                    <a:pt x="151006" y="56959"/>
-                  </a:lnTo>
-                  <a:lnTo>
-                    <a:pt x="228640" y="85509"/>
-                  </a:lnTo>
-                  <a:lnTo>
-                    <a:pt x="306274" y="113576"/>
-                  </a:lnTo>
-                  <a:lnTo>
-                    <a:pt x="383908" y="141168"/>
-                  </a:lnTo>
-                  <a:lnTo>
-                    <a:pt x="461542" y="168293"/>
-                  </a:lnTo>
-                  <a:lnTo>
-                    <a:pt x="539176" y="194960"/>
-                  </a:lnTo>
-                  <a:lnTo>
-                    <a:pt x="616810" y="221176"/>
-                  </a:lnTo>
-                  <a:lnTo>
-                    <a:pt x="694444" y="246949"/>
-                  </a:lnTo>
-                  <a:lnTo>
-                    <a:pt x="772078" y="272286"/>
-                  </a:lnTo>
-                  <a:lnTo>
-                    <a:pt x="849712" y="297195"/>
-                  </a:lnTo>
-                  <a:lnTo>
-                    <a:pt x="927346" y="321682"/>
-                  </a:lnTo>
-                  <a:lnTo>
-                    <a:pt x="1004981" y="345755"/>
-                  </a:lnTo>
-                  <a:lnTo>
-                    <a:pt x="1082615" y="369421"/>
-                  </a:lnTo>
-                  <a:lnTo>
-                    <a:pt x="1160249" y="392687"/>
-                  </a:lnTo>
-                  <a:lnTo>
-                    <a:pt x="1237883" y="415559"/>
-                  </a:lnTo>
-                  <a:lnTo>
-                    <a:pt x="1315517" y="438045"/>
-                  </a:lnTo>
-                  <a:lnTo>
-                    <a:pt x="1393151" y="460150"/>
-                  </a:lnTo>
-                  <a:lnTo>
-                    <a:pt x="1470785" y="481882"/>
-                  </a:lnTo>
-                  <a:lnTo>
-                    <a:pt x="1548419" y="503246"/>
-                  </a:lnTo>
-                  <a:lnTo>
-                    <a:pt x="1626053" y="524249"/>
-                  </a:lnTo>
-                  <a:lnTo>
-                    <a:pt x="1703687" y="544897"/>
-                  </a:lnTo>
-                  <a:lnTo>
-                    <a:pt x="1781321" y="565195"/>
-                  </a:lnTo>
-                  <a:lnTo>
-                    <a:pt x="1858955" y="585150"/>
-                  </a:lnTo>
-                  <a:lnTo>
-                    <a:pt x="1936589" y="604768"/>
-                  </a:lnTo>
-                  <a:lnTo>
-                    <a:pt x="2014223" y="624054"/>
-                  </a:lnTo>
-                  <a:lnTo>
-                    <a:pt x="2091857" y="643014"/>
-                  </a:lnTo>
-                  <a:lnTo>
-                    <a:pt x="2169491" y="661654"/>
-                  </a:lnTo>
-                  <a:lnTo>
-                    <a:pt x="2247125" y="679978"/>
-                  </a:lnTo>
-                  <a:lnTo>
-                    <a:pt x="2324759" y="697992"/>
-                  </a:lnTo>
-                  <a:lnTo>
-                    <a:pt x="2402393" y="715702"/>
-                  </a:lnTo>
-                  <a:lnTo>
-                    <a:pt x="2480027" y="733112"/>
-                  </a:lnTo>
-                  <a:lnTo>
-                    <a:pt x="2557661" y="750228"/>
-                  </a:lnTo>
-                  <a:lnTo>
-                    <a:pt x="2635295" y="767054"/>
-                  </a:lnTo>
-                  <a:lnTo>
-                    <a:pt x="2712930" y="783596"/>
-                  </a:lnTo>
-                  <a:lnTo>
-                    <a:pt x="2790564" y="799858"/>
-                  </a:lnTo>
-                  <a:lnTo>
-                    <a:pt x="2868198" y="815845"/>
-                  </a:lnTo>
-                  <a:lnTo>
-                    <a:pt x="2945832" y="831562"/>
-                  </a:lnTo>
-                  <a:lnTo>
-                    <a:pt x="3023466" y="847013"/>
-                  </a:lnTo>
-                  <a:lnTo>
-                    <a:pt x="3101100" y="862203"/>
-                  </a:lnTo>
-                  <a:lnTo>
-                    <a:pt x="3178734" y="877135"/>
-                  </a:lnTo>
-                  <a:lnTo>
-                    <a:pt x="3256368" y="891816"/>
-                  </a:lnTo>
-                  <a:lnTo>
-                    <a:pt x="3334002" y="906248"/>
-                  </a:lnTo>
-                  <a:lnTo>
-                    <a:pt x="3411636" y="920436"/>
-                  </a:lnTo>
-                  <a:lnTo>
-                    <a:pt x="3489270" y="934384"/>
-                  </a:lnTo>
-                  <a:lnTo>
-                    <a:pt x="3566904" y="948096"/>
-                  </a:lnTo>
-                  <a:lnTo>
-                    <a:pt x="3644538" y="961576"/>
-                  </a:lnTo>
-                  <a:lnTo>
-                    <a:pt x="3722172" y="974829"/>
-                  </a:lnTo>
-                  <a:lnTo>
-                    <a:pt x="3799806" y="987857"/>
-                  </a:lnTo>
-                  <a:lnTo>
-                    <a:pt x="3877440" y="1000665"/>
-                  </a:lnTo>
-                  <a:lnTo>
-                    <a:pt x="3955074" y="1013257"/>
-                  </a:lnTo>
-                  <a:lnTo>
-                    <a:pt x="4032708" y="1025635"/>
-                  </a:lnTo>
-                  <a:lnTo>
-                    <a:pt x="4110342" y="1037804"/>
-                  </a:lnTo>
-                  <a:lnTo>
-                    <a:pt x="4187976" y="1049768"/>
-                  </a:lnTo>
-                  <a:lnTo>
-                    <a:pt x="4265610" y="1061529"/>
-                  </a:lnTo>
-                  <a:lnTo>
-                    <a:pt x="4343244" y="1073091"/>
-                  </a:lnTo>
-                  <a:lnTo>
-                    <a:pt x="4420879" y="1084457"/>
-                  </a:lnTo>
-                  <a:lnTo>
-                    <a:pt x="4498513" y="1095632"/>
-                  </a:lnTo>
-                  <a:lnTo>
-                    <a:pt x="4576147" y="1106617"/>
-                  </a:lnTo>
-                  <a:lnTo>
-                    <a:pt x="4653781" y="1117417"/>
-                  </a:lnTo>
-                  <a:lnTo>
-                    <a:pt x="4731415" y="1128034"/>
-                  </a:lnTo>
-                  <a:lnTo>
-                    <a:pt x="4809049" y="1138472"/>
-                  </a:lnTo>
-                  <a:lnTo>
-                    <a:pt x="4886683" y="1148733"/>
-                  </a:lnTo>
-                  <a:lnTo>
-                    <a:pt x="4964317" y="1158820"/>
-                  </a:lnTo>
-                  <a:lnTo>
-                    <a:pt x="5041951" y="1168737"/>
-                  </a:lnTo>
-                  <a:lnTo>
-                    <a:pt x="5119585" y="1178487"/>
-                  </a:lnTo>
-                  <a:lnTo>
-                    <a:pt x="5197219" y="1188071"/>
-                  </a:lnTo>
-                  <a:lnTo>
-                    <a:pt x="5274853" y="1197493"/>
-                  </a:lnTo>
-                  <a:lnTo>
-                    <a:pt x="5352487" y="1206756"/>
-                  </a:lnTo>
-                  <a:lnTo>
-                    <a:pt x="5430121" y="1215863"/>
-                  </a:lnTo>
-                  <a:lnTo>
-                    <a:pt x="5507755" y="1224815"/>
-                  </a:lnTo>
-                  <a:lnTo>
-                    <a:pt x="5585389" y="1233616"/>
-                  </a:lnTo>
-                  <a:lnTo>
-                    <a:pt x="5663023" y="1242268"/>
-                  </a:lnTo>
-                  <a:lnTo>
-                    <a:pt x="5740657" y="1250774"/>
-                  </a:lnTo>
-                  <a:lnTo>
-                    <a:pt x="5818291" y="1259136"/>
-                  </a:lnTo>
-                  <a:lnTo>
-                    <a:pt x="5895925" y="1267357"/>
-                  </a:lnTo>
-                  <a:lnTo>
-                    <a:pt x="5973559" y="1275438"/>
-                  </a:lnTo>
-                  <a:lnTo>
-                    <a:pt x="6051193" y="1283383"/>
-                  </a:lnTo>
-                  <a:lnTo>
-                    <a:pt x="6128827" y="1291194"/>
-                  </a:lnTo>
-                  <a:lnTo>
-                    <a:pt x="6206462" y="1298872"/>
-                  </a:lnTo>
-                  <a:lnTo>
-                    <a:pt x="6284096" y="1306421"/>
-                  </a:lnTo>
-                  <a:lnTo>
-                    <a:pt x="6361730" y="1313842"/>
-                  </a:lnTo>
-                  <a:lnTo>
-                    <a:pt x="6439364" y="1321138"/>
-                  </a:lnTo>
-                  <a:lnTo>
-                    <a:pt x="6516998" y="1328310"/>
-                  </a:lnTo>
-                  <a:lnTo>
-                    <a:pt x="6594632" y="1335361"/>
-                  </a:lnTo>
-                  <a:lnTo>
-                    <a:pt x="6672266" y="1342292"/>
-                  </a:lnTo>
-                  <a:lnTo>
-                    <a:pt x="6749900" y="1349107"/>
-                  </a:lnTo>
-                  <a:lnTo>
-                    <a:pt x="6827534" y="1355806"/>
-                  </a:lnTo>
-                  <a:lnTo>
-                    <a:pt x="6905168" y="1362392"/>
-                  </a:lnTo>
-                  <a:lnTo>
-                    <a:pt x="6982802" y="1368866"/>
-                  </a:lnTo>
-                  <a:lnTo>
-                    <a:pt x="7060436" y="1375231"/>
-                  </a:lnTo>
-                  <a:lnTo>
-                    <a:pt x="7138070" y="1381489"/>
-                  </a:lnTo>
-                  <a:lnTo>
-                    <a:pt x="7215704" y="1387640"/>
-                  </a:lnTo>
-                  <a:lnTo>
-                    <a:pt x="7293338" y="1393688"/>
-                  </a:lnTo>
-                  <a:lnTo>
-                    <a:pt x="7370972" y="1399633"/>
+                    <a:pt x="72270" y="26040"/>
+                  </a:lnTo>
+                  <a:lnTo>
+                    <a:pt x="148739" y="53128"/>
+                  </a:lnTo>
+                  <a:lnTo>
+                    <a:pt x="225207" y="79757"/>
+                  </a:lnTo>
+                  <a:lnTo>
+                    <a:pt x="301676" y="105936"/>
+                  </a:lnTo>
+                  <a:lnTo>
+                    <a:pt x="378144" y="131672"/>
+                  </a:lnTo>
+                  <a:lnTo>
+                    <a:pt x="454613" y="156973"/>
+                  </a:lnTo>
+                  <a:lnTo>
+                    <a:pt x="531081" y="181846"/>
+                  </a:lnTo>
+                  <a:lnTo>
+                    <a:pt x="607549" y="206299"/>
+                  </a:lnTo>
+                  <a:lnTo>
+                    <a:pt x="684018" y="230338"/>
+                  </a:lnTo>
+                  <a:lnTo>
+                    <a:pt x="760486" y="253970"/>
+                  </a:lnTo>
+                  <a:lnTo>
+                    <a:pt x="836955" y="277203"/>
+                  </a:lnTo>
+                  <a:lnTo>
+                    <a:pt x="913423" y="300043"/>
+                  </a:lnTo>
+                  <a:lnTo>
+                    <a:pt x="989892" y="322497"/>
+                  </a:lnTo>
+                  <a:lnTo>
+                    <a:pt x="1066360" y="344571"/>
+                  </a:lnTo>
+                  <a:lnTo>
+                    <a:pt x="1142828" y="366272"/>
+                  </a:lnTo>
+                  <a:lnTo>
+                    <a:pt x="1219297" y="387606"/>
+                  </a:lnTo>
+                  <a:lnTo>
+                    <a:pt x="1295765" y="408579"/>
+                  </a:lnTo>
+                  <a:lnTo>
+                    <a:pt x="1372234" y="429198"/>
+                  </a:lnTo>
+                  <a:lnTo>
+                    <a:pt x="1448702" y="449467"/>
+                  </a:lnTo>
+                  <a:lnTo>
+                    <a:pt x="1525171" y="469395"/>
+                  </a:lnTo>
+                  <a:lnTo>
+                    <a:pt x="1601639" y="488985"/>
+                  </a:lnTo>
+                  <a:lnTo>
+                    <a:pt x="1678107" y="508243"/>
+                  </a:lnTo>
+                  <a:lnTo>
+                    <a:pt x="1754576" y="527177"/>
+                  </a:lnTo>
+                  <a:lnTo>
+                    <a:pt x="1831044" y="545790"/>
+                  </a:lnTo>
+                  <a:lnTo>
+                    <a:pt x="1907513" y="564088"/>
+                  </a:lnTo>
+                  <a:lnTo>
+                    <a:pt x="1983981" y="582077"/>
+                  </a:lnTo>
+                  <a:lnTo>
+                    <a:pt x="2060450" y="599761"/>
+                  </a:lnTo>
+                  <a:lnTo>
+                    <a:pt x="2136918" y="617147"/>
+                  </a:lnTo>
+                  <a:lnTo>
+                    <a:pt x="2213386" y="634238"/>
+                  </a:lnTo>
+                  <a:lnTo>
+                    <a:pt x="2289855" y="651041"/>
+                  </a:lnTo>
+                  <a:lnTo>
+                    <a:pt x="2366323" y="667559"/>
+                  </a:lnTo>
+                  <a:lnTo>
+                    <a:pt x="2442792" y="683798"/>
+                  </a:lnTo>
+                  <a:lnTo>
+                    <a:pt x="2519260" y="699763"/>
+                  </a:lnTo>
+                  <a:lnTo>
+                    <a:pt x="2595729" y="715457"/>
+                  </a:lnTo>
+                  <a:lnTo>
+                    <a:pt x="2672197" y="730886"/>
+                  </a:lnTo>
+                  <a:lnTo>
+                    <a:pt x="2748666" y="746054"/>
+                  </a:lnTo>
+                  <a:lnTo>
+                    <a:pt x="2825134" y="760966"/>
+                  </a:lnTo>
+                  <a:lnTo>
+                    <a:pt x="2901602" y="775626"/>
+                  </a:lnTo>
+                  <a:lnTo>
+                    <a:pt x="2978071" y="790037"/>
+                  </a:lnTo>
+                  <a:lnTo>
+                    <a:pt x="3054539" y="804205"/>
+                  </a:lnTo>
+                  <a:lnTo>
+                    <a:pt x="3131008" y="818134"/>
+                  </a:lnTo>
+                  <a:lnTo>
+                    <a:pt x="3207476" y="831826"/>
+                  </a:lnTo>
+                  <a:lnTo>
+                    <a:pt x="3283945" y="845288"/>
+                  </a:lnTo>
+                  <a:lnTo>
+                    <a:pt x="3360413" y="858521"/>
+                  </a:lnTo>
+                  <a:lnTo>
+                    <a:pt x="3436881" y="871531"/>
+                  </a:lnTo>
+                  <a:lnTo>
+                    <a:pt x="3513350" y="884321"/>
+                  </a:lnTo>
+                  <a:lnTo>
+                    <a:pt x="3589818" y="896895"/>
+                  </a:lnTo>
+                  <a:lnTo>
+                    <a:pt x="3666287" y="909256"/>
+                  </a:lnTo>
+                  <a:lnTo>
+                    <a:pt x="3742755" y="921408"/>
+                  </a:lnTo>
+                  <a:lnTo>
+                    <a:pt x="3819224" y="933354"/>
+                  </a:lnTo>
+                  <a:lnTo>
+                    <a:pt x="3895692" y="945098"/>
+                  </a:lnTo>
+                  <a:lnTo>
+                    <a:pt x="3972160" y="956644"/>
+                  </a:lnTo>
+                  <a:lnTo>
+                    <a:pt x="4048629" y="967995"/>
+                  </a:lnTo>
+                  <a:lnTo>
+                    <a:pt x="4125097" y="979154"/>
+                  </a:lnTo>
+                  <a:lnTo>
+                    <a:pt x="4201566" y="990123"/>
+                  </a:lnTo>
+                  <a:lnTo>
+                    <a:pt x="4278034" y="1000908"/>
+                  </a:lnTo>
+                  <a:lnTo>
+                    <a:pt x="4354503" y="1011510"/>
+                  </a:lnTo>
+                  <a:lnTo>
+                    <a:pt x="4430971" y="1021933"/>
+                  </a:lnTo>
+                  <a:lnTo>
+                    <a:pt x="4507439" y="1032179"/>
+                  </a:lnTo>
+                  <a:lnTo>
+                    <a:pt x="4583908" y="1042253"/>
+                  </a:lnTo>
+                  <a:lnTo>
+                    <a:pt x="4660376" y="1052156"/>
+                  </a:lnTo>
+                  <a:lnTo>
+                    <a:pt x="4736845" y="1061891"/>
+                  </a:lnTo>
+                  <a:lnTo>
+                    <a:pt x="4813313" y="1071462"/>
+                  </a:lnTo>
+                  <a:lnTo>
+                    <a:pt x="4889782" y="1080871"/>
+                  </a:lnTo>
+                  <a:lnTo>
+                    <a:pt x="4966250" y="1090121"/>
+                  </a:lnTo>
+                  <a:lnTo>
+                    <a:pt x="5042719" y="1099214"/>
+                  </a:lnTo>
+                  <a:lnTo>
+                    <a:pt x="5119187" y="1108154"/>
+                  </a:lnTo>
+                  <a:lnTo>
+                    <a:pt x="5195655" y="1116942"/>
+                  </a:lnTo>
+                  <a:lnTo>
+                    <a:pt x="5272124" y="1125582"/>
+                  </a:lnTo>
+                  <a:lnTo>
+                    <a:pt x="5348592" y="1134076"/>
+                  </a:lnTo>
+                  <a:lnTo>
+                    <a:pt x="5425061" y="1142426"/>
+                  </a:lnTo>
+                  <a:lnTo>
+                    <a:pt x="5501529" y="1150635"/>
+                  </a:lnTo>
+                  <a:lnTo>
+                    <a:pt x="5577998" y="1158705"/>
+                  </a:lnTo>
+                  <a:lnTo>
+                    <a:pt x="5654466" y="1166639"/>
+                  </a:lnTo>
+                  <a:lnTo>
+                    <a:pt x="5730934" y="1174439"/>
+                  </a:lnTo>
+                  <a:lnTo>
+                    <a:pt x="5807403" y="1182106"/>
+                  </a:lnTo>
+                  <a:lnTo>
+                    <a:pt x="5883871" y="1189644"/>
+                  </a:lnTo>
+                  <a:lnTo>
+                    <a:pt x="5960340" y="1197055"/>
+                  </a:lnTo>
+                  <a:lnTo>
+                    <a:pt x="6036808" y="1204340"/>
+                  </a:lnTo>
+                  <a:lnTo>
+                    <a:pt x="6113277" y="1211502"/>
+                  </a:lnTo>
+                  <a:lnTo>
+                    <a:pt x="6189745" y="1218543"/>
+                  </a:lnTo>
+                  <a:lnTo>
+                    <a:pt x="6266213" y="1225465"/>
+                  </a:lnTo>
+                  <a:lnTo>
+                    <a:pt x="6342682" y="1232269"/>
+                  </a:lnTo>
+                  <a:lnTo>
+                    <a:pt x="6419150" y="1238959"/>
+                  </a:lnTo>
+                  <a:lnTo>
+                    <a:pt x="6495619" y="1245536"/>
+                  </a:lnTo>
+                  <a:lnTo>
+                    <a:pt x="6572087" y="1252001"/>
+                  </a:lnTo>
+                  <a:lnTo>
+                    <a:pt x="6648556" y="1258357"/>
+                  </a:lnTo>
+                  <a:lnTo>
+                    <a:pt x="6725024" y="1264606"/>
+                  </a:lnTo>
+                  <a:lnTo>
+                    <a:pt x="6801492" y="1270749"/>
+                  </a:lnTo>
+                  <a:lnTo>
+                    <a:pt x="6877961" y="1276788"/>
+                  </a:lnTo>
+                  <a:lnTo>
+                    <a:pt x="6954429" y="1282724"/>
+                  </a:lnTo>
+                  <a:lnTo>
+                    <a:pt x="7030898" y="1288561"/>
+                  </a:lnTo>
+                  <a:lnTo>
+                    <a:pt x="7107366" y="1294299"/>
+                  </a:lnTo>
+                  <a:lnTo>
+                    <a:pt x="7183835" y="1299940"/>
+                  </a:lnTo>
+                  <a:lnTo>
+                    <a:pt x="7260303" y="1305485"/>
                   </a:lnTo>
                 </a:path>
               </a:pathLst>
@@ -4515,21 +4515,21 @@
           </p:nvSpPr>
           <p:spPr>
             <a:xfrm>
-              <a:off x="817517" y="4727786"/>
-              <a:ext cx="7799693" cy="0"/>
+              <a:off x="915645" y="4684908"/>
+              <a:ext cx="7682587" cy="0"/>
             </a:xfrm>
             <a:custGeom>
               <a:avLst/>
               <a:pathLst>
-                <a:path w="7799693" h="0">
+                <a:path w="7682587" h="0">
                   <a:moveTo>
                     <a:pt x="0" y="0"/>
                   </a:moveTo>
                   <a:lnTo>
-                    <a:pt x="7799693" y="0"/>
-                  </a:lnTo>
-                  <a:lnTo>
-                    <a:pt x="7799693" y="0"/>
+                    <a:pt x="7682587" y="0"/>
+                  </a:lnTo>
+                  <a:lnTo>
+                    <a:pt x="7682587" y="0"/>
                   </a:lnTo>
                 </a:path>
               </a:pathLst>
@@ -4558,15 +4558,15 @@
           </p:nvSpPr>
           <p:spPr>
             <a:xfrm>
-              <a:off x="4203673" y="2073503"/>
-              <a:ext cx="0" cy="3649639"/>
+              <a:off x="4250960" y="2209169"/>
+              <a:ext cx="0" cy="3404141"/>
             </a:xfrm>
             <a:custGeom>
               <a:avLst/>
               <a:pathLst>
-                <a:path w="0" h="3649639">
+                <a:path w="0" h="3404141">
                   <a:moveTo>
-                    <a:pt x="0" y="3649639"/>
+                    <a:pt x="0" y="3404141"/>
                   </a:moveTo>
                   <a:lnTo>
                     <a:pt x="0" y="0"/>
@@ -4601,8 +4601,8 @@
           </p:nvSpPr>
           <p:spPr>
             <a:xfrm>
-              <a:off x="692708" y="5517199"/>
-              <a:ext cx="62179" cy="80101"/>
+              <a:off x="756929" y="5407599"/>
+              <a:ext cx="79004" cy="101955"/>
             </a:xfrm>
             <a:prstGeom prst="rect">
               <a:avLst/>
@@ -4615,7 +4615,7 @@
             <a:p>
               <a:pPr algn="l" marL="0" marR="0" indent="0">
                 <a:lnSpc>
-                  <a:spcPts val="880"/>
+                  <a:spcPts val="1120"/>
                 </a:lnSpc>
                 <a:spcBef>
                   <a:spcPts val="0"/>
@@ -4625,7 +4625,7 @@
                 </a:spcAft>
               </a:pPr>
               <a:r>
-                <a:rPr sz="880">
+                <a:rPr sz="1120">
                   <a:solidFill>
                     <a:srgbClr val="4D4D4D">
                       <a:alpha val="100000"/>
@@ -4647,8 +4647,8 @@
           </p:nvSpPr>
           <p:spPr>
             <a:xfrm>
-              <a:off x="692708" y="4687735"/>
-              <a:ext cx="62179" cy="80101"/>
+              <a:off x="756929" y="4633931"/>
+              <a:ext cx="79004" cy="101955"/>
             </a:xfrm>
             <a:prstGeom prst="rect">
               <a:avLst/>
@@ -4661,7 +4661,7 @@
             <a:p>
               <a:pPr algn="l" marL="0" marR="0" indent="0">
                 <a:lnSpc>
-                  <a:spcPts val="880"/>
+                  <a:spcPts val="1120"/>
                 </a:lnSpc>
                 <a:spcBef>
                   <a:spcPts val="0"/>
@@ -4671,7 +4671,7 @@
                 </a:spcAft>
               </a:pPr>
               <a:r>
-                <a:rPr sz="880">
+                <a:rPr sz="1120">
                   <a:solidFill>
                     <a:srgbClr val="4D4D4D">
                       <a:alpha val="100000"/>
@@ -4693,8 +4693,8 @@
           </p:nvSpPr>
           <p:spPr>
             <a:xfrm>
-              <a:off x="692708" y="3858272"/>
-              <a:ext cx="62179" cy="80101"/>
+              <a:off x="756929" y="3860262"/>
+              <a:ext cx="79004" cy="101955"/>
             </a:xfrm>
             <a:prstGeom prst="rect">
               <a:avLst/>
@@ -4707,7 +4707,7 @@
             <a:p>
               <a:pPr algn="l" marL="0" marR="0" indent="0">
                 <a:lnSpc>
-                  <a:spcPts val="880"/>
+                  <a:spcPts val="1120"/>
                 </a:lnSpc>
                 <a:spcBef>
                   <a:spcPts val="0"/>
@@ -4717,7 +4717,7 @@
                 </a:spcAft>
               </a:pPr>
               <a:r>
-                <a:rPr sz="880">
+                <a:rPr sz="1120">
                   <a:solidFill>
                     <a:srgbClr val="4D4D4D">
                       <a:alpha val="100000"/>
@@ -4739,8 +4739,8 @@
           </p:nvSpPr>
           <p:spPr>
             <a:xfrm>
-              <a:off x="692708" y="3028808"/>
-              <a:ext cx="62179" cy="80101"/>
+              <a:off x="756929" y="3086593"/>
+              <a:ext cx="79004" cy="101955"/>
             </a:xfrm>
             <a:prstGeom prst="rect">
               <a:avLst/>
@@ -4753,7 +4753,7 @@
             <a:p>
               <a:pPr algn="l" marL="0" marR="0" indent="0">
                 <a:lnSpc>
-                  <a:spcPts val="880"/>
+                  <a:spcPts val="1120"/>
                 </a:lnSpc>
                 <a:spcBef>
                   <a:spcPts val="0"/>
@@ -4763,7 +4763,7 @@
                 </a:spcAft>
               </a:pPr>
               <a:r>
-                <a:rPr sz="880">
+                <a:rPr sz="1120">
                   <a:solidFill>
                     <a:srgbClr val="4D4D4D">
                       <a:alpha val="100000"/>
@@ -4785,8 +4785,8 @@
           </p:nvSpPr>
           <p:spPr>
             <a:xfrm>
-              <a:off x="692708" y="2199345"/>
-              <a:ext cx="62179" cy="80101"/>
+              <a:off x="756929" y="2312925"/>
+              <a:ext cx="79004" cy="101955"/>
             </a:xfrm>
             <a:prstGeom prst="rect">
               <a:avLst/>
@@ -4799,7 +4799,7 @@
             <a:p>
               <a:pPr algn="l" marL="0" marR="0" indent="0">
                 <a:lnSpc>
-                  <a:spcPts val="880"/>
+                  <a:spcPts val="1120"/>
                 </a:lnSpc>
                 <a:spcBef>
                   <a:spcPts val="0"/>
@@ -4809,7 +4809,7 @@
                 </a:spcAft>
               </a:pPr>
               <a:r>
-                <a:rPr sz="880">
+                <a:rPr sz="1120">
                   <a:solidFill>
                     <a:srgbClr val="4D4D4D">
                       <a:alpha val="100000"/>
@@ -4831,8 +4831,8 @@
           </p:nvSpPr>
           <p:spPr>
             <a:xfrm>
-              <a:off x="2423864" y="5785772"/>
-              <a:ext cx="155356" cy="80101"/>
+              <a:off x="2475630" y="5693022"/>
+              <a:ext cx="197510" cy="101955"/>
             </a:xfrm>
             <a:prstGeom prst="rect">
               <a:avLst/>
@@ -4845,7 +4845,7 @@
             <a:p>
               <a:pPr algn="l" marL="0" marR="0" indent="0">
                 <a:lnSpc>
-                  <a:spcPts val="880"/>
+                  <a:spcPts val="1120"/>
                 </a:lnSpc>
                 <a:spcBef>
                   <a:spcPts val="0"/>
@@ -4855,7 +4855,7 @@
                 </a:spcAft>
               </a:pPr>
               <a:r>
-                <a:rPr sz="880">
+                <a:rPr sz="1120">
                   <a:solidFill>
                     <a:srgbClr val="4D4D4D">
                       <a:alpha val="100000"/>
@@ -4877,8 +4877,8 @@
           </p:nvSpPr>
           <p:spPr>
             <a:xfrm>
-              <a:off x="4196521" y="5785772"/>
-              <a:ext cx="155356" cy="80101"/>
+              <a:off x="4221672" y="5693022"/>
+              <a:ext cx="197510" cy="101955"/>
             </a:xfrm>
             <a:prstGeom prst="rect">
               <a:avLst/>
@@ -4891,7 +4891,7 @@
             <a:p>
               <a:pPr algn="l" marL="0" marR="0" indent="0">
                 <a:lnSpc>
-                  <a:spcPts val="880"/>
+                  <a:spcPts val="1120"/>
                 </a:lnSpc>
                 <a:spcBef>
                   <a:spcPts val="0"/>
@@ -4901,7 +4901,7 @@
                 </a:spcAft>
               </a:pPr>
               <a:r>
-                <a:rPr sz="880">
+                <a:rPr sz="1120">
                   <a:solidFill>
                     <a:srgbClr val="4D4D4D">
                       <a:alpha val="100000"/>
@@ -4923,8 +4923,8 @@
           </p:nvSpPr>
           <p:spPr>
             <a:xfrm>
-              <a:off x="5969179" y="5785772"/>
-              <a:ext cx="155356" cy="80101"/>
+              <a:off x="5967715" y="5693022"/>
+              <a:ext cx="197510" cy="101955"/>
             </a:xfrm>
             <a:prstGeom prst="rect">
               <a:avLst/>
@@ -4937,7 +4937,7 @@
             <a:p>
               <a:pPr algn="l" marL="0" marR="0" indent="0">
                 <a:lnSpc>
-                  <a:spcPts val="880"/>
+                  <a:spcPts val="1120"/>
                 </a:lnSpc>
                 <a:spcBef>
                   <a:spcPts val="0"/>
@@ -4947,7 +4947,7 @@
                 </a:spcAft>
               </a:pPr>
               <a:r>
-                <a:rPr sz="880">
+                <a:rPr sz="1120">
                   <a:solidFill>
                     <a:srgbClr val="4D4D4D">
                       <a:alpha val="100000"/>
@@ -4969,8 +4969,8 @@
           </p:nvSpPr>
           <p:spPr>
             <a:xfrm>
-              <a:off x="7741836" y="5785772"/>
-              <a:ext cx="155356" cy="80101"/>
+              <a:off x="7713757" y="5693022"/>
+              <a:ext cx="197510" cy="101955"/>
             </a:xfrm>
             <a:prstGeom prst="rect">
               <a:avLst/>
@@ -4983,7 +4983,7 @@
             <a:p>
               <a:pPr algn="l" marL="0" marR="0" indent="0">
                 <a:lnSpc>
-                  <a:spcPts val="880"/>
+                  <a:spcPts val="1120"/>
                 </a:lnSpc>
                 <a:spcBef>
                   <a:spcPts val="0"/>
@@ -4993,7 +4993,7 @@
                 </a:spcAft>
               </a:pPr>
               <a:r>
-                <a:rPr sz="880">
+                <a:rPr sz="1120">
                   <a:solidFill>
                     <a:srgbClr val="4D4D4D">
                       <a:alpha val="100000"/>
@@ -5015,8 +5015,8 @@
           </p:nvSpPr>
           <p:spPr>
             <a:xfrm>
-              <a:off x="3879271" y="5925448"/>
-              <a:ext cx="1676186" cy="100218"/>
+              <a:off x="3690153" y="5870717"/>
+              <a:ext cx="2133569" cy="127558"/>
             </a:xfrm>
             <a:prstGeom prst="rect">
               <a:avLst/>
@@ -5029,7 +5029,7 @@
             <a:p>
               <a:pPr algn="l" marL="0" marR="0" indent="0">
                 <a:lnSpc>
-                  <a:spcPts val="1100"/>
+                  <a:spcPts val="1400"/>
                 </a:lnSpc>
                 <a:spcBef>
                   <a:spcPts val="0"/>
@@ -5039,7 +5039,7 @@
                 </a:spcAft>
               </a:pPr>
               <a:r>
-                <a:rPr sz="1100">
+                <a:rPr sz="1400">
                   <a:solidFill>
                     <a:srgbClr val="000000">
                       <a:alpha val="100000"/>
@@ -5061,8 +5061,8 @@
           </p:nvSpPr>
           <p:spPr>
             <a:xfrm rot="-5400000">
-              <a:off x="68446" y="3848213"/>
-              <a:ext cx="1016904" cy="100218"/>
+              <a:off x="-37527" y="3847460"/>
+              <a:ext cx="1294150" cy="127558"/>
             </a:xfrm>
             <a:prstGeom prst="rect">
               <a:avLst/>
@@ -5075,7 +5075,7 @@
             <a:p>
               <a:pPr algn="l" marL="0" marR="0" indent="0">
                 <a:lnSpc>
-                  <a:spcPts val="1100"/>
+                  <a:spcPts val="1400"/>
                 </a:lnSpc>
                 <a:spcBef>
                   <a:spcPts val="0"/>
@@ -5085,7 +5085,7 @@
                 </a:spcAft>
               </a:pPr>
               <a:r>
-                <a:rPr sz="1100">
+                <a:rPr sz="1400">
                   <a:solidFill>
                     <a:srgbClr val="000000">
                       <a:alpha val="100000"/>
@@ -5107,8 +5107,8 @@
           </p:nvSpPr>
           <p:spPr>
             <a:xfrm>
-              <a:off x="817517" y="1896563"/>
-              <a:ext cx="4166463" cy="82021"/>
+              <a:off x="915645" y="1977589"/>
+              <a:ext cx="5556900" cy="109362"/>
             </a:xfrm>
             <a:prstGeom prst="rect">
               <a:avLst/>
@@ -5121,7 +5121,7 @@
             <a:p>
               <a:pPr algn="l" marL="0" marR="0" indent="0">
                 <a:lnSpc>
-                  <a:spcPts val="900"/>
+                  <a:spcPts val="1200"/>
                 </a:lnSpc>
                 <a:spcBef>
                   <a:spcPts val="0"/>
@@ -5131,7 +5131,7 @@
                 </a:spcAft>
               </a:pPr>
               <a:r>
-                <a:rPr sz="900">
+                <a:rPr sz="1200">
                   <a:solidFill>
                     <a:srgbClr val="404040">
                       <a:alpha val="100000"/>
@@ -5153,8 +5153,8 @@
           </p:nvSpPr>
           <p:spPr>
             <a:xfrm>
-              <a:off x="817517" y="1669789"/>
-              <a:ext cx="2495397" cy="120152"/>
+              <a:off x="915645" y="1688767"/>
+              <a:ext cx="3176808" cy="153070"/>
             </a:xfrm>
             <a:prstGeom prst="rect">
               <a:avLst/>
@@ -5167,7 +5167,7 @@
             <a:p>
               <a:pPr algn="l" marL="0" marR="0" indent="0">
                 <a:lnSpc>
-                  <a:spcPts val="1320"/>
+                  <a:spcPts val="1680"/>
                 </a:lnSpc>
                 <a:spcBef>
                   <a:spcPts val="0"/>
@@ -5177,7 +5177,7 @@
                 </a:spcAft>
               </a:pPr>
               <a:r>
-                <a:rPr sz="1320">
+                <a:rPr sz="1680">
                   <a:solidFill>
                     <a:srgbClr val="000000">
                       <a:alpha val="100000"/>
